--- a/design/templates/mashrabiya/template.pptx
+++ b/design/templates/mashrabiya/template.pptx
@@ -126,7 +126,7 @@
           <p:cNvPr id="9" name="creative_background">
             <a:extLst>
               <a:ext uri="{FF2B5EF4-FFF2-40B4-BE49-F238E27FC236}">
-                <a16:creationId xmlns:a16="http://schemas.microsoft.com/office/drawing/2014/main" id="{4D63F3D8-398B-583D-9E2A-6C089D1D1D19}"/>
+                <a16:creationId xmlns:a16="http://schemas.microsoft.com/office/drawing/2014/main" id="{E2BE65D2-934C-E25A-E9EB-787496B6BD7D}"/>
               </a:ext>
             </a:extLst>
           </p:cNvPr>
@@ -169,8 +169,8 @@
         </p:nvSpPr>
         <p:spPr>
           <a:xfrm>
-            <a:off x="457200" y="4960137"/>
-            <a:ext cx="7772400" cy="1463040"/>
+            <a:off x="2072640" y="4960137"/>
+            <a:ext cx="6159500" cy="1463040"/>
           </a:xfrm>
         </p:spPr>
         <p:txBody>
@@ -281,7 +281,12 @@
             <p:ph type="dt" sz="half" idx="10"/>
           </p:nvPr>
         </p:nvSpPr>
-        <p:spPr/>
+        <p:spPr>
+          <a:xfrm>
+            <a:off x="2072640" y="6470704"/>
+            <a:ext cx="1104900" cy="274320"/>
+          </a:xfrm>
+        </p:spPr>
         <p:txBody>
           <a:bodyPr/>
           <a:lstStyle>
@@ -290,7 +295,7 @@
             </a:lvl1pPr>
           </a:lstStyle>
           <a:p>
-            <a:fld id="{B5D244B9-259B-433A-84B9-2D3FCD42690F}" type="datetimeFigureOut">
+            <a:fld id="{F163761A-A4E5-4C7D-9728-6F0BC80FAE16}" type="datetimeFigureOut">
               <a:rPr lang="en-US" smtClean="0"/>
               <a:t>10/3/2026</a:t>
             </a:fld>
@@ -332,7 +337,7 @@
           <a:bodyPr/>
           <a:lstStyle/>
           <a:p>
-            <a:fld id="{F9842B40-88D3-4B59-923A-4074BB0E4CE6}" type="slidenum">
+            <a:fld id="{4DDE2B9A-5AB6-497C-A8BC-8EC14D6B62BC}" type="slidenum">
               <a:rPr lang="en-US" smtClean="0"/>
               <a:t>‹#›</a:t>
             </a:fld>
@@ -343,7 +348,7 @@
     </p:spTree>
     <p:extLst>
       <p:ext uri="{BB962C8B-B14F-4D97-AF65-F5344CB8AC3E}">
-        <p14:creationId xmlns:p14="http://schemas.microsoft.com/office/powerpoint/2010/main" val="443617252"/>
+        <p14:creationId xmlns:p14="http://schemas.microsoft.com/office/powerpoint/2010/main" val="3570373532"/>
       </p:ext>
     </p:extLst>
   </p:cSld>
@@ -375,7 +380,7 @@
           <p:cNvPr id="7" name="creative_background">
             <a:extLst>
               <a:ext uri="{FF2B5EF4-FFF2-40B4-BE49-F238E27FC236}">
-                <a16:creationId xmlns:a16="http://schemas.microsoft.com/office/drawing/2014/main" id="{B5A28DBF-5C49-AA9A-B547-C3A48F42DEB4}"/>
+                <a16:creationId xmlns:a16="http://schemas.microsoft.com/office/drawing/2014/main" id="{961D5EB0-DE37-7F97-4E6C-BB67AFF7794C}"/>
               </a:ext>
             </a:extLst>
           </p:cNvPr>
@@ -416,7 +421,12 @@
             <p:ph type="title"/>
           </p:nvPr>
         </p:nvSpPr>
-        <p:spPr/>
+        <p:spPr>
+          <a:xfrm>
+            <a:off x="2072640" y="585216"/>
+            <a:ext cx="8674100" cy="1499616"/>
+          </a:xfrm>
+        </p:spPr>
         <p:txBody>
           <a:bodyPr/>
           <a:lstStyle>
@@ -443,12 +453,17 @@
             <p:ph type="dt" sz="half" idx="10"/>
           </p:nvPr>
         </p:nvSpPr>
-        <p:spPr/>
+        <p:spPr>
+          <a:xfrm>
+            <a:off x="2072640" y="6470704"/>
+            <a:ext cx="1104900" cy="274320"/>
+          </a:xfrm>
+        </p:spPr>
         <p:txBody>
           <a:bodyPr/>
           <a:lstStyle/>
           <a:p>
-            <a:fld id="{B5D244B9-259B-433A-84B9-2D3FCD42690F}" type="datetimeFigureOut">
+            <a:fld id="{F163761A-A4E5-4C7D-9728-6F0BC80FAE16}" type="datetimeFigureOut">
               <a:rPr lang="en-US" smtClean="0"/>
               <a:t>10/3/2026</a:t>
             </a:fld>
@@ -490,7 +505,7 @@
           <a:bodyPr/>
           <a:lstStyle/>
           <a:p>
-            <a:fld id="{F9842B40-88D3-4B59-923A-4074BB0E4CE6}" type="slidenum">
+            <a:fld id="{4DDE2B9A-5AB6-497C-A8BC-8EC14D6B62BC}" type="slidenum">
               <a:rPr lang="en-US" smtClean="0"/>
               <a:t>‹#›</a:t>
             </a:fld>
@@ -503,7 +518,7 @@
           <p:cNvPr id="8" name="body">
             <a:extLst>
               <a:ext uri="{FF2B5EF4-FFF2-40B4-BE49-F238E27FC236}">
-                <a16:creationId xmlns:a16="http://schemas.microsoft.com/office/drawing/2014/main" id="{176E4ED0-4FFC-B948-24BF-02E1F305332C}"/>
+                <a16:creationId xmlns:a16="http://schemas.microsoft.com/office/drawing/2014/main" id="{EFEC8CD9-7826-8EAE-5ED9-6A988333B145}"/>
               </a:ext>
             </a:extLst>
           </p:cNvPr>
@@ -516,8 +531,8 @@
         </p:nvSpPr>
         <p:spPr>
           <a:xfrm>
-            <a:off x="1024128" y="2286000"/>
-            <a:ext cx="9720073" cy="3591560"/>
+            <a:off x="2072640" y="2286000"/>
+            <a:ext cx="8671561" cy="3591560"/>
           </a:xfrm>
         </p:spPr>
         <p:txBody>
@@ -543,7 +558,7 @@
           <p:cNvPr id="9" name="source">
             <a:extLst>
               <a:ext uri="{FF2B5EF4-FFF2-40B4-BE49-F238E27FC236}">
-                <a16:creationId xmlns:a16="http://schemas.microsoft.com/office/drawing/2014/main" id="{39FDE5C6-E9BC-7A44-AAEF-190229FF8080}"/>
+                <a16:creationId xmlns:a16="http://schemas.microsoft.com/office/drawing/2014/main" id="{496327D8-643A-E187-C9F5-AFD1BC54B2A7}"/>
               </a:ext>
             </a:extLst>
           </p:cNvPr>
@@ -556,7 +571,7 @@
         </p:nvSpPr>
         <p:spPr>
           <a:xfrm>
-            <a:off x="1024128" y="6004560"/>
+            <a:off x="2072640" y="6004560"/>
             <a:ext cx="1905000" cy="304800"/>
           </a:xfrm>
           <a:prstGeom prst="roundRect">
@@ -598,7 +613,7 @@
     </p:spTree>
     <p:extLst>
       <p:ext uri="{BB962C8B-B14F-4D97-AF65-F5344CB8AC3E}">
-        <p14:creationId xmlns:p14="http://schemas.microsoft.com/office/powerpoint/2010/main" val="3764763413"/>
+        <p14:creationId xmlns:p14="http://schemas.microsoft.com/office/powerpoint/2010/main" val="874458143"/>
       </p:ext>
     </p:extLst>
   </p:cSld>
@@ -630,7 +645,7 @@
           <p:cNvPr id="7" name="creative_background">
             <a:extLst>
               <a:ext uri="{FF2B5EF4-FFF2-40B4-BE49-F238E27FC236}">
-                <a16:creationId xmlns:a16="http://schemas.microsoft.com/office/drawing/2014/main" id="{7052B5B7-1D38-B143-21E8-A8CD19D1FAC7}"/>
+                <a16:creationId xmlns:a16="http://schemas.microsoft.com/office/drawing/2014/main" id="{24B08A7A-87D2-F49A-88F8-FC9134C93EEF}"/>
               </a:ext>
             </a:extLst>
           </p:cNvPr>
@@ -671,7 +686,12 @@
             <p:ph type="title"/>
           </p:nvPr>
         </p:nvSpPr>
-        <p:spPr/>
+        <p:spPr>
+          <a:xfrm>
+            <a:off x="2072640" y="585216"/>
+            <a:ext cx="8674100" cy="1499616"/>
+          </a:xfrm>
+        </p:spPr>
         <p:txBody>
           <a:bodyPr/>
           <a:lstStyle>
@@ -698,12 +718,17 @@
             <p:ph type="dt" sz="half" idx="10"/>
           </p:nvPr>
         </p:nvSpPr>
-        <p:spPr/>
+        <p:spPr>
+          <a:xfrm>
+            <a:off x="2072640" y="6470704"/>
+            <a:ext cx="1104900" cy="274320"/>
+          </a:xfrm>
+        </p:spPr>
         <p:txBody>
           <a:bodyPr/>
           <a:lstStyle/>
           <a:p>
-            <a:fld id="{B5D244B9-259B-433A-84B9-2D3FCD42690F}" type="datetimeFigureOut">
+            <a:fld id="{F163761A-A4E5-4C7D-9728-6F0BC80FAE16}" type="datetimeFigureOut">
               <a:rPr lang="en-US" smtClean="0"/>
               <a:t>10/3/2026</a:t>
             </a:fld>
@@ -745,7 +770,7 @@
           <a:bodyPr/>
           <a:lstStyle/>
           <a:p>
-            <a:fld id="{F9842B40-88D3-4B59-923A-4074BB0E4CE6}" type="slidenum">
+            <a:fld id="{4DDE2B9A-5AB6-497C-A8BC-8EC14D6B62BC}" type="slidenum">
               <a:rPr lang="en-US" smtClean="0"/>
               <a:t>‹#›</a:t>
             </a:fld>
@@ -758,7 +783,7 @@
           <p:cNvPr id="8" name="body">
             <a:extLst>
               <a:ext uri="{FF2B5EF4-FFF2-40B4-BE49-F238E27FC236}">
-                <a16:creationId xmlns:a16="http://schemas.microsoft.com/office/drawing/2014/main" id="{31BE3C36-C867-2C0F-9BAE-2B012BE17333}"/>
+                <a16:creationId xmlns:a16="http://schemas.microsoft.com/office/drawing/2014/main" id="{6A255ABA-FB75-23C9-E82B-69262CD9CB4B}"/>
               </a:ext>
             </a:extLst>
           </p:cNvPr>
@@ -771,8 +796,8 @@
         </p:nvSpPr>
         <p:spPr>
           <a:xfrm>
-            <a:off x="1024128" y="2286000"/>
-            <a:ext cx="9720073" cy="3591560"/>
+            <a:off x="2072640" y="2286000"/>
+            <a:ext cx="8671561" cy="3591560"/>
           </a:xfrm>
         </p:spPr>
         <p:txBody>
@@ -801,7 +826,7 @@
     </p:spTree>
     <p:extLst>
       <p:ext uri="{BB962C8B-B14F-4D97-AF65-F5344CB8AC3E}">
-        <p14:creationId xmlns:p14="http://schemas.microsoft.com/office/powerpoint/2010/main" val="3008145917"/>
+        <p14:creationId xmlns:p14="http://schemas.microsoft.com/office/powerpoint/2010/main" val="635545879"/>
       </p:ext>
     </p:extLst>
   </p:cSld>
@@ -877,7 +902,7 @@
           <p:cNvPr id="6" name="section_number">
             <a:extLst>
               <a:ext uri="{FF2B5EF4-FFF2-40B4-BE49-F238E27FC236}">
-                <a16:creationId xmlns:a16="http://schemas.microsoft.com/office/drawing/2014/main" id="{1A3D3E29-4823-689C-6445-24790D11ACD6}"/>
+                <a16:creationId xmlns:a16="http://schemas.microsoft.com/office/drawing/2014/main" id="{E2A44898-C602-0EE3-8337-8842F06DFF47}"/>
               </a:ext>
             </a:extLst>
           </p:cNvPr>
@@ -930,7 +955,7 @@
           <p:cNvPr id="7" name="subtitle">
             <a:extLst>
               <a:ext uri="{FF2B5EF4-FFF2-40B4-BE49-F238E27FC236}">
-                <a16:creationId xmlns:a16="http://schemas.microsoft.com/office/drawing/2014/main" id="{192D4F04-466A-1CAC-1097-025CF402F3C3}"/>
+                <a16:creationId xmlns:a16="http://schemas.microsoft.com/office/drawing/2014/main" id="{28E5C251-3537-221D-EC4D-EF780EEF3761}"/>
               </a:ext>
             </a:extLst>
           </p:cNvPr>
@@ -982,7 +1007,7 @@
           <p:cNvPr id="8" name="pattern">
             <a:extLst>
               <a:ext uri="{FF2B5EF4-FFF2-40B4-BE49-F238E27FC236}">
-                <a16:creationId xmlns:a16="http://schemas.microsoft.com/office/drawing/2014/main" id="{78CFB33D-8C05-5080-CA7A-43B453CF5D59}"/>
+                <a16:creationId xmlns:a16="http://schemas.microsoft.com/office/drawing/2014/main" id="{CE17FBCA-3546-1BAB-D532-287B59424B1B}"/>
               </a:ext>
             </a:extLst>
           </p:cNvPr>
@@ -1050,7 +1075,7 @@
           <p:cNvPr id="9" name="pattern">
             <a:extLst>
               <a:ext uri="{FF2B5EF4-FFF2-40B4-BE49-F238E27FC236}">
-                <a16:creationId xmlns:a16="http://schemas.microsoft.com/office/drawing/2014/main" id="{32101D2B-3279-8738-D277-960646BB83EA}"/>
+                <a16:creationId xmlns:a16="http://schemas.microsoft.com/office/drawing/2014/main" id="{196FE107-291D-BD76-559A-78BDD6D64243}"/>
               </a:ext>
             </a:extLst>
           </p:cNvPr>
@@ -1118,7 +1143,7 @@
           <p:cNvPr id="10" name="pattern">
             <a:extLst>
               <a:ext uri="{FF2B5EF4-FFF2-40B4-BE49-F238E27FC236}">
-                <a16:creationId xmlns:a16="http://schemas.microsoft.com/office/drawing/2014/main" id="{9792D453-78E2-DD6A-6136-BD85620ACFB9}"/>
+                <a16:creationId xmlns:a16="http://schemas.microsoft.com/office/drawing/2014/main" id="{7E25536A-9EA1-CB84-E7AE-833E9A6EE2EF}"/>
               </a:ext>
             </a:extLst>
           </p:cNvPr>
@@ -1186,7 +1211,7 @@
           <p:cNvPr id="11" name="pattern">
             <a:extLst>
               <a:ext uri="{FF2B5EF4-FFF2-40B4-BE49-F238E27FC236}">
-                <a16:creationId xmlns:a16="http://schemas.microsoft.com/office/drawing/2014/main" id="{46FCC429-A5FC-3E8F-D7E8-E501E51FD973}"/>
+                <a16:creationId xmlns:a16="http://schemas.microsoft.com/office/drawing/2014/main" id="{412D67AB-0547-24A6-30D4-22A4F5195BF4}"/>
               </a:ext>
             </a:extLst>
           </p:cNvPr>
@@ -1254,7 +1279,7 @@
           <p:cNvPr id="12" name="pattern">
             <a:extLst>
               <a:ext uri="{FF2B5EF4-FFF2-40B4-BE49-F238E27FC236}">
-                <a16:creationId xmlns:a16="http://schemas.microsoft.com/office/drawing/2014/main" id="{97A82C11-0BC5-5D75-C49F-8D2D3F463297}"/>
+                <a16:creationId xmlns:a16="http://schemas.microsoft.com/office/drawing/2014/main" id="{250834F0-09B0-286D-B2B2-C698193B3AEF}"/>
               </a:ext>
             </a:extLst>
           </p:cNvPr>
@@ -1322,7 +1347,7 @@
           <p:cNvPr id="13" name="pattern">
             <a:extLst>
               <a:ext uri="{FF2B5EF4-FFF2-40B4-BE49-F238E27FC236}">
-                <a16:creationId xmlns:a16="http://schemas.microsoft.com/office/drawing/2014/main" id="{44D62097-4A78-D382-A092-C32AADC5E2C5}"/>
+                <a16:creationId xmlns:a16="http://schemas.microsoft.com/office/drawing/2014/main" id="{BAE27B64-EBCF-F47C-CE7D-AC0499FCAB5F}"/>
               </a:ext>
             </a:extLst>
           </p:cNvPr>
@@ -1390,7 +1415,7 @@
           <p:cNvPr id="14" name="pattern">
             <a:extLst>
               <a:ext uri="{FF2B5EF4-FFF2-40B4-BE49-F238E27FC236}">
-                <a16:creationId xmlns:a16="http://schemas.microsoft.com/office/drawing/2014/main" id="{E779D930-8235-3CBE-11BE-41BD15A9B22E}"/>
+                <a16:creationId xmlns:a16="http://schemas.microsoft.com/office/drawing/2014/main" id="{CA29A9C9-7041-DE02-3152-2AA41231E864}"/>
               </a:ext>
             </a:extLst>
           </p:cNvPr>
@@ -1458,7 +1483,7 @@
           <p:cNvPr id="15" name="pattern">
             <a:extLst>
               <a:ext uri="{FF2B5EF4-FFF2-40B4-BE49-F238E27FC236}">
-                <a16:creationId xmlns:a16="http://schemas.microsoft.com/office/drawing/2014/main" id="{8A4ED312-CA4B-E1D8-1727-8E9F77975D18}"/>
+                <a16:creationId xmlns:a16="http://schemas.microsoft.com/office/drawing/2014/main" id="{09056500-33CE-08FD-9AC6-3762DB237E9A}"/>
               </a:ext>
             </a:extLst>
           </p:cNvPr>
@@ -1526,7 +1551,7 @@
           <p:cNvPr id="16" name="pattern">
             <a:extLst>
               <a:ext uri="{FF2B5EF4-FFF2-40B4-BE49-F238E27FC236}">
-                <a16:creationId xmlns:a16="http://schemas.microsoft.com/office/drawing/2014/main" id="{7F377031-BF45-DE37-ABAC-CC624FDB1ACA}"/>
+                <a16:creationId xmlns:a16="http://schemas.microsoft.com/office/drawing/2014/main" id="{A430470F-80E5-32F7-3F69-9258B18DF293}"/>
               </a:ext>
             </a:extLst>
           </p:cNvPr>
@@ -1594,7 +1619,7 @@
           <p:cNvPr id="17" name="pattern">
             <a:extLst>
               <a:ext uri="{FF2B5EF4-FFF2-40B4-BE49-F238E27FC236}">
-                <a16:creationId xmlns:a16="http://schemas.microsoft.com/office/drawing/2014/main" id="{BC15EFFE-2534-250F-06C1-099257CB1C4F}"/>
+                <a16:creationId xmlns:a16="http://schemas.microsoft.com/office/drawing/2014/main" id="{70B67B30-DAC0-E925-DC46-543678959831}"/>
               </a:ext>
             </a:extLst>
           </p:cNvPr>
@@ -1662,7 +1687,7 @@
           <p:cNvPr id="18" name="pattern">
             <a:extLst>
               <a:ext uri="{FF2B5EF4-FFF2-40B4-BE49-F238E27FC236}">
-                <a16:creationId xmlns:a16="http://schemas.microsoft.com/office/drawing/2014/main" id="{DF571980-B74D-C2C2-D9BC-EDCD123C7ED4}"/>
+                <a16:creationId xmlns:a16="http://schemas.microsoft.com/office/drawing/2014/main" id="{D45FACA7-CDD6-07D6-BC3D-79FD8AEE3FB1}"/>
               </a:ext>
             </a:extLst>
           </p:cNvPr>
@@ -1730,7 +1755,7 @@
           <p:cNvPr id="19" name="pattern">
             <a:extLst>
               <a:ext uri="{FF2B5EF4-FFF2-40B4-BE49-F238E27FC236}">
-                <a16:creationId xmlns:a16="http://schemas.microsoft.com/office/drawing/2014/main" id="{35552363-A6A8-3F4B-B7E5-FF8C835C359F}"/>
+                <a16:creationId xmlns:a16="http://schemas.microsoft.com/office/drawing/2014/main" id="{BC1EFA8E-356B-9424-F905-D51747BB8CA0}"/>
               </a:ext>
             </a:extLst>
           </p:cNvPr>
@@ -1798,7 +1823,7 @@
           <p:cNvPr id="20" name="pattern">
             <a:extLst>
               <a:ext uri="{FF2B5EF4-FFF2-40B4-BE49-F238E27FC236}">
-                <a16:creationId xmlns:a16="http://schemas.microsoft.com/office/drawing/2014/main" id="{05DCCDD6-5465-CBB7-60AC-033D9FBB56B5}"/>
+                <a16:creationId xmlns:a16="http://schemas.microsoft.com/office/drawing/2014/main" id="{79AF9B79-AA60-3289-4C54-C66D61F07517}"/>
               </a:ext>
             </a:extLst>
           </p:cNvPr>
@@ -1866,7 +1891,7 @@
           <p:cNvPr id="21" name="pattern">
             <a:extLst>
               <a:ext uri="{FF2B5EF4-FFF2-40B4-BE49-F238E27FC236}">
-                <a16:creationId xmlns:a16="http://schemas.microsoft.com/office/drawing/2014/main" id="{911D4DDB-900C-610F-9409-8DB2F05F9457}"/>
+                <a16:creationId xmlns:a16="http://schemas.microsoft.com/office/drawing/2014/main" id="{198886F2-B113-E687-683A-4D9A75EDFA20}"/>
               </a:ext>
             </a:extLst>
           </p:cNvPr>
@@ -1934,7 +1959,7 @@
           <p:cNvPr id="22" name="pattern">
             <a:extLst>
               <a:ext uri="{FF2B5EF4-FFF2-40B4-BE49-F238E27FC236}">
-                <a16:creationId xmlns:a16="http://schemas.microsoft.com/office/drawing/2014/main" id="{20D3564F-0BF4-E197-C304-92D05EE444C2}"/>
+                <a16:creationId xmlns:a16="http://schemas.microsoft.com/office/drawing/2014/main" id="{99DA1AD7-A035-BB51-90F0-B44F016C6066}"/>
               </a:ext>
             </a:extLst>
           </p:cNvPr>
@@ -2002,7 +2027,7 @@
           <p:cNvPr id="23" name="pattern">
             <a:extLst>
               <a:ext uri="{FF2B5EF4-FFF2-40B4-BE49-F238E27FC236}">
-                <a16:creationId xmlns:a16="http://schemas.microsoft.com/office/drawing/2014/main" id="{EA316CAC-A715-30F2-574C-2C32492BAABC}"/>
+                <a16:creationId xmlns:a16="http://schemas.microsoft.com/office/drawing/2014/main" id="{5DD79C50-DDD0-A86D-380D-707640CC265A}"/>
               </a:ext>
             </a:extLst>
           </p:cNvPr>
@@ -2070,7 +2095,7 @@
           <p:cNvPr id="24" name="pattern">
             <a:extLst>
               <a:ext uri="{FF2B5EF4-FFF2-40B4-BE49-F238E27FC236}">
-                <a16:creationId xmlns:a16="http://schemas.microsoft.com/office/drawing/2014/main" id="{E3D6BD0C-7F38-8508-6A47-D79EACBD7626}"/>
+                <a16:creationId xmlns:a16="http://schemas.microsoft.com/office/drawing/2014/main" id="{75892151-8CA7-7F0C-27B6-570A0F08228A}"/>
               </a:ext>
             </a:extLst>
           </p:cNvPr>
@@ -2138,7 +2163,7 @@
           <p:cNvPr id="25" name="pattern">
             <a:extLst>
               <a:ext uri="{FF2B5EF4-FFF2-40B4-BE49-F238E27FC236}">
-                <a16:creationId xmlns:a16="http://schemas.microsoft.com/office/drawing/2014/main" id="{2F141AE2-44B1-61B3-9D1D-EAAAF5BBB05A}"/>
+                <a16:creationId xmlns:a16="http://schemas.microsoft.com/office/drawing/2014/main" id="{D69C3650-21AD-4186-E338-C0F6D7338ED7}"/>
               </a:ext>
             </a:extLst>
           </p:cNvPr>
@@ -2206,7 +2231,7 @@
           <p:cNvPr id="26" name="pattern">
             <a:extLst>
               <a:ext uri="{FF2B5EF4-FFF2-40B4-BE49-F238E27FC236}">
-                <a16:creationId xmlns:a16="http://schemas.microsoft.com/office/drawing/2014/main" id="{0E0FC91F-0B59-785C-9BA4-2F0E4459A6A0}"/>
+                <a16:creationId xmlns:a16="http://schemas.microsoft.com/office/drawing/2014/main" id="{D827F194-6259-9F4F-0F63-69D7B493F9D7}"/>
               </a:ext>
             </a:extLst>
           </p:cNvPr>
@@ -2274,7 +2299,7 @@
           <p:cNvPr id="27" name="pattern">
             <a:extLst>
               <a:ext uri="{FF2B5EF4-FFF2-40B4-BE49-F238E27FC236}">
-                <a16:creationId xmlns:a16="http://schemas.microsoft.com/office/drawing/2014/main" id="{E11039E3-C0CE-518E-6660-6D17D6DC257A}"/>
+                <a16:creationId xmlns:a16="http://schemas.microsoft.com/office/drawing/2014/main" id="{F79FF26A-EEB7-6AF3-ABA3-99208BE2D9B4}"/>
               </a:ext>
             </a:extLst>
           </p:cNvPr>
@@ -2342,7 +2367,7 @@
           <p:cNvPr id="28" name="pattern">
             <a:extLst>
               <a:ext uri="{FF2B5EF4-FFF2-40B4-BE49-F238E27FC236}">
-                <a16:creationId xmlns:a16="http://schemas.microsoft.com/office/drawing/2014/main" id="{EDFC2119-1224-8A4D-59BD-320989596076}"/>
+                <a16:creationId xmlns:a16="http://schemas.microsoft.com/office/drawing/2014/main" id="{6B36E77A-8A86-E11C-4E76-A64C005C73F2}"/>
               </a:ext>
             </a:extLst>
           </p:cNvPr>
@@ -2410,7 +2435,7 @@
           <p:cNvPr id="29" name="pattern">
             <a:extLst>
               <a:ext uri="{FF2B5EF4-FFF2-40B4-BE49-F238E27FC236}">
-                <a16:creationId xmlns:a16="http://schemas.microsoft.com/office/drawing/2014/main" id="{7F715252-38B1-FAB9-9EC7-F12F4F7F37CF}"/>
+                <a16:creationId xmlns:a16="http://schemas.microsoft.com/office/drawing/2014/main" id="{51A9502C-8A47-9631-6A87-EB211A6CFA2E}"/>
               </a:ext>
             </a:extLst>
           </p:cNvPr>
@@ -2478,7 +2503,7 @@
           <p:cNvPr id="30" name="pattern">
             <a:extLst>
               <a:ext uri="{FF2B5EF4-FFF2-40B4-BE49-F238E27FC236}">
-                <a16:creationId xmlns:a16="http://schemas.microsoft.com/office/drawing/2014/main" id="{AF6B8008-D065-AE1A-3A99-5D8559ECE640}"/>
+                <a16:creationId xmlns:a16="http://schemas.microsoft.com/office/drawing/2014/main" id="{F6F040D1-6811-E698-4D6B-7EAAD0E9BEBA}"/>
               </a:ext>
             </a:extLst>
           </p:cNvPr>
@@ -2546,7 +2571,7 @@
           <p:cNvPr id="31" name="pattern">
             <a:extLst>
               <a:ext uri="{FF2B5EF4-FFF2-40B4-BE49-F238E27FC236}">
-                <a16:creationId xmlns:a16="http://schemas.microsoft.com/office/drawing/2014/main" id="{EBFDE5E5-27EE-3966-02D8-ADB4BCA529F2}"/>
+                <a16:creationId xmlns:a16="http://schemas.microsoft.com/office/drawing/2014/main" id="{CC602CC1-6269-4BDD-FDC6-DBA6100157A0}"/>
               </a:ext>
             </a:extLst>
           </p:cNvPr>
@@ -2614,7 +2639,7 @@
           <p:cNvPr id="32" name="pattern">
             <a:extLst>
               <a:ext uri="{FF2B5EF4-FFF2-40B4-BE49-F238E27FC236}">
-                <a16:creationId xmlns:a16="http://schemas.microsoft.com/office/drawing/2014/main" id="{5B723EFE-77DB-9581-D56E-FA8374CDCD40}"/>
+                <a16:creationId xmlns:a16="http://schemas.microsoft.com/office/drawing/2014/main" id="{E400591D-F687-F053-547C-52F3591EED2A}"/>
               </a:ext>
             </a:extLst>
           </p:cNvPr>
@@ -2682,7 +2707,7 @@
           <p:cNvPr id="33" name="pattern">
             <a:extLst>
               <a:ext uri="{FF2B5EF4-FFF2-40B4-BE49-F238E27FC236}">
-                <a16:creationId xmlns:a16="http://schemas.microsoft.com/office/drawing/2014/main" id="{4FA59D6C-F83B-8350-5830-FBF69C1EDA98}"/>
+                <a16:creationId xmlns:a16="http://schemas.microsoft.com/office/drawing/2014/main" id="{CA55A79F-F5F5-8F11-890F-976771170204}"/>
               </a:ext>
             </a:extLst>
           </p:cNvPr>
@@ -2750,7 +2775,7 @@
           <p:cNvPr id="34" name="pattern">
             <a:extLst>
               <a:ext uri="{FF2B5EF4-FFF2-40B4-BE49-F238E27FC236}">
-                <a16:creationId xmlns:a16="http://schemas.microsoft.com/office/drawing/2014/main" id="{E415DAE8-B0A1-4D8C-9387-71E56D6DEDFF}"/>
+                <a16:creationId xmlns:a16="http://schemas.microsoft.com/office/drawing/2014/main" id="{A0BA29B3-054F-0DB0-076B-EA60281225B5}"/>
               </a:ext>
             </a:extLst>
           </p:cNvPr>
@@ -2818,7 +2843,7 @@
           <p:cNvPr id="35" name="pattern">
             <a:extLst>
               <a:ext uri="{FF2B5EF4-FFF2-40B4-BE49-F238E27FC236}">
-                <a16:creationId xmlns:a16="http://schemas.microsoft.com/office/drawing/2014/main" id="{B47CF176-8842-ADE8-BB1C-6A309922B448}"/>
+                <a16:creationId xmlns:a16="http://schemas.microsoft.com/office/drawing/2014/main" id="{F48904F7-613A-1BA0-DAD8-BAC34DAA396D}"/>
               </a:ext>
             </a:extLst>
           </p:cNvPr>
@@ -2886,7 +2911,7 @@
           <p:cNvPr id="36" name="pattern">
             <a:extLst>
               <a:ext uri="{FF2B5EF4-FFF2-40B4-BE49-F238E27FC236}">
-                <a16:creationId xmlns:a16="http://schemas.microsoft.com/office/drawing/2014/main" id="{C98EA102-FFB8-EB7B-5D3E-9D6AACB16644}"/>
+                <a16:creationId xmlns:a16="http://schemas.microsoft.com/office/drawing/2014/main" id="{A8F32142-8617-676A-FA02-596959E1DADD}"/>
               </a:ext>
             </a:extLst>
           </p:cNvPr>
@@ -2954,7 +2979,7 @@
           <p:cNvPr id="37" name="pattern">
             <a:extLst>
               <a:ext uri="{FF2B5EF4-FFF2-40B4-BE49-F238E27FC236}">
-                <a16:creationId xmlns:a16="http://schemas.microsoft.com/office/drawing/2014/main" id="{0184755C-3B8B-47FE-D83A-4DA0C57DF85C}"/>
+                <a16:creationId xmlns:a16="http://schemas.microsoft.com/office/drawing/2014/main" id="{45CA6E32-D204-7786-5781-9FBDE3846E8A}"/>
               </a:ext>
             </a:extLst>
           </p:cNvPr>
@@ -3022,7 +3047,7 @@
           <p:cNvPr id="38" name="pattern">
             <a:extLst>
               <a:ext uri="{FF2B5EF4-FFF2-40B4-BE49-F238E27FC236}">
-                <a16:creationId xmlns:a16="http://schemas.microsoft.com/office/drawing/2014/main" id="{AB6D4D25-D70A-FE14-AA98-0F1DB981B405}"/>
+                <a16:creationId xmlns:a16="http://schemas.microsoft.com/office/drawing/2014/main" id="{7D414FDB-C7FB-816F-74FD-45C425FB8304}"/>
               </a:ext>
             </a:extLst>
           </p:cNvPr>
@@ -3090,7 +3115,7 @@
           <p:cNvPr id="39" name="pattern">
             <a:extLst>
               <a:ext uri="{FF2B5EF4-FFF2-40B4-BE49-F238E27FC236}">
-                <a16:creationId xmlns:a16="http://schemas.microsoft.com/office/drawing/2014/main" id="{EC5AAA62-705D-BA29-7CE2-14097BE32361}"/>
+                <a16:creationId xmlns:a16="http://schemas.microsoft.com/office/drawing/2014/main" id="{6EEE225C-72AF-80AB-D7CA-6D72C163B557}"/>
               </a:ext>
             </a:extLst>
           </p:cNvPr>
@@ -3158,7 +3183,7 @@
           <p:cNvPr id="40" name="pattern">
             <a:extLst>
               <a:ext uri="{FF2B5EF4-FFF2-40B4-BE49-F238E27FC236}">
-                <a16:creationId xmlns:a16="http://schemas.microsoft.com/office/drawing/2014/main" id="{129CCA14-E23B-D253-53B8-7D8850590EF9}"/>
+                <a16:creationId xmlns:a16="http://schemas.microsoft.com/office/drawing/2014/main" id="{B96E0DB2-1860-20F8-3D29-6AC64EA861A9}"/>
               </a:ext>
             </a:extLst>
           </p:cNvPr>
@@ -3226,7 +3251,7 @@
           <p:cNvPr id="41" name="pattern">
             <a:extLst>
               <a:ext uri="{FF2B5EF4-FFF2-40B4-BE49-F238E27FC236}">
-                <a16:creationId xmlns:a16="http://schemas.microsoft.com/office/drawing/2014/main" id="{D495BDE8-CDC7-937B-7E94-93D10DF1530B}"/>
+                <a16:creationId xmlns:a16="http://schemas.microsoft.com/office/drawing/2014/main" id="{F002B6CB-6E43-3692-9EB0-3554FA570B08}"/>
               </a:ext>
             </a:extLst>
           </p:cNvPr>
@@ -3294,7 +3319,7 @@
           <p:cNvPr id="42" name="pattern">
             <a:extLst>
               <a:ext uri="{FF2B5EF4-FFF2-40B4-BE49-F238E27FC236}">
-                <a16:creationId xmlns:a16="http://schemas.microsoft.com/office/drawing/2014/main" id="{BF22BD89-DB2A-6E71-1FCC-2CECF3B088A6}"/>
+                <a16:creationId xmlns:a16="http://schemas.microsoft.com/office/drawing/2014/main" id="{5221B1ED-89E6-2B8C-7E6A-7435A774B031}"/>
               </a:ext>
             </a:extLst>
           </p:cNvPr>
@@ -3362,7 +3387,7 @@
           <p:cNvPr id="43" name="pattern">
             <a:extLst>
               <a:ext uri="{FF2B5EF4-FFF2-40B4-BE49-F238E27FC236}">
-                <a16:creationId xmlns:a16="http://schemas.microsoft.com/office/drawing/2014/main" id="{13BDB3BB-E5BB-BF11-B826-749E60972AFC}"/>
+                <a16:creationId xmlns:a16="http://schemas.microsoft.com/office/drawing/2014/main" id="{BD895A01-C2AA-0E9F-CEB0-EECF2E8C3F27}"/>
               </a:ext>
             </a:extLst>
           </p:cNvPr>
@@ -3430,7 +3455,7 @@
           <p:cNvPr id="44" name="pattern">
             <a:extLst>
               <a:ext uri="{FF2B5EF4-FFF2-40B4-BE49-F238E27FC236}">
-                <a16:creationId xmlns:a16="http://schemas.microsoft.com/office/drawing/2014/main" id="{9D7A4368-1AC3-E06F-4D9D-DEA9DA759043}"/>
+                <a16:creationId xmlns:a16="http://schemas.microsoft.com/office/drawing/2014/main" id="{5CE18751-0A6A-85D1-8BFD-C3F0DFD90851}"/>
               </a:ext>
             </a:extLst>
           </p:cNvPr>
@@ -3498,7 +3523,7 @@
           <p:cNvPr id="45" name="pattern">
             <a:extLst>
               <a:ext uri="{FF2B5EF4-FFF2-40B4-BE49-F238E27FC236}">
-                <a16:creationId xmlns:a16="http://schemas.microsoft.com/office/drawing/2014/main" id="{A33434B1-82DF-C488-783F-58688B922C52}"/>
+                <a16:creationId xmlns:a16="http://schemas.microsoft.com/office/drawing/2014/main" id="{6F81FB72-0A94-3416-605C-FB41FABAD120}"/>
               </a:ext>
             </a:extLst>
           </p:cNvPr>
@@ -3566,7 +3591,7 @@
           <p:cNvPr id="46" name="pattern">
             <a:extLst>
               <a:ext uri="{FF2B5EF4-FFF2-40B4-BE49-F238E27FC236}">
-                <a16:creationId xmlns:a16="http://schemas.microsoft.com/office/drawing/2014/main" id="{8C07F43D-976E-1656-D217-96AEED47A9B1}"/>
+                <a16:creationId xmlns:a16="http://schemas.microsoft.com/office/drawing/2014/main" id="{5BC223AE-D9C6-346F-FD16-A30C9AD8F971}"/>
               </a:ext>
             </a:extLst>
           </p:cNvPr>
@@ -3634,7 +3659,7 @@
           <p:cNvPr id="47" name="pattern">
             <a:extLst>
               <a:ext uri="{FF2B5EF4-FFF2-40B4-BE49-F238E27FC236}">
-                <a16:creationId xmlns:a16="http://schemas.microsoft.com/office/drawing/2014/main" id="{2B6D54D2-E086-2016-DEBC-F29663551384}"/>
+                <a16:creationId xmlns:a16="http://schemas.microsoft.com/office/drawing/2014/main" id="{7F254183-74C2-0A67-1200-B74B73B5D59C}"/>
               </a:ext>
             </a:extLst>
           </p:cNvPr>
@@ -3702,7 +3727,7 @@
           <p:cNvPr id="48" name="pattern">
             <a:extLst>
               <a:ext uri="{FF2B5EF4-FFF2-40B4-BE49-F238E27FC236}">
-                <a16:creationId xmlns:a16="http://schemas.microsoft.com/office/drawing/2014/main" id="{AB2B4D1C-CD2B-5AB2-4E51-9AA2B5C53ED2}"/>
+                <a16:creationId xmlns:a16="http://schemas.microsoft.com/office/drawing/2014/main" id="{A22AF36C-CA7A-EC91-9859-8320AC671CC2}"/>
               </a:ext>
             </a:extLst>
           </p:cNvPr>
@@ -3770,7 +3795,7 @@
           <p:cNvPr id="49" name="pattern">
             <a:extLst>
               <a:ext uri="{FF2B5EF4-FFF2-40B4-BE49-F238E27FC236}">
-                <a16:creationId xmlns:a16="http://schemas.microsoft.com/office/drawing/2014/main" id="{22865AF0-8412-9487-327D-5500367E5E58}"/>
+                <a16:creationId xmlns:a16="http://schemas.microsoft.com/office/drawing/2014/main" id="{B841298F-89E9-A3A9-CAB2-00C0C6FC307D}"/>
               </a:ext>
             </a:extLst>
           </p:cNvPr>
@@ -3838,7 +3863,7 @@
           <p:cNvPr id="50" name="pattern">
             <a:extLst>
               <a:ext uri="{FF2B5EF4-FFF2-40B4-BE49-F238E27FC236}">
-                <a16:creationId xmlns:a16="http://schemas.microsoft.com/office/drawing/2014/main" id="{C693C927-607C-2788-41D9-E611DA57EE10}"/>
+                <a16:creationId xmlns:a16="http://schemas.microsoft.com/office/drawing/2014/main" id="{0A3F3930-F544-CC1D-CDD2-1B6ACB201515}"/>
               </a:ext>
             </a:extLst>
           </p:cNvPr>
@@ -3906,7 +3931,7 @@
           <p:cNvPr id="51" name="pattern">
             <a:extLst>
               <a:ext uri="{FF2B5EF4-FFF2-40B4-BE49-F238E27FC236}">
-                <a16:creationId xmlns:a16="http://schemas.microsoft.com/office/drawing/2014/main" id="{E2C63687-8482-5FDA-97A6-FC1395A8ACA9}"/>
+                <a16:creationId xmlns:a16="http://schemas.microsoft.com/office/drawing/2014/main" id="{4A41658B-A9A7-0B2E-86FB-680DE2810CEE}"/>
               </a:ext>
             </a:extLst>
           </p:cNvPr>
@@ -3974,7 +3999,7 @@
           <p:cNvPr id="52" name="pattern">
             <a:extLst>
               <a:ext uri="{FF2B5EF4-FFF2-40B4-BE49-F238E27FC236}">
-                <a16:creationId xmlns:a16="http://schemas.microsoft.com/office/drawing/2014/main" id="{8E902F98-EA3A-FB65-5BED-14B896E8B977}"/>
+                <a16:creationId xmlns:a16="http://schemas.microsoft.com/office/drawing/2014/main" id="{943052D7-AD7D-10D8-5615-B609C489CEDF}"/>
               </a:ext>
             </a:extLst>
           </p:cNvPr>
@@ -4042,7 +4067,7 @@
           <p:cNvPr id="53" name="pattern">
             <a:extLst>
               <a:ext uri="{FF2B5EF4-FFF2-40B4-BE49-F238E27FC236}">
-                <a16:creationId xmlns:a16="http://schemas.microsoft.com/office/drawing/2014/main" id="{8404FE42-C910-B80F-B972-8690EEA75202}"/>
+                <a16:creationId xmlns:a16="http://schemas.microsoft.com/office/drawing/2014/main" id="{37964A95-4161-C76D-1362-37DB1D8F8858}"/>
               </a:ext>
             </a:extLst>
           </p:cNvPr>
@@ -4110,7 +4135,7 @@
           <p:cNvPr id="54" name="pattern">
             <a:extLst>
               <a:ext uri="{FF2B5EF4-FFF2-40B4-BE49-F238E27FC236}">
-                <a16:creationId xmlns:a16="http://schemas.microsoft.com/office/drawing/2014/main" id="{AC820290-B3B5-29D3-AB43-2CE40FBD8919}"/>
+                <a16:creationId xmlns:a16="http://schemas.microsoft.com/office/drawing/2014/main" id="{2EA6DA88-636B-9855-0B09-C987EC663C2D}"/>
               </a:ext>
             </a:extLst>
           </p:cNvPr>
@@ -4178,7 +4203,7 @@
           <p:cNvPr id="55" name="pattern">
             <a:extLst>
               <a:ext uri="{FF2B5EF4-FFF2-40B4-BE49-F238E27FC236}">
-                <a16:creationId xmlns:a16="http://schemas.microsoft.com/office/drawing/2014/main" id="{D7D49834-0007-DC2C-2BF5-EE0F70764B77}"/>
+                <a16:creationId xmlns:a16="http://schemas.microsoft.com/office/drawing/2014/main" id="{600EAC4E-5E9B-078F-A942-9C73132877B2}"/>
               </a:ext>
             </a:extLst>
           </p:cNvPr>
@@ -4246,7 +4271,7 @@
           <p:cNvPr id="56" name="pattern">
             <a:extLst>
               <a:ext uri="{FF2B5EF4-FFF2-40B4-BE49-F238E27FC236}">
-                <a16:creationId xmlns:a16="http://schemas.microsoft.com/office/drawing/2014/main" id="{2674ECB5-521A-4BF5-B9A6-CA298521F5C1}"/>
+                <a16:creationId xmlns:a16="http://schemas.microsoft.com/office/drawing/2014/main" id="{582BB5B9-7125-25E6-37DB-238F9BAF2EF2}"/>
               </a:ext>
             </a:extLst>
           </p:cNvPr>
@@ -4314,7 +4339,7 @@
           <p:cNvPr id="57" name="pattern">
             <a:extLst>
               <a:ext uri="{FF2B5EF4-FFF2-40B4-BE49-F238E27FC236}">
-                <a16:creationId xmlns:a16="http://schemas.microsoft.com/office/drawing/2014/main" id="{6AE5CCA6-EAF1-FA2B-3C96-E58A484DE91D}"/>
+                <a16:creationId xmlns:a16="http://schemas.microsoft.com/office/drawing/2014/main" id="{F37BB78B-65B9-E4C6-82DB-662A3151C1DD}"/>
               </a:ext>
             </a:extLst>
           </p:cNvPr>
@@ -4382,7 +4407,7 @@
           <p:cNvPr id="58" name="pattern">
             <a:extLst>
               <a:ext uri="{FF2B5EF4-FFF2-40B4-BE49-F238E27FC236}">
-                <a16:creationId xmlns:a16="http://schemas.microsoft.com/office/drawing/2014/main" id="{3A3727A8-2F1F-2796-2060-2BFC88D826CF}"/>
+                <a16:creationId xmlns:a16="http://schemas.microsoft.com/office/drawing/2014/main" id="{2C7FDBA0-4073-17AF-5B8E-5D083A47AA5F}"/>
               </a:ext>
             </a:extLst>
           </p:cNvPr>
@@ -4450,7 +4475,7 @@
           <p:cNvPr id="59" name="pattern">
             <a:extLst>
               <a:ext uri="{FF2B5EF4-FFF2-40B4-BE49-F238E27FC236}">
-                <a16:creationId xmlns:a16="http://schemas.microsoft.com/office/drawing/2014/main" id="{C2E26EAF-7C8A-A2E8-2344-362C93A7A38F}"/>
+                <a16:creationId xmlns:a16="http://schemas.microsoft.com/office/drawing/2014/main" id="{7789B25A-939D-AE01-CE78-3AB7C3FA3CC4}"/>
               </a:ext>
             </a:extLst>
           </p:cNvPr>
@@ -4518,7 +4543,7 @@
           <p:cNvPr id="60" name="pattern">
             <a:extLst>
               <a:ext uri="{FF2B5EF4-FFF2-40B4-BE49-F238E27FC236}">
-                <a16:creationId xmlns:a16="http://schemas.microsoft.com/office/drawing/2014/main" id="{845BE4E3-34B5-0820-B65C-46148D7161F5}"/>
+                <a16:creationId xmlns:a16="http://schemas.microsoft.com/office/drawing/2014/main" id="{1B55C234-031D-4B17-DE78-5B66699CA5C5}"/>
               </a:ext>
             </a:extLst>
           </p:cNvPr>
@@ -4586,7 +4611,7 @@
           <p:cNvPr id="61" name="pattern">
             <a:extLst>
               <a:ext uri="{FF2B5EF4-FFF2-40B4-BE49-F238E27FC236}">
-                <a16:creationId xmlns:a16="http://schemas.microsoft.com/office/drawing/2014/main" id="{F21FA181-11F8-A1FD-CA79-4F4EB252E510}"/>
+                <a16:creationId xmlns:a16="http://schemas.microsoft.com/office/drawing/2014/main" id="{8732DA83-D884-8395-E9DE-FD207E411806}"/>
               </a:ext>
             </a:extLst>
           </p:cNvPr>
@@ -4654,7 +4679,7 @@
           <p:cNvPr id="62" name="pattern">
             <a:extLst>
               <a:ext uri="{FF2B5EF4-FFF2-40B4-BE49-F238E27FC236}">
-                <a16:creationId xmlns:a16="http://schemas.microsoft.com/office/drawing/2014/main" id="{9D385F62-A836-94B8-EE08-237E1DE8274B}"/>
+                <a16:creationId xmlns:a16="http://schemas.microsoft.com/office/drawing/2014/main" id="{D82E6A88-C366-F408-9D4F-BB6238A692DC}"/>
               </a:ext>
             </a:extLst>
           </p:cNvPr>
@@ -4722,7 +4747,7 @@
           <p:cNvPr id="63" name="pattern">
             <a:extLst>
               <a:ext uri="{FF2B5EF4-FFF2-40B4-BE49-F238E27FC236}">
-                <a16:creationId xmlns:a16="http://schemas.microsoft.com/office/drawing/2014/main" id="{F8E8E9E8-740F-0AC7-67A5-A43A1D066EFD}"/>
+                <a16:creationId xmlns:a16="http://schemas.microsoft.com/office/drawing/2014/main" id="{B4A695C3-7A79-8E3E-E0BB-5618684D516F}"/>
               </a:ext>
             </a:extLst>
           </p:cNvPr>
@@ -4790,7 +4815,7 @@
           <p:cNvPr id="64" name="pattern">
             <a:extLst>
               <a:ext uri="{FF2B5EF4-FFF2-40B4-BE49-F238E27FC236}">
-                <a16:creationId xmlns:a16="http://schemas.microsoft.com/office/drawing/2014/main" id="{4348E002-5B39-99D1-8511-D2B08079090F}"/>
+                <a16:creationId xmlns:a16="http://schemas.microsoft.com/office/drawing/2014/main" id="{CD109B5B-55BE-EA6E-F26C-EF5ADAEF3AA4}"/>
               </a:ext>
             </a:extLst>
           </p:cNvPr>
@@ -4858,7 +4883,7 @@
           <p:cNvPr id="65" name="pattern">
             <a:extLst>
               <a:ext uri="{FF2B5EF4-FFF2-40B4-BE49-F238E27FC236}">
-                <a16:creationId xmlns:a16="http://schemas.microsoft.com/office/drawing/2014/main" id="{C86A95AE-920F-6B36-3915-223F1722624F}"/>
+                <a16:creationId xmlns:a16="http://schemas.microsoft.com/office/drawing/2014/main" id="{CE6123FC-7D92-6366-8C0A-2E27DA8561DF}"/>
               </a:ext>
             </a:extLst>
           </p:cNvPr>
@@ -4926,7 +4951,7 @@
           <p:cNvPr id="66" name="pattern">
             <a:extLst>
               <a:ext uri="{FF2B5EF4-FFF2-40B4-BE49-F238E27FC236}">
-                <a16:creationId xmlns:a16="http://schemas.microsoft.com/office/drawing/2014/main" id="{83F6CE6E-6447-4DC8-D395-1DB4563ED3D7}"/>
+                <a16:creationId xmlns:a16="http://schemas.microsoft.com/office/drawing/2014/main" id="{03D5F859-9727-A38A-BBBC-7D90D3CDE96B}"/>
               </a:ext>
             </a:extLst>
           </p:cNvPr>
@@ -4994,7 +5019,7 @@
           <p:cNvPr id="67" name="pattern">
             <a:extLst>
               <a:ext uri="{FF2B5EF4-FFF2-40B4-BE49-F238E27FC236}">
-                <a16:creationId xmlns:a16="http://schemas.microsoft.com/office/drawing/2014/main" id="{114EFAB2-559C-2CA4-D4F0-F70C0B750175}"/>
+                <a16:creationId xmlns:a16="http://schemas.microsoft.com/office/drawing/2014/main" id="{169C97B7-E737-F3E2-BF26-C1BD8CEC9A8A}"/>
               </a:ext>
             </a:extLst>
           </p:cNvPr>
@@ -5062,7 +5087,7 @@
           <p:cNvPr id="68" name="pattern">
             <a:extLst>
               <a:ext uri="{FF2B5EF4-FFF2-40B4-BE49-F238E27FC236}">
-                <a16:creationId xmlns:a16="http://schemas.microsoft.com/office/drawing/2014/main" id="{9B9B44FB-FD3E-4F6C-CDFA-211756E2F4CD}"/>
+                <a16:creationId xmlns:a16="http://schemas.microsoft.com/office/drawing/2014/main" id="{E41184FA-FC8E-C29F-246E-C22B9EBF5985}"/>
               </a:ext>
             </a:extLst>
           </p:cNvPr>
@@ -5130,7 +5155,7 @@
           <p:cNvPr id="69" name="pattern">
             <a:extLst>
               <a:ext uri="{FF2B5EF4-FFF2-40B4-BE49-F238E27FC236}">
-                <a16:creationId xmlns:a16="http://schemas.microsoft.com/office/drawing/2014/main" id="{04ACC3E6-39FF-BD52-9E69-62E823C1C71F}"/>
+                <a16:creationId xmlns:a16="http://schemas.microsoft.com/office/drawing/2014/main" id="{79F97263-50DA-7FE5-E89B-D1EF7BAF6D02}"/>
               </a:ext>
             </a:extLst>
           </p:cNvPr>
@@ -5198,7 +5223,7 @@
           <p:cNvPr id="70" name="pattern">
             <a:extLst>
               <a:ext uri="{FF2B5EF4-FFF2-40B4-BE49-F238E27FC236}">
-                <a16:creationId xmlns:a16="http://schemas.microsoft.com/office/drawing/2014/main" id="{D6CA8D36-0E5B-B94D-5BD3-57DB5EF03176}"/>
+                <a16:creationId xmlns:a16="http://schemas.microsoft.com/office/drawing/2014/main" id="{FF26842F-C255-ADE2-CEB8-4770C8B789F8}"/>
               </a:ext>
             </a:extLst>
           </p:cNvPr>
@@ -5266,7 +5291,7 @@
           <p:cNvPr id="71" name="pattern">
             <a:extLst>
               <a:ext uri="{FF2B5EF4-FFF2-40B4-BE49-F238E27FC236}">
-                <a16:creationId xmlns:a16="http://schemas.microsoft.com/office/drawing/2014/main" id="{F17ECB67-9B8E-9D11-26C6-54F457700BD1}"/>
+                <a16:creationId xmlns:a16="http://schemas.microsoft.com/office/drawing/2014/main" id="{4EB2B8D3-0803-1E00-1BA8-8BBA23E689A7}"/>
               </a:ext>
             </a:extLst>
           </p:cNvPr>
@@ -5334,7 +5359,7 @@
           <p:cNvPr id="72" name="pattern">
             <a:extLst>
               <a:ext uri="{FF2B5EF4-FFF2-40B4-BE49-F238E27FC236}">
-                <a16:creationId xmlns:a16="http://schemas.microsoft.com/office/drawing/2014/main" id="{7CF109DF-5FBF-2280-5CE1-ACF344350B1F}"/>
+                <a16:creationId xmlns:a16="http://schemas.microsoft.com/office/drawing/2014/main" id="{00FA9D2E-4A0B-850B-3421-FF657FEF358A}"/>
               </a:ext>
             </a:extLst>
           </p:cNvPr>
@@ -5402,7 +5427,7 @@
           <p:cNvPr id="73" name="pattern">
             <a:extLst>
               <a:ext uri="{FF2B5EF4-FFF2-40B4-BE49-F238E27FC236}">
-                <a16:creationId xmlns:a16="http://schemas.microsoft.com/office/drawing/2014/main" id="{AB1672EC-AB3A-A698-5838-CB7F0ADDD644}"/>
+                <a16:creationId xmlns:a16="http://schemas.microsoft.com/office/drawing/2014/main" id="{573EEC87-6D88-0155-CB0F-EE89CD416430}"/>
               </a:ext>
             </a:extLst>
           </p:cNvPr>
@@ -5470,7 +5495,7 @@
           <p:cNvPr id="74" name="pattern">
             <a:extLst>
               <a:ext uri="{FF2B5EF4-FFF2-40B4-BE49-F238E27FC236}">
-                <a16:creationId xmlns:a16="http://schemas.microsoft.com/office/drawing/2014/main" id="{971A31D7-CC6C-B4FD-0507-886351F0E327}"/>
+                <a16:creationId xmlns:a16="http://schemas.microsoft.com/office/drawing/2014/main" id="{C6B7FFF2-12E9-A5BD-8560-9D0C2CEE0874}"/>
               </a:ext>
             </a:extLst>
           </p:cNvPr>
@@ -5538,7 +5563,7 @@
           <p:cNvPr id="75" name="pattern">
             <a:extLst>
               <a:ext uri="{FF2B5EF4-FFF2-40B4-BE49-F238E27FC236}">
-                <a16:creationId xmlns:a16="http://schemas.microsoft.com/office/drawing/2014/main" id="{48B8142C-6BD4-DD79-7C44-B40D2C982F0E}"/>
+                <a16:creationId xmlns:a16="http://schemas.microsoft.com/office/drawing/2014/main" id="{5DAC9483-2BCF-EA8C-15BA-051021881BD1}"/>
               </a:ext>
             </a:extLst>
           </p:cNvPr>
@@ -5606,7 +5631,7 @@
           <p:cNvPr id="76" name="pattern">
             <a:extLst>
               <a:ext uri="{FF2B5EF4-FFF2-40B4-BE49-F238E27FC236}">
-                <a16:creationId xmlns:a16="http://schemas.microsoft.com/office/drawing/2014/main" id="{B2D52D44-6D36-BF1B-1865-37D0238AEFB1}"/>
+                <a16:creationId xmlns:a16="http://schemas.microsoft.com/office/drawing/2014/main" id="{7B18E3F9-A00F-B988-1FF8-0815FA31EFC4}"/>
               </a:ext>
             </a:extLst>
           </p:cNvPr>
@@ -5674,7 +5699,7 @@
           <p:cNvPr id="77" name="pattern">
             <a:extLst>
               <a:ext uri="{FF2B5EF4-FFF2-40B4-BE49-F238E27FC236}">
-                <a16:creationId xmlns:a16="http://schemas.microsoft.com/office/drawing/2014/main" id="{75C9FA7F-8ED0-0C9B-A371-81A7265D5358}"/>
+                <a16:creationId xmlns:a16="http://schemas.microsoft.com/office/drawing/2014/main" id="{B2C398D1-73CE-A709-4951-5782ED056E49}"/>
               </a:ext>
             </a:extLst>
           </p:cNvPr>
@@ -5742,7 +5767,7 @@
           <p:cNvPr id="78" name="pattern">
             <a:extLst>
               <a:ext uri="{FF2B5EF4-FFF2-40B4-BE49-F238E27FC236}">
-                <a16:creationId xmlns:a16="http://schemas.microsoft.com/office/drawing/2014/main" id="{EBFF713F-4075-0473-E5B4-ADEC87CFED71}"/>
+                <a16:creationId xmlns:a16="http://schemas.microsoft.com/office/drawing/2014/main" id="{8190AECB-BC32-1248-36F1-AEA53319A63B}"/>
               </a:ext>
             </a:extLst>
           </p:cNvPr>
@@ -5810,7 +5835,7 @@
           <p:cNvPr id="79" name="pattern">
             <a:extLst>
               <a:ext uri="{FF2B5EF4-FFF2-40B4-BE49-F238E27FC236}">
-                <a16:creationId xmlns:a16="http://schemas.microsoft.com/office/drawing/2014/main" id="{AB1BC851-C827-C3FF-5D42-C2E573BC7949}"/>
+                <a16:creationId xmlns:a16="http://schemas.microsoft.com/office/drawing/2014/main" id="{9B1BB0BC-0267-102A-8662-29BD48CEC13C}"/>
               </a:ext>
             </a:extLst>
           </p:cNvPr>
@@ -5878,7 +5903,7 @@
           <p:cNvPr id="80" name="pattern">
             <a:extLst>
               <a:ext uri="{FF2B5EF4-FFF2-40B4-BE49-F238E27FC236}">
-                <a16:creationId xmlns:a16="http://schemas.microsoft.com/office/drawing/2014/main" id="{F7427E4A-4057-7DF2-F653-B44F64F479A1}"/>
+                <a16:creationId xmlns:a16="http://schemas.microsoft.com/office/drawing/2014/main" id="{7A461497-A197-EA7A-475C-4FDC63CB13FC}"/>
               </a:ext>
             </a:extLst>
           </p:cNvPr>
@@ -5946,7 +5971,7 @@
           <p:cNvPr id="81" name="pattern">
             <a:extLst>
               <a:ext uri="{FF2B5EF4-FFF2-40B4-BE49-F238E27FC236}">
-                <a16:creationId xmlns:a16="http://schemas.microsoft.com/office/drawing/2014/main" id="{14AEB4C9-710E-1CC9-3119-BD27814B54E7}"/>
+                <a16:creationId xmlns:a16="http://schemas.microsoft.com/office/drawing/2014/main" id="{DDBF20A1-ED8B-26A9-E3BB-581A5D9CCE55}"/>
               </a:ext>
             </a:extLst>
           </p:cNvPr>
@@ -6014,7 +6039,7 @@
           <p:cNvPr id="82" name="pattern">
             <a:extLst>
               <a:ext uri="{FF2B5EF4-FFF2-40B4-BE49-F238E27FC236}">
-                <a16:creationId xmlns:a16="http://schemas.microsoft.com/office/drawing/2014/main" id="{849F50E6-D402-73F1-C6C0-E4F8F0F7DB48}"/>
+                <a16:creationId xmlns:a16="http://schemas.microsoft.com/office/drawing/2014/main" id="{72C1B339-CB19-F551-D201-68BDA29C0C72}"/>
               </a:ext>
             </a:extLst>
           </p:cNvPr>
@@ -6082,7 +6107,7 @@
           <p:cNvPr id="83" name="pattern">
             <a:extLst>
               <a:ext uri="{FF2B5EF4-FFF2-40B4-BE49-F238E27FC236}">
-                <a16:creationId xmlns:a16="http://schemas.microsoft.com/office/drawing/2014/main" id="{34A3442D-A584-E2AD-DB7D-3A8AD857B0ED}"/>
+                <a16:creationId xmlns:a16="http://schemas.microsoft.com/office/drawing/2014/main" id="{AF7645EA-6219-32A9-A77C-27B600676D09}"/>
               </a:ext>
             </a:extLst>
           </p:cNvPr>
@@ -6150,7 +6175,7 @@
           <p:cNvPr id="84" name="pattern">
             <a:extLst>
               <a:ext uri="{FF2B5EF4-FFF2-40B4-BE49-F238E27FC236}">
-                <a16:creationId xmlns:a16="http://schemas.microsoft.com/office/drawing/2014/main" id="{25649449-3D33-4225-CF0D-5EAE56472C1E}"/>
+                <a16:creationId xmlns:a16="http://schemas.microsoft.com/office/drawing/2014/main" id="{F7EBADEC-650B-6E5F-795D-13DF80503E48}"/>
               </a:ext>
             </a:extLst>
           </p:cNvPr>
@@ -6218,7 +6243,7 @@
           <p:cNvPr id="85" name="pattern">
             <a:extLst>
               <a:ext uri="{FF2B5EF4-FFF2-40B4-BE49-F238E27FC236}">
-                <a16:creationId xmlns:a16="http://schemas.microsoft.com/office/drawing/2014/main" id="{654E50C3-70E1-D040-D963-6AAB090FCAF2}"/>
+                <a16:creationId xmlns:a16="http://schemas.microsoft.com/office/drawing/2014/main" id="{961F4BBD-CAB4-F04D-6871-45286F1CDC07}"/>
               </a:ext>
             </a:extLst>
           </p:cNvPr>
@@ -6286,7 +6311,7 @@
           <p:cNvPr id="86" name="pattern">
             <a:extLst>
               <a:ext uri="{FF2B5EF4-FFF2-40B4-BE49-F238E27FC236}">
-                <a16:creationId xmlns:a16="http://schemas.microsoft.com/office/drawing/2014/main" id="{A131CE95-5BF3-FAF7-3314-A807105DD1AB}"/>
+                <a16:creationId xmlns:a16="http://schemas.microsoft.com/office/drawing/2014/main" id="{25AF4D14-EDBD-F881-63E2-55DE2A144A6E}"/>
               </a:ext>
             </a:extLst>
           </p:cNvPr>
@@ -6354,7 +6379,7 @@
           <p:cNvPr id="87" name="pattern">
             <a:extLst>
               <a:ext uri="{FF2B5EF4-FFF2-40B4-BE49-F238E27FC236}">
-                <a16:creationId xmlns:a16="http://schemas.microsoft.com/office/drawing/2014/main" id="{CF04FB6D-0B2C-A709-B2F6-0CC72DC71556}"/>
+                <a16:creationId xmlns:a16="http://schemas.microsoft.com/office/drawing/2014/main" id="{5FEE6B29-EA12-2A99-07ED-0A1745E009BC}"/>
               </a:ext>
             </a:extLst>
           </p:cNvPr>
@@ -6422,7 +6447,7 @@
           <p:cNvPr id="88" name="pattern">
             <a:extLst>
               <a:ext uri="{FF2B5EF4-FFF2-40B4-BE49-F238E27FC236}">
-                <a16:creationId xmlns:a16="http://schemas.microsoft.com/office/drawing/2014/main" id="{F5A5CD21-0736-7794-A88F-42F3BB5DBAD3}"/>
+                <a16:creationId xmlns:a16="http://schemas.microsoft.com/office/drawing/2014/main" id="{B4502567-5250-B268-0AA8-E70246FAE68E}"/>
               </a:ext>
             </a:extLst>
           </p:cNvPr>
@@ -6490,7 +6515,7 @@
           <p:cNvPr id="89" name="pattern">
             <a:extLst>
               <a:ext uri="{FF2B5EF4-FFF2-40B4-BE49-F238E27FC236}">
-                <a16:creationId xmlns:a16="http://schemas.microsoft.com/office/drawing/2014/main" id="{B76578B8-2454-4A15-64FA-A729D86F001D}"/>
+                <a16:creationId xmlns:a16="http://schemas.microsoft.com/office/drawing/2014/main" id="{A3D8F38D-674D-9D30-3771-9707C11D3FF2}"/>
               </a:ext>
             </a:extLst>
           </p:cNvPr>
@@ -6558,7 +6583,7 @@
           <p:cNvPr id="90" name="pattern">
             <a:extLst>
               <a:ext uri="{FF2B5EF4-FFF2-40B4-BE49-F238E27FC236}">
-                <a16:creationId xmlns:a16="http://schemas.microsoft.com/office/drawing/2014/main" id="{353DC595-9E28-8319-92EB-724E750D92B8}"/>
+                <a16:creationId xmlns:a16="http://schemas.microsoft.com/office/drawing/2014/main" id="{22C07795-B424-500D-973F-99E20CDDEE4B}"/>
               </a:ext>
             </a:extLst>
           </p:cNvPr>
@@ -6626,7 +6651,7 @@
           <p:cNvPr id="91" name="pattern">
             <a:extLst>
               <a:ext uri="{FF2B5EF4-FFF2-40B4-BE49-F238E27FC236}">
-                <a16:creationId xmlns:a16="http://schemas.microsoft.com/office/drawing/2014/main" id="{80CE5C4A-FA97-5C4D-DB39-DFF602FE9E3B}"/>
+                <a16:creationId xmlns:a16="http://schemas.microsoft.com/office/drawing/2014/main" id="{D84817EF-00BB-DFF2-D48F-A54EF54A3AC1}"/>
               </a:ext>
             </a:extLst>
           </p:cNvPr>
@@ -6694,7 +6719,7 @@
           <p:cNvPr id="92" name="pattern">
             <a:extLst>
               <a:ext uri="{FF2B5EF4-FFF2-40B4-BE49-F238E27FC236}">
-                <a16:creationId xmlns:a16="http://schemas.microsoft.com/office/drawing/2014/main" id="{C5A339CA-3D4A-B81B-F6FE-031AEC6B7E8E}"/>
+                <a16:creationId xmlns:a16="http://schemas.microsoft.com/office/drawing/2014/main" id="{641E6690-BAF1-CCFB-2781-2309750F3916}"/>
               </a:ext>
             </a:extLst>
           </p:cNvPr>
@@ -6762,7 +6787,7 @@
           <p:cNvPr id="93" name="pattern">
             <a:extLst>
               <a:ext uri="{FF2B5EF4-FFF2-40B4-BE49-F238E27FC236}">
-                <a16:creationId xmlns:a16="http://schemas.microsoft.com/office/drawing/2014/main" id="{2A2B7F5B-DC25-025E-02D0-5582C868009D}"/>
+                <a16:creationId xmlns:a16="http://schemas.microsoft.com/office/drawing/2014/main" id="{5F141AD4-3E20-6308-E282-CA79D0082832}"/>
               </a:ext>
             </a:extLst>
           </p:cNvPr>
@@ -6830,7 +6855,7 @@
           <p:cNvPr id="94" name="pattern">
             <a:extLst>
               <a:ext uri="{FF2B5EF4-FFF2-40B4-BE49-F238E27FC236}">
-                <a16:creationId xmlns:a16="http://schemas.microsoft.com/office/drawing/2014/main" id="{68C28C55-64DE-1AF2-5EAC-D3431DCD6052}"/>
+                <a16:creationId xmlns:a16="http://schemas.microsoft.com/office/drawing/2014/main" id="{E1F9EEE5-9E3A-CB4C-F75F-B097EA198B9C}"/>
               </a:ext>
             </a:extLst>
           </p:cNvPr>
@@ -6898,7 +6923,7 @@
           <p:cNvPr id="95" name="pattern">
             <a:extLst>
               <a:ext uri="{FF2B5EF4-FFF2-40B4-BE49-F238E27FC236}">
-                <a16:creationId xmlns:a16="http://schemas.microsoft.com/office/drawing/2014/main" id="{0421A4F3-ED6B-525B-3BE0-E7B5BA784F30}"/>
+                <a16:creationId xmlns:a16="http://schemas.microsoft.com/office/drawing/2014/main" id="{483B2394-69FA-01FF-B7DC-6BF56D60E4F2}"/>
               </a:ext>
             </a:extLst>
           </p:cNvPr>
@@ -6966,7 +6991,7 @@
           <p:cNvPr id="96" name="pattern">
             <a:extLst>
               <a:ext uri="{FF2B5EF4-FFF2-40B4-BE49-F238E27FC236}">
-                <a16:creationId xmlns:a16="http://schemas.microsoft.com/office/drawing/2014/main" id="{AE4E270D-0DD4-6B7B-7A69-2E6A27D80474}"/>
+                <a16:creationId xmlns:a16="http://schemas.microsoft.com/office/drawing/2014/main" id="{317AA0DE-4D75-4D08-FA66-7CEE3EADFBB7}"/>
               </a:ext>
             </a:extLst>
           </p:cNvPr>
@@ -7034,7 +7059,7 @@
           <p:cNvPr id="97" name="pattern">
             <a:extLst>
               <a:ext uri="{FF2B5EF4-FFF2-40B4-BE49-F238E27FC236}">
-                <a16:creationId xmlns:a16="http://schemas.microsoft.com/office/drawing/2014/main" id="{BFE41DB6-C8CE-E5EF-535E-B8B9F3E9BF3A}"/>
+                <a16:creationId xmlns:a16="http://schemas.microsoft.com/office/drawing/2014/main" id="{F771DB57-E146-687F-7AB2-245A136CB3A3}"/>
               </a:ext>
             </a:extLst>
           </p:cNvPr>
@@ -7102,7 +7127,7 @@
           <p:cNvPr id="98" name="pattern">
             <a:extLst>
               <a:ext uri="{FF2B5EF4-FFF2-40B4-BE49-F238E27FC236}">
-                <a16:creationId xmlns:a16="http://schemas.microsoft.com/office/drawing/2014/main" id="{24BC4C19-729D-CD47-A7D4-8B46322AE46D}"/>
+                <a16:creationId xmlns:a16="http://schemas.microsoft.com/office/drawing/2014/main" id="{48E74BF9-E0FD-28AE-0EB2-EA45866AC0CB}"/>
               </a:ext>
             </a:extLst>
           </p:cNvPr>
@@ -7170,7 +7195,7 @@
           <p:cNvPr id="99" name="pattern">
             <a:extLst>
               <a:ext uri="{FF2B5EF4-FFF2-40B4-BE49-F238E27FC236}">
-                <a16:creationId xmlns:a16="http://schemas.microsoft.com/office/drawing/2014/main" id="{FD2AC5DD-A169-A26F-9B0F-3A1705E0D6A9}"/>
+                <a16:creationId xmlns:a16="http://schemas.microsoft.com/office/drawing/2014/main" id="{460E1E90-1990-808C-E2DD-A70F27603ED5}"/>
               </a:ext>
             </a:extLst>
           </p:cNvPr>
@@ -7238,7 +7263,7 @@
           <p:cNvPr id="100" name="pattern">
             <a:extLst>
               <a:ext uri="{FF2B5EF4-FFF2-40B4-BE49-F238E27FC236}">
-                <a16:creationId xmlns:a16="http://schemas.microsoft.com/office/drawing/2014/main" id="{DE860FCF-6BE4-6ED1-0D3E-2311A6B65D33}"/>
+                <a16:creationId xmlns:a16="http://schemas.microsoft.com/office/drawing/2014/main" id="{2342C7DC-1FA7-4DCA-8C10-57D82ADDEC3C}"/>
               </a:ext>
             </a:extLst>
           </p:cNvPr>
@@ -7306,7 +7331,7 @@
           <p:cNvPr id="101" name="pattern">
             <a:extLst>
               <a:ext uri="{FF2B5EF4-FFF2-40B4-BE49-F238E27FC236}">
-                <a16:creationId xmlns:a16="http://schemas.microsoft.com/office/drawing/2014/main" id="{3507BBFF-138D-431E-AE2E-48EF5E75290A}"/>
+                <a16:creationId xmlns:a16="http://schemas.microsoft.com/office/drawing/2014/main" id="{E9BFEDEB-E46E-4854-5BB5-4058FA763B5D}"/>
               </a:ext>
             </a:extLst>
           </p:cNvPr>
@@ -7374,7 +7399,7 @@
           <p:cNvPr id="102" name="pattern">
             <a:extLst>
               <a:ext uri="{FF2B5EF4-FFF2-40B4-BE49-F238E27FC236}">
-                <a16:creationId xmlns:a16="http://schemas.microsoft.com/office/drawing/2014/main" id="{D455492C-DBA4-14A2-52C0-9054149CD3F8}"/>
+                <a16:creationId xmlns:a16="http://schemas.microsoft.com/office/drawing/2014/main" id="{88CFF212-281E-341C-E958-D8E6096AEDEC}"/>
               </a:ext>
             </a:extLst>
           </p:cNvPr>
@@ -7442,7 +7467,7 @@
           <p:cNvPr id="103" name="pattern">
             <a:extLst>
               <a:ext uri="{FF2B5EF4-FFF2-40B4-BE49-F238E27FC236}">
-                <a16:creationId xmlns:a16="http://schemas.microsoft.com/office/drawing/2014/main" id="{AA44907A-2582-4CD1-33D0-29565B3D0FAF}"/>
+                <a16:creationId xmlns:a16="http://schemas.microsoft.com/office/drawing/2014/main" id="{57C31395-3B19-0BFD-2876-EFC431CC85AE}"/>
               </a:ext>
             </a:extLst>
           </p:cNvPr>
@@ -7510,7 +7535,7 @@
           <p:cNvPr id="104" name="pattern">
             <a:extLst>
               <a:ext uri="{FF2B5EF4-FFF2-40B4-BE49-F238E27FC236}">
-                <a16:creationId xmlns:a16="http://schemas.microsoft.com/office/drawing/2014/main" id="{7D9CFB69-640D-C1CE-21C6-B5B8012DB171}"/>
+                <a16:creationId xmlns:a16="http://schemas.microsoft.com/office/drawing/2014/main" id="{C2BD5A16-61B5-038F-3322-82990DCE581D}"/>
               </a:ext>
             </a:extLst>
           </p:cNvPr>
@@ -7578,7 +7603,7 @@
           <p:cNvPr id="105" name="pattern">
             <a:extLst>
               <a:ext uri="{FF2B5EF4-FFF2-40B4-BE49-F238E27FC236}">
-                <a16:creationId xmlns:a16="http://schemas.microsoft.com/office/drawing/2014/main" id="{3E6F1670-B032-E35E-65FF-A19F0FF7B00E}"/>
+                <a16:creationId xmlns:a16="http://schemas.microsoft.com/office/drawing/2014/main" id="{2A19B79D-658D-D5F3-EC38-DABEFB18641E}"/>
               </a:ext>
             </a:extLst>
           </p:cNvPr>
@@ -7646,7 +7671,7 @@
           <p:cNvPr id="106" name="pattern">
             <a:extLst>
               <a:ext uri="{FF2B5EF4-FFF2-40B4-BE49-F238E27FC236}">
-                <a16:creationId xmlns:a16="http://schemas.microsoft.com/office/drawing/2014/main" id="{B462D5D0-71B9-5BDD-EB24-5206D20EFC7F}"/>
+                <a16:creationId xmlns:a16="http://schemas.microsoft.com/office/drawing/2014/main" id="{F0E27421-0827-9235-1FB3-6BA7D9229F21}"/>
               </a:ext>
             </a:extLst>
           </p:cNvPr>
@@ -7714,7 +7739,7 @@
           <p:cNvPr id="107" name="pattern">
             <a:extLst>
               <a:ext uri="{FF2B5EF4-FFF2-40B4-BE49-F238E27FC236}">
-                <a16:creationId xmlns:a16="http://schemas.microsoft.com/office/drawing/2014/main" id="{3D4A124A-903A-D7D7-5450-971E28AA7CB9}"/>
+                <a16:creationId xmlns:a16="http://schemas.microsoft.com/office/drawing/2014/main" id="{9EFC09C2-4344-654F-D53C-8595483D7425}"/>
               </a:ext>
             </a:extLst>
           </p:cNvPr>
@@ -7782,7 +7807,7 @@
           <p:cNvPr id="108" name="pattern">
             <a:extLst>
               <a:ext uri="{FF2B5EF4-FFF2-40B4-BE49-F238E27FC236}">
-                <a16:creationId xmlns:a16="http://schemas.microsoft.com/office/drawing/2014/main" id="{0EB75464-B0ED-8776-D23F-9452958C0A97}"/>
+                <a16:creationId xmlns:a16="http://schemas.microsoft.com/office/drawing/2014/main" id="{96628B52-38B8-1CA2-4E20-E1EDCB93F34A}"/>
               </a:ext>
             </a:extLst>
           </p:cNvPr>
@@ -7850,7 +7875,7 @@
           <p:cNvPr id="109" name="pattern">
             <a:extLst>
               <a:ext uri="{FF2B5EF4-FFF2-40B4-BE49-F238E27FC236}">
-                <a16:creationId xmlns:a16="http://schemas.microsoft.com/office/drawing/2014/main" id="{AE8B68ED-00F7-8EE3-BCD0-C54DCF4972C8}"/>
+                <a16:creationId xmlns:a16="http://schemas.microsoft.com/office/drawing/2014/main" id="{A40AF7FC-027A-588B-CDD0-750E9B424416}"/>
               </a:ext>
             </a:extLst>
           </p:cNvPr>
@@ -7918,7 +7943,7 @@
           <p:cNvPr id="110" name="pattern">
             <a:extLst>
               <a:ext uri="{FF2B5EF4-FFF2-40B4-BE49-F238E27FC236}">
-                <a16:creationId xmlns:a16="http://schemas.microsoft.com/office/drawing/2014/main" id="{2093E396-E7E8-4F2C-57E0-74C09FFBAF87}"/>
+                <a16:creationId xmlns:a16="http://schemas.microsoft.com/office/drawing/2014/main" id="{61E49708-B041-11BC-76E0-D179020D95C3}"/>
               </a:ext>
             </a:extLst>
           </p:cNvPr>
@@ -7986,7 +8011,7 @@
           <p:cNvPr id="111" name="pattern">
             <a:extLst>
               <a:ext uri="{FF2B5EF4-FFF2-40B4-BE49-F238E27FC236}">
-                <a16:creationId xmlns:a16="http://schemas.microsoft.com/office/drawing/2014/main" id="{D079CB9C-9D0D-E652-B94D-CD53288019D0}"/>
+                <a16:creationId xmlns:a16="http://schemas.microsoft.com/office/drawing/2014/main" id="{FA3B249C-7C1B-D20A-263B-C3434B54D43F}"/>
               </a:ext>
             </a:extLst>
           </p:cNvPr>
@@ -8054,7 +8079,7 @@
           <p:cNvPr id="112" name="pattern">
             <a:extLst>
               <a:ext uri="{FF2B5EF4-FFF2-40B4-BE49-F238E27FC236}">
-                <a16:creationId xmlns:a16="http://schemas.microsoft.com/office/drawing/2014/main" id="{BE9356A5-A1AA-7C69-07B9-DD5E78E77366}"/>
+                <a16:creationId xmlns:a16="http://schemas.microsoft.com/office/drawing/2014/main" id="{89E663FF-C67F-4997-98A4-A2A15FC17D44}"/>
               </a:ext>
             </a:extLst>
           </p:cNvPr>
@@ -8122,7 +8147,7 @@
           <p:cNvPr id="113" name="pattern">
             <a:extLst>
               <a:ext uri="{FF2B5EF4-FFF2-40B4-BE49-F238E27FC236}">
-                <a16:creationId xmlns:a16="http://schemas.microsoft.com/office/drawing/2014/main" id="{9BB93932-7248-9CD6-4E21-DBAF398BAFB8}"/>
+                <a16:creationId xmlns:a16="http://schemas.microsoft.com/office/drawing/2014/main" id="{CDAABD6E-9D1C-ADF9-DDC6-2353AED68BDE}"/>
               </a:ext>
             </a:extLst>
           </p:cNvPr>
@@ -8190,7 +8215,7 @@
           <p:cNvPr id="114" name="pattern">
             <a:extLst>
               <a:ext uri="{FF2B5EF4-FFF2-40B4-BE49-F238E27FC236}">
-                <a16:creationId xmlns:a16="http://schemas.microsoft.com/office/drawing/2014/main" id="{954916F9-DE00-903C-BEF6-7C19945453FD}"/>
+                <a16:creationId xmlns:a16="http://schemas.microsoft.com/office/drawing/2014/main" id="{2B94E060-DABD-F7C9-F530-737085807A0B}"/>
               </a:ext>
             </a:extLst>
           </p:cNvPr>
@@ -8258,7 +8283,7 @@
           <p:cNvPr id="115" name="pattern">
             <a:extLst>
               <a:ext uri="{FF2B5EF4-FFF2-40B4-BE49-F238E27FC236}">
-                <a16:creationId xmlns:a16="http://schemas.microsoft.com/office/drawing/2014/main" id="{D37A5CC7-4BB8-3559-91D9-BED060217490}"/>
+                <a16:creationId xmlns:a16="http://schemas.microsoft.com/office/drawing/2014/main" id="{C33C49E1-FD44-786D-639A-44FE18D71B52}"/>
               </a:ext>
             </a:extLst>
           </p:cNvPr>
@@ -8326,7 +8351,7 @@
           <p:cNvPr id="116" name="pattern">
             <a:extLst>
               <a:ext uri="{FF2B5EF4-FFF2-40B4-BE49-F238E27FC236}">
-                <a16:creationId xmlns:a16="http://schemas.microsoft.com/office/drawing/2014/main" id="{226FD5CE-15B4-DCF6-FF5E-4F9F531333C0}"/>
+                <a16:creationId xmlns:a16="http://schemas.microsoft.com/office/drawing/2014/main" id="{35866A0E-351B-FD39-9656-84B6B7F67A9F}"/>
               </a:ext>
             </a:extLst>
           </p:cNvPr>
@@ -8394,7 +8419,7 @@
           <p:cNvPr id="117" name="pattern">
             <a:extLst>
               <a:ext uri="{FF2B5EF4-FFF2-40B4-BE49-F238E27FC236}">
-                <a16:creationId xmlns:a16="http://schemas.microsoft.com/office/drawing/2014/main" id="{0EDC4E70-BBF6-5C07-FFAC-032FA0DF54A7}"/>
+                <a16:creationId xmlns:a16="http://schemas.microsoft.com/office/drawing/2014/main" id="{18426171-3D03-D53E-044F-BDF03230C2DC}"/>
               </a:ext>
             </a:extLst>
           </p:cNvPr>
@@ -8462,7 +8487,7 @@
           <p:cNvPr id="118" name="pattern">
             <a:extLst>
               <a:ext uri="{FF2B5EF4-FFF2-40B4-BE49-F238E27FC236}">
-                <a16:creationId xmlns:a16="http://schemas.microsoft.com/office/drawing/2014/main" id="{0694847E-E280-DA36-6A36-C05B4F31A9A8}"/>
+                <a16:creationId xmlns:a16="http://schemas.microsoft.com/office/drawing/2014/main" id="{7F1B28CF-220C-9F70-6D19-6210DE8B268E}"/>
               </a:ext>
             </a:extLst>
           </p:cNvPr>
@@ -8530,7 +8555,7 @@
           <p:cNvPr id="119" name="pattern">
             <a:extLst>
               <a:ext uri="{FF2B5EF4-FFF2-40B4-BE49-F238E27FC236}">
-                <a16:creationId xmlns:a16="http://schemas.microsoft.com/office/drawing/2014/main" id="{F00E2FAC-0ADD-E64B-9EC8-0A7B82F46C65}"/>
+                <a16:creationId xmlns:a16="http://schemas.microsoft.com/office/drawing/2014/main" id="{8D910F49-F3AC-64B1-86D5-9AB02E000D97}"/>
               </a:ext>
             </a:extLst>
           </p:cNvPr>
@@ -8598,7 +8623,7 @@
           <p:cNvPr id="120" name="pattern">
             <a:extLst>
               <a:ext uri="{FF2B5EF4-FFF2-40B4-BE49-F238E27FC236}">
-                <a16:creationId xmlns:a16="http://schemas.microsoft.com/office/drawing/2014/main" id="{2D9EB6E1-CA20-5D23-CA7A-EEB116768A0C}"/>
+                <a16:creationId xmlns:a16="http://schemas.microsoft.com/office/drawing/2014/main" id="{BA1D3E1B-2AFF-91DC-D469-8419BDF7E5EE}"/>
               </a:ext>
             </a:extLst>
           </p:cNvPr>
@@ -8666,7 +8691,7 @@
           <p:cNvPr id="121" name="pattern">
             <a:extLst>
               <a:ext uri="{FF2B5EF4-FFF2-40B4-BE49-F238E27FC236}">
-                <a16:creationId xmlns:a16="http://schemas.microsoft.com/office/drawing/2014/main" id="{187EC031-EDE5-A542-5150-63F2EEFE8C26}"/>
+                <a16:creationId xmlns:a16="http://schemas.microsoft.com/office/drawing/2014/main" id="{526CAC01-A2AF-A868-E5ED-473E0C9AF6C4}"/>
               </a:ext>
             </a:extLst>
           </p:cNvPr>
@@ -8734,7 +8759,7 @@
           <p:cNvPr id="122" name="pattern">
             <a:extLst>
               <a:ext uri="{FF2B5EF4-FFF2-40B4-BE49-F238E27FC236}">
-                <a16:creationId xmlns:a16="http://schemas.microsoft.com/office/drawing/2014/main" id="{73AF40DB-1FFE-C602-B3D1-D2FD6323A4ED}"/>
+                <a16:creationId xmlns:a16="http://schemas.microsoft.com/office/drawing/2014/main" id="{F5366AEB-0F32-1E08-F5D3-338ACC980EEB}"/>
               </a:ext>
             </a:extLst>
           </p:cNvPr>
@@ -8802,7 +8827,7 @@
           <p:cNvPr id="123" name="pattern">
             <a:extLst>
               <a:ext uri="{FF2B5EF4-FFF2-40B4-BE49-F238E27FC236}">
-                <a16:creationId xmlns:a16="http://schemas.microsoft.com/office/drawing/2014/main" id="{DB2AD79A-8A28-EA79-B642-26D9DE76888A}"/>
+                <a16:creationId xmlns:a16="http://schemas.microsoft.com/office/drawing/2014/main" id="{6DAC31D0-7429-22F1-1F8B-4F5F2AE2D0D2}"/>
               </a:ext>
             </a:extLst>
           </p:cNvPr>
@@ -8870,7 +8895,7 @@
           <p:cNvPr id="124" name="pattern">
             <a:extLst>
               <a:ext uri="{FF2B5EF4-FFF2-40B4-BE49-F238E27FC236}">
-                <a16:creationId xmlns:a16="http://schemas.microsoft.com/office/drawing/2014/main" id="{9D8A7F81-89AD-35EE-0971-14DBF8F03BC7}"/>
+                <a16:creationId xmlns:a16="http://schemas.microsoft.com/office/drawing/2014/main" id="{4EBDACCD-63EE-FA91-F42F-658E15262222}"/>
               </a:ext>
             </a:extLst>
           </p:cNvPr>
@@ -8938,7 +8963,7 @@
           <p:cNvPr id="125" name="pattern">
             <a:extLst>
               <a:ext uri="{FF2B5EF4-FFF2-40B4-BE49-F238E27FC236}">
-                <a16:creationId xmlns:a16="http://schemas.microsoft.com/office/drawing/2014/main" id="{115FF165-4C43-4F92-B20F-35B06E71F24F}"/>
+                <a16:creationId xmlns:a16="http://schemas.microsoft.com/office/drawing/2014/main" id="{A08874D6-0396-08D9-6D6F-B8E5841ADD66}"/>
               </a:ext>
             </a:extLst>
           </p:cNvPr>
@@ -9006,7 +9031,7 @@
           <p:cNvPr id="126" name="pattern">
             <a:extLst>
               <a:ext uri="{FF2B5EF4-FFF2-40B4-BE49-F238E27FC236}">
-                <a16:creationId xmlns:a16="http://schemas.microsoft.com/office/drawing/2014/main" id="{E5881A2B-9D21-4033-7E55-DEC8FB747B08}"/>
+                <a16:creationId xmlns:a16="http://schemas.microsoft.com/office/drawing/2014/main" id="{E342D059-3FC7-28E1-B320-65B04551042C}"/>
               </a:ext>
             </a:extLst>
           </p:cNvPr>
@@ -9074,7 +9099,7 @@
           <p:cNvPr id="127" name="pattern">
             <a:extLst>
               <a:ext uri="{FF2B5EF4-FFF2-40B4-BE49-F238E27FC236}">
-                <a16:creationId xmlns:a16="http://schemas.microsoft.com/office/drawing/2014/main" id="{788E54B0-DB77-B7B2-5715-9C70C13AC332}"/>
+                <a16:creationId xmlns:a16="http://schemas.microsoft.com/office/drawing/2014/main" id="{D8427A18-A92E-3539-CD63-1371303BF530}"/>
               </a:ext>
             </a:extLst>
           </p:cNvPr>
@@ -9142,7 +9167,7 @@
           <p:cNvPr id="128" name="pattern">
             <a:extLst>
               <a:ext uri="{FF2B5EF4-FFF2-40B4-BE49-F238E27FC236}">
-                <a16:creationId xmlns:a16="http://schemas.microsoft.com/office/drawing/2014/main" id="{A59AC83E-5C69-074A-402D-B72190C80140}"/>
+                <a16:creationId xmlns:a16="http://schemas.microsoft.com/office/drawing/2014/main" id="{D06056EF-EE25-6F87-39B0-F73A16DCEC48}"/>
               </a:ext>
             </a:extLst>
           </p:cNvPr>
@@ -9210,7 +9235,7 @@
           <p:cNvPr id="129" name="pattern">
             <a:extLst>
               <a:ext uri="{FF2B5EF4-FFF2-40B4-BE49-F238E27FC236}">
-                <a16:creationId xmlns:a16="http://schemas.microsoft.com/office/drawing/2014/main" id="{4396129A-3F10-19AA-6354-DBB416CF2C3A}"/>
+                <a16:creationId xmlns:a16="http://schemas.microsoft.com/office/drawing/2014/main" id="{963FFE80-5473-435A-0FC7-0B1FEFB74D00}"/>
               </a:ext>
             </a:extLst>
           </p:cNvPr>
@@ -9278,7 +9303,7 @@
           <p:cNvPr id="130" name="pattern">
             <a:extLst>
               <a:ext uri="{FF2B5EF4-FFF2-40B4-BE49-F238E27FC236}">
-                <a16:creationId xmlns:a16="http://schemas.microsoft.com/office/drawing/2014/main" id="{26C45058-D366-4A57-1A4F-FFDD974FB05D}"/>
+                <a16:creationId xmlns:a16="http://schemas.microsoft.com/office/drawing/2014/main" id="{A52421BA-F706-F338-5E18-901DE52C23C5}"/>
               </a:ext>
             </a:extLst>
           </p:cNvPr>
@@ -9346,7 +9371,7 @@
           <p:cNvPr id="131" name="pattern">
             <a:extLst>
               <a:ext uri="{FF2B5EF4-FFF2-40B4-BE49-F238E27FC236}">
-                <a16:creationId xmlns:a16="http://schemas.microsoft.com/office/drawing/2014/main" id="{F5AFD6FF-0D4C-D11D-C642-8D8B2A172038}"/>
+                <a16:creationId xmlns:a16="http://schemas.microsoft.com/office/drawing/2014/main" id="{2B7F4C8F-DBAA-9BD2-2668-2A2EEF44F4E0}"/>
               </a:ext>
             </a:extLst>
           </p:cNvPr>
@@ -9414,7 +9439,7 @@
           <p:cNvPr id="132" name="pattern">
             <a:extLst>
               <a:ext uri="{FF2B5EF4-FFF2-40B4-BE49-F238E27FC236}">
-                <a16:creationId xmlns:a16="http://schemas.microsoft.com/office/drawing/2014/main" id="{259D8CB6-F257-91CB-71B8-15B68999221F}"/>
+                <a16:creationId xmlns:a16="http://schemas.microsoft.com/office/drawing/2014/main" id="{8BBC7EF6-DF61-13D5-8C24-A2157F8458FE}"/>
               </a:ext>
             </a:extLst>
           </p:cNvPr>
@@ -9482,7 +9507,7 @@
           <p:cNvPr id="133" name="pattern">
             <a:extLst>
               <a:ext uri="{FF2B5EF4-FFF2-40B4-BE49-F238E27FC236}">
-                <a16:creationId xmlns:a16="http://schemas.microsoft.com/office/drawing/2014/main" id="{BC3217E3-7986-A9E9-7CBE-0659F5BD35DA}"/>
+                <a16:creationId xmlns:a16="http://schemas.microsoft.com/office/drawing/2014/main" id="{76A60B51-8190-D244-696A-1BFE690258A0}"/>
               </a:ext>
             </a:extLst>
           </p:cNvPr>
@@ -9550,7 +9575,7 @@
           <p:cNvPr id="134" name="pattern">
             <a:extLst>
               <a:ext uri="{FF2B5EF4-FFF2-40B4-BE49-F238E27FC236}">
-                <a16:creationId xmlns:a16="http://schemas.microsoft.com/office/drawing/2014/main" id="{6379CF70-28A3-1F49-F0A3-3E62340F2F5A}"/>
+                <a16:creationId xmlns:a16="http://schemas.microsoft.com/office/drawing/2014/main" id="{61542D96-BF5F-C75C-A9AF-6CD68D7EEF47}"/>
               </a:ext>
             </a:extLst>
           </p:cNvPr>
@@ -9618,7 +9643,7 @@
           <p:cNvPr id="135" name="pattern">
             <a:extLst>
               <a:ext uri="{FF2B5EF4-FFF2-40B4-BE49-F238E27FC236}">
-                <a16:creationId xmlns:a16="http://schemas.microsoft.com/office/drawing/2014/main" id="{B5AEE3A1-3E04-1431-750B-8DA746BA581A}"/>
+                <a16:creationId xmlns:a16="http://schemas.microsoft.com/office/drawing/2014/main" id="{767AAB90-70E4-6DFE-D9DF-35198ECA29D9}"/>
               </a:ext>
             </a:extLst>
           </p:cNvPr>
@@ -9684,7 +9709,7 @@
     </p:spTree>
     <p:extLst>
       <p:ext uri="{BB962C8B-B14F-4D97-AF65-F5344CB8AC3E}">
-        <p14:creationId xmlns:p14="http://schemas.microsoft.com/office/powerpoint/2010/main" val="1307354092"/>
+        <p14:creationId xmlns:p14="http://schemas.microsoft.com/office/powerpoint/2010/main" val="3402085529"/>
       </p:ext>
     </p:extLst>
   </p:cSld>
@@ -9716,7 +9741,7 @@
           <p:cNvPr id="7" name="creative_background">
             <a:extLst>
               <a:ext uri="{FF2B5EF4-FFF2-40B4-BE49-F238E27FC236}">
-                <a16:creationId xmlns:a16="http://schemas.microsoft.com/office/drawing/2014/main" id="{669C6D03-0022-C203-470B-7CA120CE0524}"/>
+                <a16:creationId xmlns:a16="http://schemas.microsoft.com/office/drawing/2014/main" id="{BA045D69-A5F0-F78A-D723-A638E6040722}"/>
               </a:ext>
             </a:extLst>
           </p:cNvPr>
@@ -9757,7 +9782,12 @@
             <p:ph type="title"/>
           </p:nvPr>
         </p:nvSpPr>
-        <p:spPr/>
+        <p:spPr>
+          <a:xfrm>
+            <a:off x="2072640" y="585216"/>
+            <a:ext cx="8674100" cy="1499616"/>
+          </a:xfrm>
+        </p:spPr>
         <p:txBody>
           <a:bodyPr/>
           <a:lstStyle>
@@ -9784,12 +9814,17 @@
             <p:ph type="dt" sz="half" idx="10"/>
           </p:nvPr>
         </p:nvSpPr>
-        <p:spPr/>
+        <p:spPr>
+          <a:xfrm>
+            <a:off x="2072640" y="6470704"/>
+            <a:ext cx="1104900" cy="274320"/>
+          </a:xfrm>
+        </p:spPr>
         <p:txBody>
           <a:bodyPr/>
           <a:lstStyle/>
           <a:p>
-            <a:fld id="{B5D244B9-259B-433A-84B9-2D3FCD42690F}" type="datetimeFigureOut">
+            <a:fld id="{F163761A-A4E5-4C7D-9728-6F0BC80FAE16}" type="datetimeFigureOut">
               <a:rPr lang="en-US" smtClean="0"/>
               <a:t>10/3/2026</a:t>
             </a:fld>
@@ -9831,7 +9866,7 @@
           <a:bodyPr/>
           <a:lstStyle/>
           <a:p>
-            <a:fld id="{F9842B40-88D3-4B59-923A-4074BB0E4CE6}" type="slidenum">
+            <a:fld id="{4DDE2B9A-5AB6-497C-A8BC-8EC14D6B62BC}" type="slidenum">
               <a:rPr lang="en-US" smtClean="0"/>
               <a:t>‹#›</a:t>
             </a:fld>
@@ -9844,7 +9879,7 @@
           <p:cNvPr id="8" name="item_1_title">
             <a:extLst>
               <a:ext uri="{FF2B5EF4-FFF2-40B4-BE49-F238E27FC236}">
-                <a16:creationId xmlns:a16="http://schemas.microsoft.com/office/drawing/2014/main" id="{DFD7E984-9CFF-9CC5-4382-B4A9152E4E47}"/>
+                <a16:creationId xmlns:a16="http://schemas.microsoft.com/office/drawing/2014/main" id="{5097435F-DE93-9FAA-CA4F-C92103AA9240}"/>
               </a:ext>
             </a:extLst>
           </p:cNvPr>
@@ -9857,8 +9892,8 @@
         </p:nvSpPr>
         <p:spPr>
           <a:xfrm>
-            <a:off x="1148744" y="2419022"/>
-            <a:ext cx="2841252" cy="532083"/>
+            <a:off x="2183814" y="2419022"/>
+            <a:ext cx="2534764" cy="532083"/>
           </a:xfrm>
         </p:spPr>
         <p:txBody>
@@ -9894,7 +9929,7 @@
           <p:cNvPr id="9" name="item_1">
             <a:extLst>
               <a:ext uri="{FF2B5EF4-FFF2-40B4-BE49-F238E27FC236}">
-                <a16:creationId xmlns:a16="http://schemas.microsoft.com/office/drawing/2014/main" id="{9AFD2040-C1CE-E878-C68B-AA1A99CC2142}"/>
+                <a16:creationId xmlns:a16="http://schemas.microsoft.com/office/drawing/2014/main" id="{D63FB453-0376-86AE-C99F-7BBAB9827391}"/>
               </a:ext>
             </a:extLst>
           </p:cNvPr>
@@ -9907,8 +9942,8 @@
         </p:nvSpPr>
         <p:spPr>
           <a:xfrm>
-            <a:off x="4089691" y="2419022"/>
-            <a:ext cx="6529895" cy="532083"/>
+            <a:off x="4807517" y="2419022"/>
+            <a:ext cx="5825510" cy="532083"/>
           </a:xfrm>
           <a:prstGeom prst="rect">
             <a:avLst/>
@@ -9942,7 +9977,7 @@
           <p:cNvPr id="10" name="item_2_title">
             <a:extLst>
               <a:ext uri="{FF2B5EF4-FFF2-40B4-BE49-F238E27FC236}">
-                <a16:creationId xmlns:a16="http://schemas.microsoft.com/office/drawing/2014/main" id="{9575D1F2-4423-835A-1146-AA3910E87805}"/>
+                <a16:creationId xmlns:a16="http://schemas.microsoft.com/office/drawing/2014/main" id="{BF7B1470-5E94-F31A-DAE3-E1B1D78BF402}"/>
               </a:ext>
             </a:extLst>
           </p:cNvPr>
@@ -9955,8 +9990,8 @@
         </p:nvSpPr>
         <p:spPr>
           <a:xfrm>
-            <a:off x="1148744" y="3350167"/>
-            <a:ext cx="2841252" cy="532083"/>
+            <a:off x="2183814" y="3350167"/>
+            <a:ext cx="2534764" cy="532083"/>
           </a:xfrm>
           <a:prstGeom prst="rect">
             <a:avLst/>
@@ -9995,7 +10030,7 @@
           <p:cNvPr id="11" name="item_2">
             <a:extLst>
               <a:ext uri="{FF2B5EF4-FFF2-40B4-BE49-F238E27FC236}">
-                <a16:creationId xmlns:a16="http://schemas.microsoft.com/office/drawing/2014/main" id="{C31562DF-51DD-404E-3A44-8A16E02C4809}"/>
+                <a16:creationId xmlns:a16="http://schemas.microsoft.com/office/drawing/2014/main" id="{8B3BFCD7-F178-B111-0E5E-657CF42B7E70}"/>
               </a:ext>
             </a:extLst>
           </p:cNvPr>
@@ -10008,8 +10043,8 @@
         </p:nvSpPr>
         <p:spPr>
           <a:xfrm>
-            <a:off x="4089691" y="3350167"/>
-            <a:ext cx="6529895" cy="532083"/>
+            <a:off x="4807517" y="3350167"/>
+            <a:ext cx="5825510" cy="532083"/>
           </a:xfrm>
           <a:prstGeom prst="rect">
             <a:avLst/>
@@ -10043,7 +10078,7 @@
           <p:cNvPr id="12" name="item_3_title">
             <a:extLst>
               <a:ext uri="{FF2B5EF4-FFF2-40B4-BE49-F238E27FC236}">
-                <a16:creationId xmlns:a16="http://schemas.microsoft.com/office/drawing/2014/main" id="{B3025ABC-0CBB-CF8A-06AA-18F4604699C5}"/>
+                <a16:creationId xmlns:a16="http://schemas.microsoft.com/office/drawing/2014/main" id="{AE82B101-026C-6D0A-A5B6-1AECD8C8F69C}"/>
               </a:ext>
             </a:extLst>
           </p:cNvPr>
@@ -10056,8 +10091,8 @@
         </p:nvSpPr>
         <p:spPr>
           <a:xfrm>
-            <a:off x="1148744" y="4281312"/>
-            <a:ext cx="2841252" cy="532083"/>
+            <a:off x="2183814" y="4281312"/>
+            <a:ext cx="2534764" cy="532083"/>
           </a:xfrm>
           <a:prstGeom prst="rect">
             <a:avLst/>
@@ -10096,7 +10131,7 @@
           <p:cNvPr id="13" name="item_3">
             <a:extLst>
               <a:ext uri="{FF2B5EF4-FFF2-40B4-BE49-F238E27FC236}">
-                <a16:creationId xmlns:a16="http://schemas.microsoft.com/office/drawing/2014/main" id="{6943BFFB-7A7B-274B-C627-66D361F099E7}"/>
+                <a16:creationId xmlns:a16="http://schemas.microsoft.com/office/drawing/2014/main" id="{9E769FA0-DF3B-FB65-8AC7-DDE079157451}"/>
               </a:ext>
             </a:extLst>
           </p:cNvPr>
@@ -10109,8 +10144,8 @@
         </p:nvSpPr>
         <p:spPr>
           <a:xfrm>
-            <a:off x="4089691" y="4281312"/>
-            <a:ext cx="6529895" cy="532083"/>
+            <a:off x="4807517" y="4281312"/>
+            <a:ext cx="5825510" cy="532083"/>
           </a:xfrm>
           <a:prstGeom prst="rect">
             <a:avLst/>
@@ -10144,7 +10179,7 @@
           <p:cNvPr id="14" name="item_4_title">
             <a:extLst>
               <a:ext uri="{FF2B5EF4-FFF2-40B4-BE49-F238E27FC236}">
-                <a16:creationId xmlns:a16="http://schemas.microsoft.com/office/drawing/2014/main" id="{9D8451C4-C1C6-A780-C959-0FBE2D9CEAE3}"/>
+                <a16:creationId xmlns:a16="http://schemas.microsoft.com/office/drawing/2014/main" id="{771BF3B9-6994-3CBB-D65F-6AB475E8C546}"/>
               </a:ext>
             </a:extLst>
           </p:cNvPr>
@@ -10157,8 +10192,8 @@
         </p:nvSpPr>
         <p:spPr>
           <a:xfrm>
-            <a:off x="1148744" y="5212457"/>
-            <a:ext cx="2841252" cy="532083"/>
+            <a:off x="2183814" y="5212457"/>
+            <a:ext cx="2534764" cy="532083"/>
           </a:xfrm>
           <a:prstGeom prst="rect">
             <a:avLst/>
@@ -10197,7 +10232,7 @@
           <p:cNvPr id="15" name="item_4">
             <a:extLst>
               <a:ext uri="{FF2B5EF4-FFF2-40B4-BE49-F238E27FC236}">
-                <a16:creationId xmlns:a16="http://schemas.microsoft.com/office/drawing/2014/main" id="{32BDFFC8-A270-78B9-A0B3-4056173EA357}"/>
+                <a16:creationId xmlns:a16="http://schemas.microsoft.com/office/drawing/2014/main" id="{EA5BC195-16E9-E9F9-1079-A8C5374A934F}"/>
               </a:ext>
             </a:extLst>
           </p:cNvPr>
@@ -10210,8 +10245,8 @@
         </p:nvSpPr>
         <p:spPr>
           <a:xfrm>
-            <a:off x="4089691" y="5212457"/>
-            <a:ext cx="6529895" cy="532083"/>
+            <a:off x="4807517" y="5212457"/>
+            <a:ext cx="5825510" cy="532083"/>
           </a:xfrm>
           <a:prstGeom prst="rect">
             <a:avLst/>
@@ -10245,7 +10280,7 @@
           <p:cNvPr id="16" name="source">
             <a:extLst>
               <a:ext uri="{FF2B5EF4-FFF2-40B4-BE49-F238E27FC236}">
-                <a16:creationId xmlns:a16="http://schemas.microsoft.com/office/drawing/2014/main" id="{3346245D-3DFE-D91B-C79E-4BF259D60D6C}"/>
+                <a16:creationId xmlns:a16="http://schemas.microsoft.com/office/drawing/2014/main" id="{F261FC9B-27F4-2571-A372-6C59655A3AD6}"/>
               </a:ext>
             </a:extLst>
           </p:cNvPr>
@@ -10258,7 +10293,7 @@
         </p:nvSpPr>
         <p:spPr>
           <a:xfrm>
-            <a:off x="1024128" y="6004560"/>
+            <a:off x="2072640" y="6004560"/>
             <a:ext cx="1905000" cy="304800"/>
           </a:xfrm>
           <a:prstGeom prst="roundRect">
@@ -10300,7 +10335,7 @@
     </p:spTree>
     <p:extLst>
       <p:ext uri="{BB962C8B-B14F-4D97-AF65-F5344CB8AC3E}">
-        <p14:creationId xmlns:p14="http://schemas.microsoft.com/office/powerpoint/2010/main" val="941570993"/>
+        <p14:creationId xmlns:p14="http://schemas.microsoft.com/office/powerpoint/2010/main" val="536026905"/>
       </p:ext>
     </p:extLst>
   </p:cSld>
@@ -10332,7 +10367,7 @@
           <p:cNvPr id="7" name="creative_background">
             <a:extLst>
               <a:ext uri="{FF2B5EF4-FFF2-40B4-BE49-F238E27FC236}">
-                <a16:creationId xmlns:a16="http://schemas.microsoft.com/office/drawing/2014/main" id="{E2DB710C-6C45-AEEA-0213-D9317DD8AEF1}"/>
+                <a16:creationId xmlns:a16="http://schemas.microsoft.com/office/drawing/2014/main" id="{3D7FCA7F-6CD6-71A8-1852-0B5934AA70FF}"/>
               </a:ext>
             </a:extLst>
           </p:cNvPr>
@@ -10373,7 +10408,12 @@
             <p:ph type="title"/>
           </p:nvPr>
         </p:nvSpPr>
-        <p:spPr/>
+        <p:spPr>
+          <a:xfrm>
+            <a:off x="2072640" y="585216"/>
+            <a:ext cx="8674100" cy="1499616"/>
+          </a:xfrm>
+        </p:spPr>
         <p:txBody>
           <a:bodyPr/>
           <a:lstStyle>
@@ -10400,12 +10440,17 @@
             <p:ph type="dt" sz="half" idx="10"/>
           </p:nvPr>
         </p:nvSpPr>
-        <p:spPr/>
+        <p:spPr>
+          <a:xfrm>
+            <a:off x="2072640" y="6470704"/>
+            <a:ext cx="1104900" cy="274320"/>
+          </a:xfrm>
+        </p:spPr>
         <p:txBody>
           <a:bodyPr/>
           <a:lstStyle/>
           <a:p>
-            <a:fld id="{B5D244B9-259B-433A-84B9-2D3FCD42690F}" type="datetimeFigureOut">
+            <a:fld id="{F163761A-A4E5-4C7D-9728-6F0BC80FAE16}" type="datetimeFigureOut">
               <a:rPr lang="en-US" smtClean="0"/>
               <a:t>10/3/2026</a:t>
             </a:fld>
@@ -10447,7 +10492,7 @@
           <a:bodyPr/>
           <a:lstStyle/>
           <a:p>
-            <a:fld id="{F9842B40-88D3-4B59-923A-4074BB0E4CE6}" type="slidenum">
+            <a:fld id="{4DDE2B9A-5AB6-497C-A8BC-8EC14D6B62BC}" type="slidenum">
               <a:rPr lang="en-US" smtClean="0"/>
               <a:t>‹#›</a:t>
             </a:fld>
@@ -10460,7 +10505,7 @@
           <p:cNvPr id="8" name="body">
             <a:extLst>
               <a:ext uri="{FF2B5EF4-FFF2-40B4-BE49-F238E27FC236}">
-                <a16:creationId xmlns:a16="http://schemas.microsoft.com/office/drawing/2014/main" id="{6C0190AF-FCF9-6319-8C74-C00A7FAEAA1A}"/>
+                <a16:creationId xmlns:a16="http://schemas.microsoft.com/office/drawing/2014/main" id="{348066B7-FF4F-72AE-1D4A-914262B854E2}"/>
               </a:ext>
             </a:extLst>
           </p:cNvPr>
@@ -10473,8 +10518,8 @@
         </p:nvSpPr>
         <p:spPr>
           <a:xfrm>
-            <a:off x="1024128" y="2286000"/>
-            <a:ext cx="9720073" cy="3591560"/>
+            <a:off x="2072640" y="2286000"/>
+            <a:ext cx="8671561" cy="3591560"/>
           </a:xfrm>
         </p:spPr>
         <p:txBody>
@@ -10505,7 +10550,7 @@
           <p:cNvPr id="9" name="source">
             <a:extLst>
               <a:ext uri="{FF2B5EF4-FFF2-40B4-BE49-F238E27FC236}">
-                <a16:creationId xmlns:a16="http://schemas.microsoft.com/office/drawing/2014/main" id="{8FA26168-E3B1-84A9-7703-ED16044D890C}"/>
+                <a16:creationId xmlns:a16="http://schemas.microsoft.com/office/drawing/2014/main" id="{4F342BE8-3B67-88BD-25BD-9ED0581F3293}"/>
               </a:ext>
             </a:extLst>
           </p:cNvPr>
@@ -10518,7 +10563,7 @@
         </p:nvSpPr>
         <p:spPr>
           <a:xfrm>
-            <a:off x="1024128" y="6004560"/>
+            <a:off x="2072640" y="6004560"/>
             <a:ext cx="1905000" cy="304800"/>
           </a:xfrm>
           <a:prstGeom prst="roundRect">
@@ -10560,7 +10605,7 @@
     </p:spTree>
     <p:extLst>
       <p:ext uri="{BB962C8B-B14F-4D97-AF65-F5344CB8AC3E}">
-        <p14:creationId xmlns:p14="http://schemas.microsoft.com/office/powerpoint/2010/main" val="3012883157"/>
+        <p14:creationId xmlns:p14="http://schemas.microsoft.com/office/powerpoint/2010/main" val="4071527109"/>
       </p:ext>
     </p:extLst>
   </p:cSld>
@@ -10592,7 +10637,7 @@
           <p:cNvPr id="7" name="creative_background">
             <a:extLst>
               <a:ext uri="{FF2B5EF4-FFF2-40B4-BE49-F238E27FC236}">
-                <a16:creationId xmlns:a16="http://schemas.microsoft.com/office/drawing/2014/main" id="{7DC30D8F-DC6D-36B2-DB86-F4B354D02A92}"/>
+                <a16:creationId xmlns:a16="http://schemas.microsoft.com/office/drawing/2014/main" id="{793DD144-6FA3-E54D-610B-E57BAA5E8F94}"/>
               </a:ext>
             </a:extLst>
           </p:cNvPr>
@@ -10633,7 +10678,12 @@
             <p:ph type="title"/>
           </p:nvPr>
         </p:nvSpPr>
-        <p:spPr/>
+        <p:spPr>
+          <a:xfrm>
+            <a:off x="2072640" y="585216"/>
+            <a:ext cx="8674100" cy="1499616"/>
+          </a:xfrm>
+        </p:spPr>
         <p:txBody>
           <a:bodyPr/>
           <a:lstStyle>
@@ -10660,12 +10710,17 @@
             <p:ph type="dt" sz="half" idx="10"/>
           </p:nvPr>
         </p:nvSpPr>
-        <p:spPr/>
+        <p:spPr>
+          <a:xfrm>
+            <a:off x="2072640" y="6470704"/>
+            <a:ext cx="1104900" cy="274320"/>
+          </a:xfrm>
+        </p:spPr>
         <p:txBody>
           <a:bodyPr/>
           <a:lstStyle/>
           <a:p>
-            <a:fld id="{B5D244B9-259B-433A-84B9-2D3FCD42690F}" type="datetimeFigureOut">
+            <a:fld id="{F163761A-A4E5-4C7D-9728-6F0BC80FAE16}" type="datetimeFigureOut">
               <a:rPr lang="en-US" smtClean="0"/>
               <a:t>10/3/2026</a:t>
             </a:fld>
@@ -10707,7 +10762,7 @@
           <a:bodyPr/>
           <a:lstStyle/>
           <a:p>
-            <a:fld id="{F9842B40-88D3-4B59-923A-4074BB0E4CE6}" type="slidenum">
+            <a:fld id="{4DDE2B9A-5AB6-497C-A8BC-8EC14D6B62BC}" type="slidenum">
               <a:rPr lang="en-US" smtClean="0"/>
               <a:t>‹#›</a:t>
             </a:fld>
@@ -10720,7 +10775,7 @@
           <p:cNvPr id="8" name="item_1_title">
             <a:extLst>
               <a:ext uri="{FF2B5EF4-FFF2-40B4-BE49-F238E27FC236}">
-                <a16:creationId xmlns:a16="http://schemas.microsoft.com/office/drawing/2014/main" id="{0A0AA0A1-5D14-6002-4D91-729870B445B9}"/>
+                <a16:creationId xmlns:a16="http://schemas.microsoft.com/office/drawing/2014/main" id="{2F1FDF57-0315-2F19-13D6-14773DDA8A5E}"/>
               </a:ext>
             </a:extLst>
           </p:cNvPr>
@@ -10733,8 +10788,8 @@
         </p:nvSpPr>
         <p:spPr>
           <a:xfrm>
-            <a:off x="1198591" y="2472230"/>
-            <a:ext cx="4411418" cy="387325"/>
+            <a:off x="2228283" y="2472230"/>
+            <a:ext cx="3935555" cy="387325"/>
           </a:xfrm>
         </p:spPr>
         <p:txBody>
@@ -10770,7 +10825,7 @@
           <p:cNvPr id="9" name="item_1">
             <a:extLst>
               <a:ext uri="{FF2B5EF4-FFF2-40B4-BE49-F238E27FC236}">
-                <a16:creationId xmlns:a16="http://schemas.microsoft.com/office/drawing/2014/main" id="{D9D5A0A7-036A-C94B-8D74-E80E44118C41}"/>
+                <a16:creationId xmlns:a16="http://schemas.microsoft.com/office/drawing/2014/main" id="{403D740C-9DF0-62E2-70DF-0FF73D58F29A}"/>
               </a:ext>
             </a:extLst>
           </p:cNvPr>
@@ -10783,8 +10838,8 @@
         </p:nvSpPr>
         <p:spPr>
           <a:xfrm>
-            <a:off x="1198591" y="2859554"/>
-            <a:ext cx="4411418" cy="929580"/>
+            <a:off x="2228284" y="2859554"/>
+            <a:ext cx="3935555" cy="929580"/>
           </a:xfrm>
           <a:prstGeom prst="rect">
             <a:avLst/>
@@ -10818,7 +10873,7 @@
           <p:cNvPr id="10" name="item_2_title">
             <a:extLst>
               <a:ext uri="{FF2B5EF4-FFF2-40B4-BE49-F238E27FC236}">
-                <a16:creationId xmlns:a16="http://schemas.microsoft.com/office/drawing/2014/main" id="{C1C14D35-8221-0449-DA67-28287744E13D}"/>
+                <a16:creationId xmlns:a16="http://schemas.microsoft.com/office/drawing/2014/main" id="{AF52D1F8-3DD0-8A4F-0413-B67E4B1EBFCB}"/>
               </a:ext>
             </a:extLst>
           </p:cNvPr>
@@ -10831,8 +10886,8 @@
         </p:nvSpPr>
         <p:spPr>
           <a:xfrm>
-            <a:off x="6158321" y="2472230"/>
-            <a:ext cx="4411418" cy="387325"/>
+            <a:off x="6653004" y="2472230"/>
+            <a:ext cx="3935555" cy="387325"/>
           </a:xfrm>
           <a:prstGeom prst="rect">
             <a:avLst/>
@@ -10871,7 +10926,7 @@
           <p:cNvPr id="11" name="item_2">
             <a:extLst>
               <a:ext uri="{FF2B5EF4-FFF2-40B4-BE49-F238E27FC236}">
-                <a16:creationId xmlns:a16="http://schemas.microsoft.com/office/drawing/2014/main" id="{344FBCFE-8921-CA0C-1913-A9605300B16D}"/>
+                <a16:creationId xmlns:a16="http://schemas.microsoft.com/office/drawing/2014/main" id="{10C8924E-F266-95A8-2832-C841D1464E7C}"/>
               </a:ext>
             </a:extLst>
           </p:cNvPr>
@@ -10884,8 +10939,8 @@
         </p:nvSpPr>
         <p:spPr>
           <a:xfrm>
-            <a:off x="6158321" y="2859554"/>
-            <a:ext cx="4411418" cy="929580"/>
+            <a:off x="6653004" y="2859554"/>
+            <a:ext cx="3935555" cy="929580"/>
           </a:xfrm>
           <a:prstGeom prst="rect">
             <a:avLst/>
@@ -10919,7 +10974,7 @@
           <p:cNvPr id="12" name="item_3_title">
             <a:extLst>
               <a:ext uri="{FF2B5EF4-FFF2-40B4-BE49-F238E27FC236}">
-                <a16:creationId xmlns:a16="http://schemas.microsoft.com/office/drawing/2014/main" id="{1A5ED4DB-3015-9DAF-3910-83C34B3D5D12}"/>
+                <a16:creationId xmlns:a16="http://schemas.microsoft.com/office/drawing/2014/main" id="{3A880569-6BE8-1CE1-FAC5-6BD19FB1EC99}"/>
               </a:ext>
             </a:extLst>
           </p:cNvPr>
@@ -10932,8 +10987,8 @@
         </p:nvSpPr>
         <p:spPr>
           <a:xfrm>
-            <a:off x="1198591" y="4374427"/>
-            <a:ext cx="4411418" cy="387325"/>
+            <a:off x="2228284" y="4374427"/>
+            <a:ext cx="3935555" cy="387325"/>
           </a:xfrm>
           <a:prstGeom prst="rect">
             <a:avLst/>
@@ -10972,7 +11027,7 @@
           <p:cNvPr id="13" name="item_3">
             <a:extLst>
               <a:ext uri="{FF2B5EF4-FFF2-40B4-BE49-F238E27FC236}">
-                <a16:creationId xmlns:a16="http://schemas.microsoft.com/office/drawing/2014/main" id="{2B6B16D3-B538-E26F-9108-EAEF5F50E553}"/>
+                <a16:creationId xmlns:a16="http://schemas.microsoft.com/office/drawing/2014/main" id="{82A38B2A-D93E-8C4F-421A-2D866AAD91D5}"/>
               </a:ext>
             </a:extLst>
           </p:cNvPr>
@@ -10985,8 +11040,8 @@
         </p:nvSpPr>
         <p:spPr>
           <a:xfrm>
-            <a:off x="1198591" y="4761750"/>
-            <a:ext cx="4411418" cy="929580"/>
+            <a:off x="2228284" y="4761750"/>
+            <a:ext cx="3935555" cy="929580"/>
           </a:xfrm>
           <a:prstGeom prst="rect">
             <a:avLst/>
@@ -11020,7 +11075,7 @@
           <p:cNvPr id="14" name="item_4_title">
             <a:extLst>
               <a:ext uri="{FF2B5EF4-FFF2-40B4-BE49-F238E27FC236}">
-                <a16:creationId xmlns:a16="http://schemas.microsoft.com/office/drawing/2014/main" id="{968F81E7-7ECA-BA8F-6D84-B792D06AC794}"/>
+                <a16:creationId xmlns:a16="http://schemas.microsoft.com/office/drawing/2014/main" id="{7533A330-293B-E769-CDDD-E515E782235B}"/>
               </a:ext>
             </a:extLst>
           </p:cNvPr>
@@ -11033,8 +11088,8 @@
         </p:nvSpPr>
         <p:spPr>
           <a:xfrm>
-            <a:off x="6158321" y="4374427"/>
-            <a:ext cx="4411418" cy="387325"/>
+            <a:off x="6653004" y="4374427"/>
+            <a:ext cx="3935555" cy="387325"/>
           </a:xfrm>
           <a:prstGeom prst="rect">
             <a:avLst/>
@@ -11073,7 +11128,7 @@
           <p:cNvPr id="15" name="item_4">
             <a:extLst>
               <a:ext uri="{FF2B5EF4-FFF2-40B4-BE49-F238E27FC236}">
-                <a16:creationId xmlns:a16="http://schemas.microsoft.com/office/drawing/2014/main" id="{6B2A7EC0-C810-FD0D-39AF-4F2311FD841A}"/>
+                <a16:creationId xmlns:a16="http://schemas.microsoft.com/office/drawing/2014/main" id="{6F150D3E-6037-5B2A-1DB6-2D241B5BBA2B}"/>
               </a:ext>
             </a:extLst>
           </p:cNvPr>
@@ -11086,8 +11141,8 @@
         </p:nvSpPr>
         <p:spPr>
           <a:xfrm>
-            <a:off x="6158321" y="4761750"/>
-            <a:ext cx="4411418" cy="929580"/>
+            <a:off x="6653004" y="4761750"/>
+            <a:ext cx="3935555" cy="929580"/>
           </a:xfrm>
           <a:prstGeom prst="rect">
             <a:avLst/>
@@ -11121,7 +11176,7 @@
           <p:cNvPr id="16" name="source">
             <a:extLst>
               <a:ext uri="{FF2B5EF4-FFF2-40B4-BE49-F238E27FC236}">
-                <a16:creationId xmlns:a16="http://schemas.microsoft.com/office/drawing/2014/main" id="{65D3A408-32D9-7527-545F-7AD4C7083B09}"/>
+                <a16:creationId xmlns:a16="http://schemas.microsoft.com/office/drawing/2014/main" id="{2720B9B8-6389-BF9B-BA42-60D926FA90BB}"/>
               </a:ext>
             </a:extLst>
           </p:cNvPr>
@@ -11134,7 +11189,7 @@
         </p:nvSpPr>
         <p:spPr>
           <a:xfrm>
-            <a:off x="1024128" y="6004560"/>
+            <a:off x="2072640" y="6004560"/>
             <a:ext cx="1905000" cy="304800"/>
           </a:xfrm>
           <a:prstGeom prst="roundRect">
@@ -11176,7 +11231,7 @@
     </p:spTree>
     <p:extLst>
       <p:ext uri="{BB962C8B-B14F-4D97-AF65-F5344CB8AC3E}">
-        <p14:creationId xmlns:p14="http://schemas.microsoft.com/office/powerpoint/2010/main" val="2255954047"/>
+        <p14:creationId xmlns:p14="http://schemas.microsoft.com/office/powerpoint/2010/main" val="1664290359"/>
       </p:ext>
     </p:extLst>
   </p:cSld>
@@ -11208,7 +11263,7 @@
           <p:cNvPr id="7" name="creative_background">
             <a:extLst>
               <a:ext uri="{FF2B5EF4-FFF2-40B4-BE49-F238E27FC236}">
-                <a16:creationId xmlns:a16="http://schemas.microsoft.com/office/drawing/2014/main" id="{B040BD71-B16A-724C-F686-76B5F4ACB04D}"/>
+                <a16:creationId xmlns:a16="http://schemas.microsoft.com/office/drawing/2014/main" id="{04AADC75-BF25-788D-2930-272B3E57C254}"/>
               </a:ext>
             </a:extLst>
           </p:cNvPr>
@@ -11249,7 +11304,12 @@
             <p:ph type="title"/>
           </p:nvPr>
         </p:nvSpPr>
-        <p:spPr/>
+        <p:spPr>
+          <a:xfrm>
+            <a:off x="2072640" y="585216"/>
+            <a:ext cx="8674100" cy="1499616"/>
+          </a:xfrm>
+        </p:spPr>
         <p:txBody>
           <a:bodyPr/>
           <a:lstStyle>
@@ -11276,12 +11336,17 @@
             <p:ph type="dt" sz="half" idx="10"/>
           </p:nvPr>
         </p:nvSpPr>
-        <p:spPr/>
+        <p:spPr>
+          <a:xfrm>
+            <a:off x="2072640" y="6470704"/>
+            <a:ext cx="1104900" cy="274320"/>
+          </a:xfrm>
+        </p:spPr>
         <p:txBody>
           <a:bodyPr/>
           <a:lstStyle/>
           <a:p>
-            <a:fld id="{B5D244B9-259B-433A-84B9-2D3FCD42690F}" type="datetimeFigureOut">
+            <a:fld id="{F163761A-A4E5-4C7D-9728-6F0BC80FAE16}" type="datetimeFigureOut">
               <a:rPr lang="en-US" smtClean="0"/>
               <a:t>10/3/2026</a:t>
             </a:fld>
@@ -11323,7 +11388,7 @@
           <a:bodyPr/>
           <a:lstStyle/>
           <a:p>
-            <a:fld id="{F9842B40-88D3-4B59-923A-4074BB0E4CE6}" type="slidenum">
+            <a:fld id="{4DDE2B9A-5AB6-497C-A8BC-8EC14D6B62BC}" type="slidenum">
               <a:rPr lang="en-US" smtClean="0"/>
               <a:t>‹#›</a:t>
             </a:fld>
@@ -11336,7 +11401,7 @@
           <p:cNvPr id="8" name="body">
             <a:extLst>
               <a:ext uri="{FF2B5EF4-FFF2-40B4-BE49-F238E27FC236}">
-                <a16:creationId xmlns:a16="http://schemas.microsoft.com/office/drawing/2014/main" id="{AF2EA01E-162C-26C2-E016-7D7E8903F0BD}"/>
+                <a16:creationId xmlns:a16="http://schemas.microsoft.com/office/drawing/2014/main" id="{8C5FC308-AFA0-E9F0-CE9B-CDB5BD60C403}"/>
               </a:ext>
             </a:extLst>
           </p:cNvPr>
@@ -11349,8 +11414,8 @@
         </p:nvSpPr>
         <p:spPr>
           <a:xfrm>
-            <a:off x="7244975" y="2824734"/>
-            <a:ext cx="3499226" cy="2514092"/>
+            <a:off x="7622439" y="2824734"/>
+            <a:ext cx="3121762" cy="2514092"/>
           </a:xfrm>
         </p:spPr>
         <p:txBody>
@@ -11376,7 +11441,7 @@
           <p:cNvPr id="9" name="kpi_value_1">
             <a:extLst>
               <a:ext uri="{FF2B5EF4-FFF2-40B4-BE49-F238E27FC236}">
-                <a16:creationId xmlns:a16="http://schemas.microsoft.com/office/drawing/2014/main" id="{C34BD3DF-74EF-61B3-59F3-A96AC30EC812}"/>
+                <a16:creationId xmlns:a16="http://schemas.microsoft.com/office/drawing/2014/main" id="{5073FBC0-84FB-4862-6D2F-D12374573556}"/>
               </a:ext>
             </a:extLst>
           </p:cNvPr>
@@ -11389,8 +11454,8 @@
         </p:nvSpPr>
         <p:spPr>
           <a:xfrm>
-            <a:off x="1024128" y="2286000"/>
-            <a:ext cx="5832044" cy="2308860"/>
+            <a:off x="2072641" y="2286000"/>
+            <a:ext cx="5202937" cy="2308860"/>
           </a:xfrm>
           <a:prstGeom prst="rect">
             <a:avLst/>
@@ -11429,7 +11494,7 @@
           <p:cNvPr id="10" name="kpi_label_1">
             <a:extLst>
               <a:ext uri="{FF2B5EF4-FFF2-40B4-BE49-F238E27FC236}">
-                <a16:creationId xmlns:a16="http://schemas.microsoft.com/office/drawing/2014/main" id="{F903A0EA-D0BB-1350-72FB-EDB63771B0EC}"/>
+                <a16:creationId xmlns:a16="http://schemas.microsoft.com/office/drawing/2014/main" id="{6565D6FA-2298-E264-90AF-325F267C768A}"/>
               </a:ext>
             </a:extLst>
           </p:cNvPr>
@@ -11442,8 +11507,8 @@
         </p:nvSpPr>
         <p:spPr>
           <a:xfrm>
-            <a:off x="1024128" y="4594860"/>
-            <a:ext cx="5832044" cy="1282700"/>
+            <a:off x="2072641" y="4594860"/>
+            <a:ext cx="5202937" cy="1282700"/>
           </a:xfrm>
           <a:prstGeom prst="rect">
             <a:avLst/>
@@ -11477,7 +11542,7 @@
           <p:cNvPr id="11" name="source">
             <a:extLst>
               <a:ext uri="{FF2B5EF4-FFF2-40B4-BE49-F238E27FC236}">
-                <a16:creationId xmlns:a16="http://schemas.microsoft.com/office/drawing/2014/main" id="{01060379-BDF7-C8EA-BAE8-F332F4942BAD}"/>
+                <a16:creationId xmlns:a16="http://schemas.microsoft.com/office/drawing/2014/main" id="{B3981F1B-6F15-F42E-0089-E8F7AD85917D}"/>
               </a:ext>
             </a:extLst>
           </p:cNvPr>
@@ -11490,7 +11555,7 @@
         </p:nvSpPr>
         <p:spPr>
           <a:xfrm>
-            <a:off x="1024128" y="6004560"/>
+            <a:off x="2072640" y="6004560"/>
             <a:ext cx="1905000" cy="304800"/>
           </a:xfrm>
           <a:prstGeom prst="roundRect">
@@ -11532,7 +11597,7 @@
     </p:spTree>
     <p:extLst>
       <p:ext uri="{BB962C8B-B14F-4D97-AF65-F5344CB8AC3E}">
-        <p14:creationId xmlns:p14="http://schemas.microsoft.com/office/powerpoint/2010/main" val="3374938790"/>
+        <p14:creationId xmlns:p14="http://schemas.microsoft.com/office/powerpoint/2010/main" val="2404914897"/>
       </p:ext>
     </p:extLst>
   </p:cSld>
@@ -11564,7 +11629,7 @@
           <p:cNvPr id="7" name="creative_background">
             <a:extLst>
               <a:ext uri="{FF2B5EF4-FFF2-40B4-BE49-F238E27FC236}">
-                <a16:creationId xmlns:a16="http://schemas.microsoft.com/office/drawing/2014/main" id="{9EC2C827-73C3-62A7-F1BE-705E1C70065E}"/>
+                <a16:creationId xmlns:a16="http://schemas.microsoft.com/office/drawing/2014/main" id="{9C565C34-BEE4-3679-D41F-190455442485}"/>
               </a:ext>
             </a:extLst>
           </p:cNvPr>
@@ -11605,7 +11670,12 @@
             <p:ph type="title"/>
           </p:nvPr>
         </p:nvSpPr>
-        <p:spPr/>
+        <p:spPr>
+          <a:xfrm>
+            <a:off x="2072640" y="585216"/>
+            <a:ext cx="8674100" cy="1499616"/>
+          </a:xfrm>
+        </p:spPr>
         <p:txBody>
           <a:bodyPr/>
           <a:lstStyle>
@@ -11632,12 +11702,17 @@
             <p:ph type="dt" sz="half" idx="10"/>
           </p:nvPr>
         </p:nvSpPr>
-        <p:spPr/>
+        <p:spPr>
+          <a:xfrm>
+            <a:off x="2072640" y="6470704"/>
+            <a:ext cx="1104900" cy="274320"/>
+          </a:xfrm>
+        </p:spPr>
         <p:txBody>
           <a:bodyPr/>
           <a:lstStyle/>
           <a:p>
-            <a:fld id="{B5D244B9-259B-433A-84B9-2D3FCD42690F}" type="datetimeFigureOut">
+            <a:fld id="{F163761A-A4E5-4C7D-9728-6F0BC80FAE16}" type="datetimeFigureOut">
               <a:rPr lang="en-US" smtClean="0"/>
               <a:t>10/3/2026</a:t>
             </a:fld>
@@ -11679,7 +11754,7 @@
           <a:bodyPr/>
           <a:lstStyle/>
           <a:p>
-            <a:fld id="{F9842B40-88D3-4B59-923A-4074BB0E4CE6}" type="slidenum">
+            <a:fld id="{4DDE2B9A-5AB6-497C-A8BC-8EC14D6B62BC}" type="slidenum">
               <a:rPr lang="en-US" smtClean="0"/>
               <a:t>‹#›</a:t>
             </a:fld>
@@ -11692,7 +11767,7 @@
           <p:cNvPr id="8" name="body">
             <a:extLst>
               <a:ext uri="{FF2B5EF4-FFF2-40B4-BE49-F238E27FC236}">
-                <a16:creationId xmlns:a16="http://schemas.microsoft.com/office/drawing/2014/main" id="{13E61822-CFE4-3584-7263-58B1FB9FB4AF}"/>
+                <a16:creationId xmlns:a16="http://schemas.microsoft.com/office/drawing/2014/main" id="{83A40B39-D3EB-882F-C0F5-3B7F830F00C4}"/>
               </a:ext>
             </a:extLst>
           </p:cNvPr>
@@ -11705,8 +11780,8 @@
         </p:nvSpPr>
         <p:spPr>
           <a:xfrm>
-            <a:off x="1024128" y="5231080"/>
-            <a:ext cx="9720073" cy="646481"/>
+            <a:off x="2072640" y="5231080"/>
+            <a:ext cx="8671561" cy="646481"/>
           </a:xfrm>
         </p:spPr>
         <p:txBody>
@@ -11732,7 +11807,7 @@
           <p:cNvPr id="9" name="kpi_value_1">
             <a:extLst>
               <a:ext uri="{FF2B5EF4-FFF2-40B4-BE49-F238E27FC236}">
-                <a16:creationId xmlns:a16="http://schemas.microsoft.com/office/drawing/2014/main" id="{7499A731-FD2A-263C-3440-A46F5BEB6C83}"/>
+                <a16:creationId xmlns:a16="http://schemas.microsoft.com/office/drawing/2014/main" id="{7C75A59E-D8BA-DDE2-0298-69419C7D7FBE}"/>
               </a:ext>
             </a:extLst>
           </p:cNvPr>
@@ -11745,8 +11820,8 @@
         </p:nvSpPr>
         <p:spPr>
           <a:xfrm>
-            <a:off x="1198592" y="2472230"/>
-            <a:ext cx="4511111" cy="1561473"/>
+            <a:off x="2228283" y="2472230"/>
+            <a:ext cx="4024494" cy="1561473"/>
           </a:xfrm>
           <a:prstGeom prst="rect">
             <a:avLst/>
@@ -11785,7 +11860,7 @@
           <p:cNvPr id="10" name="kpi_label_1">
             <a:extLst>
               <a:ext uri="{FF2B5EF4-FFF2-40B4-BE49-F238E27FC236}">
-                <a16:creationId xmlns:a16="http://schemas.microsoft.com/office/drawing/2014/main" id="{68EB0E9B-73A8-F69F-936F-4AEE1AEBA2F6}"/>
+                <a16:creationId xmlns:a16="http://schemas.microsoft.com/office/drawing/2014/main" id="{CB99CEE4-CC57-7F1B-7BC8-188B69EBF33E}"/>
               </a:ext>
             </a:extLst>
           </p:cNvPr>
@@ -11798,8 +11873,8 @@
         </p:nvSpPr>
         <p:spPr>
           <a:xfrm>
-            <a:off x="1198592" y="4033703"/>
-            <a:ext cx="4511111" cy="867485"/>
+            <a:off x="2228283" y="4033703"/>
+            <a:ext cx="4024494" cy="867485"/>
           </a:xfrm>
           <a:prstGeom prst="rect">
             <a:avLst/>
@@ -11833,7 +11908,7 @@
           <p:cNvPr id="11" name="kpi_value_2">
             <a:extLst>
               <a:ext uri="{FF2B5EF4-FFF2-40B4-BE49-F238E27FC236}">
-                <a16:creationId xmlns:a16="http://schemas.microsoft.com/office/drawing/2014/main" id="{9D4AA8BF-33C2-8EBF-671F-C8E0F8017BBF}"/>
+                <a16:creationId xmlns:a16="http://schemas.microsoft.com/office/drawing/2014/main" id="{22A52CD9-7B87-9D54-A336-A1B4F33E2111}"/>
               </a:ext>
             </a:extLst>
           </p:cNvPr>
@@ -11846,8 +11921,8 @@
         </p:nvSpPr>
         <p:spPr>
           <a:xfrm>
-            <a:off x="6258015" y="2472230"/>
-            <a:ext cx="4311725" cy="592607"/>
+            <a:off x="6741942" y="2472230"/>
+            <a:ext cx="3846616" cy="592607"/>
           </a:xfrm>
           <a:prstGeom prst="rect">
             <a:avLst/>
@@ -11886,7 +11961,7 @@
           <p:cNvPr id="12" name="kpi_label_2">
             <a:extLst>
               <a:ext uri="{FF2B5EF4-FFF2-40B4-BE49-F238E27FC236}">
-                <a16:creationId xmlns:a16="http://schemas.microsoft.com/office/drawing/2014/main" id="{609E9D86-D947-CC96-4F51-1CD4DC3086F4}"/>
+                <a16:creationId xmlns:a16="http://schemas.microsoft.com/office/drawing/2014/main" id="{5D9E8C56-906F-1E48-11CF-18B94A16769F}"/>
               </a:ext>
             </a:extLst>
           </p:cNvPr>
@@ -11899,8 +11974,8 @@
         </p:nvSpPr>
         <p:spPr>
           <a:xfrm>
-            <a:off x="6258015" y="3064836"/>
-            <a:ext cx="4311725" cy="329226"/>
+            <a:off x="6741942" y="3064836"/>
+            <a:ext cx="3846616" cy="329226"/>
           </a:xfrm>
           <a:prstGeom prst="rect">
             <a:avLst/>
@@ -11934,7 +12009,7 @@
           <p:cNvPr id="13" name="kpi_value_3">
             <a:extLst>
               <a:ext uri="{FF2B5EF4-FFF2-40B4-BE49-F238E27FC236}">
-                <a16:creationId xmlns:a16="http://schemas.microsoft.com/office/drawing/2014/main" id="{540DAE12-6ED2-E2AD-524B-76DA118C11CC}"/>
+                <a16:creationId xmlns:a16="http://schemas.microsoft.com/office/drawing/2014/main" id="{AE7CCA1F-823D-BFCD-FF0A-357F15437E79}"/>
               </a:ext>
             </a:extLst>
           </p:cNvPr>
@@ -11947,8 +12022,8 @@
         </p:nvSpPr>
         <p:spPr>
           <a:xfrm>
-            <a:off x="6258014" y="3979355"/>
-            <a:ext cx="1881706" cy="592607"/>
+            <a:off x="6741943" y="3979355"/>
+            <a:ext cx="1678725" cy="592607"/>
           </a:xfrm>
           <a:prstGeom prst="rect">
             <a:avLst/>
@@ -11987,7 +12062,7 @@
           <p:cNvPr id="14" name="kpi_label_3">
             <a:extLst>
               <a:ext uri="{FF2B5EF4-FFF2-40B4-BE49-F238E27FC236}">
-                <a16:creationId xmlns:a16="http://schemas.microsoft.com/office/drawing/2014/main" id="{97659F8E-CDE4-A77E-5006-B534C984E1AA}"/>
+                <a16:creationId xmlns:a16="http://schemas.microsoft.com/office/drawing/2014/main" id="{C9DFF84F-35EC-04B3-3C14-B08FE6B39C0D}"/>
               </a:ext>
             </a:extLst>
           </p:cNvPr>
@@ -12000,8 +12075,8 @@
         </p:nvSpPr>
         <p:spPr>
           <a:xfrm>
-            <a:off x="6258014" y="4571961"/>
-            <a:ext cx="1881706" cy="329226"/>
+            <a:off x="6741943" y="4571961"/>
+            <a:ext cx="1678725" cy="329226"/>
           </a:xfrm>
           <a:prstGeom prst="rect">
             <a:avLst/>
@@ -12035,7 +12110,7 @@
           <p:cNvPr id="15" name="kpi_value_4">
             <a:extLst>
               <a:ext uri="{FF2B5EF4-FFF2-40B4-BE49-F238E27FC236}">
-                <a16:creationId xmlns:a16="http://schemas.microsoft.com/office/drawing/2014/main" id="{ABBAD060-F6A6-B979-C7BF-1517404EC949}"/>
+                <a16:creationId xmlns:a16="http://schemas.microsoft.com/office/drawing/2014/main" id="{F9EE4732-D3FE-58F1-2F14-307C4C30270C}"/>
               </a:ext>
             </a:extLst>
           </p:cNvPr>
@@ -12048,8 +12123,8 @@
         </p:nvSpPr>
         <p:spPr>
           <a:xfrm>
-            <a:off x="8688032" y="3979355"/>
-            <a:ext cx="1881706" cy="592607"/>
+            <a:off x="8909834" y="3979355"/>
+            <a:ext cx="1678725" cy="592607"/>
           </a:xfrm>
           <a:prstGeom prst="rect">
             <a:avLst/>
@@ -12088,7 +12163,7 @@
           <p:cNvPr id="16" name="kpi_label_4">
             <a:extLst>
               <a:ext uri="{FF2B5EF4-FFF2-40B4-BE49-F238E27FC236}">
-                <a16:creationId xmlns:a16="http://schemas.microsoft.com/office/drawing/2014/main" id="{B123599D-42F3-5715-DB23-D1D7DC4C4187}"/>
+                <a16:creationId xmlns:a16="http://schemas.microsoft.com/office/drawing/2014/main" id="{9CAE4029-5504-7912-7CA6-F56D8DDB36AA}"/>
               </a:ext>
             </a:extLst>
           </p:cNvPr>
@@ -12101,8 +12176,8 @@
         </p:nvSpPr>
         <p:spPr>
           <a:xfrm>
-            <a:off x="8688032" y="4571961"/>
-            <a:ext cx="1881706" cy="329226"/>
+            <a:off x="8909834" y="4571961"/>
+            <a:ext cx="1678725" cy="329226"/>
           </a:xfrm>
           <a:prstGeom prst="rect">
             <a:avLst/>
@@ -12136,7 +12211,7 @@
           <p:cNvPr id="17" name="source">
             <a:extLst>
               <a:ext uri="{FF2B5EF4-FFF2-40B4-BE49-F238E27FC236}">
-                <a16:creationId xmlns:a16="http://schemas.microsoft.com/office/drawing/2014/main" id="{FF04E82E-0AC4-1DCF-1E97-8389D5005DF4}"/>
+                <a16:creationId xmlns:a16="http://schemas.microsoft.com/office/drawing/2014/main" id="{D5729FF8-0613-BA25-C08F-CF90D37B9008}"/>
               </a:ext>
             </a:extLst>
           </p:cNvPr>
@@ -12149,7 +12224,7 @@
         </p:nvSpPr>
         <p:spPr>
           <a:xfrm>
-            <a:off x="1024128" y="6004560"/>
+            <a:off x="2072640" y="6004560"/>
             <a:ext cx="1905000" cy="304800"/>
           </a:xfrm>
           <a:prstGeom prst="roundRect">
@@ -12191,7 +12266,7 @@
     </p:spTree>
     <p:extLst>
       <p:ext uri="{BB962C8B-B14F-4D97-AF65-F5344CB8AC3E}">
-        <p14:creationId xmlns:p14="http://schemas.microsoft.com/office/powerpoint/2010/main" val="1285596309"/>
+        <p14:creationId xmlns:p14="http://schemas.microsoft.com/office/powerpoint/2010/main" val="3947974420"/>
       </p:ext>
     </p:extLst>
   </p:cSld>
@@ -12223,7 +12298,7 @@
           <p:cNvPr id="7" name="creative_background">
             <a:extLst>
               <a:ext uri="{FF2B5EF4-FFF2-40B4-BE49-F238E27FC236}">
-                <a16:creationId xmlns:a16="http://schemas.microsoft.com/office/drawing/2014/main" id="{F47A28BC-4269-A6A4-8D55-B625775722E4}"/>
+                <a16:creationId xmlns:a16="http://schemas.microsoft.com/office/drawing/2014/main" id="{C7868D07-24DA-B7E6-FF01-7097D2FE2DD7}"/>
               </a:ext>
             </a:extLst>
           </p:cNvPr>
@@ -12264,7 +12339,12 @@
             <p:ph type="title"/>
           </p:nvPr>
         </p:nvSpPr>
-        <p:spPr/>
+        <p:spPr>
+          <a:xfrm>
+            <a:off x="2072640" y="585216"/>
+            <a:ext cx="8674100" cy="1499616"/>
+          </a:xfrm>
+        </p:spPr>
         <p:txBody>
           <a:bodyPr/>
           <a:lstStyle>
@@ -12291,12 +12371,17 @@
             <p:ph type="dt" sz="half" idx="10"/>
           </p:nvPr>
         </p:nvSpPr>
-        <p:spPr/>
+        <p:spPr>
+          <a:xfrm>
+            <a:off x="2072640" y="6470704"/>
+            <a:ext cx="1104900" cy="274320"/>
+          </a:xfrm>
+        </p:spPr>
         <p:txBody>
           <a:bodyPr/>
           <a:lstStyle/>
           <a:p>
-            <a:fld id="{B5D244B9-259B-433A-84B9-2D3FCD42690F}" type="datetimeFigureOut">
+            <a:fld id="{F163761A-A4E5-4C7D-9728-6F0BC80FAE16}" type="datetimeFigureOut">
               <a:rPr lang="en-US" smtClean="0"/>
               <a:t>10/3/2026</a:t>
             </a:fld>
@@ -12338,7 +12423,7 @@
           <a:bodyPr/>
           <a:lstStyle/>
           <a:p>
-            <a:fld id="{F9842B40-88D3-4B59-923A-4074BB0E4CE6}" type="slidenum">
+            <a:fld id="{4DDE2B9A-5AB6-497C-A8BC-8EC14D6B62BC}" type="slidenum">
               <a:rPr lang="en-US" smtClean="0"/>
               <a:t>‹#›</a:t>
             </a:fld>
@@ -12351,7 +12436,7 @@
           <p:cNvPr id="8" name="body">
             <a:extLst>
               <a:ext uri="{FF2B5EF4-FFF2-40B4-BE49-F238E27FC236}">
-                <a16:creationId xmlns:a16="http://schemas.microsoft.com/office/drawing/2014/main" id="{3D852275-0247-5866-359F-145C69572E87}"/>
+                <a16:creationId xmlns:a16="http://schemas.microsoft.com/office/drawing/2014/main" id="{37FF98F8-9979-1555-B72A-99EC15DEA2CD}"/>
               </a:ext>
             </a:extLst>
           </p:cNvPr>
@@ -12364,8 +12449,8 @@
         </p:nvSpPr>
         <p:spPr>
           <a:xfrm>
-            <a:off x="1024128" y="5231080"/>
-            <a:ext cx="9720073" cy="646481"/>
+            <a:off x="2072640" y="5231080"/>
+            <a:ext cx="8671561" cy="646481"/>
           </a:xfrm>
         </p:spPr>
         <p:txBody>
@@ -12391,7 +12476,7 @@
           <p:cNvPr id="9" name="kpi_value_1">
             <a:extLst>
               <a:ext uri="{FF2B5EF4-FFF2-40B4-BE49-F238E27FC236}">
-                <a16:creationId xmlns:a16="http://schemas.microsoft.com/office/drawing/2014/main" id="{F9B8B3A9-46A5-D5BD-B20B-7367C8175796}"/>
+                <a16:creationId xmlns:a16="http://schemas.microsoft.com/office/drawing/2014/main" id="{3AE11725-CF94-531A-01C1-DAD14471D1E3}"/>
               </a:ext>
             </a:extLst>
           </p:cNvPr>
@@ -12404,8 +12489,8 @@
         </p:nvSpPr>
         <p:spPr>
           <a:xfrm>
-            <a:off x="1198591" y="2472229"/>
-            <a:ext cx="4411418" cy="1181656"/>
+            <a:off x="2228284" y="2472229"/>
+            <a:ext cx="3935555" cy="1181656"/>
           </a:xfrm>
           <a:prstGeom prst="rect">
             <a:avLst/>
@@ -12444,7 +12529,7 @@
           <p:cNvPr id="10" name="kpi_label_1">
             <a:extLst>
               <a:ext uri="{FF2B5EF4-FFF2-40B4-BE49-F238E27FC236}">
-                <a16:creationId xmlns:a16="http://schemas.microsoft.com/office/drawing/2014/main" id="{45887AED-8BA3-76D2-12DE-112DD8089282}"/>
+                <a16:creationId xmlns:a16="http://schemas.microsoft.com/office/drawing/2014/main" id="{268C49D7-2A73-9CE5-A011-D3D83B036957}"/>
               </a:ext>
             </a:extLst>
           </p:cNvPr>
@@ -12457,8 +12542,8 @@
         </p:nvSpPr>
         <p:spPr>
           <a:xfrm>
-            <a:off x="1198591" y="3653886"/>
-            <a:ext cx="4411418" cy="656475"/>
+            <a:off x="2228284" y="3653886"/>
+            <a:ext cx="3935555" cy="656475"/>
           </a:xfrm>
           <a:prstGeom prst="rect">
             <a:avLst/>
@@ -12492,7 +12577,7 @@
           <p:cNvPr id="11" name="kpi_value_2">
             <a:extLst>
               <a:ext uri="{FF2B5EF4-FFF2-40B4-BE49-F238E27FC236}">
-                <a16:creationId xmlns:a16="http://schemas.microsoft.com/office/drawing/2014/main" id="{7E20987C-C141-0CD5-B06B-C5EB2476B977}"/>
+                <a16:creationId xmlns:a16="http://schemas.microsoft.com/office/drawing/2014/main" id="{DE90D001-312D-7F5A-A577-3DDBE73CD9A1}"/>
               </a:ext>
             </a:extLst>
           </p:cNvPr>
@@ -12505,8 +12590,8 @@
         </p:nvSpPr>
         <p:spPr>
           <a:xfrm>
-            <a:off x="6158321" y="2472229"/>
-            <a:ext cx="4411418" cy="1181656"/>
+            <a:off x="6653004" y="2472229"/>
+            <a:ext cx="3935555" cy="1181656"/>
           </a:xfrm>
           <a:prstGeom prst="rect">
             <a:avLst/>
@@ -12545,7 +12630,7 @@
           <p:cNvPr id="12" name="kpi_label_2">
             <a:extLst>
               <a:ext uri="{FF2B5EF4-FFF2-40B4-BE49-F238E27FC236}">
-                <a16:creationId xmlns:a16="http://schemas.microsoft.com/office/drawing/2014/main" id="{AD3C0382-1C3E-96F7-A183-922669BCC195}"/>
+                <a16:creationId xmlns:a16="http://schemas.microsoft.com/office/drawing/2014/main" id="{BD12A555-CA78-E1E2-4696-5F9817B14C42}"/>
               </a:ext>
             </a:extLst>
           </p:cNvPr>
@@ -12558,8 +12643,8 @@
         </p:nvSpPr>
         <p:spPr>
           <a:xfrm>
-            <a:off x="6158321" y="3653886"/>
-            <a:ext cx="4411418" cy="656475"/>
+            <a:off x="6653004" y="3653886"/>
+            <a:ext cx="3935555" cy="656475"/>
           </a:xfrm>
           <a:prstGeom prst="rect">
             <a:avLst/>
@@ -12593,7 +12678,7 @@
           <p:cNvPr id="13" name="source">
             <a:extLst>
               <a:ext uri="{FF2B5EF4-FFF2-40B4-BE49-F238E27FC236}">
-                <a16:creationId xmlns:a16="http://schemas.microsoft.com/office/drawing/2014/main" id="{03113153-86A1-996F-45A2-FF265C02D4E3}"/>
+                <a16:creationId xmlns:a16="http://schemas.microsoft.com/office/drawing/2014/main" id="{5D1C0880-6D44-0650-D496-17A87B0E3F81}"/>
               </a:ext>
             </a:extLst>
           </p:cNvPr>
@@ -12606,7 +12691,7 @@
         </p:nvSpPr>
         <p:spPr>
           <a:xfrm>
-            <a:off x="1024128" y="6004560"/>
+            <a:off x="2072640" y="6004560"/>
             <a:ext cx="1905000" cy="304800"/>
           </a:xfrm>
           <a:prstGeom prst="roundRect">
@@ -12648,7 +12733,7 @@
     </p:spTree>
     <p:extLst>
       <p:ext uri="{BB962C8B-B14F-4D97-AF65-F5344CB8AC3E}">
-        <p14:creationId xmlns:p14="http://schemas.microsoft.com/office/powerpoint/2010/main" val="1952397014"/>
+        <p14:creationId xmlns:p14="http://schemas.microsoft.com/office/powerpoint/2010/main" val="744197559"/>
       </p:ext>
     </p:extLst>
   </p:cSld>
@@ -12680,7 +12765,7 @@
           <p:cNvPr id="7" name="creative_background">
             <a:extLst>
               <a:ext uri="{FF2B5EF4-FFF2-40B4-BE49-F238E27FC236}">
-                <a16:creationId xmlns:a16="http://schemas.microsoft.com/office/drawing/2014/main" id="{EB67591A-518D-AC91-D162-9B324FB642A4}"/>
+                <a16:creationId xmlns:a16="http://schemas.microsoft.com/office/drawing/2014/main" id="{B84F5568-61CF-FCB0-5C8F-4433DD848777}"/>
               </a:ext>
             </a:extLst>
           </p:cNvPr>
@@ -12721,7 +12806,12 @@
             <p:ph type="title"/>
           </p:nvPr>
         </p:nvSpPr>
-        <p:spPr/>
+        <p:spPr>
+          <a:xfrm>
+            <a:off x="2072640" y="585216"/>
+            <a:ext cx="8674100" cy="1499616"/>
+          </a:xfrm>
+        </p:spPr>
         <p:txBody>
           <a:bodyPr/>
           <a:lstStyle>
@@ -12748,12 +12838,17 @@
             <p:ph type="dt" sz="half" idx="10"/>
           </p:nvPr>
         </p:nvSpPr>
-        <p:spPr/>
+        <p:spPr>
+          <a:xfrm>
+            <a:off x="2072640" y="6470704"/>
+            <a:ext cx="1104900" cy="274320"/>
+          </a:xfrm>
+        </p:spPr>
         <p:txBody>
           <a:bodyPr/>
           <a:lstStyle/>
           <a:p>
-            <a:fld id="{B5D244B9-259B-433A-84B9-2D3FCD42690F}" type="datetimeFigureOut">
+            <a:fld id="{F163761A-A4E5-4C7D-9728-6F0BC80FAE16}" type="datetimeFigureOut">
               <a:rPr lang="en-US" smtClean="0"/>
               <a:t>10/3/2026</a:t>
             </a:fld>
@@ -12795,7 +12890,7 @@
           <a:bodyPr/>
           <a:lstStyle/>
           <a:p>
-            <a:fld id="{F9842B40-88D3-4B59-923A-4074BB0E4CE6}" type="slidenum">
+            <a:fld id="{4DDE2B9A-5AB6-497C-A8BC-8EC14D6B62BC}" type="slidenum">
               <a:rPr lang="en-US" smtClean="0"/>
               <a:t>‹#›</a:t>
             </a:fld>
@@ -12808,7 +12903,7 @@
           <p:cNvPr id="8" name="body">
             <a:extLst>
               <a:ext uri="{FF2B5EF4-FFF2-40B4-BE49-F238E27FC236}">
-                <a16:creationId xmlns:a16="http://schemas.microsoft.com/office/drawing/2014/main" id="{E4717655-7085-B61B-1A0C-D265B43FF5D2}"/>
+                <a16:creationId xmlns:a16="http://schemas.microsoft.com/office/drawing/2014/main" id="{69E95C15-7758-C296-30C8-22D18735092A}"/>
               </a:ext>
             </a:extLst>
           </p:cNvPr>
@@ -12821,8 +12916,8 @@
         </p:nvSpPr>
         <p:spPr>
           <a:xfrm>
-            <a:off x="1024128" y="5231080"/>
-            <a:ext cx="9720073" cy="646481"/>
+            <a:off x="2072640" y="5231080"/>
+            <a:ext cx="8671561" cy="646481"/>
           </a:xfrm>
         </p:spPr>
         <p:txBody>
@@ -12848,7 +12943,7 @@
           <p:cNvPr id="9" name="kpi_value_1">
             <a:extLst>
               <a:ext uri="{FF2B5EF4-FFF2-40B4-BE49-F238E27FC236}">
-                <a16:creationId xmlns:a16="http://schemas.microsoft.com/office/drawing/2014/main" id="{5D8605A5-E214-8AB5-EB6F-AA808EB38C66}"/>
+                <a16:creationId xmlns:a16="http://schemas.microsoft.com/office/drawing/2014/main" id="{AB597E66-65C8-407D-23DA-E358D5693980}"/>
               </a:ext>
             </a:extLst>
           </p:cNvPr>
@@ -12861,8 +12956,8 @@
         </p:nvSpPr>
         <p:spPr>
           <a:xfrm>
-            <a:off x="1148744" y="2419022"/>
-            <a:ext cx="2462418" cy="334547"/>
+            <a:off x="2183814" y="2419022"/>
+            <a:ext cx="2196796" cy="334547"/>
           </a:xfrm>
           <a:prstGeom prst="rect">
             <a:avLst/>
@@ -12901,7 +12996,7 @@
           <p:cNvPr id="10" name="kpi_label_1">
             <a:extLst>
               <a:ext uri="{FF2B5EF4-FFF2-40B4-BE49-F238E27FC236}">
-                <a16:creationId xmlns:a16="http://schemas.microsoft.com/office/drawing/2014/main" id="{19EFF497-DD3A-F61B-D3D6-C772B11F2E72}"/>
+                <a16:creationId xmlns:a16="http://schemas.microsoft.com/office/drawing/2014/main" id="{AC074A08-0BDC-A021-4686-62B55A44A316}"/>
               </a:ext>
             </a:extLst>
           </p:cNvPr>
@@ -12914,8 +13009,8 @@
         </p:nvSpPr>
         <p:spPr>
           <a:xfrm>
-            <a:off x="3710857" y="2419022"/>
-            <a:ext cx="6908729" cy="247813"/>
+            <a:off x="4469550" y="2419022"/>
+            <a:ext cx="6163479" cy="247813"/>
           </a:xfrm>
           <a:prstGeom prst="rect">
             <a:avLst/>
@@ -12949,7 +13044,7 @@
           <p:cNvPr id="11" name="kpi_value_2">
             <a:extLst>
               <a:ext uri="{FF2B5EF4-FFF2-40B4-BE49-F238E27FC236}">
-                <a16:creationId xmlns:a16="http://schemas.microsoft.com/office/drawing/2014/main" id="{1F453A24-A320-7B35-F25C-5576314F4620}"/>
+                <a16:creationId xmlns:a16="http://schemas.microsoft.com/office/drawing/2014/main" id="{38F416D8-EF85-5B71-797D-8D8715F69E98}"/>
               </a:ext>
             </a:extLst>
           </p:cNvPr>
@@ -12962,8 +13057,8 @@
         </p:nvSpPr>
         <p:spPr>
           <a:xfrm>
-            <a:off x="1148744" y="3152631"/>
-            <a:ext cx="2462418" cy="334547"/>
+            <a:off x="2183814" y="3152631"/>
+            <a:ext cx="2196796" cy="334547"/>
           </a:xfrm>
           <a:prstGeom prst="rect">
             <a:avLst/>
@@ -13002,7 +13097,7 @@
           <p:cNvPr id="12" name="kpi_label_2">
             <a:extLst>
               <a:ext uri="{FF2B5EF4-FFF2-40B4-BE49-F238E27FC236}">
-                <a16:creationId xmlns:a16="http://schemas.microsoft.com/office/drawing/2014/main" id="{D71F1A0B-38CF-2CB8-0380-BDCC03C049F0}"/>
+                <a16:creationId xmlns:a16="http://schemas.microsoft.com/office/drawing/2014/main" id="{0379C4C8-1008-A52A-41A5-39B6C5677C3A}"/>
               </a:ext>
             </a:extLst>
           </p:cNvPr>
@@ -13015,8 +13110,8 @@
         </p:nvSpPr>
         <p:spPr>
           <a:xfrm>
-            <a:off x="3710857" y="3152631"/>
-            <a:ext cx="6908729" cy="247813"/>
+            <a:off x="4469550" y="3152631"/>
+            <a:ext cx="6163479" cy="247813"/>
           </a:xfrm>
           <a:prstGeom prst="rect">
             <a:avLst/>
@@ -13050,7 +13145,7 @@
           <p:cNvPr id="13" name="kpi_value_3">
             <a:extLst>
               <a:ext uri="{FF2B5EF4-FFF2-40B4-BE49-F238E27FC236}">
-                <a16:creationId xmlns:a16="http://schemas.microsoft.com/office/drawing/2014/main" id="{25B35D56-1B9D-9A7B-D431-751A495CD651}"/>
+                <a16:creationId xmlns:a16="http://schemas.microsoft.com/office/drawing/2014/main" id="{2BB823B4-C80A-188B-98C7-2654B5678E06}"/>
               </a:ext>
             </a:extLst>
           </p:cNvPr>
@@ -13063,8 +13158,8 @@
         </p:nvSpPr>
         <p:spPr>
           <a:xfrm>
-            <a:off x="1148744" y="3886241"/>
-            <a:ext cx="2462418" cy="334547"/>
+            <a:off x="2183814" y="3886241"/>
+            <a:ext cx="2196796" cy="334547"/>
           </a:xfrm>
           <a:prstGeom prst="rect">
             <a:avLst/>
@@ -13103,7 +13198,7 @@
           <p:cNvPr id="14" name="kpi_label_3">
             <a:extLst>
               <a:ext uri="{FF2B5EF4-FFF2-40B4-BE49-F238E27FC236}">
-                <a16:creationId xmlns:a16="http://schemas.microsoft.com/office/drawing/2014/main" id="{AD33763B-1EA8-E8A2-5970-770FABE08871}"/>
+                <a16:creationId xmlns:a16="http://schemas.microsoft.com/office/drawing/2014/main" id="{EBA893CE-F894-7AFF-AF8D-3C8BD60F8228}"/>
               </a:ext>
             </a:extLst>
           </p:cNvPr>
@@ -13116,8 +13211,8 @@
         </p:nvSpPr>
         <p:spPr>
           <a:xfrm>
-            <a:off x="3710857" y="3886241"/>
-            <a:ext cx="6908729" cy="247813"/>
+            <a:off x="4469550" y="3886241"/>
+            <a:ext cx="6163479" cy="247813"/>
           </a:xfrm>
           <a:prstGeom prst="rect">
             <a:avLst/>
@@ -13151,7 +13246,7 @@
           <p:cNvPr id="15" name="kpi_value_4">
             <a:extLst>
               <a:ext uri="{FF2B5EF4-FFF2-40B4-BE49-F238E27FC236}">
-                <a16:creationId xmlns:a16="http://schemas.microsoft.com/office/drawing/2014/main" id="{11D21440-948F-19B8-E694-3AD6380EEEE4}"/>
+                <a16:creationId xmlns:a16="http://schemas.microsoft.com/office/drawing/2014/main" id="{1BC79AB4-7422-4BAB-6F6D-6AC60895A8B6}"/>
               </a:ext>
             </a:extLst>
           </p:cNvPr>
@@ -13164,8 +13259,8 @@
         </p:nvSpPr>
         <p:spPr>
           <a:xfrm>
-            <a:off x="1148744" y="4619850"/>
-            <a:ext cx="2462418" cy="334547"/>
+            <a:off x="2183814" y="4619850"/>
+            <a:ext cx="2196796" cy="334547"/>
           </a:xfrm>
           <a:prstGeom prst="rect">
             <a:avLst/>
@@ -13204,7 +13299,7 @@
           <p:cNvPr id="16" name="kpi_label_4">
             <a:extLst>
               <a:ext uri="{FF2B5EF4-FFF2-40B4-BE49-F238E27FC236}">
-                <a16:creationId xmlns:a16="http://schemas.microsoft.com/office/drawing/2014/main" id="{F12E5DD7-AED9-B29E-3FE9-B5D43A345578}"/>
+                <a16:creationId xmlns:a16="http://schemas.microsoft.com/office/drawing/2014/main" id="{41FC9EE7-3AB1-6C9A-34A0-AF88B55D737B}"/>
               </a:ext>
             </a:extLst>
           </p:cNvPr>
@@ -13217,8 +13312,8 @@
         </p:nvSpPr>
         <p:spPr>
           <a:xfrm>
-            <a:off x="3710857" y="4619850"/>
-            <a:ext cx="6908729" cy="247813"/>
+            <a:off x="4469550" y="4619850"/>
+            <a:ext cx="6163479" cy="247813"/>
           </a:xfrm>
           <a:prstGeom prst="rect">
             <a:avLst/>
@@ -13252,7 +13347,7 @@
           <p:cNvPr id="17" name="source">
             <a:extLst>
               <a:ext uri="{FF2B5EF4-FFF2-40B4-BE49-F238E27FC236}">
-                <a16:creationId xmlns:a16="http://schemas.microsoft.com/office/drawing/2014/main" id="{3F5F501A-2080-3B5A-6CE3-4AFFBF6DCF83}"/>
+                <a16:creationId xmlns:a16="http://schemas.microsoft.com/office/drawing/2014/main" id="{21F28981-75F5-DC11-A016-015F240E0B79}"/>
               </a:ext>
             </a:extLst>
           </p:cNvPr>
@@ -13265,7 +13360,7 @@
         </p:nvSpPr>
         <p:spPr>
           <a:xfrm>
-            <a:off x="1024128" y="6004560"/>
+            <a:off x="2072640" y="6004560"/>
             <a:ext cx="1905000" cy="304800"/>
           </a:xfrm>
           <a:prstGeom prst="roundRect">
@@ -13307,7 +13402,7 @@
     </p:spTree>
     <p:extLst>
       <p:ext uri="{BB962C8B-B14F-4D97-AF65-F5344CB8AC3E}">
-        <p14:creationId xmlns:p14="http://schemas.microsoft.com/office/powerpoint/2010/main" val="1410589100"/>
+        <p14:creationId xmlns:p14="http://schemas.microsoft.com/office/powerpoint/2010/main" val="1556618328"/>
       </p:ext>
     </p:extLst>
   </p:cSld>
@@ -13339,7 +13434,7 @@
           <p:cNvPr id="7" name="creative_background">
             <a:extLst>
               <a:ext uri="{FF2B5EF4-FFF2-40B4-BE49-F238E27FC236}">
-                <a16:creationId xmlns:a16="http://schemas.microsoft.com/office/drawing/2014/main" id="{442D3BC2-C555-5E0E-20D7-9016E81F048E}"/>
+                <a16:creationId xmlns:a16="http://schemas.microsoft.com/office/drawing/2014/main" id="{3BBCFA36-8889-16E5-4015-E27769E4843B}"/>
               </a:ext>
             </a:extLst>
           </p:cNvPr>
@@ -13380,7 +13475,12 @@
             <p:ph type="title"/>
           </p:nvPr>
         </p:nvSpPr>
-        <p:spPr/>
+        <p:spPr>
+          <a:xfrm>
+            <a:off x="2072640" y="585216"/>
+            <a:ext cx="8674100" cy="1499616"/>
+          </a:xfrm>
+        </p:spPr>
         <p:txBody>
           <a:bodyPr/>
           <a:lstStyle>
@@ -13407,12 +13507,17 @@
             <p:ph type="dt" sz="half" idx="10"/>
           </p:nvPr>
         </p:nvSpPr>
-        <p:spPr/>
+        <p:spPr>
+          <a:xfrm>
+            <a:off x="2072640" y="6470704"/>
+            <a:ext cx="1104900" cy="274320"/>
+          </a:xfrm>
+        </p:spPr>
         <p:txBody>
           <a:bodyPr/>
           <a:lstStyle/>
           <a:p>
-            <a:fld id="{B5D244B9-259B-433A-84B9-2D3FCD42690F}" type="datetimeFigureOut">
+            <a:fld id="{F163761A-A4E5-4C7D-9728-6F0BC80FAE16}" type="datetimeFigureOut">
               <a:rPr lang="en-US" smtClean="0"/>
               <a:t>10/3/2026</a:t>
             </a:fld>
@@ -13454,7 +13559,7 @@
           <a:bodyPr/>
           <a:lstStyle/>
           <a:p>
-            <a:fld id="{F9842B40-88D3-4B59-923A-4074BB0E4CE6}" type="slidenum">
+            <a:fld id="{4DDE2B9A-5AB6-497C-A8BC-8EC14D6B62BC}" type="slidenum">
               <a:rPr lang="en-US" smtClean="0"/>
               <a:t>‹#›</a:t>
             </a:fld>
@@ -13467,7 +13572,7 @@
           <p:cNvPr id="8" name="item_1_title">
             <a:extLst>
               <a:ext uri="{FF2B5EF4-FFF2-40B4-BE49-F238E27FC236}">
-                <a16:creationId xmlns:a16="http://schemas.microsoft.com/office/drawing/2014/main" id="{F59F8D49-CCF4-BB35-95E3-19EB73B1864B}"/>
+                <a16:creationId xmlns:a16="http://schemas.microsoft.com/office/drawing/2014/main" id="{6EE2BDDA-DA84-8A74-F335-E26E818582B3}"/>
               </a:ext>
             </a:extLst>
           </p:cNvPr>
@@ -13480,8 +13585,8 @@
         </p:nvSpPr>
         <p:spPr>
           <a:xfrm>
-            <a:off x="1148744" y="2419022"/>
-            <a:ext cx="2841252" cy="532083"/>
+            <a:off x="2183814" y="2419022"/>
+            <a:ext cx="2534764" cy="532083"/>
           </a:xfrm>
         </p:spPr>
         <p:txBody>
@@ -13517,7 +13622,7 @@
           <p:cNvPr id="9" name="item_1">
             <a:extLst>
               <a:ext uri="{FF2B5EF4-FFF2-40B4-BE49-F238E27FC236}">
-                <a16:creationId xmlns:a16="http://schemas.microsoft.com/office/drawing/2014/main" id="{F528F14A-3AEE-9C08-DB2C-CD4C5F158D2F}"/>
+                <a16:creationId xmlns:a16="http://schemas.microsoft.com/office/drawing/2014/main" id="{840284E4-3C58-BDD5-F200-3AE75CF21FA0}"/>
               </a:ext>
             </a:extLst>
           </p:cNvPr>
@@ -13530,8 +13635,8 @@
         </p:nvSpPr>
         <p:spPr>
           <a:xfrm>
-            <a:off x="4089691" y="2419022"/>
-            <a:ext cx="6529895" cy="532083"/>
+            <a:off x="4807517" y="2419022"/>
+            <a:ext cx="5825510" cy="532083"/>
           </a:xfrm>
           <a:prstGeom prst="rect">
             <a:avLst/>
@@ -13565,7 +13670,7 @@
           <p:cNvPr id="10" name="item_2_title">
             <a:extLst>
               <a:ext uri="{FF2B5EF4-FFF2-40B4-BE49-F238E27FC236}">
-                <a16:creationId xmlns:a16="http://schemas.microsoft.com/office/drawing/2014/main" id="{8EF35406-0309-81AF-3C05-2088AEBE36E3}"/>
+                <a16:creationId xmlns:a16="http://schemas.microsoft.com/office/drawing/2014/main" id="{38EDA9DB-9555-D3B8-90C5-F7DB8E5632A1}"/>
               </a:ext>
             </a:extLst>
           </p:cNvPr>
@@ -13578,8 +13683,8 @@
         </p:nvSpPr>
         <p:spPr>
           <a:xfrm>
-            <a:off x="1148744" y="3350167"/>
-            <a:ext cx="2841252" cy="532083"/>
+            <a:off x="2183814" y="3350167"/>
+            <a:ext cx="2534764" cy="532083"/>
           </a:xfrm>
           <a:prstGeom prst="rect">
             <a:avLst/>
@@ -13618,7 +13723,7 @@
           <p:cNvPr id="11" name="item_2">
             <a:extLst>
               <a:ext uri="{FF2B5EF4-FFF2-40B4-BE49-F238E27FC236}">
-                <a16:creationId xmlns:a16="http://schemas.microsoft.com/office/drawing/2014/main" id="{10C2491C-405F-7834-6E82-548D2A6B2256}"/>
+                <a16:creationId xmlns:a16="http://schemas.microsoft.com/office/drawing/2014/main" id="{40677EC7-FC16-A4AE-A8F9-FDFE480D8CFD}"/>
               </a:ext>
             </a:extLst>
           </p:cNvPr>
@@ -13631,8 +13736,8 @@
         </p:nvSpPr>
         <p:spPr>
           <a:xfrm>
-            <a:off x="4089691" y="3350167"/>
-            <a:ext cx="6529895" cy="532083"/>
+            <a:off x="4807517" y="3350167"/>
+            <a:ext cx="5825510" cy="532083"/>
           </a:xfrm>
           <a:prstGeom prst="rect">
             <a:avLst/>
@@ -13666,7 +13771,7 @@
           <p:cNvPr id="12" name="item_3_title">
             <a:extLst>
               <a:ext uri="{FF2B5EF4-FFF2-40B4-BE49-F238E27FC236}">
-                <a16:creationId xmlns:a16="http://schemas.microsoft.com/office/drawing/2014/main" id="{ECF6190A-DAC1-6F85-7ECA-0D8EE1C78BB5}"/>
+                <a16:creationId xmlns:a16="http://schemas.microsoft.com/office/drawing/2014/main" id="{FCD8BAD4-DD8E-36B7-C397-F5CBECB82450}"/>
               </a:ext>
             </a:extLst>
           </p:cNvPr>
@@ -13679,8 +13784,8 @@
         </p:nvSpPr>
         <p:spPr>
           <a:xfrm>
-            <a:off x="1148744" y="4281312"/>
-            <a:ext cx="2841252" cy="532083"/>
+            <a:off x="2183814" y="4281312"/>
+            <a:ext cx="2534764" cy="532083"/>
           </a:xfrm>
           <a:prstGeom prst="rect">
             <a:avLst/>
@@ -13719,7 +13824,7 @@
           <p:cNvPr id="13" name="item_3">
             <a:extLst>
               <a:ext uri="{FF2B5EF4-FFF2-40B4-BE49-F238E27FC236}">
-                <a16:creationId xmlns:a16="http://schemas.microsoft.com/office/drawing/2014/main" id="{EB5C791A-156B-443E-FC09-AF54D138D360}"/>
+                <a16:creationId xmlns:a16="http://schemas.microsoft.com/office/drawing/2014/main" id="{F17DE79A-BAA6-69AB-6D1E-D8E21CFCDCDC}"/>
               </a:ext>
             </a:extLst>
           </p:cNvPr>
@@ -13732,8 +13837,8 @@
         </p:nvSpPr>
         <p:spPr>
           <a:xfrm>
-            <a:off x="4089691" y="4281312"/>
-            <a:ext cx="6529895" cy="532083"/>
+            <a:off x="4807517" y="4281312"/>
+            <a:ext cx="5825510" cy="532083"/>
           </a:xfrm>
           <a:prstGeom prst="rect">
             <a:avLst/>
@@ -13767,7 +13872,7 @@
           <p:cNvPr id="14" name="item_4_title">
             <a:extLst>
               <a:ext uri="{FF2B5EF4-FFF2-40B4-BE49-F238E27FC236}">
-                <a16:creationId xmlns:a16="http://schemas.microsoft.com/office/drawing/2014/main" id="{26635BD8-D001-3712-8FEB-C3483B18EFFA}"/>
+                <a16:creationId xmlns:a16="http://schemas.microsoft.com/office/drawing/2014/main" id="{C4F9DBD1-74BA-CB2A-7425-3080E51031F2}"/>
               </a:ext>
             </a:extLst>
           </p:cNvPr>
@@ -13780,8 +13885,8 @@
         </p:nvSpPr>
         <p:spPr>
           <a:xfrm>
-            <a:off x="1148744" y="5212457"/>
-            <a:ext cx="2841252" cy="532083"/>
+            <a:off x="2183814" y="5212457"/>
+            <a:ext cx="2534764" cy="532083"/>
           </a:xfrm>
           <a:prstGeom prst="rect">
             <a:avLst/>
@@ -13820,7 +13925,7 @@
           <p:cNvPr id="15" name="item_4">
             <a:extLst>
               <a:ext uri="{FF2B5EF4-FFF2-40B4-BE49-F238E27FC236}">
-                <a16:creationId xmlns:a16="http://schemas.microsoft.com/office/drawing/2014/main" id="{1F5002A5-8B81-F0B7-3691-0FD51875DCC1}"/>
+                <a16:creationId xmlns:a16="http://schemas.microsoft.com/office/drawing/2014/main" id="{74169F3A-3FAC-A9CE-F5B8-2009A17E3AD0}"/>
               </a:ext>
             </a:extLst>
           </p:cNvPr>
@@ -13833,8 +13938,8 @@
         </p:nvSpPr>
         <p:spPr>
           <a:xfrm>
-            <a:off x="4089691" y="5212457"/>
-            <a:ext cx="6529895" cy="532083"/>
+            <a:off x="4807517" y="5212457"/>
+            <a:ext cx="5825510" cy="532083"/>
           </a:xfrm>
           <a:prstGeom prst="rect">
             <a:avLst/>
@@ -13868,7 +13973,7 @@
           <p:cNvPr id="16" name="source">
             <a:extLst>
               <a:ext uri="{FF2B5EF4-FFF2-40B4-BE49-F238E27FC236}">
-                <a16:creationId xmlns:a16="http://schemas.microsoft.com/office/drawing/2014/main" id="{BE1D1ACE-A6A1-6DA1-1605-43EF94E5A70C}"/>
+                <a16:creationId xmlns:a16="http://schemas.microsoft.com/office/drawing/2014/main" id="{0FAD3CD6-0F44-A064-96D7-E69FF2C1D4A1}"/>
               </a:ext>
             </a:extLst>
           </p:cNvPr>
@@ -13881,7 +13986,7 @@
         </p:nvSpPr>
         <p:spPr>
           <a:xfrm>
-            <a:off x="1024128" y="6004560"/>
+            <a:off x="2072640" y="6004560"/>
             <a:ext cx="1905000" cy="304800"/>
           </a:xfrm>
           <a:prstGeom prst="roundRect">
@@ -13923,7 +14028,7 @@
     </p:spTree>
     <p:extLst>
       <p:ext uri="{BB962C8B-B14F-4D97-AF65-F5344CB8AC3E}">
-        <p14:creationId xmlns:p14="http://schemas.microsoft.com/office/powerpoint/2010/main" val="615343729"/>
+        <p14:creationId xmlns:p14="http://schemas.microsoft.com/office/powerpoint/2010/main" val="647143135"/>
       </p:ext>
     </p:extLst>
   </p:cSld>
@@ -13955,7 +14060,7 @@
           <p:cNvPr id="7" name="creative_background">
             <a:extLst>
               <a:ext uri="{FF2B5EF4-FFF2-40B4-BE49-F238E27FC236}">
-                <a16:creationId xmlns:a16="http://schemas.microsoft.com/office/drawing/2014/main" id="{E986ADEE-252C-38CA-1AAA-C755367F347B}"/>
+                <a16:creationId xmlns:a16="http://schemas.microsoft.com/office/drawing/2014/main" id="{EF0E0E5E-4B82-3105-FB91-7A29C8EB02BA}"/>
               </a:ext>
             </a:extLst>
           </p:cNvPr>
@@ -13996,7 +14101,12 @@
             <p:ph type="title"/>
           </p:nvPr>
         </p:nvSpPr>
-        <p:spPr/>
+        <p:spPr>
+          <a:xfrm>
+            <a:off x="2072640" y="585216"/>
+            <a:ext cx="8674100" cy="1499616"/>
+          </a:xfrm>
+        </p:spPr>
         <p:txBody>
           <a:bodyPr/>
           <a:lstStyle>
@@ -14023,12 +14133,17 @@
             <p:ph type="dt" sz="half" idx="10"/>
           </p:nvPr>
         </p:nvSpPr>
-        <p:spPr/>
+        <p:spPr>
+          <a:xfrm>
+            <a:off x="2072640" y="6470704"/>
+            <a:ext cx="1104900" cy="274320"/>
+          </a:xfrm>
+        </p:spPr>
         <p:txBody>
           <a:bodyPr/>
           <a:lstStyle/>
           <a:p>
-            <a:fld id="{B5D244B9-259B-433A-84B9-2D3FCD42690F}" type="datetimeFigureOut">
+            <a:fld id="{F163761A-A4E5-4C7D-9728-6F0BC80FAE16}" type="datetimeFigureOut">
               <a:rPr lang="en-US" smtClean="0"/>
               <a:t>10/3/2026</a:t>
             </a:fld>
@@ -14070,7 +14185,7 @@
           <a:bodyPr/>
           <a:lstStyle/>
           <a:p>
-            <a:fld id="{F9842B40-88D3-4B59-923A-4074BB0E4CE6}" type="slidenum">
+            <a:fld id="{4DDE2B9A-5AB6-497C-A8BC-8EC14D6B62BC}" type="slidenum">
               <a:rPr lang="en-US" smtClean="0"/>
               <a:t>‹#›</a:t>
             </a:fld>
@@ -14083,7 +14198,7 @@
           <p:cNvPr id="8" name="marker_1">
             <a:extLst>
               <a:ext uri="{FF2B5EF4-FFF2-40B4-BE49-F238E27FC236}">
-                <a16:creationId xmlns:a16="http://schemas.microsoft.com/office/drawing/2014/main" id="{AC9605C4-3365-DA37-3C60-515BA342DEB0}"/>
+                <a16:creationId xmlns:a16="http://schemas.microsoft.com/office/drawing/2014/main" id="{B4B8F14D-CB08-98F0-ECE0-497BCA62C898}"/>
               </a:ext>
             </a:extLst>
           </p:cNvPr>
@@ -14096,8 +14211,8 @@
         </p:nvSpPr>
         <p:spPr>
           <a:xfrm>
-            <a:off x="1198591" y="2472230"/>
-            <a:ext cx="548312" cy="585291"/>
+            <a:off x="2228283" y="2472230"/>
+            <a:ext cx="489165" cy="585291"/>
           </a:xfrm>
           <a:prstGeom prst="ellipse">
             <a:avLst/>
@@ -14139,7 +14254,7 @@
           <p:cNvPr id="9" name="item_1_title">
             <a:extLst>
               <a:ext uri="{FF2B5EF4-FFF2-40B4-BE49-F238E27FC236}">
-                <a16:creationId xmlns:a16="http://schemas.microsoft.com/office/drawing/2014/main" id="{44D1BD1E-11B0-1E9F-BE3B-EF094C7E9D42}"/>
+                <a16:creationId xmlns:a16="http://schemas.microsoft.com/office/drawing/2014/main" id="{75132FC2-3993-7A76-0A43-3518BF653D04}"/>
               </a:ext>
             </a:extLst>
           </p:cNvPr>
@@ -14152,8 +14267,8 @@
         </p:nvSpPr>
         <p:spPr>
           <a:xfrm>
-            <a:off x="1846597" y="2472230"/>
-            <a:ext cx="8723143" cy="387325"/>
+            <a:off x="2806388" y="2472230"/>
+            <a:ext cx="7782171" cy="387325"/>
           </a:xfrm>
           <a:prstGeom prst="rect">
             <a:avLst/>
@@ -14192,7 +14307,7 @@
           <p:cNvPr id="10" name="item_1">
             <a:extLst>
               <a:ext uri="{FF2B5EF4-FFF2-40B4-BE49-F238E27FC236}">
-                <a16:creationId xmlns:a16="http://schemas.microsoft.com/office/drawing/2014/main" id="{0BFE1FAE-02AC-D091-7ABA-0A461FF2520E}"/>
+                <a16:creationId xmlns:a16="http://schemas.microsoft.com/office/drawing/2014/main" id="{B7D6AC7E-BA7B-E746-5306-7FAAEE816DAC}"/>
               </a:ext>
             </a:extLst>
           </p:cNvPr>
@@ -14205,8 +14320,8 @@
         </p:nvSpPr>
         <p:spPr>
           <a:xfrm>
-            <a:off x="1846597" y="2859554"/>
-            <a:ext cx="8723143" cy="929580"/>
+            <a:off x="2806388" y="2859554"/>
+            <a:ext cx="7782171" cy="929580"/>
           </a:xfrm>
           <a:prstGeom prst="rect">
             <a:avLst/>
@@ -14240,7 +14355,7 @@
           <p:cNvPr id="11" name="marker_2">
             <a:extLst>
               <a:ext uri="{FF2B5EF4-FFF2-40B4-BE49-F238E27FC236}">
-                <a16:creationId xmlns:a16="http://schemas.microsoft.com/office/drawing/2014/main" id="{5B870129-FD05-3219-83E5-090B8F8A7546}"/>
+                <a16:creationId xmlns:a16="http://schemas.microsoft.com/office/drawing/2014/main" id="{1FAD5476-575C-2FD5-6CB7-8A5DD6040BE0}"/>
               </a:ext>
             </a:extLst>
           </p:cNvPr>
@@ -14253,8 +14368,8 @@
         </p:nvSpPr>
         <p:spPr>
           <a:xfrm>
-            <a:off x="1198591" y="4374427"/>
-            <a:ext cx="548312" cy="585291"/>
+            <a:off x="2228284" y="4374427"/>
+            <a:ext cx="489165" cy="585291"/>
           </a:xfrm>
           <a:prstGeom prst="ellipse">
             <a:avLst/>
@@ -14296,7 +14411,7 @@
           <p:cNvPr id="12" name="item_2_title">
             <a:extLst>
               <a:ext uri="{FF2B5EF4-FFF2-40B4-BE49-F238E27FC236}">
-                <a16:creationId xmlns:a16="http://schemas.microsoft.com/office/drawing/2014/main" id="{0B008ED9-47A1-1F4A-BFEF-D30F44F964B4}"/>
+                <a16:creationId xmlns:a16="http://schemas.microsoft.com/office/drawing/2014/main" id="{A70B9678-8D17-5DA4-43D0-2A214DADB40D}"/>
               </a:ext>
             </a:extLst>
           </p:cNvPr>
@@ -14309,8 +14424,8 @@
         </p:nvSpPr>
         <p:spPr>
           <a:xfrm>
-            <a:off x="1846597" y="4374427"/>
-            <a:ext cx="8723143" cy="387325"/>
+            <a:off x="2806388" y="4374427"/>
+            <a:ext cx="7782171" cy="387325"/>
           </a:xfrm>
           <a:prstGeom prst="rect">
             <a:avLst/>
@@ -14349,7 +14464,7 @@
           <p:cNvPr id="13" name="item_2">
             <a:extLst>
               <a:ext uri="{FF2B5EF4-FFF2-40B4-BE49-F238E27FC236}">
-                <a16:creationId xmlns:a16="http://schemas.microsoft.com/office/drawing/2014/main" id="{E038AADF-3AF3-EDF8-F29F-E997E7140979}"/>
+                <a16:creationId xmlns:a16="http://schemas.microsoft.com/office/drawing/2014/main" id="{DB837B94-4D8A-6A6C-E726-4D898CA09104}"/>
               </a:ext>
             </a:extLst>
           </p:cNvPr>
@@ -14362,8 +14477,8 @@
         </p:nvSpPr>
         <p:spPr>
           <a:xfrm>
-            <a:off x="1846597" y="4761750"/>
-            <a:ext cx="8723143" cy="929580"/>
+            <a:off x="2806388" y="4761750"/>
+            <a:ext cx="7782171" cy="929580"/>
           </a:xfrm>
           <a:prstGeom prst="rect">
             <a:avLst/>
@@ -14397,7 +14512,7 @@
           <p:cNvPr id="14" name="source">
             <a:extLst>
               <a:ext uri="{FF2B5EF4-FFF2-40B4-BE49-F238E27FC236}">
-                <a16:creationId xmlns:a16="http://schemas.microsoft.com/office/drawing/2014/main" id="{C035D294-915B-7A93-9363-F9D1EBD945E5}"/>
+                <a16:creationId xmlns:a16="http://schemas.microsoft.com/office/drawing/2014/main" id="{6E634AE9-C255-BA7E-6067-7796C84D48E1}"/>
               </a:ext>
             </a:extLst>
           </p:cNvPr>
@@ -14410,7 +14525,7 @@
         </p:nvSpPr>
         <p:spPr>
           <a:xfrm>
-            <a:off x="1024128" y="6004560"/>
+            <a:off x="2072640" y="6004560"/>
             <a:ext cx="1905000" cy="304800"/>
           </a:xfrm>
           <a:prstGeom prst="roundRect">
@@ -14452,7 +14567,7 @@
     </p:spTree>
     <p:extLst>
       <p:ext uri="{BB962C8B-B14F-4D97-AF65-F5344CB8AC3E}">
-        <p14:creationId xmlns:p14="http://schemas.microsoft.com/office/powerpoint/2010/main" val="580241230"/>
+        <p14:creationId xmlns:p14="http://schemas.microsoft.com/office/powerpoint/2010/main" val="772472911"/>
       </p:ext>
     </p:extLst>
   </p:cSld>
@@ -14484,7 +14599,7 @@
           <p:cNvPr id="7" name="creative_background">
             <a:extLst>
               <a:ext uri="{FF2B5EF4-FFF2-40B4-BE49-F238E27FC236}">
-                <a16:creationId xmlns:a16="http://schemas.microsoft.com/office/drawing/2014/main" id="{39C0D6B1-6C7B-5394-D8F8-D30B6DBE1F7E}"/>
+                <a16:creationId xmlns:a16="http://schemas.microsoft.com/office/drawing/2014/main" id="{D65B60EB-D496-4100-1339-8B74D7B1ECC7}"/>
               </a:ext>
             </a:extLst>
           </p:cNvPr>
@@ -14525,7 +14640,12 @@
             <p:ph type="title"/>
           </p:nvPr>
         </p:nvSpPr>
-        <p:spPr/>
+        <p:spPr>
+          <a:xfrm>
+            <a:off x="2072640" y="585216"/>
+            <a:ext cx="8674100" cy="1499616"/>
+          </a:xfrm>
+        </p:spPr>
         <p:txBody>
           <a:bodyPr/>
           <a:lstStyle>
@@ -14552,12 +14672,17 @@
             <p:ph type="dt" sz="half" idx="10"/>
           </p:nvPr>
         </p:nvSpPr>
-        <p:spPr/>
+        <p:spPr>
+          <a:xfrm>
+            <a:off x="2072640" y="6470704"/>
+            <a:ext cx="1104900" cy="274320"/>
+          </a:xfrm>
+        </p:spPr>
         <p:txBody>
           <a:bodyPr/>
           <a:lstStyle/>
           <a:p>
-            <a:fld id="{B5D244B9-259B-433A-84B9-2D3FCD42690F}" type="datetimeFigureOut">
+            <a:fld id="{F163761A-A4E5-4C7D-9728-6F0BC80FAE16}" type="datetimeFigureOut">
               <a:rPr lang="en-US" smtClean="0"/>
               <a:t>10/3/2026</a:t>
             </a:fld>
@@ -14599,7 +14724,7 @@
           <a:bodyPr/>
           <a:lstStyle/>
           <a:p>
-            <a:fld id="{F9842B40-88D3-4B59-923A-4074BB0E4CE6}" type="slidenum">
+            <a:fld id="{4DDE2B9A-5AB6-497C-A8BC-8EC14D6B62BC}" type="slidenum">
               <a:rPr lang="en-US" smtClean="0"/>
               <a:t>‹#›</a:t>
             </a:fld>
@@ -14612,7 +14737,7 @@
           <p:cNvPr id="8" name="item_1_title">
             <a:extLst>
               <a:ext uri="{FF2B5EF4-FFF2-40B4-BE49-F238E27FC236}">
-                <a16:creationId xmlns:a16="http://schemas.microsoft.com/office/drawing/2014/main" id="{B027E1BD-150A-3929-B9D8-2EEE401C8D23}"/>
+                <a16:creationId xmlns:a16="http://schemas.microsoft.com/office/drawing/2014/main" id="{4606890E-6F7E-7ADC-583F-F394711D75A4}"/>
               </a:ext>
             </a:extLst>
           </p:cNvPr>
@@ -14625,8 +14750,8 @@
         </p:nvSpPr>
         <p:spPr>
           <a:xfrm>
-            <a:off x="1198591" y="2472230"/>
-            <a:ext cx="4411418" cy="387325"/>
+            <a:off x="2228283" y="2472230"/>
+            <a:ext cx="3935555" cy="387325"/>
           </a:xfrm>
         </p:spPr>
         <p:txBody>
@@ -14662,7 +14787,7 @@
           <p:cNvPr id="9" name="item_1">
             <a:extLst>
               <a:ext uri="{FF2B5EF4-FFF2-40B4-BE49-F238E27FC236}">
-                <a16:creationId xmlns:a16="http://schemas.microsoft.com/office/drawing/2014/main" id="{0A03BE5F-18AF-0610-1B01-653CE4D7C15E}"/>
+                <a16:creationId xmlns:a16="http://schemas.microsoft.com/office/drawing/2014/main" id="{6ABA1FFA-67C9-778A-9C25-F8F6D40C001F}"/>
               </a:ext>
             </a:extLst>
           </p:cNvPr>
@@ -14675,8 +14800,8 @@
         </p:nvSpPr>
         <p:spPr>
           <a:xfrm>
-            <a:off x="1198591" y="2859554"/>
-            <a:ext cx="4411418" cy="929580"/>
+            <a:off x="2228284" y="2859554"/>
+            <a:ext cx="3935555" cy="929580"/>
           </a:xfrm>
           <a:prstGeom prst="rect">
             <a:avLst/>
@@ -14710,7 +14835,7 @@
           <p:cNvPr id="10" name="item_2_title">
             <a:extLst>
               <a:ext uri="{FF2B5EF4-FFF2-40B4-BE49-F238E27FC236}">
-                <a16:creationId xmlns:a16="http://schemas.microsoft.com/office/drawing/2014/main" id="{B7C61536-2151-E1D9-C42F-AD856DAAC32A}"/>
+                <a16:creationId xmlns:a16="http://schemas.microsoft.com/office/drawing/2014/main" id="{99819B48-9E27-86BE-D1A3-6085C969B0AD}"/>
               </a:ext>
             </a:extLst>
           </p:cNvPr>
@@ -14723,8 +14848,8 @@
         </p:nvSpPr>
         <p:spPr>
           <a:xfrm>
-            <a:off x="6158321" y="2472230"/>
-            <a:ext cx="4411418" cy="387325"/>
+            <a:off x="6653004" y="2472230"/>
+            <a:ext cx="3935555" cy="387325"/>
           </a:xfrm>
           <a:prstGeom prst="rect">
             <a:avLst/>
@@ -14763,7 +14888,7 @@
           <p:cNvPr id="11" name="item_2">
             <a:extLst>
               <a:ext uri="{FF2B5EF4-FFF2-40B4-BE49-F238E27FC236}">
-                <a16:creationId xmlns:a16="http://schemas.microsoft.com/office/drawing/2014/main" id="{5B426D26-09A3-8407-44A8-58B2405507A6}"/>
+                <a16:creationId xmlns:a16="http://schemas.microsoft.com/office/drawing/2014/main" id="{EC20DEE1-1CC4-9A6B-E740-3EE91EB4ED8F}"/>
               </a:ext>
             </a:extLst>
           </p:cNvPr>
@@ -14776,8 +14901,8 @@
         </p:nvSpPr>
         <p:spPr>
           <a:xfrm>
-            <a:off x="6158321" y="2859554"/>
-            <a:ext cx="4411418" cy="929580"/>
+            <a:off x="6653004" y="2859554"/>
+            <a:ext cx="3935555" cy="929580"/>
           </a:xfrm>
           <a:prstGeom prst="rect">
             <a:avLst/>
@@ -14811,7 +14936,7 @@
           <p:cNvPr id="12" name="item_3_title">
             <a:extLst>
               <a:ext uri="{FF2B5EF4-FFF2-40B4-BE49-F238E27FC236}">
-                <a16:creationId xmlns:a16="http://schemas.microsoft.com/office/drawing/2014/main" id="{EDC5B804-E1FD-5F2D-F913-D4031D251D4C}"/>
+                <a16:creationId xmlns:a16="http://schemas.microsoft.com/office/drawing/2014/main" id="{B7DB1A73-E145-D196-1465-039CF89CB8C5}"/>
               </a:ext>
             </a:extLst>
           </p:cNvPr>
@@ -14824,8 +14949,8 @@
         </p:nvSpPr>
         <p:spPr>
           <a:xfrm>
-            <a:off x="1198591" y="4374427"/>
-            <a:ext cx="4411418" cy="387325"/>
+            <a:off x="2228284" y="4374427"/>
+            <a:ext cx="3935555" cy="387325"/>
           </a:xfrm>
           <a:prstGeom prst="rect">
             <a:avLst/>
@@ -14864,7 +14989,7 @@
           <p:cNvPr id="13" name="item_3">
             <a:extLst>
               <a:ext uri="{FF2B5EF4-FFF2-40B4-BE49-F238E27FC236}">
-                <a16:creationId xmlns:a16="http://schemas.microsoft.com/office/drawing/2014/main" id="{0D113493-DDE8-0BA1-A235-51544E212E3D}"/>
+                <a16:creationId xmlns:a16="http://schemas.microsoft.com/office/drawing/2014/main" id="{EBBDBED0-03AF-3206-B85D-84839D18A7F7}"/>
               </a:ext>
             </a:extLst>
           </p:cNvPr>
@@ -14877,8 +15002,8 @@
         </p:nvSpPr>
         <p:spPr>
           <a:xfrm>
-            <a:off x="1198591" y="4761750"/>
-            <a:ext cx="4411418" cy="929580"/>
+            <a:off x="2228284" y="4761750"/>
+            <a:ext cx="3935555" cy="929580"/>
           </a:xfrm>
           <a:prstGeom prst="rect">
             <a:avLst/>
@@ -14912,7 +15037,7 @@
           <p:cNvPr id="14" name="item_4_title">
             <a:extLst>
               <a:ext uri="{FF2B5EF4-FFF2-40B4-BE49-F238E27FC236}">
-                <a16:creationId xmlns:a16="http://schemas.microsoft.com/office/drawing/2014/main" id="{89E570E1-75C2-175E-39E9-5F4063AB919E}"/>
+                <a16:creationId xmlns:a16="http://schemas.microsoft.com/office/drawing/2014/main" id="{ADBDF868-8ECC-0692-29C6-E2375C24498C}"/>
               </a:ext>
             </a:extLst>
           </p:cNvPr>
@@ -14925,8 +15050,8 @@
         </p:nvSpPr>
         <p:spPr>
           <a:xfrm>
-            <a:off x="6158321" y="4374427"/>
-            <a:ext cx="4411418" cy="387325"/>
+            <a:off x="6653004" y="4374427"/>
+            <a:ext cx="3935555" cy="387325"/>
           </a:xfrm>
           <a:prstGeom prst="rect">
             <a:avLst/>
@@ -14965,7 +15090,7 @@
           <p:cNvPr id="15" name="item_4">
             <a:extLst>
               <a:ext uri="{FF2B5EF4-FFF2-40B4-BE49-F238E27FC236}">
-                <a16:creationId xmlns:a16="http://schemas.microsoft.com/office/drawing/2014/main" id="{D4B53B42-577E-AFD8-DB1C-C2C5F77AAD94}"/>
+                <a16:creationId xmlns:a16="http://schemas.microsoft.com/office/drawing/2014/main" id="{AC5DF92F-F879-C937-7B01-06EE4255C593}"/>
               </a:ext>
             </a:extLst>
           </p:cNvPr>
@@ -14978,8 +15103,8 @@
         </p:nvSpPr>
         <p:spPr>
           <a:xfrm>
-            <a:off x="6158321" y="4761750"/>
-            <a:ext cx="4411418" cy="929580"/>
+            <a:off x="6653004" y="4761750"/>
+            <a:ext cx="3935555" cy="929580"/>
           </a:xfrm>
           <a:prstGeom prst="rect">
             <a:avLst/>
@@ -15013,7 +15138,7 @@
           <p:cNvPr id="16" name="source">
             <a:extLst>
               <a:ext uri="{FF2B5EF4-FFF2-40B4-BE49-F238E27FC236}">
-                <a16:creationId xmlns:a16="http://schemas.microsoft.com/office/drawing/2014/main" id="{DA701A70-ACD3-8B23-4F2F-A1846791CDF9}"/>
+                <a16:creationId xmlns:a16="http://schemas.microsoft.com/office/drawing/2014/main" id="{4C4ECF43-9BCC-FE0C-E193-189A57A21ECA}"/>
               </a:ext>
             </a:extLst>
           </p:cNvPr>
@@ -15026,7 +15151,7 @@
         </p:nvSpPr>
         <p:spPr>
           <a:xfrm>
-            <a:off x="1024128" y="6004560"/>
+            <a:off x="2072640" y="6004560"/>
             <a:ext cx="1905000" cy="304800"/>
           </a:xfrm>
           <a:prstGeom prst="roundRect">
@@ -15068,7 +15193,7 @@
     </p:spTree>
     <p:extLst>
       <p:ext uri="{BB962C8B-B14F-4D97-AF65-F5344CB8AC3E}">
-        <p14:creationId xmlns:p14="http://schemas.microsoft.com/office/powerpoint/2010/main" val="831857304"/>
+        <p14:creationId xmlns:p14="http://schemas.microsoft.com/office/powerpoint/2010/main" val="839229831"/>
       </p:ext>
     </p:extLst>
   </p:cSld>
@@ -15100,7 +15225,7 @@
           <p:cNvPr id="7" name="creative_background">
             <a:extLst>
               <a:ext uri="{FF2B5EF4-FFF2-40B4-BE49-F238E27FC236}">
-                <a16:creationId xmlns:a16="http://schemas.microsoft.com/office/drawing/2014/main" id="{ACAFAC22-D32E-9310-FDC6-546205D4037C}"/>
+                <a16:creationId xmlns:a16="http://schemas.microsoft.com/office/drawing/2014/main" id="{46D16182-1521-8DA4-2EF9-CC562C74E50D}"/>
               </a:ext>
             </a:extLst>
           </p:cNvPr>
@@ -15141,7 +15266,12 @@
             <p:ph type="title"/>
           </p:nvPr>
         </p:nvSpPr>
-        <p:spPr/>
+        <p:spPr>
+          <a:xfrm>
+            <a:off x="2072640" y="585216"/>
+            <a:ext cx="8674100" cy="1499616"/>
+          </a:xfrm>
+        </p:spPr>
         <p:txBody>
           <a:bodyPr/>
           <a:lstStyle>
@@ -15168,12 +15298,17 @@
             <p:ph type="dt" sz="half" idx="10"/>
           </p:nvPr>
         </p:nvSpPr>
-        <p:spPr/>
+        <p:spPr>
+          <a:xfrm>
+            <a:off x="2072640" y="6470704"/>
+            <a:ext cx="1104900" cy="274320"/>
+          </a:xfrm>
+        </p:spPr>
         <p:txBody>
           <a:bodyPr/>
           <a:lstStyle/>
           <a:p>
-            <a:fld id="{B5D244B9-259B-433A-84B9-2D3FCD42690F}" type="datetimeFigureOut">
+            <a:fld id="{F163761A-A4E5-4C7D-9728-6F0BC80FAE16}" type="datetimeFigureOut">
               <a:rPr lang="en-US" smtClean="0"/>
               <a:t>10/3/2026</a:t>
             </a:fld>
@@ -15215,7 +15350,7 @@
           <a:bodyPr/>
           <a:lstStyle/>
           <a:p>
-            <a:fld id="{F9842B40-88D3-4B59-923A-4074BB0E4CE6}" type="slidenum">
+            <a:fld id="{4DDE2B9A-5AB6-497C-A8BC-8EC14D6B62BC}" type="slidenum">
               <a:rPr lang="en-US" smtClean="0"/>
               <a:t>‹#›</a:t>
             </a:fld>
@@ -15228,7 +15363,7 @@
           <p:cNvPr id="8" name="item_1_title">
             <a:extLst>
               <a:ext uri="{FF2B5EF4-FFF2-40B4-BE49-F238E27FC236}">
-                <a16:creationId xmlns:a16="http://schemas.microsoft.com/office/drawing/2014/main" id="{4515AE2E-B576-EEEC-0C86-B54961FEFA52}"/>
+                <a16:creationId xmlns:a16="http://schemas.microsoft.com/office/drawing/2014/main" id="{2D304003-CBB2-EC5A-4486-FD3E255BEB66}"/>
               </a:ext>
             </a:extLst>
           </p:cNvPr>
@@ -15241,8 +15376,8 @@
         </p:nvSpPr>
         <p:spPr>
           <a:xfrm>
-            <a:off x="1198591" y="2811082"/>
-            <a:ext cx="1931553" cy="847132"/>
+            <a:off x="2228283" y="2811082"/>
+            <a:ext cx="1723195" cy="847132"/>
           </a:xfrm>
         </p:spPr>
         <p:txBody>
@@ -15278,7 +15413,7 @@
           <p:cNvPr id="9" name="item_1">
             <a:extLst>
               <a:ext uri="{FF2B5EF4-FFF2-40B4-BE49-F238E27FC236}">
-                <a16:creationId xmlns:a16="http://schemas.microsoft.com/office/drawing/2014/main" id="{1D0114F1-B005-510B-7AA6-238CAE70E5FA}"/>
+                <a16:creationId xmlns:a16="http://schemas.microsoft.com/office/drawing/2014/main" id="{1C6A2519-BA11-7A53-576B-E45386013451}"/>
               </a:ext>
             </a:extLst>
           </p:cNvPr>
@@ -15291,8 +15426,8 @@
         </p:nvSpPr>
         <p:spPr>
           <a:xfrm>
-            <a:off x="1198592" y="3658215"/>
-            <a:ext cx="1931553" cy="2033117"/>
+            <a:off x="2228284" y="3658215"/>
+            <a:ext cx="1723195" cy="2033117"/>
           </a:xfrm>
           <a:prstGeom prst="rect">
             <a:avLst/>
@@ -15326,7 +15461,7 @@
           <p:cNvPr id="10" name="item_2_title">
             <a:extLst>
               <a:ext uri="{FF2B5EF4-FFF2-40B4-BE49-F238E27FC236}">
-                <a16:creationId xmlns:a16="http://schemas.microsoft.com/office/drawing/2014/main" id="{B8468E38-554C-C726-C952-F2247D6637AE}"/>
+                <a16:creationId xmlns:a16="http://schemas.microsoft.com/office/drawing/2014/main" id="{0BD45133-F63B-D306-69C1-26DDD5A7B827}"/>
               </a:ext>
             </a:extLst>
           </p:cNvPr>
@@ -15339,8 +15474,8 @@
         </p:nvSpPr>
         <p:spPr>
           <a:xfrm>
-            <a:off x="3678457" y="2811082"/>
-            <a:ext cx="1931553" cy="847132"/>
+            <a:off x="4440644" y="2811082"/>
+            <a:ext cx="1723195" cy="847132"/>
           </a:xfrm>
           <a:prstGeom prst="rect">
             <a:avLst/>
@@ -15379,7 +15514,7 @@
           <p:cNvPr id="11" name="item_2">
             <a:extLst>
               <a:ext uri="{FF2B5EF4-FFF2-40B4-BE49-F238E27FC236}">
-                <a16:creationId xmlns:a16="http://schemas.microsoft.com/office/drawing/2014/main" id="{6CD7E63B-9621-B67F-BEC7-A9F22C6570AE}"/>
+                <a16:creationId xmlns:a16="http://schemas.microsoft.com/office/drawing/2014/main" id="{EDF5ECF5-EEAA-8584-A062-47DE1C233E0B}"/>
               </a:ext>
             </a:extLst>
           </p:cNvPr>
@@ -15392,8 +15527,8 @@
         </p:nvSpPr>
         <p:spPr>
           <a:xfrm>
-            <a:off x="3678457" y="3658215"/>
-            <a:ext cx="1931553" cy="2033117"/>
+            <a:off x="4440644" y="3658215"/>
+            <a:ext cx="1723195" cy="2033117"/>
           </a:xfrm>
           <a:prstGeom prst="rect">
             <a:avLst/>
@@ -15427,7 +15562,7 @@
           <p:cNvPr id="12" name="item_3_title">
             <a:extLst>
               <a:ext uri="{FF2B5EF4-FFF2-40B4-BE49-F238E27FC236}">
-                <a16:creationId xmlns:a16="http://schemas.microsoft.com/office/drawing/2014/main" id="{202EBE2D-B0A1-C038-4581-896D381CEF1F}"/>
+                <a16:creationId xmlns:a16="http://schemas.microsoft.com/office/drawing/2014/main" id="{FD24CAD9-89D7-5E24-C764-02FDE37E9F5A}"/>
               </a:ext>
             </a:extLst>
           </p:cNvPr>
@@ -15440,8 +15575,8 @@
         </p:nvSpPr>
         <p:spPr>
           <a:xfrm>
-            <a:off x="6158322" y="2811082"/>
-            <a:ext cx="1931553" cy="847132"/>
+            <a:off x="6653004" y="2811082"/>
+            <a:ext cx="1723195" cy="847132"/>
           </a:xfrm>
           <a:prstGeom prst="rect">
             <a:avLst/>
@@ -15480,7 +15615,7 @@
           <p:cNvPr id="13" name="item_3">
             <a:extLst>
               <a:ext uri="{FF2B5EF4-FFF2-40B4-BE49-F238E27FC236}">
-                <a16:creationId xmlns:a16="http://schemas.microsoft.com/office/drawing/2014/main" id="{31755D2E-4D7B-C62C-CD9B-8FDC959D5D44}"/>
+                <a16:creationId xmlns:a16="http://schemas.microsoft.com/office/drawing/2014/main" id="{67208888-59E2-DD10-4F6A-91C6A798018F}"/>
               </a:ext>
             </a:extLst>
           </p:cNvPr>
@@ -15493,8 +15628,8 @@
         </p:nvSpPr>
         <p:spPr>
           <a:xfrm>
-            <a:off x="6158322" y="3658215"/>
-            <a:ext cx="1931553" cy="2033117"/>
+            <a:off x="6653004" y="3658215"/>
+            <a:ext cx="1723195" cy="2033117"/>
           </a:xfrm>
           <a:prstGeom prst="rect">
             <a:avLst/>
@@ -15528,7 +15663,7 @@
           <p:cNvPr id="14" name="item_4_title">
             <a:extLst>
               <a:ext uri="{FF2B5EF4-FFF2-40B4-BE49-F238E27FC236}">
-                <a16:creationId xmlns:a16="http://schemas.microsoft.com/office/drawing/2014/main" id="{59BDAAE6-E65C-E74F-80A7-3CE9138CB2D1}"/>
+                <a16:creationId xmlns:a16="http://schemas.microsoft.com/office/drawing/2014/main" id="{BEB1C6F7-8EA2-C830-F2D8-B82C8CF2025A}"/>
               </a:ext>
             </a:extLst>
           </p:cNvPr>
@@ -15541,8 +15676,8 @@
         </p:nvSpPr>
         <p:spPr>
           <a:xfrm>
-            <a:off x="8638186" y="2811082"/>
-            <a:ext cx="1931553" cy="847132"/>
+            <a:off x="8865364" y="2811082"/>
+            <a:ext cx="1723195" cy="847132"/>
           </a:xfrm>
           <a:prstGeom prst="rect">
             <a:avLst/>
@@ -15581,7 +15716,7 @@
           <p:cNvPr id="15" name="item_4">
             <a:extLst>
               <a:ext uri="{FF2B5EF4-FFF2-40B4-BE49-F238E27FC236}">
-                <a16:creationId xmlns:a16="http://schemas.microsoft.com/office/drawing/2014/main" id="{F210F2A2-B0C6-6A72-8162-F825B64B1C06}"/>
+                <a16:creationId xmlns:a16="http://schemas.microsoft.com/office/drawing/2014/main" id="{00DBEA05-2158-5783-9532-A7D944989A61}"/>
               </a:ext>
             </a:extLst>
           </p:cNvPr>
@@ -15594,8 +15729,8 @@
         </p:nvSpPr>
         <p:spPr>
           <a:xfrm>
-            <a:off x="8638186" y="3658215"/>
-            <a:ext cx="1931553" cy="2033117"/>
+            <a:off x="8865364" y="3658215"/>
+            <a:ext cx="1723195" cy="2033117"/>
           </a:xfrm>
           <a:prstGeom prst="rect">
             <a:avLst/>
@@ -15629,7 +15764,7 @@
           <p:cNvPr id="16" name="source">
             <a:extLst>
               <a:ext uri="{FF2B5EF4-FFF2-40B4-BE49-F238E27FC236}">
-                <a16:creationId xmlns:a16="http://schemas.microsoft.com/office/drawing/2014/main" id="{69E15931-6677-D901-5E0E-C3BFF3C88557}"/>
+                <a16:creationId xmlns:a16="http://schemas.microsoft.com/office/drawing/2014/main" id="{9406C010-4F27-2F0E-5E25-1A553FE459B5}"/>
               </a:ext>
             </a:extLst>
           </p:cNvPr>
@@ -15642,7 +15777,7 @@
         </p:nvSpPr>
         <p:spPr>
           <a:xfrm>
-            <a:off x="1024128" y="6004560"/>
+            <a:off x="2072640" y="6004560"/>
             <a:ext cx="1905000" cy="304800"/>
           </a:xfrm>
           <a:prstGeom prst="roundRect">
@@ -15684,7 +15819,7 @@
     </p:spTree>
     <p:extLst>
       <p:ext uri="{BB962C8B-B14F-4D97-AF65-F5344CB8AC3E}">
-        <p14:creationId xmlns:p14="http://schemas.microsoft.com/office/powerpoint/2010/main" val="2716485576"/>
+        <p14:creationId xmlns:p14="http://schemas.microsoft.com/office/powerpoint/2010/main" val="182715788"/>
       </p:ext>
     </p:extLst>
   </p:cSld>
@@ -15716,7 +15851,7 @@
           <p:cNvPr id="7" name="creative_background">
             <a:extLst>
               <a:ext uri="{FF2B5EF4-FFF2-40B4-BE49-F238E27FC236}">
-                <a16:creationId xmlns:a16="http://schemas.microsoft.com/office/drawing/2014/main" id="{9A7E9D39-A688-C8D9-6FE0-428EC4A024AE}"/>
+                <a16:creationId xmlns:a16="http://schemas.microsoft.com/office/drawing/2014/main" id="{DE0C081B-A90A-C801-6C38-01DD739256B7}"/>
               </a:ext>
             </a:extLst>
           </p:cNvPr>
@@ -15757,7 +15892,12 @@
             <p:ph type="title"/>
           </p:nvPr>
         </p:nvSpPr>
-        <p:spPr/>
+        <p:spPr>
+          <a:xfrm>
+            <a:off x="2072640" y="585216"/>
+            <a:ext cx="8674100" cy="1499616"/>
+          </a:xfrm>
+        </p:spPr>
         <p:txBody>
           <a:bodyPr/>
           <a:lstStyle>
@@ -15784,12 +15924,17 @@
             <p:ph type="dt" sz="half" idx="10"/>
           </p:nvPr>
         </p:nvSpPr>
-        <p:spPr/>
+        <p:spPr>
+          <a:xfrm>
+            <a:off x="2072640" y="6470704"/>
+            <a:ext cx="1104900" cy="274320"/>
+          </a:xfrm>
+        </p:spPr>
         <p:txBody>
           <a:bodyPr/>
           <a:lstStyle/>
           <a:p>
-            <a:fld id="{B5D244B9-259B-433A-84B9-2D3FCD42690F}" type="datetimeFigureOut">
+            <a:fld id="{F163761A-A4E5-4C7D-9728-6F0BC80FAE16}" type="datetimeFigureOut">
               <a:rPr lang="en-US" smtClean="0"/>
               <a:t>10/3/2026</a:t>
             </a:fld>
@@ -15831,7 +15976,7 @@
           <a:bodyPr/>
           <a:lstStyle/>
           <a:p>
-            <a:fld id="{F9842B40-88D3-4B59-923A-4074BB0E4CE6}" type="slidenum">
+            <a:fld id="{4DDE2B9A-5AB6-497C-A8BC-8EC14D6B62BC}" type="slidenum">
               <a:rPr lang="en-US" smtClean="0"/>
               <a:t>‹#›</a:t>
             </a:fld>
@@ -15844,7 +15989,7 @@
           <p:cNvPr id="8" name="kpi_value_1">
             <a:extLst>
               <a:ext uri="{FF2B5EF4-FFF2-40B4-BE49-F238E27FC236}">
-                <a16:creationId xmlns:a16="http://schemas.microsoft.com/office/drawing/2014/main" id="{B529458A-D601-7849-FC24-5F3D33F7E8E0}"/>
+                <a16:creationId xmlns:a16="http://schemas.microsoft.com/office/drawing/2014/main" id="{CB77B2C9-9479-736D-149B-2CCA3C15C72E}"/>
               </a:ext>
             </a:extLst>
           </p:cNvPr>
@@ -15857,8 +16002,8 @@
         </p:nvSpPr>
         <p:spPr>
           <a:xfrm>
-            <a:off x="1198591" y="2472230"/>
-            <a:ext cx="4705512" cy="1995843"/>
+            <a:off x="2228283" y="2472230"/>
+            <a:ext cx="4197925" cy="1995843"/>
           </a:xfrm>
         </p:spPr>
         <p:txBody>
@@ -15894,7 +16039,7 @@
           <p:cNvPr id="9" name="kpi_label_1">
             <a:extLst>
               <a:ext uri="{FF2B5EF4-FFF2-40B4-BE49-F238E27FC236}">
-                <a16:creationId xmlns:a16="http://schemas.microsoft.com/office/drawing/2014/main" id="{09D5F4BE-1F8C-55F3-1A02-79D7414E7E8D}"/>
+                <a16:creationId xmlns:a16="http://schemas.microsoft.com/office/drawing/2014/main" id="{05BE147D-4C8A-B0ED-51B1-411BA72336E2}"/>
               </a:ext>
             </a:extLst>
           </p:cNvPr>
@@ -15907,8 +16052,8 @@
         </p:nvSpPr>
         <p:spPr>
           <a:xfrm>
-            <a:off x="1198591" y="4532455"/>
-            <a:ext cx="4705512" cy="1158877"/>
+            <a:off x="2228284" y="4532455"/>
+            <a:ext cx="4197925" cy="1158877"/>
           </a:xfrm>
           <a:prstGeom prst="rect">
             <a:avLst/>
@@ -15942,7 +16087,7 @@
           <p:cNvPr id="10" name="quote">
             <a:extLst>
               <a:ext uri="{FF2B5EF4-FFF2-40B4-BE49-F238E27FC236}">
-                <a16:creationId xmlns:a16="http://schemas.microsoft.com/office/drawing/2014/main" id="{B3B4E184-F01A-0197-5B99-97C412FECE67}"/>
+                <a16:creationId xmlns:a16="http://schemas.microsoft.com/office/drawing/2014/main" id="{764EB69D-3915-72E7-3F2A-C619C985E40B}"/>
               </a:ext>
             </a:extLst>
           </p:cNvPr>
@@ -15955,8 +16100,8 @@
         </p:nvSpPr>
         <p:spPr>
           <a:xfrm>
-            <a:off x="1198591" y="2472230"/>
-            <a:ext cx="4705512" cy="2510899"/>
+            <a:off x="2228284" y="2472230"/>
+            <a:ext cx="4197925" cy="2510899"/>
           </a:xfrm>
           <a:prstGeom prst="rect">
             <a:avLst/>
@@ -15992,7 +16137,7 @@
           <p:cNvPr id="11" name="attribution">
             <a:extLst>
               <a:ext uri="{FF2B5EF4-FFF2-40B4-BE49-F238E27FC236}">
-                <a16:creationId xmlns:a16="http://schemas.microsoft.com/office/drawing/2014/main" id="{2C0D79FB-3BC5-A08B-0CE5-14E0014152E4}"/>
+                <a16:creationId xmlns:a16="http://schemas.microsoft.com/office/drawing/2014/main" id="{A1529C32-8357-9039-F017-06E621C93779}"/>
               </a:ext>
             </a:extLst>
           </p:cNvPr>
@@ -16005,8 +16150,8 @@
         </p:nvSpPr>
         <p:spPr>
           <a:xfrm>
-            <a:off x="1198591" y="5047511"/>
-            <a:ext cx="4705512" cy="643820"/>
+            <a:off x="2228284" y="5047511"/>
+            <a:ext cx="4197925" cy="643820"/>
           </a:xfrm>
           <a:prstGeom prst="rect">
             <a:avLst/>
@@ -16040,7 +16185,7 @@
           <p:cNvPr id="12" name="item_1_title">
             <a:extLst>
               <a:ext uri="{FF2B5EF4-FFF2-40B4-BE49-F238E27FC236}">
-                <a16:creationId xmlns:a16="http://schemas.microsoft.com/office/drawing/2014/main" id="{9F0CE9E1-8ACB-3B28-7100-363D82759E1C}"/>
+                <a16:creationId xmlns:a16="http://schemas.microsoft.com/office/drawing/2014/main" id="{F90F637D-0684-1680-5A28-9FD5B8E5CA16}"/>
               </a:ext>
             </a:extLst>
           </p:cNvPr>
@@ -16053,8 +16198,8 @@
         </p:nvSpPr>
         <p:spPr>
           <a:xfrm>
-            <a:off x="6467369" y="2286001"/>
-            <a:ext cx="4276832" cy="1056341"/>
+            <a:off x="6928715" y="2286001"/>
+            <a:ext cx="3815487" cy="1056341"/>
           </a:xfrm>
           <a:prstGeom prst="rect">
             <a:avLst/>
@@ -16093,7 +16238,7 @@
           <p:cNvPr id="13" name="item_1">
             <a:extLst>
               <a:ext uri="{FF2B5EF4-FFF2-40B4-BE49-F238E27FC236}">
-                <a16:creationId xmlns:a16="http://schemas.microsoft.com/office/drawing/2014/main" id="{F6C89C2F-E37B-AFA9-D026-A93779CFA3AB}"/>
+                <a16:creationId xmlns:a16="http://schemas.microsoft.com/office/drawing/2014/main" id="{136EDCB0-ACDC-A800-B034-CB89AD8E2138}"/>
               </a:ext>
             </a:extLst>
           </p:cNvPr>
@@ -16106,8 +16251,8 @@
         </p:nvSpPr>
         <p:spPr>
           <a:xfrm>
-            <a:off x="6467369" y="3342342"/>
-            <a:ext cx="4276832" cy="2535219"/>
+            <a:off x="6928715" y="3342342"/>
+            <a:ext cx="3815487" cy="2535219"/>
           </a:xfrm>
           <a:prstGeom prst="rect">
             <a:avLst/>
@@ -16141,7 +16286,7 @@
           <p:cNvPr id="14" name="source">
             <a:extLst>
               <a:ext uri="{FF2B5EF4-FFF2-40B4-BE49-F238E27FC236}">
-                <a16:creationId xmlns:a16="http://schemas.microsoft.com/office/drawing/2014/main" id="{1143CE25-888D-8D69-043E-EB0D8E694AA9}"/>
+                <a16:creationId xmlns:a16="http://schemas.microsoft.com/office/drawing/2014/main" id="{7182793D-03B0-808C-1355-7D13D3BE3260}"/>
               </a:ext>
             </a:extLst>
           </p:cNvPr>
@@ -16154,7 +16299,7 @@
         </p:nvSpPr>
         <p:spPr>
           <a:xfrm>
-            <a:off x="1024128" y="6004560"/>
+            <a:off x="2072640" y="6004560"/>
             <a:ext cx="1905000" cy="304800"/>
           </a:xfrm>
           <a:prstGeom prst="roundRect">
@@ -16196,7 +16341,7 @@
     </p:spTree>
     <p:extLst>
       <p:ext uri="{BB962C8B-B14F-4D97-AF65-F5344CB8AC3E}">
-        <p14:creationId xmlns:p14="http://schemas.microsoft.com/office/powerpoint/2010/main" val="4196401535"/>
+        <p14:creationId xmlns:p14="http://schemas.microsoft.com/office/powerpoint/2010/main" val="1227762322"/>
       </p:ext>
     </p:extLst>
   </p:cSld>
@@ -16228,7 +16373,7 @@
           <p:cNvPr id="7" name="creative_background">
             <a:extLst>
               <a:ext uri="{FF2B5EF4-FFF2-40B4-BE49-F238E27FC236}">
-                <a16:creationId xmlns:a16="http://schemas.microsoft.com/office/drawing/2014/main" id="{12846BE1-D76F-43E8-9B68-711B092943B0}"/>
+                <a16:creationId xmlns:a16="http://schemas.microsoft.com/office/drawing/2014/main" id="{7C1F8195-C4CE-0228-8BCC-A762F322469B}"/>
               </a:ext>
             </a:extLst>
           </p:cNvPr>
@@ -16269,7 +16414,12 @@
             <p:ph type="title"/>
           </p:nvPr>
         </p:nvSpPr>
-        <p:spPr/>
+        <p:spPr>
+          <a:xfrm>
+            <a:off x="2072640" y="585216"/>
+            <a:ext cx="8674100" cy="1499616"/>
+          </a:xfrm>
+        </p:spPr>
         <p:txBody>
           <a:bodyPr/>
           <a:lstStyle>
@@ -16296,12 +16446,17 @@
             <p:ph type="dt" sz="half" idx="10"/>
           </p:nvPr>
         </p:nvSpPr>
-        <p:spPr/>
+        <p:spPr>
+          <a:xfrm>
+            <a:off x="2072640" y="6470704"/>
+            <a:ext cx="1104900" cy="274320"/>
+          </a:xfrm>
+        </p:spPr>
         <p:txBody>
           <a:bodyPr/>
           <a:lstStyle/>
           <a:p>
-            <a:fld id="{B5D244B9-259B-433A-84B9-2D3FCD42690F}" type="datetimeFigureOut">
+            <a:fld id="{F163761A-A4E5-4C7D-9728-6F0BC80FAE16}" type="datetimeFigureOut">
               <a:rPr lang="en-US" smtClean="0"/>
               <a:t>10/3/2026</a:t>
             </a:fld>
@@ -16343,7 +16498,7 @@
           <a:bodyPr/>
           <a:lstStyle/>
           <a:p>
-            <a:fld id="{F9842B40-88D3-4B59-923A-4074BB0E4CE6}" type="slidenum">
+            <a:fld id="{4DDE2B9A-5AB6-497C-A8BC-8EC14D6B62BC}" type="slidenum">
               <a:rPr lang="en-US" smtClean="0"/>
               <a:t>‹#›</a:t>
             </a:fld>
@@ -16356,7 +16511,7 @@
           <p:cNvPr id="8" name="item_1_title">
             <a:extLst>
               <a:ext uri="{FF2B5EF4-FFF2-40B4-BE49-F238E27FC236}">
-                <a16:creationId xmlns:a16="http://schemas.microsoft.com/office/drawing/2014/main" id="{4F2AF1D1-0877-FF26-553E-A4D3A5997312}"/>
+                <a16:creationId xmlns:a16="http://schemas.microsoft.com/office/drawing/2014/main" id="{E1986508-EE45-5155-DF78-3F1276AE7FE1}"/>
               </a:ext>
             </a:extLst>
           </p:cNvPr>
@@ -16369,8 +16524,8 @@
         </p:nvSpPr>
         <p:spPr>
           <a:xfrm>
-            <a:off x="1198591" y="2472230"/>
-            <a:ext cx="2758175" cy="946795"/>
+            <a:off x="2228283" y="2472230"/>
+            <a:ext cx="2460648" cy="946795"/>
           </a:xfrm>
         </p:spPr>
         <p:txBody>
@@ -16406,7 +16561,7 @@
           <p:cNvPr id="9" name="item_1">
             <a:extLst>
               <a:ext uri="{FF2B5EF4-FFF2-40B4-BE49-F238E27FC236}">
-                <a16:creationId xmlns:a16="http://schemas.microsoft.com/office/drawing/2014/main" id="{966A9CA3-CF64-4D5C-960D-33A233AD6EC4}"/>
+                <a16:creationId xmlns:a16="http://schemas.microsoft.com/office/drawing/2014/main" id="{295881D7-DAF9-39F4-FB0A-15D305F467C7}"/>
               </a:ext>
             </a:extLst>
           </p:cNvPr>
@@ -16419,8 +16574,8 @@
         </p:nvSpPr>
         <p:spPr>
           <a:xfrm>
-            <a:off x="1198592" y="3419025"/>
-            <a:ext cx="2758175" cy="2272307"/>
+            <a:off x="2228283" y="3419025"/>
+            <a:ext cx="2460648" cy="2272307"/>
           </a:xfrm>
           <a:prstGeom prst="rect">
             <a:avLst/>
@@ -16454,7 +16609,7 @@
           <p:cNvPr id="10" name="item_2_title">
             <a:extLst>
               <a:ext uri="{FF2B5EF4-FFF2-40B4-BE49-F238E27FC236}">
-                <a16:creationId xmlns:a16="http://schemas.microsoft.com/office/drawing/2014/main" id="{5B0C1BBE-5F1B-85E1-6B9F-9B69E764FF75}"/>
+                <a16:creationId xmlns:a16="http://schemas.microsoft.com/office/drawing/2014/main" id="{0484604C-5B50-35E8-D5E5-8A0AAEF5EDF1}"/>
               </a:ext>
             </a:extLst>
           </p:cNvPr>
@@ -16467,8 +16622,8 @@
         </p:nvSpPr>
         <p:spPr>
           <a:xfrm>
-            <a:off x="4505078" y="2472230"/>
-            <a:ext cx="2758175" cy="946795"/>
+            <a:off x="5178097" y="2472230"/>
+            <a:ext cx="2460648" cy="946795"/>
           </a:xfrm>
           <a:prstGeom prst="rect">
             <a:avLst/>
@@ -16507,7 +16662,7 @@
           <p:cNvPr id="11" name="item_2">
             <a:extLst>
               <a:ext uri="{FF2B5EF4-FFF2-40B4-BE49-F238E27FC236}">
-                <a16:creationId xmlns:a16="http://schemas.microsoft.com/office/drawing/2014/main" id="{C379EA7A-5A8B-85C6-D297-DBD92E0B4CB3}"/>
+                <a16:creationId xmlns:a16="http://schemas.microsoft.com/office/drawing/2014/main" id="{35DE6D12-7B02-8369-D379-3E4384D39D90}"/>
               </a:ext>
             </a:extLst>
           </p:cNvPr>
@@ -16520,8 +16675,8 @@
         </p:nvSpPr>
         <p:spPr>
           <a:xfrm>
-            <a:off x="4505078" y="3419025"/>
-            <a:ext cx="2758175" cy="2272307"/>
+            <a:off x="5178097" y="3419025"/>
+            <a:ext cx="2460648" cy="2272307"/>
           </a:xfrm>
           <a:prstGeom prst="rect">
             <a:avLst/>
@@ -16555,7 +16710,7 @@
           <p:cNvPr id="12" name="item_3_title">
             <a:extLst>
               <a:ext uri="{FF2B5EF4-FFF2-40B4-BE49-F238E27FC236}">
-                <a16:creationId xmlns:a16="http://schemas.microsoft.com/office/drawing/2014/main" id="{97A8D108-FFB3-0841-2C63-7952DCB63F00}"/>
+                <a16:creationId xmlns:a16="http://schemas.microsoft.com/office/drawing/2014/main" id="{1747E4D6-7937-2CC2-275C-DEB6B8028288}"/>
               </a:ext>
             </a:extLst>
           </p:cNvPr>
@@ -16568,8 +16723,8 @@
         </p:nvSpPr>
         <p:spPr>
           <a:xfrm>
-            <a:off x="7811565" y="2472230"/>
-            <a:ext cx="2758175" cy="946795"/>
+            <a:off x="8127910" y="2472230"/>
+            <a:ext cx="2460648" cy="946795"/>
           </a:xfrm>
           <a:prstGeom prst="rect">
             <a:avLst/>
@@ -16608,7 +16763,7 @@
           <p:cNvPr id="13" name="item_3">
             <a:extLst>
               <a:ext uri="{FF2B5EF4-FFF2-40B4-BE49-F238E27FC236}">
-                <a16:creationId xmlns:a16="http://schemas.microsoft.com/office/drawing/2014/main" id="{B6F66FE9-51ED-296D-6904-E25F1070B595}"/>
+                <a16:creationId xmlns:a16="http://schemas.microsoft.com/office/drawing/2014/main" id="{4E7F5031-F435-6123-5561-1BC882E1E971}"/>
               </a:ext>
             </a:extLst>
           </p:cNvPr>
@@ -16621,8 +16776,8 @@
         </p:nvSpPr>
         <p:spPr>
           <a:xfrm>
-            <a:off x="7811565" y="3419025"/>
-            <a:ext cx="2758175" cy="2272307"/>
+            <a:off x="8127910" y="3419025"/>
+            <a:ext cx="2460648" cy="2272307"/>
           </a:xfrm>
           <a:prstGeom prst="rect">
             <a:avLst/>
@@ -16656,7 +16811,7 @@
           <p:cNvPr id="14" name="source">
             <a:extLst>
               <a:ext uri="{FF2B5EF4-FFF2-40B4-BE49-F238E27FC236}">
-                <a16:creationId xmlns:a16="http://schemas.microsoft.com/office/drawing/2014/main" id="{74809668-8024-D3C3-49C4-2AB2BB484BD7}"/>
+                <a16:creationId xmlns:a16="http://schemas.microsoft.com/office/drawing/2014/main" id="{11FF80C7-2947-C30E-0961-068D4009ED2C}"/>
               </a:ext>
             </a:extLst>
           </p:cNvPr>
@@ -16669,7 +16824,7 @@
         </p:nvSpPr>
         <p:spPr>
           <a:xfrm>
-            <a:off x="1024128" y="6004560"/>
+            <a:off x="2072640" y="6004560"/>
             <a:ext cx="1905000" cy="304800"/>
           </a:xfrm>
           <a:prstGeom prst="roundRect">
@@ -16711,7 +16866,7 @@
     </p:spTree>
     <p:extLst>
       <p:ext uri="{BB962C8B-B14F-4D97-AF65-F5344CB8AC3E}">
-        <p14:creationId xmlns:p14="http://schemas.microsoft.com/office/powerpoint/2010/main" val="3222690097"/>
+        <p14:creationId xmlns:p14="http://schemas.microsoft.com/office/powerpoint/2010/main" val="2698191588"/>
       </p:ext>
     </p:extLst>
   </p:cSld>
@@ -16743,7 +16898,7 @@
           <p:cNvPr id="7" name="creative_background">
             <a:extLst>
               <a:ext uri="{FF2B5EF4-FFF2-40B4-BE49-F238E27FC236}">
-                <a16:creationId xmlns:a16="http://schemas.microsoft.com/office/drawing/2014/main" id="{C3DC06E4-0087-8908-130B-1D6566328094}"/>
+                <a16:creationId xmlns:a16="http://schemas.microsoft.com/office/drawing/2014/main" id="{B21ACCD4-770C-D3F3-0BF8-745BED38B691}"/>
               </a:ext>
             </a:extLst>
           </p:cNvPr>
@@ -16784,7 +16939,12 @@
             <p:ph type="title"/>
           </p:nvPr>
         </p:nvSpPr>
-        <p:spPr/>
+        <p:spPr>
+          <a:xfrm>
+            <a:off x="2072640" y="585216"/>
+            <a:ext cx="8674100" cy="1499616"/>
+          </a:xfrm>
+        </p:spPr>
         <p:txBody>
           <a:bodyPr/>
           <a:lstStyle>
@@ -16811,12 +16971,17 @@
             <p:ph type="dt" sz="half" idx="10"/>
           </p:nvPr>
         </p:nvSpPr>
-        <p:spPr/>
+        <p:spPr>
+          <a:xfrm>
+            <a:off x="2072640" y="6470704"/>
+            <a:ext cx="1104900" cy="274320"/>
+          </a:xfrm>
+        </p:spPr>
         <p:txBody>
           <a:bodyPr/>
           <a:lstStyle/>
           <a:p>
-            <a:fld id="{B5D244B9-259B-433A-84B9-2D3FCD42690F}" type="datetimeFigureOut">
+            <a:fld id="{F163761A-A4E5-4C7D-9728-6F0BC80FAE16}" type="datetimeFigureOut">
               <a:rPr lang="en-US" smtClean="0"/>
               <a:t>10/3/2026</a:t>
             </a:fld>
@@ -16858,7 +17023,7 @@
           <a:bodyPr/>
           <a:lstStyle/>
           <a:p>
-            <a:fld id="{F9842B40-88D3-4B59-923A-4074BB0E4CE6}" type="slidenum">
+            <a:fld id="{4DDE2B9A-5AB6-497C-A8BC-8EC14D6B62BC}" type="slidenum">
               <a:rPr lang="en-US" smtClean="0"/>
               <a:t>‹#›</a:t>
             </a:fld>
@@ -16871,7 +17036,7 @@
           <p:cNvPr id="8" name="marker_1">
             <a:extLst>
               <a:ext uri="{FF2B5EF4-FFF2-40B4-BE49-F238E27FC236}">
-                <a16:creationId xmlns:a16="http://schemas.microsoft.com/office/drawing/2014/main" id="{F9C9CC53-3510-3258-C186-FAD735C95D5C}"/>
+                <a16:creationId xmlns:a16="http://schemas.microsoft.com/office/drawing/2014/main" id="{49CBD5F4-3367-7D00-F50B-C62CED494984}"/>
               </a:ext>
             </a:extLst>
           </p:cNvPr>
@@ -16884,8 +17049,8 @@
         </p:nvSpPr>
         <p:spPr>
           <a:xfrm>
-            <a:off x="1198591" y="2472230"/>
-            <a:ext cx="548312" cy="585291"/>
+            <a:off x="2228283" y="2472230"/>
+            <a:ext cx="489165" cy="585291"/>
           </a:xfrm>
           <a:prstGeom prst="ellipse">
             <a:avLst/>
@@ -16927,7 +17092,7 @@
           <p:cNvPr id="9" name="item_1_title">
             <a:extLst>
               <a:ext uri="{FF2B5EF4-FFF2-40B4-BE49-F238E27FC236}">
-                <a16:creationId xmlns:a16="http://schemas.microsoft.com/office/drawing/2014/main" id="{08844098-9B5E-2C34-FA22-A74D3818B6C5}"/>
+                <a16:creationId xmlns:a16="http://schemas.microsoft.com/office/drawing/2014/main" id="{44E11F1B-53FD-36AF-0D13-45BD09DFB2AB}"/>
               </a:ext>
             </a:extLst>
           </p:cNvPr>
@@ -16940,8 +17105,8 @@
         </p:nvSpPr>
         <p:spPr>
           <a:xfrm>
-            <a:off x="1846597" y="2472230"/>
-            <a:ext cx="8723143" cy="387325"/>
+            <a:off x="2806388" y="2472230"/>
+            <a:ext cx="7782171" cy="387325"/>
           </a:xfrm>
           <a:prstGeom prst="rect">
             <a:avLst/>
@@ -16980,7 +17145,7 @@
           <p:cNvPr id="10" name="item_1">
             <a:extLst>
               <a:ext uri="{FF2B5EF4-FFF2-40B4-BE49-F238E27FC236}">
-                <a16:creationId xmlns:a16="http://schemas.microsoft.com/office/drawing/2014/main" id="{6059A389-911D-88AC-AB36-8D90C5D6B4F9}"/>
+                <a16:creationId xmlns:a16="http://schemas.microsoft.com/office/drawing/2014/main" id="{13049A69-FF66-B5D7-D3C4-0B7A87E05E4E}"/>
               </a:ext>
             </a:extLst>
           </p:cNvPr>
@@ -16993,8 +17158,8 @@
         </p:nvSpPr>
         <p:spPr>
           <a:xfrm>
-            <a:off x="1846597" y="2859554"/>
-            <a:ext cx="8723143" cy="929580"/>
+            <a:off x="2806388" y="2859554"/>
+            <a:ext cx="7782171" cy="929580"/>
           </a:xfrm>
           <a:prstGeom prst="rect">
             <a:avLst/>
@@ -17028,7 +17193,7 @@
           <p:cNvPr id="11" name="marker_2">
             <a:extLst>
               <a:ext uri="{FF2B5EF4-FFF2-40B4-BE49-F238E27FC236}">
-                <a16:creationId xmlns:a16="http://schemas.microsoft.com/office/drawing/2014/main" id="{57319F18-4346-44DA-D977-EE59C53C3D51}"/>
+                <a16:creationId xmlns:a16="http://schemas.microsoft.com/office/drawing/2014/main" id="{B5920BA4-E76C-81C7-770E-D0924916C1CA}"/>
               </a:ext>
             </a:extLst>
           </p:cNvPr>
@@ -17041,8 +17206,8 @@
         </p:nvSpPr>
         <p:spPr>
           <a:xfrm>
-            <a:off x="1198591" y="4374427"/>
-            <a:ext cx="548312" cy="585291"/>
+            <a:off x="2228284" y="4374427"/>
+            <a:ext cx="489165" cy="585291"/>
           </a:xfrm>
           <a:prstGeom prst="ellipse">
             <a:avLst/>
@@ -17084,7 +17249,7 @@
           <p:cNvPr id="12" name="item_2_title">
             <a:extLst>
               <a:ext uri="{FF2B5EF4-FFF2-40B4-BE49-F238E27FC236}">
-                <a16:creationId xmlns:a16="http://schemas.microsoft.com/office/drawing/2014/main" id="{B9E7C7E3-7EDC-8A61-614D-378EB9E32AC6}"/>
+                <a16:creationId xmlns:a16="http://schemas.microsoft.com/office/drawing/2014/main" id="{42AFA3A2-5281-6A4A-57DD-A76583DB732D}"/>
               </a:ext>
             </a:extLst>
           </p:cNvPr>
@@ -17097,8 +17262,8 @@
         </p:nvSpPr>
         <p:spPr>
           <a:xfrm>
-            <a:off x="1846597" y="4374427"/>
-            <a:ext cx="8723143" cy="387325"/>
+            <a:off x="2806388" y="4374427"/>
+            <a:ext cx="7782171" cy="387325"/>
           </a:xfrm>
           <a:prstGeom prst="rect">
             <a:avLst/>
@@ -17137,7 +17302,7 @@
           <p:cNvPr id="13" name="item_2">
             <a:extLst>
               <a:ext uri="{FF2B5EF4-FFF2-40B4-BE49-F238E27FC236}">
-                <a16:creationId xmlns:a16="http://schemas.microsoft.com/office/drawing/2014/main" id="{C9887532-7F53-C4F3-A815-8A3F0A66F6AA}"/>
+                <a16:creationId xmlns:a16="http://schemas.microsoft.com/office/drawing/2014/main" id="{B76DD944-525A-0E09-9F00-9E13E186F0EB}"/>
               </a:ext>
             </a:extLst>
           </p:cNvPr>
@@ -17150,8 +17315,8 @@
         </p:nvSpPr>
         <p:spPr>
           <a:xfrm>
-            <a:off x="1846597" y="4761750"/>
-            <a:ext cx="8723143" cy="929580"/>
+            <a:off x="2806388" y="4761750"/>
+            <a:ext cx="7782171" cy="929580"/>
           </a:xfrm>
           <a:prstGeom prst="rect">
             <a:avLst/>
@@ -17185,7 +17350,7 @@
           <p:cNvPr id="14" name="source">
             <a:extLst>
               <a:ext uri="{FF2B5EF4-FFF2-40B4-BE49-F238E27FC236}">
-                <a16:creationId xmlns:a16="http://schemas.microsoft.com/office/drawing/2014/main" id="{43D83C2F-E121-97C4-682B-115FF6D69ADC}"/>
+                <a16:creationId xmlns:a16="http://schemas.microsoft.com/office/drawing/2014/main" id="{573D97CB-1502-1271-ACF7-4F3A9F46BFB8}"/>
               </a:ext>
             </a:extLst>
           </p:cNvPr>
@@ -17198,7 +17363,7 @@
         </p:nvSpPr>
         <p:spPr>
           <a:xfrm>
-            <a:off x="1024128" y="6004560"/>
+            <a:off x="2072640" y="6004560"/>
             <a:ext cx="1905000" cy="304800"/>
           </a:xfrm>
           <a:prstGeom prst="roundRect">
@@ -17240,7 +17405,7 @@
     </p:spTree>
     <p:extLst>
       <p:ext uri="{BB962C8B-B14F-4D97-AF65-F5344CB8AC3E}">
-        <p14:creationId xmlns:p14="http://schemas.microsoft.com/office/powerpoint/2010/main" val="1023461878"/>
+        <p14:creationId xmlns:p14="http://schemas.microsoft.com/office/powerpoint/2010/main" val="1863644360"/>
       </p:ext>
     </p:extLst>
   </p:cSld>
@@ -17272,7 +17437,7 @@
           <p:cNvPr id="7" name="creative_background">
             <a:extLst>
               <a:ext uri="{FF2B5EF4-FFF2-40B4-BE49-F238E27FC236}">
-                <a16:creationId xmlns:a16="http://schemas.microsoft.com/office/drawing/2014/main" id="{5EFF74C4-D909-4606-5448-88B131E1A201}"/>
+                <a16:creationId xmlns:a16="http://schemas.microsoft.com/office/drawing/2014/main" id="{48E39F7C-E6BF-3486-2377-D327E901A598}"/>
               </a:ext>
             </a:extLst>
           </p:cNvPr>
@@ -17313,7 +17478,12 @@
             <p:ph type="title"/>
           </p:nvPr>
         </p:nvSpPr>
-        <p:spPr/>
+        <p:spPr>
+          <a:xfrm>
+            <a:off x="2072640" y="585216"/>
+            <a:ext cx="8674100" cy="1499616"/>
+          </a:xfrm>
+        </p:spPr>
         <p:txBody>
           <a:bodyPr/>
           <a:lstStyle>
@@ -17340,12 +17510,17 @@
             <p:ph type="dt" sz="half" idx="10"/>
           </p:nvPr>
         </p:nvSpPr>
-        <p:spPr/>
+        <p:spPr>
+          <a:xfrm>
+            <a:off x="2072640" y="6470704"/>
+            <a:ext cx="1104900" cy="274320"/>
+          </a:xfrm>
+        </p:spPr>
         <p:txBody>
           <a:bodyPr/>
           <a:lstStyle/>
           <a:p>
-            <a:fld id="{B5D244B9-259B-433A-84B9-2D3FCD42690F}" type="datetimeFigureOut">
+            <a:fld id="{F163761A-A4E5-4C7D-9728-6F0BC80FAE16}" type="datetimeFigureOut">
               <a:rPr lang="en-US" smtClean="0"/>
               <a:t>10/3/2026</a:t>
             </a:fld>
@@ -17387,7 +17562,7 @@
           <a:bodyPr/>
           <a:lstStyle/>
           <a:p>
-            <a:fld id="{F9842B40-88D3-4B59-923A-4074BB0E4CE6}" type="slidenum">
+            <a:fld id="{4DDE2B9A-5AB6-497C-A8BC-8EC14D6B62BC}" type="slidenum">
               <a:rPr lang="en-US" smtClean="0"/>
               <a:t>‹#›</a:t>
             </a:fld>
@@ -17400,7 +17575,7 @@
           <p:cNvPr id="8" name="kpi_value_1">
             <a:extLst>
               <a:ext uri="{FF2B5EF4-FFF2-40B4-BE49-F238E27FC236}">
-                <a16:creationId xmlns:a16="http://schemas.microsoft.com/office/drawing/2014/main" id="{704C470E-86A8-2F35-F13D-9FC54292D04D}"/>
+                <a16:creationId xmlns:a16="http://schemas.microsoft.com/office/drawing/2014/main" id="{82BF1548-EA41-421E-F391-8900626AF235}"/>
               </a:ext>
             </a:extLst>
           </p:cNvPr>
@@ -17413,8 +17588,8 @@
         </p:nvSpPr>
         <p:spPr>
           <a:xfrm>
-            <a:off x="1198591" y="2472230"/>
-            <a:ext cx="4705512" cy="1995843"/>
+            <a:off x="2228283" y="2472230"/>
+            <a:ext cx="4197925" cy="1995843"/>
           </a:xfrm>
         </p:spPr>
         <p:txBody>
@@ -17450,7 +17625,7 @@
           <p:cNvPr id="9" name="kpi_label_1">
             <a:extLst>
               <a:ext uri="{FF2B5EF4-FFF2-40B4-BE49-F238E27FC236}">
-                <a16:creationId xmlns:a16="http://schemas.microsoft.com/office/drawing/2014/main" id="{323A5A4D-67C3-5011-F26D-411E65AAF1F7}"/>
+                <a16:creationId xmlns:a16="http://schemas.microsoft.com/office/drawing/2014/main" id="{1D47BCD6-1193-3E7C-E187-2F6B3B61D199}"/>
               </a:ext>
             </a:extLst>
           </p:cNvPr>
@@ -17463,8 +17638,8 @@
         </p:nvSpPr>
         <p:spPr>
           <a:xfrm>
-            <a:off x="1198591" y="4532455"/>
-            <a:ext cx="4705512" cy="1158877"/>
+            <a:off x="2228284" y="4532455"/>
+            <a:ext cx="4197925" cy="1158877"/>
           </a:xfrm>
           <a:prstGeom prst="rect">
             <a:avLst/>
@@ -17498,7 +17673,7 @@
           <p:cNvPr id="10" name="quote">
             <a:extLst>
               <a:ext uri="{FF2B5EF4-FFF2-40B4-BE49-F238E27FC236}">
-                <a16:creationId xmlns:a16="http://schemas.microsoft.com/office/drawing/2014/main" id="{F44B88B8-30FF-3FC5-A21B-4E22D6EB8F07}"/>
+                <a16:creationId xmlns:a16="http://schemas.microsoft.com/office/drawing/2014/main" id="{DE06D7DB-03C4-99A2-3E68-3BB8ACA5B50B}"/>
               </a:ext>
             </a:extLst>
           </p:cNvPr>
@@ -17511,8 +17686,8 @@
         </p:nvSpPr>
         <p:spPr>
           <a:xfrm>
-            <a:off x="1198591" y="2472230"/>
-            <a:ext cx="4705512" cy="2510899"/>
+            <a:off x="2228284" y="2472230"/>
+            <a:ext cx="4197925" cy="2510899"/>
           </a:xfrm>
           <a:prstGeom prst="rect">
             <a:avLst/>
@@ -17548,7 +17723,7 @@
           <p:cNvPr id="11" name="attribution">
             <a:extLst>
               <a:ext uri="{FF2B5EF4-FFF2-40B4-BE49-F238E27FC236}">
-                <a16:creationId xmlns:a16="http://schemas.microsoft.com/office/drawing/2014/main" id="{4F74428E-EF04-738D-54FA-36A816537231}"/>
+                <a16:creationId xmlns:a16="http://schemas.microsoft.com/office/drawing/2014/main" id="{594AB0EC-8340-31E9-593F-320A6AECB043}"/>
               </a:ext>
             </a:extLst>
           </p:cNvPr>
@@ -17561,8 +17736,8 @@
         </p:nvSpPr>
         <p:spPr>
           <a:xfrm>
-            <a:off x="1198591" y="5047511"/>
-            <a:ext cx="4705512" cy="643820"/>
+            <a:off x="2228284" y="5047511"/>
+            <a:ext cx="4197925" cy="643820"/>
           </a:xfrm>
           <a:prstGeom prst="rect">
             <a:avLst/>
@@ -17596,7 +17771,7 @@
           <p:cNvPr id="12" name="item_1_title">
             <a:extLst>
               <a:ext uri="{FF2B5EF4-FFF2-40B4-BE49-F238E27FC236}">
-                <a16:creationId xmlns:a16="http://schemas.microsoft.com/office/drawing/2014/main" id="{0F613212-5B1A-61FA-2CF2-B2C7688E1502}"/>
+                <a16:creationId xmlns:a16="http://schemas.microsoft.com/office/drawing/2014/main" id="{64DC1073-E343-32B1-503C-E181DD48D958}"/>
               </a:ext>
             </a:extLst>
           </p:cNvPr>
@@ -17609,8 +17784,8 @@
         </p:nvSpPr>
         <p:spPr>
           <a:xfrm>
-            <a:off x="6467369" y="2286001"/>
-            <a:ext cx="4276832" cy="1056341"/>
+            <a:off x="6928715" y="2286001"/>
+            <a:ext cx="3815487" cy="1056341"/>
           </a:xfrm>
           <a:prstGeom prst="rect">
             <a:avLst/>
@@ -17649,7 +17824,7 @@
           <p:cNvPr id="13" name="item_1">
             <a:extLst>
               <a:ext uri="{FF2B5EF4-FFF2-40B4-BE49-F238E27FC236}">
-                <a16:creationId xmlns:a16="http://schemas.microsoft.com/office/drawing/2014/main" id="{F2C37ACC-4869-893B-C6D7-68FB179E71A2}"/>
+                <a16:creationId xmlns:a16="http://schemas.microsoft.com/office/drawing/2014/main" id="{2EF5B381-5B3A-2632-A364-06FBCFC7337E}"/>
               </a:ext>
             </a:extLst>
           </p:cNvPr>
@@ -17662,8 +17837,8 @@
         </p:nvSpPr>
         <p:spPr>
           <a:xfrm>
-            <a:off x="6467369" y="3342342"/>
-            <a:ext cx="4276832" cy="2535219"/>
+            <a:off x="6928715" y="3342342"/>
+            <a:ext cx="3815487" cy="2535219"/>
           </a:xfrm>
           <a:prstGeom prst="rect">
             <a:avLst/>
@@ -17697,7 +17872,7 @@
           <p:cNvPr id="14" name="source">
             <a:extLst>
               <a:ext uri="{FF2B5EF4-FFF2-40B4-BE49-F238E27FC236}">
-                <a16:creationId xmlns:a16="http://schemas.microsoft.com/office/drawing/2014/main" id="{61565D8D-1180-7AF1-CF91-F5C5166C4181}"/>
+                <a16:creationId xmlns:a16="http://schemas.microsoft.com/office/drawing/2014/main" id="{DB26FF15-44C2-FA64-35F2-AA6382AA3593}"/>
               </a:ext>
             </a:extLst>
           </p:cNvPr>
@@ -17710,7 +17885,7 @@
         </p:nvSpPr>
         <p:spPr>
           <a:xfrm>
-            <a:off x="1024128" y="6004560"/>
+            <a:off x="2072640" y="6004560"/>
             <a:ext cx="1905000" cy="304800"/>
           </a:xfrm>
           <a:prstGeom prst="roundRect">
@@ -17752,7 +17927,7 @@
     </p:spTree>
     <p:extLst>
       <p:ext uri="{BB962C8B-B14F-4D97-AF65-F5344CB8AC3E}">
-        <p14:creationId xmlns:p14="http://schemas.microsoft.com/office/powerpoint/2010/main" val="2741112991"/>
+        <p14:creationId xmlns:p14="http://schemas.microsoft.com/office/powerpoint/2010/main" val="313349238"/>
       </p:ext>
     </p:extLst>
   </p:cSld>
@@ -17784,7 +17959,7 @@
           <p:cNvPr id="7" name="creative_background">
             <a:extLst>
               <a:ext uri="{FF2B5EF4-FFF2-40B4-BE49-F238E27FC236}">
-                <a16:creationId xmlns:a16="http://schemas.microsoft.com/office/drawing/2014/main" id="{FB9EDE82-292D-EDBA-AB0A-BE09725E61C2}"/>
+                <a16:creationId xmlns:a16="http://schemas.microsoft.com/office/drawing/2014/main" id="{6D69E0AA-5832-DCB0-6926-B3DEF1C20B8F}"/>
               </a:ext>
             </a:extLst>
           </p:cNvPr>
@@ -17825,7 +18000,12 @@
             <p:ph type="title"/>
           </p:nvPr>
         </p:nvSpPr>
-        <p:spPr/>
+        <p:spPr>
+          <a:xfrm>
+            <a:off x="2072640" y="585216"/>
+            <a:ext cx="8674100" cy="1499616"/>
+          </a:xfrm>
+        </p:spPr>
         <p:txBody>
           <a:bodyPr/>
           <a:lstStyle>
@@ -17852,12 +18032,17 @@
             <p:ph type="dt" sz="half" idx="10"/>
           </p:nvPr>
         </p:nvSpPr>
-        <p:spPr/>
+        <p:spPr>
+          <a:xfrm>
+            <a:off x="2072640" y="6470704"/>
+            <a:ext cx="1104900" cy="274320"/>
+          </a:xfrm>
+        </p:spPr>
         <p:txBody>
           <a:bodyPr/>
           <a:lstStyle/>
           <a:p>
-            <a:fld id="{B5D244B9-259B-433A-84B9-2D3FCD42690F}" type="datetimeFigureOut">
+            <a:fld id="{F163761A-A4E5-4C7D-9728-6F0BC80FAE16}" type="datetimeFigureOut">
               <a:rPr lang="en-US" smtClean="0"/>
               <a:t>10/3/2026</a:t>
             </a:fld>
@@ -17899,7 +18084,7 @@
           <a:bodyPr/>
           <a:lstStyle/>
           <a:p>
-            <a:fld id="{F9842B40-88D3-4B59-923A-4074BB0E4CE6}" type="slidenum">
+            <a:fld id="{4DDE2B9A-5AB6-497C-A8BC-8EC14D6B62BC}" type="slidenum">
               <a:rPr lang="en-US" smtClean="0"/>
               <a:t>‹#›</a:t>
             </a:fld>
@@ -17912,7 +18097,7 @@
           <p:cNvPr id="8" name="marker_1">
             <a:extLst>
               <a:ext uri="{FF2B5EF4-FFF2-40B4-BE49-F238E27FC236}">
-                <a16:creationId xmlns:a16="http://schemas.microsoft.com/office/drawing/2014/main" id="{FBEF1D4E-B0AB-3C46-EB4E-D2B71F2943F9}"/>
+                <a16:creationId xmlns:a16="http://schemas.microsoft.com/office/drawing/2014/main" id="{2DBF9584-EA1F-5A0C-2226-991AFFB3EAC6}"/>
               </a:ext>
             </a:extLst>
           </p:cNvPr>
@@ -17925,8 +18110,8 @@
         </p:nvSpPr>
         <p:spPr>
           <a:xfrm>
-            <a:off x="1148744" y="2419022"/>
-            <a:ext cx="548312" cy="585291"/>
+            <a:off x="2183814" y="2419022"/>
+            <a:ext cx="489165" cy="585291"/>
           </a:xfrm>
           <a:prstGeom prst="ellipse">
             <a:avLst/>
@@ -17968,7 +18153,7 @@
           <p:cNvPr id="9" name="item_1">
             <a:extLst>
               <a:ext uri="{FF2B5EF4-FFF2-40B4-BE49-F238E27FC236}">
-                <a16:creationId xmlns:a16="http://schemas.microsoft.com/office/drawing/2014/main" id="{13258673-F1D9-9764-635E-0828DA22CA4C}"/>
+                <a16:creationId xmlns:a16="http://schemas.microsoft.com/office/drawing/2014/main" id="{BDD53CFF-78EB-CB11-CE6A-FB923B926F69}"/>
               </a:ext>
             </a:extLst>
           </p:cNvPr>
@@ -17981,8 +18166,8 @@
         </p:nvSpPr>
         <p:spPr>
           <a:xfrm>
-            <a:off x="1796749" y="2419022"/>
-            <a:ext cx="8822836" cy="532083"/>
+            <a:off x="2761919" y="2419022"/>
+            <a:ext cx="7871109" cy="532083"/>
           </a:xfrm>
           <a:prstGeom prst="rect">
             <a:avLst/>
@@ -18016,7 +18201,7 @@
           <p:cNvPr id="10" name="marker_2">
             <a:extLst>
               <a:ext uri="{FF2B5EF4-FFF2-40B4-BE49-F238E27FC236}">
-                <a16:creationId xmlns:a16="http://schemas.microsoft.com/office/drawing/2014/main" id="{3F07B736-6EEA-78D6-CA38-502E98E8DB0C}"/>
+                <a16:creationId xmlns:a16="http://schemas.microsoft.com/office/drawing/2014/main" id="{157F3447-16CE-D7FE-61BB-5F09A3651A92}"/>
               </a:ext>
             </a:extLst>
           </p:cNvPr>
@@ -18029,8 +18214,8 @@
         </p:nvSpPr>
         <p:spPr>
           <a:xfrm>
-            <a:off x="1148744" y="3350167"/>
-            <a:ext cx="548312" cy="585291"/>
+            <a:off x="2183815" y="3350167"/>
+            <a:ext cx="489165" cy="585291"/>
           </a:xfrm>
           <a:prstGeom prst="ellipse">
             <a:avLst/>
@@ -18072,7 +18257,7 @@
           <p:cNvPr id="11" name="item_2">
             <a:extLst>
               <a:ext uri="{FF2B5EF4-FFF2-40B4-BE49-F238E27FC236}">
-                <a16:creationId xmlns:a16="http://schemas.microsoft.com/office/drawing/2014/main" id="{B272BECC-C20B-9BBB-015C-33016008E0BB}"/>
+                <a16:creationId xmlns:a16="http://schemas.microsoft.com/office/drawing/2014/main" id="{EF955441-B60F-DCAA-31EE-F12716ED086D}"/>
               </a:ext>
             </a:extLst>
           </p:cNvPr>
@@ -18085,8 +18270,8 @@
         </p:nvSpPr>
         <p:spPr>
           <a:xfrm>
-            <a:off x="1796749" y="3350167"/>
-            <a:ext cx="8822836" cy="532083"/>
+            <a:off x="2761919" y="3350167"/>
+            <a:ext cx="7871109" cy="532083"/>
           </a:xfrm>
           <a:prstGeom prst="rect">
             <a:avLst/>
@@ -18120,7 +18305,7 @@
           <p:cNvPr id="12" name="marker_3">
             <a:extLst>
               <a:ext uri="{FF2B5EF4-FFF2-40B4-BE49-F238E27FC236}">
-                <a16:creationId xmlns:a16="http://schemas.microsoft.com/office/drawing/2014/main" id="{62DD14E6-FE5B-8F5C-F753-72F303D82D9A}"/>
+                <a16:creationId xmlns:a16="http://schemas.microsoft.com/office/drawing/2014/main" id="{96C37D8E-ED01-2A08-469F-38C88A3524B1}"/>
               </a:ext>
             </a:extLst>
           </p:cNvPr>
@@ -18133,8 +18318,8 @@
         </p:nvSpPr>
         <p:spPr>
           <a:xfrm>
-            <a:off x="1148744" y="4281312"/>
-            <a:ext cx="548312" cy="585291"/>
+            <a:off x="2183815" y="4281312"/>
+            <a:ext cx="489165" cy="585291"/>
           </a:xfrm>
           <a:prstGeom prst="ellipse">
             <a:avLst/>
@@ -18176,7 +18361,7 @@
           <p:cNvPr id="13" name="item_3">
             <a:extLst>
               <a:ext uri="{FF2B5EF4-FFF2-40B4-BE49-F238E27FC236}">
-                <a16:creationId xmlns:a16="http://schemas.microsoft.com/office/drawing/2014/main" id="{25945BF1-7094-90DB-56F1-A655FC55E932}"/>
+                <a16:creationId xmlns:a16="http://schemas.microsoft.com/office/drawing/2014/main" id="{1E99FB25-E282-A733-3D32-A66AEE80D520}"/>
               </a:ext>
             </a:extLst>
           </p:cNvPr>
@@ -18189,8 +18374,8 @@
         </p:nvSpPr>
         <p:spPr>
           <a:xfrm>
-            <a:off x="1796749" y="4281312"/>
-            <a:ext cx="8822836" cy="532083"/>
+            <a:off x="2761919" y="4281312"/>
+            <a:ext cx="7871109" cy="532083"/>
           </a:xfrm>
           <a:prstGeom prst="rect">
             <a:avLst/>
@@ -18224,7 +18409,7 @@
           <p:cNvPr id="14" name="marker_4">
             <a:extLst>
               <a:ext uri="{FF2B5EF4-FFF2-40B4-BE49-F238E27FC236}">
-                <a16:creationId xmlns:a16="http://schemas.microsoft.com/office/drawing/2014/main" id="{BC5BD7DA-CAD3-C7E6-6415-F9119456A02B}"/>
+                <a16:creationId xmlns:a16="http://schemas.microsoft.com/office/drawing/2014/main" id="{27BDB3AC-D21E-AFAF-3C95-9AC7145144B8}"/>
               </a:ext>
             </a:extLst>
           </p:cNvPr>
@@ -18237,8 +18422,8 @@
         </p:nvSpPr>
         <p:spPr>
           <a:xfrm>
-            <a:off x="1148744" y="5212457"/>
-            <a:ext cx="548312" cy="585291"/>
+            <a:off x="2183815" y="5212457"/>
+            <a:ext cx="489165" cy="585291"/>
           </a:xfrm>
           <a:prstGeom prst="ellipse">
             <a:avLst/>
@@ -18280,7 +18465,7 @@
           <p:cNvPr id="15" name="item_4">
             <a:extLst>
               <a:ext uri="{FF2B5EF4-FFF2-40B4-BE49-F238E27FC236}">
-                <a16:creationId xmlns:a16="http://schemas.microsoft.com/office/drawing/2014/main" id="{8533D7B8-35D2-158C-41F1-051A770D497B}"/>
+                <a16:creationId xmlns:a16="http://schemas.microsoft.com/office/drawing/2014/main" id="{A4ACD789-E400-8375-583D-FEF4E44FAF39}"/>
               </a:ext>
             </a:extLst>
           </p:cNvPr>
@@ -18293,8 +18478,8 @@
         </p:nvSpPr>
         <p:spPr>
           <a:xfrm>
-            <a:off x="1796749" y="5212457"/>
-            <a:ext cx="8822836" cy="532083"/>
+            <a:off x="2761919" y="5212457"/>
+            <a:ext cx="7871109" cy="532083"/>
           </a:xfrm>
           <a:prstGeom prst="rect">
             <a:avLst/>
@@ -18328,7 +18513,7 @@
           <p:cNvPr id="16" name="source">
             <a:extLst>
               <a:ext uri="{FF2B5EF4-FFF2-40B4-BE49-F238E27FC236}">
-                <a16:creationId xmlns:a16="http://schemas.microsoft.com/office/drawing/2014/main" id="{BC3081B7-E9DA-00FE-8545-3CD96ABD2A11}"/>
+                <a16:creationId xmlns:a16="http://schemas.microsoft.com/office/drawing/2014/main" id="{BA1564C5-A0CD-79B0-4A32-D6EE4B794151}"/>
               </a:ext>
             </a:extLst>
           </p:cNvPr>
@@ -18341,7 +18526,7 @@
         </p:nvSpPr>
         <p:spPr>
           <a:xfrm>
-            <a:off x="1024128" y="6004560"/>
+            <a:off x="2072640" y="6004560"/>
             <a:ext cx="1905000" cy="304800"/>
           </a:xfrm>
           <a:prstGeom prst="roundRect">
@@ -18383,7 +18568,7 @@
     </p:spTree>
     <p:extLst>
       <p:ext uri="{BB962C8B-B14F-4D97-AF65-F5344CB8AC3E}">
-        <p14:creationId xmlns:p14="http://schemas.microsoft.com/office/powerpoint/2010/main" val="2623501972"/>
+        <p14:creationId xmlns:p14="http://schemas.microsoft.com/office/powerpoint/2010/main" val="930317771"/>
       </p:ext>
     </p:extLst>
   </p:cSld>
@@ -18415,7 +18600,7 @@
           <p:cNvPr id="7" name="creative_background">
             <a:extLst>
               <a:ext uri="{FF2B5EF4-FFF2-40B4-BE49-F238E27FC236}">
-                <a16:creationId xmlns:a16="http://schemas.microsoft.com/office/drawing/2014/main" id="{3FE0F111-ABC8-3FDC-1178-AB4E2BAB74B9}"/>
+                <a16:creationId xmlns:a16="http://schemas.microsoft.com/office/drawing/2014/main" id="{2FEED973-27C1-BF89-D314-46CF5866EE3D}"/>
               </a:ext>
             </a:extLst>
           </p:cNvPr>
@@ -18456,7 +18641,12 @@
             <p:ph type="title"/>
           </p:nvPr>
         </p:nvSpPr>
-        <p:spPr/>
+        <p:spPr>
+          <a:xfrm>
+            <a:off x="2072640" y="585216"/>
+            <a:ext cx="8674100" cy="1499616"/>
+          </a:xfrm>
+        </p:spPr>
         <p:txBody>
           <a:bodyPr/>
           <a:lstStyle>
@@ -18483,12 +18673,17 @@
             <p:ph type="dt" sz="half" idx="10"/>
           </p:nvPr>
         </p:nvSpPr>
-        <p:spPr/>
+        <p:spPr>
+          <a:xfrm>
+            <a:off x="2072640" y="6470704"/>
+            <a:ext cx="1104900" cy="274320"/>
+          </a:xfrm>
+        </p:spPr>
         <p:txBody>
           <a:bodyPr/>
           <a:lstStyle/>
           <a:p>
-            <a:fld id="{B5D244B9-259B-433A-84B9-2D3FCD42690F}" type="datetimeFigureOut">
+            <a:fld id="{F163761A-A4E5-4C7D-9728-6F0BC80FAE16}" type="datetimeFigureOut">
               <a:rPr lang="en-US" smtClean="0"/>
               <a:t>10/3/2026</a:t>
             </a:fld>
@@ -18530,7 +18725,7 @@
           <a:bodyPr/>
           <a:lstStyle/>
           <a:p>
-            <a:fld id="{F9842B40-88D3-4B59-923A-4074BB0E4CE6}" type="slidenum">
+            <a:fld id="{4DDE2B9A-5AB6-497C-A8BC-8EC14D6B62BC}" type="slidenum">
               <a:rPr lang="en-US" smtClean="0"/>
               <a:t>‹#›</a:t>
             </a:fld>
@@ -18543,7 +18738,7 @@
           <p:cNvPr id="8" name="decisions_title">
             <a:extLst>
               <a:ext uri="{FF2B5EF4-FFF2-40B4-BE49-F238E27FC236}">
-                <a16:creationId xmlns:a16="http://schemas.microsoft.com/office/drawing/2014/main" id="{374F2E90-7C79-5A1A-3E3F-3DDFD57DF4F9}"/>
+                <a16:creationId xmlns:a16="http://schemas.microsoft.com/office/drawing/2014/main" id="{705A56D4-2D7C-9BD6-591C-AC13C9F0DC4D}"/>
               </a:ext>
             </a:extLst>
           </p:cNvPr>
@@ -18556,8 +18751,8 @@
         </p:nvSpPr>
         <p:spPr>
           <a:xfrm>
-            <a:off x="1198591" y="4842659"/>
-            <a:ext cx="2352756" cy="848672"/>
+            <a:off x="2228283" y="4842659"/>
+            <a:ext cx="2098963" cy="848672"/>
           </a:xfrm>
         </p:spPr>
         <p:txBody>
@@ -18593,7 +18788,7 @@
           <p:cNvPr id="9" name="decisions">
             <a:extLst>
               <a:ext uri="{FF2B5EF4-FFF2-40B4-BE49-F238E27FC236}">
-                <a16:creationId xmlns:a16="http://schemas.microsoft.com/office/drawing/2014/main" id="{80846FFC-6E48-9AF9-24F8-F6A4319E138B}"/>
+                <a16:creationId xmlns:a16="http://schemas.microsoft.com/office/drawing/2014/main" id="{8E87C3C9-5AC4-B189-3290-5C57ADB2DEB8}"/>
               </a:ext>
             </a:extLst>
           </p:cNvPr>
@@ -18606,8 +18801,8 @@
         </p:nvSpPr>
         <p:spPr>
           <a:xfrm>
-            <a:off x="3648549" y="4842659"/>
-            <a:ext cx="6921191" cy="848672"/>
+            <a:off x="4413962" y="4842659"/>
+            <a:ext cx="6174596" cy="848672"/>
           </a:xfrm>
           <a:prstGeom prst="rect">
             <a:avLst/>
@@ -18636,7 +18831,7 @@
           <p:cNvPr id="10" name="item_1_title">
             <a:extLst>
               <a:ext uri="{FF2B5EF4-FFF2-40B4-BE49-F238E27FC236}">
-                <a16:creationId xmlns:a16="http://schemas.microsoft.com/office/drawing/2014/main" id="{AA6BCD80-F601-18DD-5443-807CCBE7E6A0}"/>
+                <a16:creationId xmlns:a16="http://schemas.microsoft.com/office/drawing/2014/main" id="{D90E2903-290A-0A0F-EDED-C3592E74C799}"/>
               </a:ext>
             </a:extLst>
           </p:cNvPr>
@@ -18649,8 +18844,8 @@
         </p:nvSpPr>
         <p:spPr>
           <a:xfrm>
-            <a:off x="1198592" y="2472229"/>
-            <a:ext cx="2758175" cy="524258"/>
+            <a:off x="2228283" y="2472229"/>
+            <a:ext cx="2460648" cy="524258"/>
           </a:xfrm>
           <a:prstGeom prst="rect">
             <a:avLst/>
@@ -18689,7 +18884,7 @@
           <p:cNvPr id="11" name="item_1">
             <a:extLst>
               <a:ext uri="{FF2B5EF4-FFF2-40B4-BE49-F238E27FC236}">
-                <a16:creationId xmlns:a16="http://schemas.microsoft.com/office/drawing/2014/main" id="{77D36EC8-EF88-F7D2-2888-00152159607E}"/>
+                <a16:creationId xmlns:a16="http://schemas.microsoft.com/office/drawing/2014/main" id="{1FF83F5E-D3C6-69B1-7AFC-C02372592522}"/>
               </a:ext>
             </a:extLst>
           </p:cNvPr>
@@ -18702,8 +18897,8 @@
         </p:nvSpPr>
         <p:spPr>
           <a:xfrm>
-            <a:off x="1198592" y="2996487"/>
-            <a:ext cx="2758175" cy="1258220"/>
+            <a:off x="2228283" y="2996487"/>
+            <a:ext cx="2460648" cy="1258220"/>
           </a:xfrm>
           <a:prstGeom prst="rect">
             <a:avLst/>
@@ -18737,7 +18932,7 @@
           <p:cNvPr id="12" name="item_2_title">
             <a:extLst>
               <a:ext uri="{FF2B5EF4-FFF2-40B4-BE49-F238E27FC236}">
-                <a16:creationId xmlns:a16="http://schemas.microsoft.com/office/drawing/2014/main" id="{72583911-8A8E-11DD-5AF5-7C0B29A7D3F7}"/>
+                <a16:creationId xmlns:a16="http://schemas.microsoft.com/office/drawing/2014/main" id="{60153090-1F99-6BBB-DFCE-5BDF4D3066E2}"/>
               </a:ext>
             </a:extLst>
           </p:cNvPr>
@@ -18750,8 +18945,8 @@
         </p:nvSpPr>
         <p:spPr>
           <a:xfrm>
-            <a:off x="4505078" y="2472229"/>
-            <a:ext cx="2758175" cy="524258"/>
+            <a:off x="5178097" y="2472229"/>
+            <a:ext cx="2460648" cy="524258"/>
           </a:xfrm>
           <a:prstGeom prst="rect">
             <a:avLst/>
@@ -18790,7 +18985,7 @@
           <p:cNvPr id="13" name="item_2">
             <a:extLst>
               <a:ext uri="{FF2B5EF4-FFF2-40B4-BE49-F238E27FC236}">
-                <a16:creationId xmlns:a16="http://schemas.microsoft.com/office/drawing/2014/main" id="{E1B9D8BD-FFF5-0DFC-E1DF-7FFFDAFE6685}"/>
+                <a16:creationId xmlns:a16="http://schemas.microsoft.com/office/drawing/2014/main" id="{104C98C7-FA31-AECE-EF3E-1BA35BEA0C6F}"/>
               </a:ext>
             </a:extLst>
           </p:cNvPr>
@@ -18803,8 +18998,8 @@
         </p:nvSpPr>
         <p:spPr>
           <a:xfrm>
-            <a:off x="4505078" y="2996487"/>
-            <a:ext cx="2758175" cy="1258220"/>
+            <a:off x="5178097" y="2996487"/>
+            <a:ext cx="2460648" cy="1258220"/>
           </a:xfrm>
           <a:prstGeom prst="rect">
             <a:avLst/>
@@ -18838,7 +19033,7 @@
           <p:cNvPr id="14" name="item_3_title">
             <a:extLst>
               <a:ext uri="{FF2B5EF4-FFF2-40B4-BE49-F238E27FC236}">
-                <a16:creationId xmlns:a16="http://schemas.microsoft.com/office/drawing/2014/main" id="{A5F8883B-E2B1-E6AA-0CE3-CC1A6966E76B}"/>
+                <a16:creationId xmlns:a16="http://schemas.microsoft.com/office/drawing/2014/main" id="{A571F9E3-E461-C6D0-65DF-6A01F4D89B52}"/>
               </a:ext>
             </a:extLst>
           </p:cNvPr>
@@ -18851,8 +19046,8 @@
         </p:nvSpPr>
         <p:spPr>
           <a:xfrm>
-            <a:off x="7811565" y="2472229"/>
-            <a:ext cx="2758175" cy="524258"/>
+            <a:off x="8127910" y="2472229"/>
+            <a:ext cx="2460648" cy="524258"/>
           </a:xfrm>
           <a:prstGeom prst="rect">
             <a:avLst/>
@@ -18891,7 +19086,7 @@
           <p:cNvPr id="15" name="item_3">
             <a:extLst>
               <a:ext uri="{FF2B5EF4-FFF2-40B4-BE49-F238E27FC236}">
-                <a16:creationId xmlns:a16="http://schemas.microsoft.com/office/drawing/2014/main" id="{4BE2BEDF-618B-53CF-3245-3443C51C69E0}"/>
+                <a16:creationId xmlns:a16="http://schemas.microsoft.com/office/drawing/2014/main" id="{98979F55-CED5-6D2E-51A3-423F56E7A603}"/>
               </a:ext>
             </a:extLst>
           </p:cNvPr>
@@ -18904,8 +19099,8 @@
         </p:nvSpPr>
         <p:spPr>
           <a:xfrm>
-            <a:off x="7811565" y="2996487"/>
-            <a:ext cx="2758175" cy="1258220"/>
+            <a:off x="8127910" y="2996487"/>
+            <a:ext cx="2460648" cy="1258220"/>
           </a:xfrm>
           <a:prstGeom prst="rect">
             <a:avLst/>
@@ -18939,7 +19134,7 @@
           <p:cNvPr id="16" name="source">
             <a:extLst>
               <a:ext uri="{FF2B5EF4-FFF2-40B4-BE49-F238E27FC236}">
-                <a16:creationId xmlns:a16="http://schemas.microsoft.com/office/drawing/2014/main" id="{D8D6D6D3-2628-0084-1A78-19141F8446D0}"/>
+                <a16:creationId xmlns:a16="http://schemas.microsoft.com/office/drawing/2014/main" id="{42B257A8-50D5-ACAA-92A5-83C5B2A6557D}"/>
               </a:ext>
             </a:extLst>
           </p:cNvPr>
@@ -18952,7 +19147,7 @@
         </p:nvSpPr>
         <p:spPr>
           <a:xfrm>
-            <a:off x="1024128" y="6004560"/>
+            <a:off x="2072640" y="6004560"/>
             <a:ext cx="1905000" cy="304800"/>
           </a:xfrm>
           <a:prstGeom prst="roundRect">
@@ -18994,7 +19189,7 @@
     </p:spTree>
     <p:extLst>
       <p:ext uri="{BB962C8B-B14F-4D97-AF65-F5344CB8AC3E}">
-        <p14:creationId xmlns:p14="http://schemas.microsoft.com/office/powerpoint/2010/main" val="2529558451"/>
+        <p14:creationId xmlns:p14="http://schemas.microsoft.com/office/powerpoint/2010/main" val="3268174642"/>
       </p:ext>
     </p:extLst>
   </p:cSld>
@@ -19026,7 +19221,7 @@
           <p:cNvPr id="7" name="creative_background">
             <a:extLst>
               <a:ext uri="{FF2B5EF4-FFF2-40B4-BE49-F238E27FC236}">
-                <a16:creationId xmlns:a16="http://schemas.microsoft.com/office/drawing/2014/main" id="{366C230D-AC39-125F-9975-F2013869E5D0}"/>
+                <a16:creationId xmlns:a16="http://schemas.microsoft.com/office/drawing/2014/main" id="{8636F3BB-AA7C-8055-C364-E72A5FD03E0E}"/>
               </a:ext>
             </a:extLst>
           </p:cNvPr>
@@ -19067,7 +19262,12 @@
             <p:ph type="title"/>
           </p:nvPr>
         </p:nvSpPr>
-        <p:spPr/>
+        <p:spPr>
+          <a:xfrm>
+            <a:off x="2072640" y="585216"/>
+            <a:ext cx="8674100" cy="1499616"/>
+          </a:xfrm>
+        </p:spPr>
         <p:txBody>
           <a:bodyPr/>
           <a:lstStyle>
@@ -19094,12 +19294,17 @@
             <p:ph type="dt" sz="half" idx="10"/>
           </p:nvPr>
         </p:nvSpPr>
-        <p:spPr/>
+        <p:spPr>
+          <a:xfrm>
+            <a:off x="2072640" y="6470704"/>
+            <a:ext cx="1104900" cy="274320"/>
+          </a:xfrm>
+        </p:spPr>
         <p:txBody>
           <a:bodyPr/>
           <a:lstStyle/>
           <a:p>
-            <a:fld id="{B5D244B9-259B-433A-84B9-2D3FCD42690F}" type="datetimeFigureOut">
+            <a:fld id="{F163761A-A4E5-4C7D-9728-6F0BC80FAE16}" type="datetimeFigureOut">
               <a:rPr lang="en-US" smtClean="0"/>
               <a:t>10/3/2026</a:t>
             </a:fld>
@@ -19141,7 +19346,7 @@
           <a:bodyPr/>
           <a:lstStyle/>
           <a:p>
-            <a:fld id="{F9842B40-88D3-4B59-923A-4074BB0E4CE6}" type="slidenum">
+            <a:fld id="{4DDE2B9A-5AB6-497C-A8BC-8EC14D6B62BC}" type="slidenum">
               <a:rPr lang="en-US" smtClean="0"/>
               <a:t>‹#›</a:t>
             </a:fld>
@@ -19154,7 +19359,7 @@
           <p:cNvPr id="8" name="body">
             <a:extLst>
               <a:ext uri="{FF2B5EF4-FFF2-40B4-BE49-F238E27FC236}">
-                <a16:creationId xmlns:a16="http://schemas.microsoft.com/office/drawing/2014/main" id="{DFD93945-A625-3B26-0646-3936568CE951}"/>
+                <a16:creationId xmlns:a16="http://schemas.microsoft.com/office/drawing/2014/main" id="{3FA41B47-4C18-E0D8-89A0-8AC75CF75BB3}"/>
               </a:ext>
             </a:extLst>
           </p:cNvPr>
@@ -19167,8 +19372,8 @@
         </p:nvSpPr>
         <p:spPr>
           <a:xfrm>
-            <a:off x="1024128" y="5159248"/>
-            <a:ext cx="9720073" cy="718312"/>
+            <a:off x="2072640" y="5159248"/>
+            <a:ext cx="8671561" cy="718312"/>
           </a:xfrm>
         </p:spPr>
         <p:txBody>
@@ -19194,7 +19399,7 @@
           <p:cNvPr id="9" name="kpi_value_1">
             <a:extLst>
               <a:ext uri="{FF2B5EF4-FFF2-40B4-BE49-F238E27FC236}">
-                <a16:creationId xmlns:a16="http://schemas.microsoft.com/office/drawing/2014/main" id="{086799DC-9A64-B1EA-5438-3FBB96D5A8CA}"/>
+                <a16:creationId xmlns:a16="http://schemas.microsoft.com/office/drawing/2014/main" id="{4A67A50A-7503-C6D5-BC92-3E3F6FD54F8F}"/>
               </a:ext>
             </a:extLst>
           </p:cNvPr>
@@ -19207,8 +19412,8 @@
         </p:nvSpPr>
         <p:spPr>
           <a:xfrm>
-            <a:off x="1198591" y="2472229"/>
-            <a:ext cx="4411418" cy="1515296"/>
+            <a:off x="2228284" y="2472229"/>
+            <a:ext cx="3935555" cy="1515296"/>
           </a:xfrm>
           <a:prstGeom prst="rect">
             <a:avLst/>
@@ -19247,7 +19452,7 @@
           <p:cNvPr id="10" name="kpi_label_1">
             <a:extLst>
               <a:ext uri="{FF2B5EF4-FFF2-40B4-BE49-F238E27FC236}">
-                <a16:creationId xmlns:a16="http://schemas.microsoft.com/office/drawing/2014/main" id="{6DB6D556-FBFD-1424-37B5-2C0AF292854B}"/>
+                <a16:creationId xmlns:a16="http://schemas.microsoft.com/office/drawing/2014/main" id="{981E5D64-1A01-64B4-141D-F177A632D47C}"/>
               </a:ext>
             </a:extLst>
           </p:cNvPr>
@@ -19260,8 +19465,8 @@
         </p:nvSpPr>
         <p:spPr>
           <a:xfrm>
-            <a:off x="1198591" y="3987526"/>
-            <a:ext cx="4411418" cy="841831"/>
+            <a:off x="2228284" y="3987526"/>
+            <a:ext cx="3935555" cy="841831"/>
           </a:xfrm>
           <a:prstGeom prst="rect">
             <a:avLst/>
@@ -19295,7 +19500,7 @@
           <p:cNvPr id="11" name="kpi_value_2">
             <a:extLst>
               <a:ext uri="{FF2B5EF4-FFF2-40B4-BE49-F238E27FC236}">
-                <a16:creationId xmlns:a16="http://schemas.microsoft.com/office/drawing/2014/main" id="{53636F91-466C-BE2C-A325-01DEC980CC87}"/>
+                <a16:creationId xmlns:a16="http://schemas.microsoft.com/office/drawing/2014/main" id="{FB3C01B1-4C4C-F022-9266-5AE6E151D341}"/>
               </a:ext>
             </a:extLst>
           </p:cNvPr>
@@ -19308,8 +19513,8 @@
         </p:nvSpPr>
         <p:spPr>
           <a:xfrm>
-            <a:off x="6158321" y="2472229"/>
-            <a:ext cx="4411418" cy="1515296"/>
+            <a:off x="6653004" y="2472229"/>
+            <a:ext cx="3935555" cy="1515296"/>
           </a:xfrm>
           <a:prstGeom prst="rect">
             <a:avLst/>
@@ -19348,7 +19553,7 @@
           <p:cNvPr id="12" name="kpi_label_2">
             <a:extLst>
               <a:ext uri="{FF2B5EF4-FFF2-40B4-BE49-F238E27FC236}">
-                <a16:creationId xmlns:a16="http://schemas.microsoft.com/office/drawing/2014/main" id="{A230EFC7-6366-DE9B-36E3-568F3A9738C6}"/>
+                <a16:creationId xmlns:a16="http://schemas.microsoft.com/office/drawing/2014/main" id="{BE221761-09FB-A570-9CF5-92BF7B87E93D}"/>
               </a:ext>
             </a:extLst>
           </p:cNvPr>
@@ -19361,8 +19566,8 @@
         </p:nvSpPr>
         <p:spPr>
           <a:xfrm>
-            <a:off x="6158321" y="3987526"/>
-            <a:ext cx="4411418" cy="841831"/>
+            <a:off x="6653004" y="3987526"/>
+            <a:ext cx="3935555" cy="841831"/>
           </a:xfrm>
           <a:prstGeom prst="rect">
             <a:avLst/>
@@ -19396,7 +19601,7 @@
           <p:cNvPr id="13" name="source">
             <a:extLst>
               <a:ext uri="{FF2B5EF4-FFF2-40B4-BE49-F238E27FC236}">
-                <a16:creationId xmlns:a16="http://schemas.microsoft.com/office/drawing/2014/main" id="{348A1238-D107-879A-315F-04D56AA3F5C7}"/>
+                <a16:creationId xmlns:a16="http://schemas.microsoft.com/office/drawing/2014/main" id="{C1A13625-C1F1-D58E-0CF2-1FC041DA0C88}"/>
               </a:ext>
             </a:extLst>
           </p:cNvPr>
@@ -19409,7 +19614,7 @@
         </p:nvSpPr>
         <p:spPr>
           <a:xfrm>
-            <a:off x="1024128" y="6004560"/>
+            <a:off x="2072640" y="6004560"/>
             <a:ext cx="1905000" cy="304800"/>
           </a:xfrm>
           <a:prstGeom prst="roundRect">
@@ -19451,7 +19656,7 @@
     </p:spTree>
     <p:extLst>
       <p:ext uri="{BB962C8B-B14F-4D97-AF65-F5344CB8AC3E}">
-        <p14:creationId xmlns:p14="http://schemas.microsoft.com/office/powerpoint/2010/main" val="2312058539"/>
+        <p14:creationId xmlns:p14="http://schemas.microsoft.com/office/powerpoint/2010/main" val="3257611957"/>
       </p:ext>
     </p:extLst>
   </p:cSld>
@@ -19483,7 +19688,7 @@
           <p:cNvPr id="7" name="creative_background">
             <a:extLst>
               <a:ext uri="{FF2B5EF4-FFF2-40B4-BE49-F238E27FC236}">
-                <a16:creationId xmlns:a16="http://schemas.microsoft.com/office/drawing/2014/main" id="{87DEE0C6-5FFE-DD77-C09E-7DF76F355492}"/>
+                <a16:creationId xmlns:a16="http://schemas.microsoft.com/office/drawing/2014/main" id="{C42471B2-0007-C813-497D-5FE4EAC0408D}"/>
               </a:ext>
             </a:extLst>
           </p:cNvPr>
@@ -19524,7 +19729,12 @@
             <p:ph type="title"/>
           </p:nvPr>
         </p:nvSpPr>
-        <p:spPr/>
+        <p:spPr>
+          <a:xfrm>
+            <a:off x="2072640" y="585216"/>
+            <a:ext cx="8674100" cy="1499616"/>
+          </a:xfrm>
+        </p:spPr>
         <p:txBody>
           <a:bodyPr/>
           <a:lstStyle>
@@ -19551,12 +19761,17 @@
             <p:ph type="dt" sz="half" idx="10"/>
           </p:nvPr>
         </p:nvSpPr>
-        <p:spPr/>
+        <p:spPr>
+          <a:xfrm>
+            <a:off x="2072640" y="6470704"/>
+            <a:ext cx="1104900" cy="274320"/>
+          </a:xfrm>
+        </p:spPr>
         <p:txBody>
           <a:bodyPr/>
           <a:lstStyle/>
           <a:p>
-            <a:fld id="{B5D244B9-259B-433A-84B9-2D3FCD42690F}" type="datetimeFigureOut">
+            <a:fld id="{F163761A-A4E5-4C7D-9728-6F0BC80FAE16}" type="datetimeFigureOut">
               <a:rPr lang="en-US" smtClean="0"/>
               <a:t>10/3/2026</a:t>
             </a:fld>
@@ -19598,7 +19813,7 @@
           <a:bodyPr/>
           <a:lstStyle/>
           <a:p>
-            <a:fld id="{F9842B40-88D3-4B59-923A-4074BB0E4CE6}" type="slidenum">
+            <a:fld id="{4DDE2B9A-5AB6-497C-A8BC-8EC14D6B62BC}" type="slidenum">
               <a:rPr lang="en-US" smtClean="0"/>
               <a:t>‹#›</a:t>
             </a:fld>
@@ -19611,7 +19826,7 @@
           <p:cNvPr id="8" name="body">
             <a:extLst>
               <a:ext uri="{FF2B5EF4-FFF2-40B4-BE49-F238E27FC236}">
-                <a16:creationId xmlns:a16="http://schemas.microsoft.com/office/drawing/2014/main" id="{3AB49A31-4E33-1694-41CB-8287F86442A7}"/>
+                <a16:creationId xmlns:a16="http://schemas.microsoft.com/office/drawing/2014/main" id="{5C184E23-5CB0-4D3F-8109-5048430CE21F}"/>
               </a:ext>
             </a:extLst>
           </p:cNvPr>
@@ -19624,8 +19839,8 @@
         </p:nvSpPr>
         <p:spPr>
           <a:xfrm>
-            <a:off x="1024128" y="5159248"/>
-            <a:ext cx="9720073" cy="718312"/>
+            <a:off x="2072640" y="5159248"/>
+            <a:ext cx="8671561" cy="718312"/>
           </a:xfrm>
         </p:spPr>
         <p:txBody>
@@ -19651,7 +19866,7 @@
           <p:cNvPr id="9" name="kpi_value_1">
             <a:extLst>
               <a:ext uri="{FF2B5EF4-FFF2-40B4-BE49-F238E27FC236}">
-                <a16:creationId xmlns:a16="http://schemas.microsoft.com/office/drawing/2014/main" id="{ED7565A5-8932-437A-F43D-E438BB791FB0}"/>
+                <a16:creationId xmlns:a16="http://schemas.microsoft.com/office/drawing/2014/main" id="{5C2EBE93-EBAE-94CA-9B9F-A4C70D57B2FA}"/>
               </a:ext>
             </a:extLst>
           </p:cNvPr>
@@ -19664,8 +19879,8 @@
         </p:nvSpPr>
         <p:spPr>
           <a:xfrm>
-            <a:off x="1198592" y="2472229"/>
-            <a:ext cx="1931553" cy="1515296"/>
+            <a:off x="2228284" y="2472229"/>
+            <a:ext cx="1723195" cy="1515296"/>
           </a:xfrm>
           <a:prstGeom prst="rect">
             <a:avLst/>
@@ -19704,7 +19919,7 @@
           <p:cNvPr id="10" name="kpi_label_1">
             <a:extLst>
               <a:ext uri="{FF2B5EF4-FFF2-40B4-BE49-F238E27FC236}">
-                <a16:creationId xmlns:a16="http://schemas.microsoft.com/office/drawing/2014/main" id="{75DBE47C-1781-B69B-20D2-403624702DBA}"/>
+                <a16:creationId xmlns:a16="http://schemas.microsoft.com/office/drawing/2014/main" id="{04D12FD6-E104-AAC7-A48B-82426E4CF948}"/>
               </a:ext>
             </a:extLst>
           </p:cNvPr>
@@ -19717,8 +19932,8 @@
         </p:nvSpPr>
         <p:spPr>
           <a:xfrm>
-            <a:off x="1198592" y="3987526"/>
-            <a:ext cx="1931553" cy="841831"/>
+            <a:off x="2228284" y="3987526"/>
+            <a:ext cx="1723195" cy="841831"/>
           </a:xfrm>
           <a:prstGeom prst="rect">
             <a:avLst/>
@@ -19752,7 +19967,7 @@
           <p:cNvPr id="11" name="kpi_value_2">
             <a:extLst>
               <a:ext uri="{FF2B5EF4-FFF2-40B4-BE49-F238E27FC236}">
-                <a16:creationId xmlns:a16="http://schemas.microsoft.com/office/drawing/2014/main" id="{E8E02948-7A5C-5E1C-84AB-B3D0062408EC}"/>
+                <a16:creationId xmlns:a16="http://schemas.microsoft.com/office/drawing/2014/main" id="{D42EED2A-45A9-83E1-459C-8B23002E94CC}"/>
               </a:ext>
             </a:extLst>
           </p:cNvPr>
@@ -19765,8 +19980,8 @@
         </p:nvSpPr>
         <p:spPr>
           <a:xfrm>
-            <a:off x="3678457" y="2472229"/>
-            <a:ext cx="1931553" cy="1515296"/>
+            <a:off x="4440644" y="2472229"/>
+            <a:ext cx="1723195" cy="1515296"/>
           </a:xfrm>
           <a:prstGeom prst="rect">
             <a:avLst/>
@@ -19805,7 +20020,7 @@
           <p:cNvPr id="12" name="kpi_label_2">
             <a:extLst>
               <a:ext uri="{FF2B5EF4-FFF2-40B4-BE49-F238E27FC236}">
-                <a16:creationId xmlns:a16="http://schemas.microsoft.com/office/drawing/2014/main" id="{94A7BC83-AD54-3924-41CB-D342D04D2BCC}"/>
+                <a16:creationId xmlns:a16="http://schemas.microsoft.com/office/drawing/2014/main" id="{1A7C8ACC-2509-F6B9-C20A-3A8322EF4126}"/>
               </a:ext>
             </a:extLst>
           </p:cNvPr>
@@ -19818,8 +20033,8 @@
         </p:nvSpPr>
         <p:spPr>
           <a:xfrm>
-            <a:off x="3678457" y="3987526"/>
-            <a:ext cx="1931553" cy="841831"/>
+            <a:off x="4440644" y="3987526"/>
+            <a:ext cx="1723195" cy="841831"/>
           </a:xfrm>
           <a:prstGeom prst="rect">
             <a:avLst/>
@@ -19853,7 +20068,7 @@
           <p:cNvPr id="13" name="kpi_value_3">
             <a:extLst>
               <a:ext uri="{FF2B5EF4-FFF2-40B4-BE49-F238E27FC236}">
-                <a16:creationId xmlns:a16="http://schemas.microsoft.com/office/drawing/2014/main" id="{4A3D2655-486B-37A4-1305-A8CAAE0E6753}"/>
+                <a16:creationId xmlns:a16="http://schemas.microsoft.com/office/drawing/2014/main" id="{A4DCED98-07E4-810D-C964-29EA965406DC}"/>
               </a:ext>
             </a:extLst>
           </p:cNvPr>
@@ -19866,8 +20081,8 @@
         </p:nvSpPr>
         <p:spPr>
           <a:xfrm>
-            <a:off x="6158322" y="2472229"/>
-            <a:ext cx="1931553" cy="1515296"/>
+            <a:off x="6653004" y="2472229"/>
+            <a:ext cx="1723195" cy="1515296"/>
           </a:xfrm>
           <a:prstGeom prst="rect">
             <a:avLst/>
@@ -19906,7 +20121,7 @@
           <p:cNvPr id="14" name="kpi_label_3">
             <a:extLst>
               <a:ext uri="{FF2B5EF4-FFF2-40B4-BE49-F238E27FC236}">
-                <a16:creationId xmlns:a16="http://schemas.microsoft.com/office/drawing/2014/main" id="{EE2FD981-50B8-98A5-401C-6E340F836B15}"/>
+                <a16:creationId xmlns:a16="http://schemas.microsoft.com/office/drawing/2014/main" id="{0F2AD1EA-F4FC-A05C-E113-8E5E5C15FBCA}"/>
               </a:ext>
             </a:extLst>
           </p:cNvPr>
@@ -19919,8 +20134,8 @@
         </p:nvSpPr>
         <p:spPr>
           <a:xfrm>
-            <a:off x="6158322" y="3987526"/>
-            <a:ext cx="1931553" cy="841831"/>
+            <a:off x="6653004" y="3987526"/>
+            <a:ext cx="1723195" cy="841831"/>
           </a:xfrm>
           <a:prstGeom prst="rect">
             <a:avLst/>
@@ -19954,7 +20169,7 @@
           <p:cNvPr id="15" name="kpi_value_4">
             <a:extLst>
               <a:ext uri="{FF2B5EF4-FFF2-40B4-BE49-F238E27FC236}">
-                <a16:creationId xmlns:a16="http://schemas.microsoft.com/office/drawing/2014/main" id="{66F11815-747D-0584-40D9-7EE332901F4F}"/>
+                <a16:creationId xmlns:a16="http://schemas.microsoft.com/office/drawing/2014/main" id="{26F629EC-F727-3BF0-52E8-47A45415AA60}"/>
               </a:ext>
             </a:extLst>
           </p:cNvPr>
@@ -19967,8 +20182,8 @@
         </p:nvSpPr>
         <p:spPr>
           <a:xfrm>
-            <a:off x="8638186" y="2472229"/>
-            <a:ext cx="1931553" cy="1515296"/>
+            <a:off x="8865364" y="2472229"/>
+            <a:ext cx="1723195" cy="1515296"/>
           </a:xfrm>
           <a:prstGeom prst="rect">
             <a:avLst/>
@@ -20007,7 +20222,7 @@
           <p:cNvPr id="16" name="kpi_label_4">
             <a:extLst>
               <a:ext uri="{FF2B5EF4-FFF2-40B4-BE49-F238E27FC236}">
-                <a16:creationId xmlns:a16="http://schemas.microsoft.com/office/drawing/2014/main" id="{8FAF0901-9501-5E01-75F1-18CA20A41AE6}"/>
+                <a16:creationId xmlns:a16="http://schemas.microsoft.com/office/drawing/2014/main" id="{F2B2E005-7A10-AE5D-BE4C-6F19A082FD9F}"/>
               </a:ext>
             </a:extLst>
           </p:cNvPr>
@@ -20020,8 +20235,8 @@
         </p:nvSpPr>
         <p:spPr>
           <a:xfrm>
-            <a:off x="8638186" y="3987526"/>
-            <a:ext cx="1931553" cy="841831"/>
+            <a:off x="8865364" y="3987526"/>
+            <a:ext cx="1723195" cy="841831"/>
           </a:xfrm>
           <a:prstGeom prst="rect">
             <a:avLst/>
@@ -20055,7 +20270,7 @@
           <p:cNvPr id="17" name="source">
             <a:extLst>
               <a:ext uri="{FF2B5EF4-FFF2-40B4-BE49-F238E27FC236}">
-                <a16:creationId xmlns:a16="http://schemas.microsoft.com/office/drawing/2014/main" id="{005F15A9-43AE-1151-CAAF-D44535BEE746}"/>
+                <a16:creationId xmlns:a16="http://schemas.microsoft.com/office/drawing/2014/main" id="{F87E2500-9052-EA11-4E0C-9812079057B9}"/>
               </a:ext>
             </a:extLst>
           </p:cNvPr>
@@ -20068,7 +20283,7 @@
         </p:nvSpPr>
         <p:spPr>
           <a:xfrm>
-            <a:off x="1024128" y="6004560"/>
+            <a:off x="2072640" y="6004560"/>
             <a:ext cx="1905000" cy="304800"/>
           </a:xfrm>
           <a:prstGeom prst="roundRect">
@@ -20110,7 +20325,7 @@
     </p:spTree>
     <p:extLst>
       <p:ext uri="{BB962C8B-B14F-4D97-AF65-F5344CB8AC3E}">
-        <p14:creationId xmlns:p14="http://schemas.microsoft.com/office/powerpoint/2010/main" val="3633184051"/>
+        <p14:creationId xmlns:p14="http://schemas.microsoft.com/office/powerpoint/2010/main" val="540523838"/>
       </p:ext>
     </p:extLst>
   </p:cSld>
@@ -20142,7 +20357,7 @@
           <p:cNvPr id="7" name="creative_background">
             <a:extLst>
               <a:ext uri="{FF2B5EF4-FFF2-40B4-BE49-F238E27FC236}">
-                <a16:creationId xmlns:a16="http://schemas.microsoft.com/office/drawing/2014/main" id="{7184F37D-4B3C-6C58-73D6-361E598624C7}"/>
+                <a16:creationId xmlns:a16="http://schemas.microsoft.com/office/drawing/2014/main" id="{DA71E52D-DF90-AC7E-2CE0-09D672855E29}"/>
               </a:ext>
             </a:extLst>
           </p:cNvPr>
@@ -20183,7 +20398,12 @@
             <p:ph type="title"/>
           </p:nvPr>
         </p:nvSpPr>
-        <p:spPr/>
+        <p:spPr>
+          <a:xfrm>
+            <a:off x="2072640" y="585216"/>
+            <a:ext cx="8674100" cy="1499616"/>
+          </a:xfrm>
+        </p:spPr>
         <p:txBody>
           <a:bodyPr/>
           <a:lstStyle>
@@ -20210,12 +20430,17 @@
             <p:ph type="dt" sz="half" idx="10"/>
           </p:nvPr>
         </p:nvSpPr>
-        <p:spPr/>
+        <p:spPr>
+          <a:xfrm>
+            <a:off x="2072640" y="6470704"/>
+            <a:ext cx="1104900" cy="274320"/>
+          </a:xfrm>
+        </p:spPr>
         <p:txBody>
           <a:bodyPr/>
           <a:lstStyle/>
           <a:p>
-            <a:fld id="{B5D244B9-259B-433A-84B9-2D3FCD42690F}" type="datetimeFigureOut">
+            <a:fld id="{F163761A-A4E5-4C7D-9728-6F0BC80FAE16}" type="datetimeFigureOut">
               <a:rPr lang="en-US" smtClean="0"/>
               <a:t>10/3/2026</a:t>
             </a:fld>
@@ -20257,7 +20482,7 @@
           <a:bodyPr/>
           <a:lstStyle/>
           <a:p>
-            <a:fld id="{F9842B40-88D3-4B59-923A-4074BB0E4CE6}" type="slidenum">
+            <a:fld id="{4DDE2B9A-5AB6-497C-A8BC-8EC14D6B62BC}" type="slidenum">
               <a:rPr lang="en-US" smtClean="0"/>
               <a:t>‹#›</a:t>
             </a:fld>
@@ -20270,7 +20495,7 @@
           <p:cNvPr id="8" name="body">
             <a:extLst>
               <a:ext uri="{FF2B5EF4-FFF2-40B4-BE49-F238E27FC236}">
-                <a16:creationId xmlns:a16="http://schemas.microsoft.com/office/drawing/2014/main" id="{81A3DCF6-021D-E957-2CCE-321B61D23CFF}"/>
+                <a16:creationId xmlns:a16="http://schemas.microsoft.com/office/drawing/2014/main" id="{392C7140-3AB5-E11B-A6E5-1E317849554E}"/>
               </a:ext>
             </a:extLst>
           </p:cNvPr>
@@ -20283,8 +20508,8 @@
         </p:nvSpPr>
         <p:spPr>
           <a:xfrm>
-            <a:off x="1024128" y="2286000"/>
-            <a:ext cx="5443241" cy="3591560"/>
+            <a:off x="2072640" y="2286000"/>
+            <a:ext cx="4856075" cy="3591560"/>
           </a:xfrm>
         </p:spPr>
         <p:txBody>
@@ -20310,7 +20535,7 @@
           <p:cNvPr id="9" name="quote">
             <a:extLst>
               <a:ext uri="{FF2B5EF4-FFF2-40B4-BE49-F238E27FC236}">
-                <a16:creationId xmlns:a16="http://schemas.microsoft.com/office/drawing/2014/main" id="{BC14B7C0-47F6-3254-EE42-53320989621D}"/>
+                <a16:creationId xmlns:a16="http://schemas.microsoft.com/office/drawing/2014/main" id="{1CD968FD-C2F4-FDE1-7AFC-5BF6B3693820}"/>
               </a:ext>
             </a:extLst>
           </p:cNvPr>
@@ -20323,8 +20548,8 @@
         </p:nvSpPr>
         <p:spPr>
           <a:xfrm>
-            <a:off x="7030635" y="2472230"/>
-            <a:ext cx="3539104" cy="2687019"/>
+            <a:off x="7431220" y="2472230"/>
+            <a:ext cx="3157338" cy="2687019"/>
           </a:xfrm>
           <a:prstGeom prst="rect">
             <a:avLst/>
@@ -20360,7 +20585,7 @@
           <p:cNvPr id="10" name="attribution">
             <a:extLst>
               <a:ext uri="{FF2B5EF4-FFF2-40B4-BE49-F238E27FC236}">
-                <a16:creationId xmlns:a16="http://schemas.microsoft.com/office/drawing/2014/main" id="{E7872DBE-E099-A6E6-F5B3-72428692A1BB}"/>
+                <a16:creationId xmlns:a16="http://schemas.microsoft.com/office/drawing/2014/main" id="{5C1C3785-AD89-009B-AF42-8EB12CE3C87F}"/>
               </a:ext>
             </a:extLst>
           </p:cNvPr>
@@ -20373,8 +20598,8 @@
         </p:nvSpPr>
         <p:spPr>
           <a:xfrm>
-            <a:off x="7030635" y="5159249"/>
-            <a:ext cx="3539104" cy="532083"/>
+            <a:off x="7431220" y="5159249"/>
+            <a:ext cx="3157338" cy="532083"/>
           </a:xfrm>
           <a:prstGeom prst="rect">
             <a:avLst/>
@@ -20408,7 +20633,7 @@
           <p:cNvPr id="11" name="source">
             <a:extLst>
               <a:ext uri="{FF2B5EF4-FFF2-40B4-BE49-F238E27FC236}">
-                <a16:creationId xmlns:a16="http://schemas.microsoft.com/office/drawing/2014/main" id="{C17C0779-2853-E79C-2568-DBC945719F3E}"/>
+                <a16:creationId xmlns:a16="http://schemas.microsoft.com/office/drawing/2014/main" id="{360B57FA-9BBC-C054-3042-6FFFEFE4C6EA}"/>
               </a:ext>
             </a:extLst>
           </p:cNvPr>
@@ -20421,7 +20646,7 @@
         </p:nvSpPr>
         <p:spPr>
           <a:xfrm>
-            <a:off x="1024128" y="6004560"/>
+            <a:off x="2072640" y="6004560"/>
             <a:ext cx="1905000" cy="304800"/>
           </a:xfrm>
           <a:prstGeom prst="roundRect">
@@ -20463,7 +20688,7 @@
     </p:spTree>
     <p:extLst>
       <p:ext uri="{BB962C8B-B14F-4D97-AF65-F5344CB8AC3E}">
-        <p14:creationId xmlns:p14="http://schemas.microsoft.com/office/powerpoint/2010/main" val="910556312"/>
+        <p14:creationId xmlns:p14="http://schemas.microsoft.com/office/powerpoint/2010/main" val="4033362876"/>
       </p:ext>
     </p:extLst>
   </p:cSld>
@@ -20495,7 +20720,7 @@
           <p:cNvPr id="7" name="creative_background">
             <a:extLst>
               <a:ext uri="{FF2B5EF4-FFF2-40B4-BE49-F238E27FC236}">
-                <a16:creationId xmlns:a16="http://schemas.microsoft.com/office/drawing/2014/main" id="{36B683E0-665D-3592-7A4A-3C351CB612DA}"/>
+                <a16:creationId xmlns:a16="http://schemas.microsoft.com/office/drawing/2014/main" id="{2F8D4E17-8899-DF64-BD32-8D454486FB6C}"/>
               </a:ext>
             </a:extLst>
           </p:cNvPr>
@@ -20536,7 +20761,12 @@
             <p:ph type="title"/>
           </p:nvPr>
         </p:nvSpPr>
-        <p:spPr/>
+        <p:spPr>
+          <a:xfrm>
+            <a:off x="2072640" y="585216"/>
+            <a:ext cx="8674100" cy="1499616"/>
+          </a:xfrm>
+        </p:spPr>
         <p:txBody>
           <a:bodyPr/>
           <a:lstStyle>
@@ -20563,12 +20793,17 @@
             <p:ph type="dt" sz="half" idx="10"/>
           </p:nvPr>
         </p:nvSpPr>
-        <p:spPr/>
+        <p:spPr>
+          <a:xfrm>
+            <a:off x="2072640" y="6470704"/>
+            <a:ext cx="1104900" cy="274320"/>
+          </a:xfrm>
+        </p:spPr>
         <p:txBody>
           <a:bodyPr/>
           <a:lstStyle/>
           <a:p>
-            <a:fld id="{B5D244B9-259B-433A-84B9-2D3FCD42690F}" type="datetimeFigureOut">
+            <a:fld id="{F163761A-A4E5-4C7D-9728-6F0BC80FAE16}" type="datetimeFigureOut">
               <a:rPr lang="en-US" smtClean="0"/>
               <a:t>10/3/2026</a:t>
             </a:fld>
@@ -20610,7 +20845,7 @@
           <a:bodyPr/>
           <a:lstStyle/>
           <a:p>
-            <a:fld id="{F9842B40-88D3-4B59-923A-4074BB0E4CE6}" type="slidenum">
+            <a:fld id="{4DDE2B9A-5AB6-497C-A8BC-8EC14D6B62BC}" type="slidenum">
               <a:rPr lang="en-US" smtClean="0"/>
               <a:t>‹#›</a:t>
             </a:fld>
@@ -20623,7 +20858,7 @@
           <p:cNvPr id="8" name="item_1_title">
             <a:extLst>
               <a:ext uri="{FF2B5EF4-FFF2-40B4-BE49-F238E27FC236}">
-                <a16:creationId xmlns:a16="http://schemas.microsoft.com/office/drawing/2014/main" id="{F47908D8-04F8-4DF1-1372-862FD5F9FD62}"/>
+                <a16:creationId xmlns:a16="http://schemas.microsoft.com/office/drawing/2014/main" id="{D7488309-59B7-D021-89C2-5564247E2183}"/>
               </a:ext>
             </a:extLst>
           </p:cNvPr>
@@ -20636,8 +20871,8 @@
         </p:nvSpPr>
         <p:spPr>
           <a:xfrm>
-            <a:off x="1198591" y="2472230"/>
-            <a:ext cx="2758175" cy="946795"/>
+            <a:off x="2228283" y="2472230"/>
+            <a:ext cx="2460648" cy="946795"/>
           </a:xfrm>
         </p:spPr>
         <p:txBody>
@@ -20673,7 +20908,7 @@
           <p:cNvPr id="9" name="item_1">
             <a:extLst>
               <a:ext uri="{FF2B5EF4-FFF2-40B4-BE49-F238E27FC236}">
-                <a16:creationId xmlns:a16="http://schemas.microsoft.com/office/drawing/2014/main" id="{5931FBC3-72BD-98F3-E392-331127831EE5}"/>
+                <a16:creationId xmlns:a16="http://schemas.microsoft.com/office/drawing/2014/main" id="{90E611E1-9222-0AF3-C791-9781B486988B}"/>
               </a:ext>
             </a:extLst>
           </p:cNvPr>
@@ -20686,8 +20921,8 @@
         </p:nvSpPr>
         <p:spPr>
           <a:xfrm>
-            <a:off x="1198592" y="3419025"/>
-            <a:ext cx="2758175" cy="2272307"/>
+            <a:off x="2228283" y="3419025"/>
+            <a:ext cx="2460648" cy="2272307"/>
           </a:xfrm>
           <a:prstGeom prst="rect">
             <a:avLst/>
@@ -20721,7 +20956,7 @@
           <p:cNvPr id="10" name="item_2_title">
             <a:extLst>
               <a:ext uri="{FF2B5EF4-FFF2-40B4-BE49-F238E27FC236}">
-                <a16:creationId xmlns:a16="http://schemas.microsoft.com/office/drawing/2014/main" id="{736B5580-7ACC-6D69-6F21-522200AF6A31}"/>
+                <a16:creationId xmlns:a16="http://schemas.microsoft.com/office/drawing/2014/main" id="{8E97C252-9629-24C4-4F7A-4EA4C0C1CA23}"/>
               </a:ext>
             </a:extLst>
           </p:cNvPr>
@@ -20734,8 +20969,8 @@
         </p:nvSpPr>
         <p:spPr>
           <a:xfrm>
-            <a:off x="4505078" y="2472230"/>
-            <a:ext cx="2758175" cy="946795"/>
+            <a:off x="5178097" y="2472230"/>
+            <a:ext cx="2460648" cy="946795"/>
           </a:xfrm>
           <a:prstGeom prst="rect">
             <a:avLst/>
@@ -20774,7 +21009,7 @@
           <p:cNvPr id="11" name="item_2">
             <a:extLst>
               <a:ext uri="{FF2B5EF4-FFF2-40B4-BE49-F238E27FC236}">
-                <a16:creationId xmlns:a16="http://schemas.microsoft.com/office/drawing/2014/main" id="{0ABECD6D-55DF-9AF3-085B-ED8BB6E8EF65}"/>
+                <a16:creationId xmlns:a16="http://schemas.microsoft.com/office/drawing/2014/main" id="{482A09AA-AC6A-1008-0A8D-4037ACC6D7BC}"/>
               </a:ext>
             </a:extLst>
           </p:cNvPr>
@@ -20787,8 +21022,8 @@
         </p:nvSpPr>
         <p:spPr>
           <a:xfrm>
-            <a:off x="4505078" y="3419025"/>
-            <a:ext cx="2758175" cy="2272307"/>
+            <a:off x="5178097" y="3419025"/>
+            <a:ext cx="2460648" cy="2272307"/>
           </a:xfrm>
           <a:prstGeom prst="rect">
             <a:avLst/>
@@ -20822,7 +21057,7 @@
           <p:cNvPr id="12" name="item_3_title">
             <a:extLst>
               <a:ext uri="{FF2B5EF4-FFF2-40B4-BE49-F238E27FC236}">
-                <a16:creationId xmlns:a16="http://schemas.microsoft.com/office/drawing/2014/main" id="{DA75226E-7964-708C-69BD-1CD4230CA391}"/>
+                <a16:creationId xmlns:a16="http://schemas.microsoft.com/office/drawing/2014/main" id="{DB78206E-C70E-D7BC-EAA4-79DB89529F83}"/>
               </a:ext>
             </a:extLst>
           </p:cNvPr>
@@ -20835,8 +21070,8 @@
         </p:nvSpPr>
         <p:spPr>
           <a:xfrm>
-            <a:off x="7811565" y="2472230"/>
-            <a:ext cx="2758175" cy="946795"/>
+            <a:off x="8127910" y="2472230"/>
+            <a:ext cx="2460648" cy="946795"/>
           </a:xfrm>
           <a:prstGeom prst="rect">
             <a:avLst/>
@@ -20875,7 +21110,7 @@
           <p:cNvPr id="13" name="item_3">
             <a:extLst>
               <a:ext uri="{FF2B5EF4-FFF2-40B4-BE49-F238E27FC236}">
-                <a16:creationId xmlns:a16="http://schemas.microsoft.com/office/drawing/2014/main" id="{0F22A055-D7FB-D080-F69A-B5154B06981B}"/>
+                <a16:creationId xmlns:a16="http://schemas.microsoft.com/office/drawing/2014/main" id="{8335229B-EAA8-F05F-C93F-C4DA8E917EAB}"/>
               </a:ext>
             </a:extLst>
           </p:cNvPr>
@@ -20888,8 +21123,8 @@
         </p:nvSpPr>
         <p:spPr>
           <a:xfrm>
-            <a:off x="7811565" y="3419025"/>
-            <a:ext cx="2758175" cy="2272307"/>
+            <a:off x="8127910" y="3419025"/>
+            <a:ext cx="2460648" cy="2272307"/>
           </a:xfrm>
           <a:prstGeom prst="rect">
             <a:avLst/>
@@ -20923,7 +21158,7 @@
           <p:cNvPr id="14" name="source">
             <a:extLst>
               <a:ext uri="{FF2B5EF4-FFF2-40B4-BE49-F238E27FC236}">
-                <a16:creationId xmlns:a16="http://schemas.microsoft.com/office/drawing/2014/main" id="{766D3AA9-EB80-5B86-F623-FBDFB1813564}"/>
+                <a16:creationId xmlns:a16="http://schemas.microsoft.com/office/drawing/2014/main" id="{4AE8B255-B91F-5285-550E-635812041233}"/>
               </a:ext>
             </a:extLst>
           </p:cNvPr>
@@ -20936,7 +21171,7 @@
         </p:nvSpPr>
         <p:spPr>
           <a:xfrm>
-            <a:off x="1024128" y="6004560"/>
+            <a:off x="2072640" y="6004560"/>
             <a:ext cx="1905000" cy="304800"/>
           </a:xfrm>
           <a:prstGeom prst="roundRect">
@@ -20978,7 +21213,7 @@
     </p:spTree>
     <p:extLst>
       <p:ext uri="{BB962C8B-B14F-4D97-AF65-F5344CB8AC3E}">
-        <p14:creationId xmlns:p14="http://schemas.microsoft.com/office/powerpoint/2010/main" val="2148604537"/>
+        <p14:creationId xmlns:p14="http://schemas.microsoft.com/office/powerpoint/2010/main" val="1656077667"/>
       </p:ext>
     </p:extLst>
   </p:cSld>
@@ -21010,7 +21245,7 @@
           <p:cNvPr id="7" name="creative_background">
             <a:extLst>
               <a:ext uri="{FF2B5EF4-FFF2-40B4-BE49-F238E27FC236}">
-                <a16:creationId xmlns:a16="http://schemas.microsoft.com/office/drawing/2014/main" id="{B7EC9B44-F4DC-0602-FC23-862837E36948}"/>
+                <a16:creationId xmlns:a16="http://schemas.microsoft.com/office/drawing/2014/main" id="{1CBBD67B-BEE4-754D-374A-7E326B081E72}"/>
               </a:ext>
             </a:extLst>
           </p:cNvPr>
@@ -21051,7 +21286,12 @@
             <p:ph type="title"/>
           </p:nvPr>
         </p:nvSpPr>
-        <p:spPr/>
+        <p:spPr>
+          <a:xfrm>
+            <a:off x="2072640" y="585216"/>
+            <a:ext cx="8674100" cy="1499616"/>
+          </a:xfrm>
+        </p:spPr>
         <p:txBody>
           <a:bodyPr/>
           <a:lstStyle>
@@ -21078,12 +21318,17 @@
             <p:ph type="dt" sz="half" idx="10"/>
           </p:nvPr>
         </p:nvSpPr>
-        <p:spPr/>
+        <p:spPr>
+          <a:xfrm>
+            <a:off x="2072640" y="6470704"/>
+            <a:ext cx="1104900" cy="274320"/>
+          </a:xfrm>
+        </p:spPr>
         <p:txBody>
           <a:bodyPr/>
           <a:lstStyle/>
           <a:p>
-            <a:fld id="{B5D244B9-259B-433A-84B9-2D3FCD42690F}" type="datetimeFigureOut">
+            <a:fld id="{F163761A-A4E5-4C7D-9728-6F0BC80FAE16}" type="datetimeFigureOut">
               <a:rPr lang="en-US" smtClean="0"/>
               <a:t>10/3/2026</a:t>
             </a:fld>
@@ -21125,7 +21370,7 @@
           <a:bodyPr/>
           <a:lstStyle/>
           <a:p>
-            <a:fld id="{F9842B40-88D3-4B59-923A-4074BB0E4CE6}" type="slidenum">
+            <a:fld id="{4DDE2B9A-5AB6-497C-A8BC-8EC14D6B62BC}" type="slidenum">
               <a:rPr lang="en-US" smtClean="0"/>
               <a:t>‹#›</a:t>
             </a:fld>
@@ -21138,7 +21383,7 @@
           <p:cNvPr id="8" name="item_1_title">
             <a:extLst>
               <a:ext uri="{FF2B5EF4-FFF2-40B4-BE49-F238E27FC236}">
-                <a16:creationId xmlns:a16="http://schemas.microsoft.com/office/drawing/2014/main" id="{7EA3B7D1-D659-AD5F-A058-EB7C2B5BBE01}"/>
+                <a16:creationId xmlns:a16="http://schemas.microsoft.com/office/drawing/2014/main" id="{319E46EB-3C3E-F98E-8EB6-0691F2696901}"/>
               </a:ext>
             </a:extLst>
           </p:cNvPr>
@@ -21151,8 +21396,8 @@
         </p:nvSpPr>
         <p:spPr>
           <a:xfrm>
-            <a:off x="1198591" y="2472230"/>
-            <a:ext cx="4411418" cy="946795"/>
+            <a:off x="2228283" y="2472230"/>
+            <a:ext cx="3935555" cy="946795"/>
           </a:xfrm>
         </p:spPr>
         <p:txBody>
@@ -21188,7 +21433,7 @@
           <p:cNvPr id="9" name="item_1">
             <a:extLst>
               <a:ext uri="{FF2B5EF4-FFF2-40B4-BE49-F238E27FC236}">
-                <a16:creationId xmlns:a16="http://schemas.microsoft.com/office/drawing/2014/main" id="{467C6A0B-98A0-AF71-76D2-3D6832737980}"/>
+                <a16:creationId xmlns:a16="http://schemas.microsoft.com/office/drawing/2014/main" id="{AD156196-275E-D7FD-DF08-EFB066528F1E}"/>
               </a:ext>
             </a:extLst>
           </p:cNvPr>
@@ -21201,8 +21446,8 @@
         </p:nvSpPr>
         <p:spPr>
           <a:xfrm>
-            <a:off x="1198591" y="3419025"/>
-            <a:ext cx="4411418" cy="2272307"/>
+            <a:off x="2228284" y="3419025"/>
+            <a:ext cx="3935555" cy="2272307"/>
           </a:xfrm>
           <a:prstGeom prst="rect">
             <a:avLst/>
@@ -21236,7 +21481,7 @@
           <p:cNvPr id="10" name="item_2_title">
             <a:extLst>
               <a:ext uri="{FF2B5EF4-FFF2-40B4-BE49-F238E27FC236}">
-                <a16:creationId xmlns:a16="http://schemas.microsoft.com/office/drawing/2014/main" id="{64A74000-FEA3-7765-010F-980A6FA42A4C}"/>
+                <a16:creationId xmlns:a16="http://schemas.microsoft.com/office/drawing/2014/main" id="{C25271B0-147C-2459-243F-76131A21077D}"/>
               </a:ext>
             </a:extLst>
           </p:cNvPr>
@@ -21249,8 +21494,8 @@
         </p:nvSpPr>
         <p:spPr>
           <a:xfrm>
-            <a:off x="6158321" y="2472230"/>
-            <a:ext cx="4411418" cy="946795"/>
+            <a:off x="6653004" y="2472230"/>
+            <a:ext cx="3935555" cy="946795"/>
           </a:xfrm>
           <a:prstGeom prst="rect">
             <a:avLst/>
@@ -21289,7 +21534,7 @@
           <p:cNvPr id="11" name="item_2">
             <a:extLst>
               <a:ext uri="{FF2B5EF4-FFF2-40B4-BE49-F238E27FC236}">
-                <a16:creationId xmlns:a16="http://schemas.microsoft.com/office/drawing/2014/main" id="{B8A80AAF-579F-B889-B629-54E470BAA106}"/>
+                <a16:creationId xmlns:a16="http://schemas.microsoft.com/office/drawing/2014/main" id="{635B17F0-7810-FAF6-0DC7-9459BF342CED}"/>
               </a:ext>
             </a:extLst>
           </p:cNvPr>
@@ -21302,8 +21547,8 @@
         </p:nvSpPr>
         <p:spPr>
           <a:xfrm>
-            <a:off x="6158321" y="3419025"/>
-            <a:ext cx="4411418" cy="2272307"/>
+            <a:off x="6653004" y="3419025"/>
+            <a:ext cx="3935555" cy="2272307"/>
           </a:xfrm>
           <a:prstGeom prst="rect">
             <a:avLst/>
@@ -21337,7 +21582,7 @@
           <p:cNvPr id="12" name="source">
             <a:extLst>
               <a:ext uri="{FF2B5EF4-FFF2-40B4-BE49-F238E27FC236}">
-                <a16:creationId xmlns:a16="http://schemas.microsoft.com/office/drawing/2014/main" id="{147ECD1D-F006-1915-7012-7CD018F866E2}"/>
+                <a16:creationId xmlns:a16="http://schemas.microsoft.com/office/drawing/2014/main" id="{62C55CF7-B6BD-2C9D-F2D8-0CFBD67889B2}"/>
               </a:ext>
             </a:extLst>
           </p:cNvPr>
@@ -21350,7 +21595,7 @@
         </p:nvSpPr>
         <p:spPr>
           <a:xfrm>
-            <a:off x="1024128" y="6004560"/>
+            <a:off x="2072640" y="6004560"/>
             <a:ext cx="1905000" cy="304800"/>
           </a:xfrm>
           <a:prstGeom prst="roundRect">
@@ -21392,7 +21637,7 @@
     </p:spTree>
     <p:extLst>
       <p:ext uri="{BB962C8B-B14F-4D97-AF65-F5344CB8AC3E}">
-        <p14:creationId xmlns:p14="http://schemas.microsoft.com/office/powerpoint/2010/main" val="1523303968"/>
+        <p14:creationId xmlns:p14="http://schemas.microsoft.com/office/powerpoint/2010/main" val="3958423878"/>
       </p:ext>
     </p:extLst>
   </p:cSld>
@@ -21424,7 +21669,7 @@
           <p:cNvPr id="7" name="creative_background">
             <a:extLst>
               <a:ext uri="{FF2B5EF4-FFF2-40B4-BE49-F238E27FC236}">
-                <a16:creationId xmlns:a16="http://schemas.microsoft.com/office/drawing/2014/main" id="{C93FA68A-78C6-5DC6-2531-7E16CD385304}"/>
+                <a16:creationId xmlns:a16="http://schemas.microsoft.com/office/drawing/2014/main" id="{CD437CF3-4F1C-0EA2-5959-664429EE9B29}"/>
               </a:ext>
             </a:extLst>
           </p:cNvPr>
@@ -21465,7 +21710,12 @@
             <p:ph type="title"/>
           </p:nvPr>
         </p:nvSpPr>
-        <p:spPr/>
+        <p:spPr>
+          <a:xfrm>
+            <a:off x="2072640" y="585216"/>
+            <a:ext cx="8674100" cy="1499616"/>
+          </a:xfrm>
+        </p:spPr>
         <p:txBody>
           <a:bodyPr/>
           <a:lstStyle>
@@ -21492,12 +21742,17 @@
             <p:ph type="dt" sz="half" idx="10"/>
           </p:nvPr>
         </p:nvSpPr>
-        <p:spPr/>
+        <p:spPr>
+          <a:xfrm>
+            <a:off x="2072640" y="6470704"/>
+            <a:ext cx="1104900" cy="274320"/>
+          </a:xfrm>
+        </p:spPr>
         <p:txBody>
           <a:bodyPr/>
           <a:lstStyle/>
           <a:p>
-            <a:fld id="{B5D244B9-259B-433A-84B9-2D3FCD42690F}" type="datetimeFigureOut">
+            <a:fld id="{F163761A-A4E5-4C7D-9728-6F0BC80FAE16}" type="datetimeFigureOut">
               <a:rPr lang="en-US" smtClean="0"/>
               <a:t>10/3/2026</a:t>
             </a:fld>
@@ -21539,7 +21794,7 @@
           <a:bodyPr/>
           <a:lstStyle/>
           <a:p>
-            <a:fld id="{F9842B40-88D3-4B59-923A-4074BB0E4CE6}" type="slidenum">
+            <a:fld id="{4DDE2B9A-5AB6-497C-A8BC-8EC14D6B62BC}" type="slidenum">
               <a:rPr lang="en-US" smtClean="0"/>
               <a:t>‹#›</a:t>
             </a:fld>
@@ -21552,7 +21807,7 @@
           <p:cNvPr id="8" name="chart">
             <a:extLst>
               <a:ext uri="{FF2B5EF4-FFF2-40B4-BE49-F238E27FC236}">
-                <a16:creationId xmlns:a16="http://schemas.microsoft.com/office/drawing/2014/main" id="{7C4507A8-CC1D-7A98-3A72-1E94C867FC35}"/>
+                <a16:creationId xmlns:a16="http://schemas.microsoft.com/office/drawing/2014/main" id="{A4DF8017-C91C-4994-9A98-EBA67E59F468}"/>
               </a:ext>
             </a:extLst>
           </p:cNvPr>
@@ -21565,8 +21820,8 @@
         </p:nvSpPr>
         <p:spPr>
           <a:xfrm>
-            <a:off x="1024128" y="2286000"/>
-            <a:ext cx="6804051" cy="3591560"/>
+            <a:off x="2072640" y="2286000"/>
+            <a:ext cx="6070093" cy="3591560"/>
           </a:xfrm>
         </p:spPr>
         <p:txBody>
@@ -21582,7 +21837,7 @@
           <p:cNvPr id="9" name="body">
             <a:extLst>
               <a:ext uri="{FF2B5EF4-FFF2-40B4-BE49-F238E27FC236}">
-                <a16:creationId xmlns:a16="http://schemas.microsoft.com/office/drawing/2014/main" id="{8ED8C498-5395-F3F8-69FC-A4E82AC85CF2}"/>
+                <a16:creationId xmlns:a16="http://schemas.microsoft.com/office/drawing/2014/main" id="{C4881A79-2F5D-3AC5-327A-DE20AF03DD83}"/>
               </a:ext>
             </a:extLst>
           </p:cNvPr>
@@ -21595,8 +21850,8 @@
         </p:nvSpPr>
         <p:spPr>
           <a:xfrm>
-            <a:off x="8216983" y="2429663"/>
-            <a:ext cx="2527219" cy="3304235"/>
+            <a:off x="8489596" y="2429663"/>
+            <a:ext cx="2254606" cy="3304235"/>
           </a:xfrm>
           <a:prstGeom prst="rect">
             <a:avLst/>
@@ -21625,7 +21880,7 @@
           <p:cNvPr id="10" name="source">
             <a:extLst>
               <a:ext uri="{FF2B5EF4-FFF2-40B4-BE49-F238E27FC236}">
-                <a16:creationId xmlns:a16="http://schemas.microsoft.com/office/drawing/2014/main" id="{308B442F-8CAE-37CB-99E3-A6D05A3A1A47}"/>
+                <a16:creationId xmlns:a16="http://schemas.microsoft.com/office/drawing/2014/main" id="{55D094B2-DEA6-7FD9-8318-0B51C17E2449}"/>
               </a:ext>
             </a:extLst>
           </p:cNvPr>
@@ -21638,7 +21893,7 @@
         </p:nvSpPr>
         <p:spPr>
           <a:xfrm>
-            <a:off x="1024128" y="6004560"/>
+            <a:off x="2072640" y="6004560"/>
             <a:ext cx="1905000" cy="304800"/>
           </a:xfrm>
           <a:prstGeom prst="roundRect">
@@ -21680,7 +21935,7 @@
     </p:spTree>
     <p:extLst>
       <p:ext uri="{BB962C8B-B14F-4D97-AF65-F5344CB8AC3E}">
-        <p14:creationId xmlns:p14="http://schemas.microsoft.com/office/powerpoint/2010/main" val="1108312112"/>
+        <p14:creationId xmlns:p14="http://schemas.microsoft.com/office/powerpoint/2010/main" val="1524612216"/>
       </p:ext>
     </p:extLst>
   </p:cSld>
@@ -21712,7 +21967,7 @@
           <p:cNvPr id="7" name="creative_background">
             <a:extLst>
               <a:ext uri="{FF2B5EF4-FFF2-40B4-BE49-F238E27FC236}">
-                <a16:creationId xmlns:a16="http://schemas.microsoft.com/office/drawing/2014/main" id="{C4EE3B39-B46A-BFCC-8517-4E4FB061A73D}"/>
+                <a16:creationId xmlns:a16="http://schemas.microsoft.com/office/drawing/2014/main" id="{7FBA10CB-4BC4-E876-1DD1-E68F32E8C37E}"/>
               </a:ext>
             </a:extLst>
           </p:cNvPr>
@@ -21753,7 +22008,12 @@
             <p:ph type="title"/>
           </p:nvPr>
         </p:nvSpPr>
-        <p:spPr/>
+        <p:spPr>
+          <a:xfrm>
+            <a:off x="2072640" y="585216"/>
+            <a:ext cx="8674100" cy="1499616"/>
+          </a:xfrm>
+        </p:spPr>
         <p:txBody>
           <a:bodyPr/>
           <a:lstStyle>
@@ -21780,12 +22040,17 @@
             <p:ph type="dt" sz="half" idx="10"/>
           </p:nvPr>
         </p:nvSpPr>
-        <p:spPr/>
+        <p:spPr>
+          <a:xfrm>
+            <a:off x="2072640" y="6470704"/>
+            <a:ext cx="1104900" cy="274320"/>
+          </a:xfrm>
+        </p:spPr>
         <p:txBody>
           <a:bodyPr/>
           <a:lstStyle/>
           <a:p>
-            <a:fld id="{B5D244B9-259B-433A-84B9-2D3FCD42690F}" type="datetimeFigureOut">
+            <a:fld id="{F163761A-A4E5-4C7D-9728-6F0BC80FAE16}" type="datetimeFigureOut">
               <a:rPr lang="en-US" smtClean="0"/>
               <a:t>10/3/2026</a:t>
             </a:fld>
@@ -21827,7 +22092,7 @@
           <a:bodyPr/>
           <a:lstStyle/>
           <a:p>
-            <a:fld id="{F9842B40-88D3-4B59-923A-4074BB0E4CE6}" type="slidenum">
+            <a:fld id="{4DDE2B9A-5AB6-497C-A8BC-8EC14D6B62BC}" type="slidenum">
               <a:rPr lang="en-US" smtClean="0"/>
               <a:t>‹#›</a:t>
             </a:fld>
@@ -21840,7 +22105,7 @@
           <p:cNvPr id="8" name="item_1_title">
             <a:extLst>
               <a:ext uri="{FF2B5EF4-FFF2-40B4-BE49-F238E27FC236}">
-                <a16:creationId xmlns:a16="http://schemas.microsoft.com/office/drawing/2014/main" id="{85B2F385-34F3-C809-531C-6A6AE1EF5E3D}"/>
+                <a16:creationId xmlns:a16="http://schemas.microsoft.com/office/drawing/2014/main" id="{08EAB2A4-DC12-9288-FDDA-BFF84D6C752C}"/>
               </a:ext>
             </a:extLst>
           </p:cNvPr>
@@ -21853,8 +22118,8 @@
         </p:nvSpPr>
         <p:spPr>
           <a:xfrm>
-            <a:off x="1198591" y="2472230"/>
-            <a:ext cx="4411418" cy="387325"/>
+            <a:off x="2228283" y="2472230"/>
+            <a:ext cx="3935555" cy="387325"/>
           </a:xfrm>
         </p:spPr>
         <p:txBody>
@@ -21890,7 +22155,7 @@
           <p:cNvPr id="9" name="item_1">
             <a:extLst>
               <a:ext uri="{FF2B5EF4-FFF2-40B4-BE49-F238E27FC236}">
-                <a16:creationId xmlns:a16="http://schemas.microsoft.com/office/drawing/2014/main" id="{383CF692-0443-2C97-BEC5-84F849BA60A3}"/>
+                <a16:creationId xmlns:a16="http://schemas.microsoft.com/office/drawing/2014/main" id="{73ADCE74-FC68-5A45-9904-9D8C949A025D}"/>
               </a:ext>
             </a:extLst>
           </p:cNvPr>
@@ -21903,8 +22168,8 @@
         </p:nvSpPr>
         <p:spPr>
           <a:xfrm>
-            <a:off x="1198591" y="2859554"/>
-            <a:ext cx="4411418" cy="929580"/>
+            <a:off x="2228284" y="2859554"/>
+            <a:ext cx="3935555" cy="929580"/>
           </a:xfrm>
           <a:prstGeom prst="rect">
             <a:avLst/>
@@ -21938,7 +22203,7 @@
           <p:cNvPr id="10" name="item_2_title">
             <a:extLst>
               <a:ext uri="{FF2B5EF4-FFF2-40B4-BE49-F238E27FC236}">
-                <a16:creationId xmlns:a16="http://schemas.microsoft.com/office/drawing/2014/main" id="{74B35379-94CA-F0BE-2E0F-6978EEA7CDC4}"/>
+                <a16:creationId xmlns:a16="http://schemas.microsoft.com/office/drawing/2014/main" id="{745E0F4E-3C62-E499-4E6A-A87938AB363C}"/>
               </a:ext>
             </a:extLst>
           </p:cNvPr>
@@ -21951,8 +22216,8 @@
         </p:nvSpPr>
         <p:spPr>
           <a:xfrm>
-            <a:off x="6158321" y="2472230"/>
-            <a:ext cx="4411418" cy="387325"/>
+            <a:off x="6653004" y="2472230"/>
+            <a:ext cx="3935555" cy="387325"/>
           </a:xfrm>
           <a:prstGeom prst="rect">
             <a:avLst/>
@@ -21991,7 +22256,7 @@
           <p:cNvPr id="11" name="item_2">
             <a:extLst>
               <a:ext uri="{FF2B5EF4-FFF2-40B4-BE49-F238E27FC236}">
-                <a16:creationId xmlns:a16="http://schemas.microsoft.com/office/drawing/2014/main" id="{4FBE43AB-552A-D33B-D8CA-2968EB2211C1}"/>
+                <a16:creationId xmlns:a16="http://schemas.microsoft.com/office/drawing/2014/main" id="{38949DDE-46FD-60B4-3BA9-EE1832F29FF3}"/>
               </a:ext>
             </a:extLst>
           </p:cNvPr>
@@ -22004,8 +22269,8 @@
         </p:nvSpPr>
         <p:spPr>
           <a:xfrm>
-            <a:off x="6158321" y="2859554"/>
-            <a:ext cx="4411418" cy="929580"/>
+            <a:off x="6653004" y="2859554"/>
+            <a:ext cx="3935555" cy="929580"/>
           </a:xfrm>
           <a:prstGeom prst="rect">
             <a:avLst/>
@@ -22039,7 +22304,7 @@
           <p:cNvPr id="12" name="item_3_title">
             <a:extLst>
               <a:ext uri="{FF2B5EF4-FFF2-40B4-BE49-F238E27FC236}">
-                <a16:creationId xmlns:a16="http://schemas.microsoft.com/office/drawing/2014/main" id="{D1082232-D964-29CA-12C7-DEEDC6BC4E02}"/>
+                <a16:creationId xmlns:a16="http://schemas.microsoft.com/office/drawing/2014/main" id="{D93D3F94-0493-7176-CFDE-4C82CDEB8367}"/>
               </a:ext>
             </a:extLst>
           </p:cNvPr>
@@ -22052,8 +22317,8 @@
         </p:nvSpPr>
         <p:spPr>
           <a:xfrm>
-            <a:off x="1198591" y="4374427"/>
-            <a:ext cx="4411418" cy="387325"/>
+            <a:off x="2228284" y="4374427"/>
+            <a:ext cx="3935555" cy="387325"/>
           </a:xfrm>
           <a:prstGeom prst="rect">
             <a:avLst/>
@@ -22092,7 +22357,7 @@
           <p:cNvPr id="13" name="item_3">
             <a:extLst>
               <a:ext uri="{FF2B5EF4-FFF2-40B4-BE49-F238E27FC236}">
-                <a16:creationId xmlns:a16="http://schemas.microsoft.com/office/drawing/2014/main" id="{F3F388E4-4924-1B63-22EF-0738CA6B7E9A}"/>
+                <a16:creationId xmlns:a16="http://schemas.microsoft.com/office/drawing/2014/main" id="{5F0DAEED-F038-B4AB-6F2B-77E739682F91}"/>
               </a:ext>
             </a:extLst>
           </p:cNvPr>
@@ -22105,8 +22370,8 @@
         </p:nvSpPr>
         <p:spPr>
           <a:xfrm>
-            <a:off x="1198591" y="4761750"/>
-            <a:ext cx="4411418" cy="929580"/>
+            <a:off x="2228284" y="4761750"/>
+            <a:ext cx="3935555" cy="929580"/>
           </a:xfrm>
           <a:prstGeom prst="rect">
             <a:avLst/>
@@ -22140,7 +22405,7 @@
           <p:cNvPr id="14" name="item_4_title">
             <a:extLst>
               <a:ext uri="{FF2B5EF4-FFF2-40B4-BE49-F238E27FC236}">
-                <a16:creationId xmlns:a16="http://schemas.microsoft.com/office/drawing/2014/main" id="{E74E0ABE-E491-2DFF-75C2-64BF1655FE6F}"/>
+                <a16:creationId xmlns:a16="http://schemas.microsoft.com/office/drawing/2014/main" id="{95A4398F-2C19-DF78-6C57-E3E7E3A020E6}"/>
               </a:ext>
             </a:extLst>
           </p:cNvPr>
@@ -22153,8 +22418,8 @@
         </p:nvSpPr>
         <p:spPr>
           <a:xfrm>
-            <a:off x="6158321" y="4374427"/>
-            <a:ext cx="4411418" cy="387325"/>
+            <a:off x="6653004" y="4374427"/>
+            <a:ext cx="3935555" cy="387325"/>
           </a:xfrm>
           <a:prstGeom prst="rect">
             <a:avLst/>
@@ -22193,7 +22458,7 @@
           <p:cNvPr id="15" name="item_4">
             <a:extLst>
               <a:ext uri="{FF2B5EF4-FFF2-40B4-BE49-F238E27FC236}">
-                <a16:creationId xmlns:a16="http://schemas.microsoft.com/office/drawing/2014/main" id="{40BCAA8B-CC81-2011-73DA-F6FB057EBA35}"/>
+                <a16:creationId xmlns:a16="http://schemas.microsoft.com/office/drawing/2014/main" id="{7FE0791C-4C84-6770-EA06-BD42F0DF958A}"/>
               </a:ext>
             </a:extLst>
           </p:cNvPr>
@@ -22206,8 +22471,8 @@
         </p:nvSpPr>
         <p:spPr>
           <a:xfrm>
-            <a:off x="6158321" y="4761750"/>
-            <a:ext cx="4411418" cy="929580"/>
+            <a:off x="6653004" y="4761750"/>
+            <a:ext cx="3935555" cy="929580"/>
           </a:xfrm>
           <a:prstGeom prst="rect">
             <a:avLst/>
@@ -22241,7 +22506,7 @@
           <p:cNvPr id="16" name="source">
             <a:extLst>
               <a:ext uri="{FF2B5EF4-FFF2-40B4-BE49-F238E27FC236}">
-                <a16:creationId xmlns:a16="http://schemas.microsoft.com/office/drawing/2014/main" id="{3E37C841-D8B8-99C0-E570-7D8ED37CFE37}"/>
+                <a16:creationId xmlns:a16="http://schemas.microsoft.com/office/drawing/2014/main" id="{9ECD8AC1-4F2A-C06F-F9A6-790DA3A876EF}"/>
               </a:ext>
             </a:extLst>
           </p:cNvPr>
@@ -22254,7 +22519,7 @@
         </p:nvSpPr>
         <p:spPr>
           <a:xfrm>
-            <a:off x="1024128" y="6004560"/>
+            <a:off x="2072640" y="6004560"/>
             <a:ext cx="1905000" cy="304800"/>
           </a:xfrm>
           <a:prstGeom prst="roundRect">
@@ -22296,7 +22561,7 @@
     </p:spTree>
     <p:extLst>
       <p:ext uri="{BB962C8B-B14F-4D97-AF65-F5344CB8AC3E}">
-        <p14:creationId xmlns:p14="http://schemas.microsoft.com/office/powerpoint/2010/main" val="1493008093"/>
+        <p14:creationId xmlns:p14="http://schemas.microsoft.com/office/powerpoint/2010/main" val="2213147108"/>
       </p:ext>
     </p:extLst>
   </p:cSld>
@@ -22333,7 +22598,7 @@
           <p:cNvPr id="9" name="creative_background_master">
             <a:extLst>
               <a:ext uri="{FF2B5EF4-FFF2-40B4-BE49-F238E27FC236}">
-                <a16:creationId xmlns:a16="http://schemas.microsoft.com/office/drawing/2014/main" id="{79727622-E28D-3DB4-69F7-61A5AE111ECF}"/>
+                <a16:creationId xmlns:a16="http://schemas.microsoft.com/office/drawing/2014/main" id="{EA396213-0D21-E7D4-CD66-4C3C312CE030}"/>
               </a:ext>
             </a:extLst>
           </p:cNvPr>
@@ -22494,7 +22759,7 @@
             </a:lvl1pPr>
           </a:lstStyle>
           <a:p>
-            <a:fld id="{B5D244B9-259B-433A-84B9-2D3FCD42690F}" type="datetimeFigureOut">
+            <a:fld id="{F163761A-A4E5-4C7D-9728-6F0BC80FAE16}" type="datetimeFigureOut">
               <a:rPr lang="en-US" smtClean="0"/>
               <a:t>10/3/2026</a:t>
             </a:fld>
@@ -22576,7 +22841,7 @@
             </a:lvl1pPr>
           </a:lstStyle>
           <a:p>
-            <a:fld id="{F9842B40-88D3-4B59-923A-4074BB0E4CE6}" type="slidenum">
+            <a:fld id="{4DDE2B9A-5AB6-497C-A8BC-8EC14D6B62BC}" type="slidenum">
               <a:rPr lang="en-US" smtClean="0"/>
               <a:t>‹#›</a:t>
             </a:fld>
@@ -22587,7 +22852,7 @@
     </p:spTree>
     <p:extLst>
       <p:ext uri="{BB962C8B-B14F-4D97-AF65-F5344CB8AC3E}">
-        <p14:creationId xmlns:p14="http://schemas.microsoft.com/office/powerpoint/2010/main" val="955098339"/>
+        <p14:creationId xmlns:p14="http://schemas.microsoft.com/office/powerpoint/2010/main" val="182671467"/>
       </p:ext>
     </p:extLst>
   </p:cSld>
@@ -22980,10 +23245,10 @@
         <a:srgbClr val="E8E8E6"/>
       </a:lt2>
       <a:accent1>
-        <a:srgbClr val="926A0B"/>
+        <a:srgbClr val="026C6C"/>
       </a:accent1>
       <a:accent2>
-        <a:srgbClr val="026C6C"/>
+        <a:srgbClr val="B58623"/>
       </a:accent2>
       <a:accent3>
         <a:srgbClr val="455353"/>
@@ -22992,7 +23257,7 @@
         <a:srgbClr val="026C6C"/>
       </a:accent4>
       <a:accent5>
-        <a:srgbClr val="926A0B"/>
+        <a:srgbClr val="026C6C"/>
       </a:accent5>
       <a:accent6>
         <a:srgbClr val="455353"/>

--- a/design/templates/mashrabiya/template.pptx
+++ b/design/templates/mashrabiya/template.pptx
@@ -126,7 +126,7 @@
           <p:cNvPr id="9" name="creative_background">
             <a:extLst>
               <a:ext uri="{FF2B5EF4-FFF2-40B4-BE49-F238E27FC236}">
-                <a16:creationId xmlns:a16="http://schemas.microsoft.com/office/drawing/2014/main" id="{E2BE65D2-934C-E25A-E9EB-787496B6BD7D}"/>
+                <a16:creationId xmlns:a16="http://schemas.microsoft.com/office/drawing/2014/main" id="{8BFCFE09-30A1-BF4A-BB73-D6DF788CB315}"/>
               </a:ext>
             </a:extLst>
           </p:cNvPr>
@@ -295,9 +295,9 @@
             </a:lvl1pPr>
           </a:lstStyle>
           <a:p>
-            <a:fld id="{F163761A-A4E5-4C7D-9728-6F0BC80FAE16}" type="datetimeFigureOut">
+            <a:fld id="{55B34ED4-2611-4754-BC8B-367044EB0C5C}" type="datetimeFigureOut">
               <a:rPr lang="en-US" smtClean="0"/>
-              <a:t>10/3/2026</a:t>
+              <a:t>10/4/2026</a:t>
             </a:fld>
             <a:endParaRPr lang="en-US"/>
           </a:p>
@@ -337,7 +337,7 @@
           <a:bodyPr/>
           <a:lstStyle/>
           <a:p>
-            <a:fld id="{4DDE2B9A-5AB6-497C-A8BC-8EC14D6B62BC}" type="slidenum">
+            <a:fld id="{1A1093C2-1C68-42EE-B693-25A933F6CF0F}" type="slidenum">
               <a:rPr lang="en-US" smtClean="0"/>
               <a:t>‹#›</a:t>
             </a:fld>
@@ -348,7 +348,7 @@
     </p:spTree>
     <p:extLst>
       <p:ext uri="{BB962C8B-B14F-4D97-AF65-F5344CB8AC3E}">
-        <p14:creationId xmlns:p14="http://schemas.microsoft.com/office/powerpoint/2010/main" val="3570373532"/>
+        <p14:creationId xmlns:p14="http://schemas.microsoft.com/office/powerpoint/2010/main" val="48874559"/>
       </p:ext>
     </p:extLst>
   </p:cSld>
@@ -380,7 +380,7 @@
           <p:cNvPr id="7" name="creative_background">
             <a:extLst>
               <a:ext uri="{FF2B5EF4-FFF2-40B4-BE49-F238E27FC236}">
-                <a16:creationId xmlns:a16="http://schemas.microsoft.com/office/drawing/2014/main" id="{961D5EB0-DE37-7F97-4E6C-BB67AFF7794C}"/>
+                <a16:creationId xmlns:a16="http://schemas.microsoft.com/office/drawing/2014/main" id="{4017E30C-70E3-BB1A-E198-976687BEB3B6}"/>
               </a:ext>
             </a:extLst>
           </p:cNvPr>
@@ -463,9 +463,9 @@
           <a:bodyPr/>
           <a:lstStyle/>
           <a:p>
-            <a:fld id="{F163761A-A4E5-4C7D-9728-6F0BC80FAE16}" type="datetimeFigureOut">
+            <a:fld id="{55B34ED4-2611-4754-BC8B-367044EB0C5C}" type="datetimeFigureOut">
               <a:rPr lang="en-US" smtClean="0"/>
-              <a:t>10/3/2026</a:t>
+              <a:t>10/4/2026</a:t>
             </a:fld>
             <a:endParaRPr lang="en-US"/>
           </a:p>
@@ -505,7 +505,7 @@
           <a:bodyPr/>
           <a:lstStyle/>
           <a:p>
-            <a:fld id="{4DDE2B9A-5AB6-497C-A8BC-8EC14D6B62BC}" type="slidenum">
+            <a:fld id="{1A1093C2-1C68-42EE-B693-25A933F6CF0F}" type="slidenum">
               <a:rPr lang="en-US" smtClean="0"/>
               <a:t>‹#›</a:t>
             </a:fld>
@@ -518,7 +518,7 @@
           <p:cNvPr id="8" name="body">
             <a:extLst>
               <a:ext uri="{FF2B5EF4-FFF2-40B4-BE49-F238E27FC236}">
-                <a16:creationId xmlns:a16="http://schemas.microsoft.com/office/drawing/2014/main" id="{EFEC8CD9-7826-8EAE-5ED9-6A988333B145}"/>
+                <a16:creationId xmlns:a16="http://schemas.microsoft.com/office/drawing/2014/main" id="{DFC96935-B2A2-C3EF-3FFC-60266A6873AC}"/>
               </a:ext>
             </a:extLst>
           </p:cNvPr>
@@ -558,7 +558,7 @@
           <p:cNvPr id="9" name="source">
             <a:extLst>
               <a:ext uri="{FF2B5EF4-FFF2-40B4-BE49-F238E27FC236}">
-                <a16:creationId xmlns:a16="http://schemas.microsoft.com/office/drawing/2014/main" id="{496327D8-643A-E187-C9F5-AFD1BC54B2A7}"/>
+                <a16:creationId xmlns:a16="http://schemas.microsoft.com/office/drawing/2014/main" id="{68CA7475-79DC-53D4-E776-718E5C42ADE8}"/>
               </a:ext>
             </a:extLst>
           </p:cNvPr>
@@ -613,7 +613,7 @@
     </p:spTree>
     <p:extLst>
       <p:ext uri="{BB962C8B-B14F-4D97-AF65-F5344CB8AC3E}">
-        <p14:creationId xmlns:p14="http://schemas.microsoft.com/office/powerpoint/2010/main" val="874458143"/>
+        <p14:creationId xmlns:p14="http://schemas.microsoft.com/office/powerpoint/2010/main" val="3157410903"/>
       </p:ext>
     </p:extLst>
   </p:cSld>
@@ -645,7 +645,7 @@
           <p:cNvPr id="7" name="creative_background">
             <a:extLst>
               <a:ext uri="{FF2B5EF4-FFF2-40B4-BE49-F238E27FC236}">
-                <a16:creationId xmlns:a16="http://schemas.microsoft.com/office/drawing/2014/main" id="{24B08A7A-87D2-F49A-88F8-FC9134C93EEF}"/>
+                <a16:creationId xmlns:a16="http://schemas.microsoft.com/office/drawing/2014/main" id="{D0DBB76C-4072-FD9D-B849-6C07C86292FE}"/>
               </a:ext>
             </a:extLst>
           </p:cNvPr>
@@ -728,9 +728,9 @@
           <a:bodyPr/>
           <a:lstStyle/>
           <a:p>
-            <a:fld id="{F163761A-A4E5-4C7D-9728-6F0BC80FAE16}" type="datetimeFigureOut">
+            <a:fld id="{55B34ED4-2611-4754-BC8B-367044EB0C5C}" type="datetimeFigureOut">
               <a:rPr lang="en-US" smtClean="0"/>
-              <a:t>10/3/2026</a:t>
+              <a:t>10/4/2026</a:t>
             </a:fld>
             <a:endParaRPr lang="en-US"/>
           </a:p>
@@ -770,7 +770,7 @@
           <a:bodyPr/>
           <a:lstStyle/>
           <a:p>
-            <a:fld id="{4DDE2B9A-5AB6-497C-A8BC-8EC14D6B62BC}" type="slidenum">
+            <a:fld id="{1A1093C2-1C68-42EE-B693-25A933F6CF0F}" type="slidenum">
               <a:rPr lang="en-US" smtClean="0"/>
               <a:t>‹#›</a:t>
             </a:fld>
@@ -783,7 +783,7 @@
           <p:cNvPr id="8" name="body">
             <a:extLst>
               <a:ext uri="{FF2B5EF4-FFF2-40B4-BE49-F238E27FC236}">
-                <a16:creationId xmlns:a16="http://schemas.microsoft.com/office/drawing/2014/main" id="{6A255ABA-FB75-23C9-E82B-69262CD9CB4B}"/>
+                <a16:creationId xmlns:a16="http://schemas.microsoft.com/office/drawing/2014/main" id="{B003F2D4-EDC9-1ABE-D399-1540342777BD}"/>
               </a:ext>
             </a:extLst>
           </p:cNvPr>
@@ -826,7 +826,7 @@
     </p:spTree>
     <p:extLst>
       <p:ext uri="{BB962C8B-B14F-4D97-AF65-F5344CB8AC3E}">
-        <p14:creationId xmlns:p14="http://schemas.microsoft.com/office/powerpoint/2010/main" val="635545879"/>
+        <p14:creationId xmlns:p14="http://schemas.microsoft.com/office/powerpoint/2010/main" val="2757180805"/>
       </p:ext>
     </p:extLst>
   </p:cSld>
@@ -902,7 +902,7 @@
           <p:cNvPr id="6" name="section_number">
             <a:extLst>
               <a:ext uri="{FF2B5EF4-FFF2-40B4-BE49-F238E27FC236}">
-                <a16:creationId xmlns:a16="http://schemas.microsoft.com/office/drawing/2014/main" id="{E2A44898-C602-0EE3-8337-8842F06DFF47}"/>
+                <a16:creationId xmlns:a16="http://schemas.microsoft.com/office/drawing/2014/main" id="{7FA53C9A-C9EC-EC3D-B903-226ED8C222F4}"/>
               </a:ext>
             </a:extLst>
           </p:cNvPr>
@@ -955,7 +955,7 @@
           <p:cNvPr id="7" name="subtitle">
             <a:extLst>
               <a:ext uri="{FF2B5EF4-FFF2-40B4-BE49-F238E27FC236}">
-                <a16:creationId xmlns:a16="http://schemas.microsoft.com/office/drawing/2014/main" id="{28E5C251-3537-221D-EC4D-EF780EEF3761}"/>
+                <a16:creationId xmlns:a16="http://schemas.microsoft.com/office/drawing/2014/main" id="{938A48E3-493F-CA56-D2FA-6DB679B19697}"/>
               </a:ext>
             </a:extLst>
           </p:cNvPr>
@@ -1007,7 +1007,7 @@
           <p:cNvPr id="8" name="pattern">
             <a:extLst>
               <a:ext uri="{FF2B5EF4-FFF2-40B4-BE49-F238E27FC236}">
-                <a16:creationId xmlns:a16="http://schemas.microsoft.com/office/drawing/2014/main" id="{CE17FBCA-3546-1BAB-D532-287B59424B1B}"/>
+                <a16:creationId xmlns:a16="http://schemas.microsoft.com/office/drawing/2014/main" id="{9E1E8C5D-D310-EE08-586B-FE0685B289F8}"/>
               </a:ext>
             </a:extLst>
           </p:cNvPr>
@@ -1075,7 +1075,7 @@
           <p:cNvPr id="9" name="pattern">
             <a:extLst>
               <a:ext uri="{FF2B5EF4-FFF2-40B4-BE49-F238E27FC236}">
-                <a16:creationId xmlns:a16="http://schemas.microsoft.com/office/drawing/2014/main" id="{196FE107-291D-BD76-559A-78BDD6D64243}"/>
+                <a16:creationId xmlns:a16="http://schemas.microsoft.com/office/drawing/2014/main" id="{D678D7A7-82C1-F323-40BE-9D588A08BED1}"/>
               </a:ext>
             </a:extLst>
           </p:cNvPr>
@@ -1143,7 +1143,7 @@
           <p:cNvPr id="10" name="pattern">
             <a:extLst>
               <a:ext uri="{FF2B5EF4-FFF2-40B4-BE49-F238E27FC236}">
-                <a16:creationId xmlns:a16="http://schemas.microsoft.com/office/drawing/2014/main" id="{7E25536A-9EA1-CB84-E7AE-833E9A6EE2EF}"/>
+                <a16:creationId xmlns:a16="http://schemas.microsoft.com/office/drawing/2014/main" id="{1A6345CE-6E54-BBD6-C752-84719009DCF9}"/>
               </a:ext>
             </a:extLst>
           </p:cNvPr>
@@ -1211,7 +1211,7 @@
           <p:cNvPr id="11" name="pattern">
             <a:extLst>
               <a:ext uri="{FF2B5EF4-FFF2-40B4-BE49-F238E27FC236}">
-                <a16:creationId xmlns:a16="http://schemas.microsoft.com/office/drawing/2014/main" id="{412D67AB-0547-24A6-30D4-22A4F5195BF4}"/>
+                <a16:creationId xmlns:a16="http://schemas.microsoft.com/office/drawing/2014/main" id="{CFD06208-B67E-215B-A767-6622227547EA}"/>
               </a:ext>
             </a:extLst>
           </p:cNvPr>
@@ -1279,7 +1279,7 @@
           <p:cNvPr id="12" name="pattern">
             <a:extLst>
               <a:ext uri="{FF2B5EF4-FFF2-40B4-BE49-F238E27FC236}">
-                <a16:creationId xmlns:a16="http://schemas.microsoft.com/office/drawing/2014/main" id="{250834F0-09B0-286D-B2B2-C698193B3AEF}"/>
+                <a16:creationId xmlns:a16="http://schemas.microsoft.com/office/drawing/2014/main" id="{6FA9A3AA-1B62-DBFB-8B5E-DA667AE7CC11}"/>
               </a:ext>
             </a:extLst>
           </p:cNvPr>
@@ -1347,7 +1347,7 @@
           <p:cNvPr id="13" name="pattern">
             <a:extLst>
               <a:ext uri="{FF2B5EF4-FFF2-40B4-BE49-F238E27FC236}">
-                <a16:creationId xmlns:a16="http://schemas.microsoft.com/office/drawing/2014/main" id="{BAE27B64-EBCF-F47C-CE7D-AC0499FCAB5F}"/>
+                <a16:creationId xmlns:a16="http://schemas.microsoft.com/office/drawing/2014/main" id="{16506C9A-1C9C-FC58-A690-7213D8D5298A}"/>
               </a:ext>
             </a:extLst>
           </p:cNvPr>
@@ -1415,7 +1415,7 @@
           <p:cNvPr id="14" name="pattern">
             <a:extLst>
               <a:ext uri="{FF2B5EF4-FFF2-40B4-BE49-F238E27FC236}">
-                <a16:creationId xmlns:a16="http://schemas.microsoft.com/office/drawing/2014/main" id="{CA29A9C9-7041-DE02-3152-2AA41231E864}"/>
+                <a16:creationId xmlns:a16="http://schemas.microsoft.com/office/drawing/2014/main" id="{2C86E469-ECE0-F635-64ED-CCCA72F104A5}"/>
               </a:ext>
             </a:extLst>
           </p:cNvPr>
@@ -1483,7 +1483,7 @@
           <p:cNvPr id="15" name="pattern">
             <a:extLst>
               <a:ext uri="{FF2B5EF4-FFF2-40B4-BE49-F238E27FC236}">
-                <a16:creationId xmlns:a16="http://schemas.microsoft.com/office/drawing/2014/main" id="{09056500-33CE-08FD-9AC6-3762DB237E9A}"/>
+                <a16:creationId xmlns:a16="http://schemas.microsoft.com/office/drawing/2014/main" id="{A520C85B-2315-9B4A-EC9E-B753957406DF}"/>
               </a:ext>
             </a:extLst>
           </p:cNvPr>
@@ -1551,7 +1551,7 @@
           <p:cNvPr id="16" name="pattern">
             <a:extLst>
               <a:ext uri="{FF2B5EF4-FFF2-40B4-BE49-F238E27FC236}">
-                <a16:creationId xmlns:a16="http://schemas.microsoft.com/office/drawing/2014/main" id="{A430470F-80E5-32F7-3F69-9258B18DF293}"/>
+                <a16:creationId xmlns:a16="http://schemas.microsoft.com/office/drawing/2014/main" id="{47563278-FCCE-3089-EE87-D25E820F8462}"/>
               </a:ext>
             </a:extLst>
           </p:cNvPr>
@@ -1619,7 +1619,7 @@
           <p:cNvPr id="17" name="pattern">
             <a:extLst>
               <a:ext uri="{FF2B5EF4-FFF2-40B4-BE49-F238E27FC236}">
-                <a16:creationId xmlns:a16="http://schemas.microsoft.com/office/drawing/2014/main" id="{70B67B30-DAC0-E925-DC46-543678959831}"/>
+                <a16:creationId xmlns:a16="http://schemas.microsoft.com/office/drawing/2014/main" id="{06E13DFA-CCA8-2609-36E3-7163CA2D5F12}"/>
               </a:ext>
             </a:extLst>
           </p:cNvPr>
@@ -1687,7 +1687,7 @@
           <p:cNvPr id="18" name="pattern">
             <a:extLst>
               <a:ext uri="{FF2B5EF4-FFF2-40B4-BE49-F238E27FC236}">
-                <a16:creationId xmlns:a16="http://schemas.microsoft.com/office/drawing/2014/main" id="{D45FACA7-CDD6-07D6-BC3D-79FD8AEE3FB1}"/>
+                <a16:creationId xmlns:a16="http://schemas.microsoft.com/office/drawing/2014/main" id="{C4D3D717-F6FA-762F-5181-815C50827865}"/>
               </a:ext>
             </a:extLst>
           </p:cNvPr>
@@ -1755,7 +1755,7 @@
           <p:cNvPr id="19" name="pattern">
             <a:extLst>
               <a:ext uri="{FF2B5EF4-FFF2-40B4-BE49-F238E27FC236}">
-                <a16:creationId xmlns:a16="http://schemas.microsoft.com/office/drawing/2014/main" id="{BC1EFA8E-356B-9424-F905-D51747BB8CA0}"/>
+                <a16:creationId xmlns:a16="http://schemas.microsoft.com/office/drawing/2014/main" id="{D8C21400-1BAF-0A26-8661-8215E09F202C}"/>
               </a:ext>
             </a:extLst>
           </p:cNvPr>
@@ -1823,7 +1823,7 @@
           <p:cNvPr id="20" name="pattern">
             <a:extLst>
               <a:ext uri="{FF2B5EF4-FFF2-40B4-BE49-F238E27FC236}">
-                <a16:creationId xmlns:a16="http://schemas.microsoft.com/office/drawing/2014/main" id="{79AF9B79-AA60-3289-4C54-C66D61F07517}"/>
+                <a16:creationId xmlns:a16="http://schemas.microsoft.com/office/drawing/2014/main" id="{C406B251-E946-93A4-165B-268C1D002AB2}"/>
               </a:ext>
             </a:extLst>
           </p:cNvPr>
@@ -1891,7 +1891,7 @@
           <p:cNvPr id="21" name="pattern">
             <a:extLst>
               <a:ext uri="{FF2B5EF4-FFF2-40B4-BE49-F238E27FC236}">
-                <a16:creationId xmlns:a16="http://schemas.microsoft.com/office/drawing/2014/main" id="{198886F2-B113-E687-683A-4D9A75EDFA20}"/>
+                <a16:creationId xmlns:a16="http://schemas.microsoft.com/office/drawing/2014/main" id="{F521278B-7B35-6F96-2D87-723E3BB4CE1C}"/>
               </a:ext>
             </a:extLst>
           </p:cNvPr>
@@ -1959,7 +1959,7 @@
           <p:cNvPr id="22" name="pattern">
             <a:extLst>
               <a:ext uri="{FF2B5EF4-FFF2-40B4-BE49-F238E27FC236}">
-                <a16:creationId xmlns:a16="http://schemas.microsoft.com/office/drawing/2014/main" id="{99DA1AD7-A035-BB51-90F0-B44F016C6066}"/>
+                <a16:creationId xmlns:a16="http://schemas.microsoft.com/office/drawing/2014/main" id="{FEB16ACC-CE15-C4C1-797E-01CBD30A19B3}"/>
               </a:ext>
             </a:extLst>
           </p:cNvPr>
@@ -2027,7 +2027,7 @@
           <p:cNvPr id="23" name="pattern">
             <a:extLst>
               <a:ext uri="{FF2B5EF4-FFF2-40B4-BE49-F238E27FC236}">
-                <a16:creationId xmlns:a16="http://schemas.microsoft.com/office/drawing/2014/main" id="{5DD79C50-DDD0-A86D-380D-707640CC265A}"/>
+                <a16:creationId xmlns:a16="http://schemas.microsoft.com/office/drawing/2014/main" id="{7C4D906F-BB1D-CFA4-D81A-2620C7C93ED2}"/>
               </a:ext>
             </a:extLst>
           </p:cNvPr>
@@ -2095,7 +2095,7 @@
           <p:cNvPr id="24" name="pattern">
             <a:extLst>
               <a:ext uri="{FF2B5EF4-FFF2-40B4-BE49-F238E27FC236}">
-                <a16:creationId xmlns:a16="http://schemas.microsoft.com/office/drawing/2014/main" id="{75892151-8CA7-7F0C-27B6-570A0F08228A}"/>
+                <a16:creationId xmlns:a16="http://schemas.microsoft.com/office/drawing/2014/main" id="{90C3AA39-6537-2CF7-9DA1-7B9ED3D962D7}"/>
               </a:ext>
             </a:extLst>
           </p:cNvPr>
@@ -2163,7 +2163,7 @@
           <p:cNvPr id="25" name="pattern">
             <a:extLst>
               <a:ext uri="{FF2B5EF4-FFF2-40B4-BE49-F238E27FC236}">
-                <a16:creationId xmlns:a16="http://schemas.microsoft.com/office/drawing/2014/main" id="{D69C3650-21AD-4186-E338-C0F6D7338ED7}"/>
+                <a16:creationId xmlns:a16="http://schemas.microsoft.com/office/drawing/2014/main" id="{8B1A5925-F649-585B-6800-38D8E7795023}"/>
               </a:ext>
             </a:extLst>
           </p:cNvPr>
@@ -2231,7 +2231,7 @@
           <p:cNvPr id="26" name="pattern">
             <a:extLst>
               <a:ext uri="{FF2B5EF4-FFF2-40B4-BE49-F238E27FC236}">
-                <a16:creationId xmlns:a16="http://schemas.microsoft.com/office/drawing/2014/main" id="{D827F194-6259-9F4F-0F63-69D7B493F9D7}"/>
+                <a16:creationId xmlns:a16="http://schemas.microsoft.com/office/drawing/2014/main" id="{7B71466A-FCE2-6EC5-9990-1861B1D248D0}"/>
               </a:ext>
             </a:extLst>
           </p:cNvPr>
@@ -2299,7 +2299,7 @@
           <p:cNvPr id="27" name="pattern">
             <a:extLst>
               <a:ext uri="{FF2B5EF4-FFF2-40B4-BE49-F238E27FC236}">
-                <a16:creationId xmlns:a16="http://schemas.microsoft.com/office/drawing/2014/main" id="{F79FF26A-EEB7-6AF3-ABA3-99208BE2D9B4}"/>
+                <a16:creationId xmlns:a16="http://schemas.microsoft.com/office/drawing/2014/main" id="{214F0E73-739B-B27E-5EF8-46E5701E4581}"/>
               </a:ext>
             </a:extLst>
           </p:cNvPr>
@@ -2367,7 +2367,7 @@
           <p:cNvPr id="28" name="pattern">
             <a:extLst>
               <a:ext uri="{FF2B5EF4-FFF2-40B4-BE49-F238E27FC236}">
-                <a16:creationId xmlns:a16="http://schemas.microsoft.com/office/drawing/2014/main" id="{6B36E77A-8A86-E11C-4E76-A64C005C73F2}"/>
+                <a16:creationId xmlns:a16="http://schemas.microsoft.com/office/drawing/2014/main" id="{952E5266-0963-8441-C80B-A0177B4A6865}"/>
               </a:ext>
             </a:extLst>
           </p:cNvPr>
@@ -2435,7 +2435,7 @@
           <p:cNvPr id="29" name="pattern">
             <a:extLst>
               <a:ext uri="{FF2B5EF4-FFF2-40B4-BE49-F238E27FC236}">
-                <a16:creationId xmlns:a16="http://schemas.microsoft.com/office/drawing/2014/main" id="{51A9502C-8A47-9631-6A87-EB211A6CFA2E}"/>
+                <a16:creationId xmlns:a16="http://schemas.microsoft.com/office/drawing/2014/main" id="{4A2870FC-4546-8E48-D92D-BBBAED118504}"/>
               </a:ext>
             </a:extLst>
           </p:cNvPr>
@@ -2503,7 +2503,7 @@
           <p:cNvPr id="30" name="pattern">
             <a:extLst>
               <a:ext uri="{FF2B5EF4-FFF2-40B4-BE49-F238E27FC236}">
-                <a16:creationId xmlns:a16="http://schemas.microsoft.com/office/drawing/2014/main" id="{F6F040D1-6811-E698-4D6B-7EAAD0E9BEBA}"/>
+                <a16:creationId xmlns:a16="http://schemas.microsoft.com/office/drawing/2014/main" id="{B13766B5-ABDA-F962-7190-F87D9DC7147C}"/>
               </a:ext>
             </a:extLst>
           </p:cNvPr>
@@ -2571,7 +2571,7 @@
           <p:cNvPr id="31" name="pattern">
             <a:extLst>
               <a:ext uri="{FF2B5EF4-FFF2-40B4-BE49-F238E27FC236}">
-                <a16:creationId xmlns:a16="http://schemas.microsoft.com/office/drawing/2014/main" id="{CC602CC1-6269-4BDD-FDC6-DBA6100157A0}"/>
+                <a16:creationId xmlns:a16="http://schemas.microsoft.com/office/drawing/2014/main" id="{CF36934B-37AA-212D-8B2C-897FEA5672FC}"/>
               </a:ext>
             </a:extLst>
           </p:cNvPr>
@@ -2639,7 +2639,7 @@
           <p:cNvPr id="32" name="pattern">
             <a:extLst>
               <a:ext uri="{FF2B5EF4-FFF2-40B4-BE49-F238E27FC236}">
-                <a16:creationId xmlns:a16="http://schemas.microsoft.com/office/drawing/2014/main" id="{E400591D-F687-F053-547C-52F3591EED2A}"/>
+                <a16:creationId xmlns:a16="http://schemas.microsoft.com/office/drawing/2014/main" id="{31521F71-5FCB-A5F0-FC43-43618CEA8CDC}"/>
               </a:ext>
             </a:extLst>
           </p:cNvPr>
@@ -2707,7 +2707,7 @@
           <p:cNvPr id="33" name="pattern">
             <a:extLst>
               <a:ext uri="{FF2B5EF4-FFF2-40B4-BE49-F238E27FC236}">
-                <a16:creationId xmlns:a16="http://schemas.microsoft.com/office/drawing/2014/main" id="{CA55A79F-F5F5-8F11-890F-976771170204}"/>
+                <a16:creationId xmlns:a16="http://schemas.microsoft.com/office/drawing/2014/main" id="{00E061FB-FD72-3D9B-E160-E74DAB5D1369}"/>
               </a:ext>
             </a:extLst>
           </p:cNvPr>
@@ -2775,7 +2775,7 @@
           <p:cNvPr id="34" name="pattern">
             <a:extLst>
               <a:ext uri="{FF2B5EF4-FFF2-40B4-BE49-F238E27FC236}">
-                <a16:creationId xmlns:a16="http://schemas.microsoft.com/office/drawing/2014/main" id="{A0BA29B3-054F-0DB0-076B-EA60281225B5}"/>
+                <a16:creationId xmlns:a16="http://schemas.microsoft.com/office/drawing/2014/main" id="{D07FA476-D426-EE25-1D98-8E142BC36EF4}"/>
               </a:ext>
             </a:extLst>
           </p:cNvPr>
@@ -2843,7 +2843,7 @@
           <p:cNvPr id="35" name="pattern">
             <a:extLst>
               <a:ext uri="{FF2B5EF4-FFF2-40B4-BE49-F238E27FC236}">
-                <a16:creationId xmlns:a16="http://schemas.microsoft.com/office/drawing/2014/main" id="{F48904F7-613A-1BA0-DAD8-BAC34DAA396D}"/>
+                <a16:creationId xmlns:a16="http://schemas.microsoft.com/office/drawing/2014/main" id="{A69D027C-DD13-4B75-F274-E2E9730A2240}"/>
               </a:ext>
             </a:extLst>
           </p:cNvPr>
@@ -2911,7 +2911,7 @@
           <p:cNvPr id="36" name="pattern">
             <a:extLst>
               <a:ext uri="{FF2B5EF4-FFF2-40B4-BE49-F238E27FC236}">
-                <a16:creationId xmlns:a16="http://schemas.microsoft.com/office/drawing/2014/main" id="{A8F32142-8617-676A-FA02-596959E1DADD}"/>
+                <a16:creationId xmlns:a16="http://schemas.microsoft.com/office/drawing/2014/main" id="{DCF9D2FC-017C-A82A-5BF4-7D8F5B582D57}"/>
               </a:ext>
             </a:extLst>
           </p:cNvPr>
@@ -2979,7 +2979,7 @@
           <p:cNvPr id="37" name="pattern">
             <a:extLst>
               <a:ext uri="{FF2B5EF4-FFF2-40B4-BE49-F238E27FC236}">
-                <a16:creationId xmlns:a16="http://schemas.microsoft.com/office/drawing/2014/main" id="{45CA6E32-D204-7786-5781-9FBDE3846E8A}"/>
+                <a16:creationId xmlns:a16="http://schemas.microsoft.com/office/drawing/2014/main" id="{1787FCA8-D329-5003-9C39-17EF54E1BBF4}"/>
               </a:ext>
             </a:extLst>
           </p:cNvPr>
@@ -3047,7 +3047,7 @@
           <p:cNvPr id="38" name="pattern">
             <a:extLst>
               <a:ext uri="{FF2B5EF4-FFF2-40B4-BE49-F238E27FC236}">
-                <a16:creationId xmlns:a16="http://schemas.microsoft.com/office/drawing/2014/main" id="{7D414FDB-C7FB-816F-74FD-45C425FB8304}"/>
+                <a16:creationId xmlns:a16="http://schemas.microsoft.com/office/drawing/2014/main" id="{6FCC787F-E82A-82A5-ED8F-AF72BE52A4AE}"/>
               </a:ext>
             </a:extLst>
           </p:cNvPr>
@@ -3115,7 +3115,7 @@
           <p:cNvPr id="39" name="pattern">
             <a:extLst>
               <a:ext uri="{FF2B5EF4-FFF2-40B4-BE49-F238E27FC236}">
-                <a16:creationId xmlns:a16="http://schemas.microsoft.com/office/drawing/2014/main" id="{6EEE225C-72AF-80AB-D7CA-6D72C163B557}"/>
+                <a16:creationId xmlns:a16="http://schemas.microsoft.com/office/drawing/2014/main" id="{29035A61-10EB-8BB9-155A-791C4045146A}"/>
               </a:ext>
             </a:extLst>
           </p:cNvPr>
@@ -3183,7 +3183,7 @@
           <p:cNvPr id="40" name="pattern">
             <a:extLst>
               <a:ext uri="{FF2B5EF4-FFF2-40B4-BE49-F238E27FC236}">
-                <a16:creationId xmlns:a16="http://schemas.microsoft.com/office/drawing/2014/main" id="{B96E0DB2-1860-20F8-3D29-6AC64EA861A9}"/>
+                <a16:creationId xmlns:a16="http://schemas.microsoft.com/office/drawing/2014/main" id="{53F7EC0D-9238-5C67-BD29-9FF6DEA3D260}"/>
               </a:ext>
             </a:extLst>
           </p:cNvPr>
@@ -3251,7 +3251,7 @@
           <p:cNvPr id="41" name="pattern">
             <a:extLst>
               <a:ext uri="{FF2B5EF4-FFF2-40B4-BE49-F238E27FC236}">
-                <a16:creationId xmlns:a16="http://schemas.microsoft.com/office/drawing/2014/main" id="{F002B6CB-6E43-3692-9EB0-3554FA570B08}"/>
+                <a16:creationId xmlns:a16="http://schemas.microsoft.com/office/drawing/2014/main" id="{29527009-0503-2128-BC84-0FBF4D0B1527}"/>
               </a:ext>
             </a:extLst>
           </p:cNvPr>
@@ -3319,7 +3319,7 @@
           <p:cNvPr id="42" name="pattern">
             <a:extLst>
               <a:ext uri="{FF2B5EF4-FFF2-40B4-BE49-F238E27FC236}">
-                <a16:creationId xmlns:a16="http://schemas.microsoft.com/office/drawing/2014/main" id="{5221B1ED-89E6-2B8C-7E6A-7435A774B031}"/>
+                <a16:creationId xmlns:a16="http://schemas.microsoft.com/office/drawing/2014/main" id="{69FEB053-06C2-676C-84F7-3D10AA261DDB}"/>
               </a:ext>
             </a:extLst>
           </p:cNvPr>
@@ -3387,7 +3387,7 @@
           <p:cNvPr id="43" name="pattern">
             <a:extLst>
               <a:ext uri="{FF2B5EF4-FFF2-40B4-BE49-F238E27FC236}">
-                <a16:creationId xmlns:a16="http://schemas.microsoft.com/office/drawing/2014/main" id="{BD895A01-C2AA-0E9F-CEB0-EECF2E8C3F27}"/>
+                <a16:creationId xmlns:a16="http://schemas.microsoft.com/office/drawing/2014/main" id="{C5F14EC1-EBD6-A946-258B-F9640E43F736}"/>
               </a:ext>
             </a:extLst>
           </p:cNvPr>
@@ -3455,7 +3455,7 @@
           <p:cNvPr id="44" name="pattern">
             <a:extLst>
               <a:ext uri="{FF2B5EF4-FFF2-40B4-BE49-F238E27FC236}">
-                <a16:creationId xmlns:a16="http://schemas.microsoft.com/office/drawing/2014/main" id="{5CE18751-0A6A-85D1-8BFD-C3F0DFD90851}"/>
+                <a16:creationId xmlns:a16="http://schemas.microsoft.com/office/drawing/2014/main" id="{2E43F9AF-E184-27F4-6CEC-379B18885BF4}"/>
               </a:ext>
             </a:extLst>
           </p:cNvPr>
@@ -3523,7 +3523,7 @@
           <p:cNvPr id="45" name="pattern">
             <a:extLst>
               <a:ext uri="{FF2B5EF4-FFF2-40B4-BE49-F238E27FC236}">
-                <a16:creationId xmlns:a16="http://schemas.microsoft.com/office/drawing/2014/main" id="{6F81FB72-0A94-3416-605C-FB41FABAD120}"/>
+                <a16:creationId xmlns:a16="http://schemas.microsoft.com/office/drawing/2014/main" id="{172DDC6D-0E22-83F8-F85D-62BDCF842DBC}"/>
               </a:ext>
             </a:extLst>
           </p:cNvPr>
@@ -3591,7 +3591,7 @@
           <p:cNvPr id="46" name="pattern">
             <a:extLst>
               <a:ext uri="{FF2B5EF4-FFF2-40B4-BE49-F238E27FC236}">
-                <a16:creationId xmlns:a16="http://schemas.microsoft.com/office/drawing/2014/main" id="{5BC223AE-D9C6-346F-FD16-A30C9AD8F971}"/>
+                <a16:creationId xmlns:a16="http://schemas.microsoft.com/office/drawing/2014/main" id="{D0A782D0-E123-A883-F9B2-9A71BAAA71FE}"/>
               </a:ext>
             </a:extLst>
           </p:cNvPr>
@@ -3659,7 +3659,7 @@
           <p:cNvPr id="47" name="pattern">
             <a:extLst>
               <a:ext uri="{FF2B5EF4-FFF2-40B4-BE49-F238E27FC236}">
-                <a16:creationId xmlns:a16="http://schemas.microsoft.com/office/drawing/2014/main" id="{7F254183-74C2-0A67-1200-B74B73B5D59C}"/>
+                <a16:creationId xmlns:a16="http://schemas.microsoft.com/office/drawing/2014/main" id="{1E8324D1-083B-879C-545C-9E6098EDD9C3}"/>
               </a:ext>
             </a:extLst>
           </p:cNvPr>
@@ -3727,7 +3727,7 @@
           <p:cNvPr id="48" name="pattern">
             <a:extLst>
               <a:ext uri="{FF2B5EF4-FFF2-40B4-BE49-F238E27FC236}">
-                <a16:creationId xmlns:a16="http://schemas.microsoft.com/office/drawing/2014/main" id="{A22AF36C-CA7A-EC91-9859-8320AC671CC2}"/>
+                <a16:creationId xmlns:a16="http://schemas.microsoft.com/office/drawing/2014/main" id="{A7168E7F-CE55-F80F-5B41-C17D99BE3BB8}"/>
               </a:ext>
             </a:extLst>
           </p:cNvPr>
@@ -3795,7 +3795,7 @@
           <p:cNvPr id="49" name="pattern">
             <a:extLst>
               <a:ext uri="{FF2B5EF4-FFF2-40B4-BE49-F238E27FC236}">
-                <a16:creationId xmlns:a16="http://schemas.microsoft.com/office/drawing/2014/main" id="{B841298F-89E9-A3A9-CAB2-00C0C6FC307D}"/>
+                <a16:creationId xmlns:a16="http://schemas.microsoft.com/office/drawing/2014/main" id="{9184AA48-8708-2302-320F-74DC5389BADF}"/>
               </a:ext>
             </a:extLst>
           </p:cNvPr>
@@ -3863,7 +3863,7 @@
           <p:cNvPr id="50" name="pattern">
             <a:extLst>
               <a:ext uri="{FF2B5EF4-FFF2-40B4-BE49-F238E27FC236}">
-                <a16:creationId xmlns:a16="http://schemas.microsoft.com/office/drawing/2014/main" id="{0A3F3930-F544-CC1D-CDD2-1B6ACB201515}"/>
+                <a16:creationId xmlns:a16="http://schemas.microsoft.com/office/drawing/2014/main" id="{DE38544D-00F8-1EE4-6019-179E97DA75A4}"/>
               </a:ext>
             </a:extLst>
           </p:cNvPr>
@@ -3931,7 +3931,7 @@
           <p:cNvPr id="51" name="pattern">
             <a:extLst>
               <a:ext uri="{FF2B5EF4-FFF2-40B4-BE49-F238E27FC236}">
-                <a16:creationId xmlns:a16="http://schemas.microsoft.com/office/drawing/2014/main" id="{4A41658B-A9A7-0B2E-86FB-680DE2810CEE}"/>
+                <a16:creationId xmlns:a16="http://schemas.microsoft.com/office/drawing/2014/main" id="{36DF1EF5-E95A-7042-F1D0-CC62782BFF95}"/>
               </a:ext>
             </a:extLst>
           </p:cNvPr>
@@ -3999,7 +3999,7 @@
           <p:cNvPr id="52" name="pattern">
             <a:extLst>
               <a:ext uri="{FF2B5EF4-FFF2-40B4-BE49-F238E27FC236}">
-                <a16:creationId xmlns:a16="http://schemas.microsoft.com/office/drawing/2014/main" id="{943052D7-AD7D-10D8-5615-B609C489CEDF}"/>
+                <a16:creationId xmlns:a16="http://schemas.microsoft.com/office/drawing/2014/main" id="{901C4543-5C0F-DB99-AC1F-0FE38BAA0D26}"/>
               </a:ext>
             </a:extLst>
           </p:cNvPr>
@@ -4067,7 +4067,7 @@
           <p:cNvPr id="53" name="pattern">
             <a:extLst>
               <a:ext uri="{FF2B5EF4-FFF2-40B4-BE49-F238E27FC236}">
-                <a16:creationId xmlns:a16="http://schemas.microsoft.com/office/drawing/2014/main" id="{37964A95-4161-C76D-1362-37DB1D8F8858}"/>
+                <a16:creationId xmlns:a16="http://schemas.microsoft.com/office/drawing/2014/main" id="{DB454829-5182-6045-3595-83282DD00273}"/>
               </a:ext>
             </a:extLst>
           </p:cNvPr>
@@ -4135,7 +4135,7 @@
           <p:cNvPr id="54" name="pattern">
             <a:extLst>
               <a:ext uri="{FF2B5EF4-FFF2-40B4-BE49-F238E27FC236}">
-                <a16:creationId xmlns:a16="http://schemas.microsoft.com/office/drawing/2014/main" id="{2EA6DA88-636B-9855-0B09-C987EC663C2D}"/>
+                <a16:creationId xmlns:a16="http://schemas.microsoft.com/office/drawing/2014/main" id="{9D21E128-9BBF-535D-2A52-E84D53B1BB46}"/>
               </a:ext>
             </a:extLst>
           </p:cNvPr>
@@ -4203,7 +4203,7 @@
           <p:cNvPr id="55" name="pattern">
             <a:extLst>
               <a:ext uri="{FF2B5EF4-FFF2-40B4-BE49-F238E27FC236}">
-                <a16:creationId xmlns:a16="http://schemas.microsoft.com/office/drawing/2014/main" id="{600EAC4E-5E9B-078F-A942-9C73132877B2}"/>
+                <a16:creationId xmlns:a16="http://schemas.microsoft.com/office/drawing/2014/main" id="{D1C06724-41FD-501B-3BED-C7DF87DC2295}"/>
               </a:ext>
             </a:extLst>
           </p:cNvPr>
@@ -4271,7 +4271,7 @@
           <p:cNvPr id="56" name="pattern">
             <a:extLst>
               <a:ext uri="{FF2B5EF4-FFF2-40B4-BE49-F238E27FC236}">
-                <a16:creationId xmlns:a16="http://schemas.microsoft.com/office/drawing/2014/main" id="{582BB5B9-7125-25E6-37DB-238F9BAF2EF2}"/>
+                <a16:creationId xmlns:a16="http://schemas.microsoft.com/office/drawing/2014/main" id="{AD889762-B6A5-F846-A19D-5CE1AFA1485B}"/>
               </a:ext>
             </a:extLst>
           </p:cNvPr>
@@ -4339,7 +4339,7 @@
           <p:cNvPr id="57" name="pattern">
             <a:extLst>
               <a:ext uri="{FF2B5EF4-FFF2-40B4-BE49-F238E27FC236}">
-                <a16:creationId xmlns:a16="http://schemas.microsoft.com/office/drawing/2014/main" id="{F37BB78B-65B9-E4C6-82DB-662A3151C1DD}"/>
+                <a16:creationId xmlns:a16="http://schemas.microsoft.com/office/drawing/2014/main" id="{FE1A16F5-DF14-BA76-5855-CE739EBAEB88}"/>
               </a:ext>
             </a:extLst>
           </p:cNvPr>
@@ -4407,7 +4407,7 @@
           <p:cNvPr id="58" name="pattern">
             <a:extLst>
               <a:ext uri="{FF2B5EF4-FFF2-40B4-BE49-F238E27FC236}">
-                <a16:creationId xmlns:a16="http://schemas.microsoft.com/office/drawing/2014/main" id="{2C7FDBA0-4073-17AF-5B8E-5D083A47AA5F}"/>
+                <a16:creationId xmlns:a16="http://schemas.microsoft.com/office/drawing/2014/main" id="{62E2B475-6AD2-141B-1B0E-2098A7DD9C76}"/>
               </a:ext>
             </a:extLst>
           </p:cNvPr>
@@ -4475,7 +4475,7 @@
           <p:cNvPr id="59" name="pattern">
             <a:extLst>
               <a:ext uri="{FF2B5EF4-FFF2-40B4-BE49-F238E27FC236}">
-                <a16:creationId xmlns:a16="http://schemas.microsoft.com/office/drawing/2014/main" id="{7789B25A-939D-AE01-CE78-3AB7C3FA3CC4}"/>
+                <a16:creationId xmlns:a16="http://schemas.microsoft.com/office/drawing/2014/main" id="{B632082D-F487-9248-84D8-1265BA483997}"/>
               </a:ext>
             </a:extLst>
           </p:cNvPr>
@@ -4543,7 +4543,7 @@
           <p:cNvPr id="60" name="pattern">
             <a:extLst>
               <a:ext uri="{FF2B5EF4-FFF2-40B4-BE49-F238E27FC236}">
-                <a16:creationId xmlns:a16="http://schemas.microsoft.com/office/drawing/2014/main" id="{1B55C234-031D-4B17-DE78-5B66699CA5C5}"/>
+                <a16:creationId xmlns:a16="http://schemas.microsoft.com/office/drawing/2014/main" id="{416316A1-3CF7-7762-9080-002636528C2A}"/>
               </a:ext>
             </a:extLst>
           </p:cNvPr>
@@ -4611,7 +4611,7 @@
           <p:cNvPr id="61" name="pattern">
             <a:extLst>
               <a:ext uri="{FF2B5EF4-FFF2-40B4-BE49-F238E27FC236}">
-                <a16:creationId xmlns:a16="http://schemas.microsoft.com/office/drawing/2014/main" id="{8732DA83-D884-8395-E9DE-FD207E411806}"/>
+                <a16:creationId xmlns:a16="http://schemas.microsoft.com/office/drawing/2014/main" id="{2FE183D0-28BA-836E-046D-F0C626BB88BC}"/>
               </a:ext>
             </a:extLst>
           </p:cNvPr>
@@ -4679,7 +4679,7 @@
           <p:cNvPr id="62" name="pattern">
             <a:extLst>
               <a:ext uri="{FF2B5EF4-FFF2-40B4-BE49-F238E27FC236}">
-                <a16:creationId xmlns:a16="http://schemas.microsoft.com/office/drawing/2014/main" id="{D82E6A88-C366-F408-9D4F-BB6238A692DC}"/>
+                <a16:creationId xmlns:a16="http://schemas.microsoft.com/office/drawing/2014/main" id="{DF149061-3357-2DBD-6C95-1DF9CEE77BF8}"/>
               </a:ext>
             </a:extLst>
           </p:cNvPr>
@@ -4747,7 +4747,7 @@
           <p:cNvPr id="63" name="pattern">
             <a:extLst>
               <a:ext uri="{FF2B5EF4-FFF2-40B4-BE49-F238E27FC236}">
-                <a16:creationId xmlns:a16="http://schemas.microsoft.com/office/drawing/2014/main" id="{B4A695C3-7A79-8E3E-E0BB-5618684D516F}"/>
+                <a16:creationId xmlns:a16="http://schemas.microsoft.com/office/drawing/2014/main" id="{C15D6153-ED1E-73E9-0970-4B55C481010F}"/>
               </a:ext>
             </a:extLst>
           </p:cNvPr>
@@ -4815,7 +4815,7 @@
           <p:cNvPr id="64" name="pattern">
             <a:extLst>
               <a:ext uri="{FF2B5EF4-FFF2-40B4-BE49-F238E27FC236}">
-                <a16:creationId xmlns:a16="http://schemas.microsoft.com/office/drawing/2014/main" id="{CD109B5B-55BE-EA6E-F26C-EF5ADAEF3AA4}"/>
+                <a16:creationId xmlns:a16="http://schemas.microsoft.com/office/drawing/2014/main" id="{54B388BD-1153-7A94-0F5D-F92A23D1EB9F}"/>
               </a:ext>
             </a:extLst>
           </p:cNvPr>
@@ -4883,7 +4883,7 @@
           <p:cNvPr id="65" name="pattern">
             <a:extLst>
               <a:ext uri="{FF2B5EF4-FFF2-40B4-BE49-F238E27FC236}">
-                <a16:creationId xmlns:a16="http://schemas.microsoft.com/office/drawing/2014/main" id="{CE6123FC-7D92-6366-8C0A-2E27DA8561DF}"/>
+                <a16:creationId xmlns:a16="http://schemas.microsoft.com/office/drawing/2014/main" id="{A9FA18AF-6761-C098-9B4B-19B8C7E636D3}"/>
               </a:ext>
             </a:extLst>
           </p:cNvPr>
@@ -4951,7 +4951,7 @@
           <p:cNvPr id="66" name="pattern">
             <a:extLst>
               <a:ext uri="{FF2B5EF4-FFF2-40B4-BE49-F238E27FC236}">
-                <a16:creationId xmlns:a16="http://schemas.microsoft.com/office/drawing/2014/main" id="{03D5F859-9727-A38A-BBBC-7D90D3CDE96B}"/>
+                <a16:creationId xmlns:a16="http://schemas.microsoft.com/office/drawing/2014/main" id="{F11A8157-3F44-7804-17EC-5652E6C99036}"/>
               </a:ext>
             </a:extLst>
           </p:cNvPr>
@@ -5019,7 +5019,7 @@
           <p:cNvPr id="67" name="pattern">
             <a:extLst>
               <a:ext uri="{FF2B5EF4-FFF2-40B4-BE49-F238E27FC236}">
-                <a16:creationId xmlns:a16="http://schemas.microsoft.com/office/drawing/2014/main" id="{169C97B7-E737-F3E2-BF26-C1BD8CEC9A8A}"/>
+                <a16:creationId xmlns:a16="http://schemas.microsoft.com/office/drawing/2014/main" id="{5EC5B41C-A1DC-1E25-3F46-90F450354F21}"/>
               </a:ext>
             </a:extLst>
           </p:cNvPr>
@@ -5087,7 +5087,7 @@
           <p:cNvPr id="68" name="pattern">
             <a:extLst>
               <a:ext uri="{FF2B5EF4-FFF2-40B4-BE49-F238E27FC236}">
-                <a16:creationId xmlns:a16="http://schemas.microsoft.com/office/drawing/2014/main" id="{E41184FA-FC8E-C29F-246E-C22B9EBF5985}"/>
+                <a16:creationId xmlns:a16="http://schemas.microsoft.com/office/drawing/2014/main" id="{E2156432-558B-B360-74F1-BF7AA847E568}"/>
               </a:ext>
             </a:extLst>
           </p:cNvPr>
@@ -5155,7 +5155,7 @@
           <p:cNvPr id="69" name="pattern">
             <a:extLst>
               <a:ext uri="{FF2B5EF4-FFF2-40B4-BE49-F238E27FC236}">
-                <a16:creationId xmlns:a16="http://schemas.microsoft.com/office/drawing/2014/main" id="{79F97263-50DA-7FE5-E89B-D1EF7BAF6D02}"/>
+                <a16:creationId xmlns:a16="http://schemas.microsoft.com/office/drawing/2014/main" id="{8E146B8D-2A36-8098-D03A-01A43C9D3179}"/>
               </a:ext>
             </a:extLst>
           </p:cNvPr>
@@ -5223,7 +5223,7 @@
           <p:cNvPr id="70" name="pattern">
             <a:extLst>
               <a:ext uri="{FF2B5EF4-FFF2-40B4-BE49-F238E27FC236}">
-                <a16:creationId xmlns:a16="http://schemas.microsoft.com/office/drawing/2014/main" id="{FF26842F-C255-ADE2-CEB8-4770C8B789F8}"/>
+                <a16:creationId xmlns:a16="http://schemas.microsoft.com/office/drawing/2014/main" id="{3BA0F6B4-BB75-EBFF-24DF-846ECCC8D4FF}"/>
               </a:ext>
             </a:extLst>
           </p:cNvPr>
@@ -5291,7 +5291,7 @@
           <p:cNvPr id="71" name="pattern">
             <a:extLst>
               <a:ext uri="{FF2B5EF4-FFF2-40B4-BE49-F238E27FC236}">
-                <a16:creationId xmlns:a16="http://schemas.microsoft.com/office/drawing/2014/main" id="{4EB2B8D3-0803-1E00-1BA8-8BBA23E689A7}"/>
+                <a16:creationId xmlns:a16="http://schemas.microsoft.com/office/drawing/2014/main" id="{0B3ACEE1-C38F-259E-27DF-CF02607BC6AD}"/>
               </a:ext>
             </a:extLst>
           </p:cNvPr>
@@ -5359,7 +5359,7 @@
           <p:cNvPr id="72" name="pattern">
             <a:extLst>
               <a:ext uri="{FF2B5EF4-FFF2-40B4-BE49-F238E27FC236}">
-                <a16:creationId xmlns:a16="http://schemas.microsoft.com/office/drawing/2014/main" id="{00FA9D2E-4A0B-850B-3421-FF657FEF358A}"/>
+                <a16:creationId xmlns:a16="http://schemas.microsoft.com/office/drawing/2014/main" id="{869356EF-2F5E-2F41-11D9-4FC4588FBB5B}"/>
               </a:ext>
             </a:extLst>
           </p:cNvPr>
@@ -5427,7 +5427,7 @@
           <p:cNvPr id="73" name="pattern">
             <a:extLst>
               <a:ext uri="{FF2B5EF4-FFF2-40B4-BE49-F238E27FC236}">
-                <a16:creationId xmlns:a16="http://schemas.microsoft.com/office/drawing/2014/main" id="{573EEC87-6D88-0155-CB0F-EE89CD416430}"/>
+                <a16:creationId xmlns:a16="http://schemas.microsoft.com/office/drawing/2014/main" id="{0FDCDF73-6137-2CAA-D3F0-FF9050D9D0B9}"/>
               </a:ext>
             </a:extLst>
           </p:cNvPr>
@@ -5495,7 +5495,7 @@
           <p:cNvPr id="74" name="pattern">
             <a:extLst>
               <a:ext uri="{FF2B5EF4-FFF2-40B4-BE49-F238E27FC236}">
-                <a16:creationId xmlns:a16="http://schemas.microsoft.com/office/drawing/2014/main" id="{C6B7FFF2-12E9-A5BD-8560-9D0C2CEE0874}"/>
+                <a16:creationId xmlns:a16="http://schemas.microsoft.com/office/drawing/2014/main" id="{9A83511C-8AF9-8896-D8DE-1162C217D1D3}"/>
               </a:ext>
             </a:extLst>
           </p:cNvPr>
@@ -5563,7 +5563,7 @@
           <p:cNvPr id="75" name="pattern">
             <a:extLst>
               <a:ext uri="{FF2B5EF4-FFF2-40B4-BE49-F238E27FC236}">
-                <a16:creationId xmlns:a16="http://schemas.microsoft.com/office/drawing/2014/main" id="{5DAC9483-2BCF-EA8C-15BA-051021881BD1}"/>
+                <a16:creationId xmlns:a16="http://schemas.microsoft.com/office/drawing/2014/main" id="{6DB887DD-CEDC-8549-65BF-D5C87C5D9F84}"/>
               </a:ext>
             </a:extLst>
           </p:cNvPr>
@@ -5631,7 +5631,7 @@
           <p:cNvPr id="76" name="pattern">
             <a:extLst>
               <a:ext uri="{FF2B5EF4-FFF2-40B4-BE49-F238E27FC236}">
-                <a16:creationId xmlns:a16="http://schemas.microsoft.com/office/drawing/2014/main" id="{7B18E3F9-A00F-B988-1FF8-0815FA31EFC4}"/>
+                <a16:creationId xmlns:a16="http://schemas.microsoft.com/office/drawing/2014/main" id="{D5F5FDFB-2D25-802F-3BCA-C01078967291}"/>
               </a:ext>
             </a:extLst>
           </p:cNvPr>
@@ -5699,7 +5699,7 @@
           <p:cNvPr id="77" name="pattern">
             <a:extLst>
               <a:ext uri="{FF2B5EF4-FFF2-40B4-BE49-F238E27FC236}">
-                <a16:creationId xmlns:a16="http://schemas.microsoft.com/office/drawing/2014/main" id="{B2C398D1-73CE-A709-4951-5782ED056E49}"/>
+                <a16:creationId xmlns:a16="http://schemas.microsoft.com/office/drawing/2014/main" id="{0FA9287C-5266-1F5D-57C5-9C9C52DC8D86}"/>
               </a:ext>
             </a:extLst>
           </p:cNvPr>
@@ -5767,7 +5767,7 @@
           <p:cNvPr id="78" name="pattern">
             <a:extLst>
               <a:ext uri="{FF2B5EF4-FFF2-40B4-BE49-F238E27FC236}">
-                <a16:creationId xmlns:a16="http://schemas.microsoft.com/office/drawing/2014/main" id="{8190AECB-BC32-1248-36F1-AEA53319A63B}"/>
+                <a16:creationId xmlns:a16="http://schemas.microsoft.com/office/drawing/2014/main" id="{DE378940-13F8-F1A8-08AE-598943505FFA}"/>
               </a:ext>
             </a:extLst>
           </p:cNvPr>
@@ -5835,7 +5835,7 @@
           <p:cNvPr id="79" name="pattern">
             <a:extLst>
               <a:ext uri="{FF2B5EF4-FFF2-40B4-BE49-F238E27FC236}">
-                <a16:creationId xmlns:a16="http://schemas.microsoft.com/office/drawing/2014/main" id="{9B1BB0BC-0267-102A-8662-29BD48CEC13C}"/>
+                <a16:creationId xmlns:a16="http://schemas.microsoft.com/office/drawing/2014/main" id="{2A2DCB0E-2902-FCDB-52F9-A58EADFE741B}"/>
               </a:ext>
             </a:extLst>
           </p:cNvPr>
@@ -5903,7 +5903,7 @@
           <p:cNvPr id="80" name="pattern">
             <a:extLst>
               <a:ext uri="{FF2B5EF4-FFF2-40B4-BE49-F238E27FC236}">
-                <a16:creationId xmlns:a16="http://schemas.microsoft.com/office/drawing/2014/main" id="{7A461497-A197-EA7A-475C-4FDC63CB13FC}"/>
+                <a16:creationId xmlns:a16="http://schemas.microsoft.com/office/drawing/2014/main" id="{6177B0DC-8D2A-6841-F3F1-D8B13BCF2D1F}"/>
               </a:ext>
             </a:extLst>
           </p:cNvPr>
@@ -5971,7 +5971,7 @@
           <p:cNvPr id="81" name="pattern">
             <a:extLst>
               <a:ext uri="{FF2B5EF4-FFF2-40B4-BE49-F238E27FC236}">
-                <a16:creationId xmlns:a16="http://schemas.microsoft.com/office/drawing/2014/main" id="{DDBF20A1-ED8B-26A9-E3BB-581A5D9CCE55}"/>
+                <a16:creationId xmlns:a16="http://schemas.microsoft.com/office/drawing/2014/main" id="{DB2974CB-6312-23CC-05CE-1E9B87A891C4}"/>
               </a:ext>
             </a:extLst>
           </p:cNvPr>
@@ -6039,7 +6039,7 @@
           <p:cNvPr id="82" name="pattern">
             <a:extLst>
               <a:ext uri="{FF2B5EF4-FFF2-40B4-BE49-F238E27FC236}">
-                <a16:creationId xmlns:a16="http://schemas.microsoft.com/office/drawing/2014/main" id="{72C1B339-CB19-F551-D201-68BDA29C0C72}"/>
+                <a16:creationId xmlns:a16="http://schemas.microsoft.com/office/drawing/2014/main" id="{182EA187-1D24-FF68-2388-993D719AFA3D}"/>
               </a:ext>
             </a:extLst>
           </p:cNvPr>
@@ -6107,7 +6107,7 @@
           <p:cNvPr id="83" name="pattern">
             <a:extLst>
               <a:ext uri="{FF2B5EF4-FFF2-40B4-BE49-F238E27FC236}">
-                <a16:creationId xmlns:a16="http://schemas.microsoft.com/office/drawing/2014/main" id="{AF7645EA-6219-32A9-A77C-27B600676D09}"/>
+                <a16:creationId xmlns:a16="http://schemas.microsoft.com/office/drawing/2014/main" id="{05D57F48-E2F4-A287-48E8-6DFEC9C77F5F}"/>
               </a:ext>
             </a:extLst>
           </p:cNvPr>
@@ -6175,7 +6175,7 @@
           <p:cNvPr id="84" name="pattern">
             <a:extLst>
               <a:ext uri="{FF2B5EF4-FFF2-40B4-BE49-F238E27FC236}">
-                <a16:creationId xmlns:a16="http://schemas.microsoft.com/office/drawing/2014/main" id="{F7EBADEC-650B-6E5F-795D-13DF80503E48}"/>
+                <a16:creationId xmlns:a16="http://schemas.microsoft.com/office/drawing/2014/main" id="{3150F550-E80F-E899-8593-C30C8AE9BCDD}"/>
               </a:ext>
             </a:extLst>
           </p:cNvPr>
@@ -6243,7 +6243,7 @@
           <p:cNvPr id="85" name="pattern">
             <a:extLst>
               <a:ext uri="{FF2B5EF4-FFF2-40B4-BE49-F238E27FC236}">
-                <a16:creationId xmlns:a16="http://schemas.microsoft.com/office/drawing/2014/main" id="{961F4BBD-CAB4-F04D-6871-45286F1CDC07}"/>
+                <a16:creationId xmlns:a16="http://schemas.microsoft.com/office/drawing/2014/main" id="{93D0CDCB-9DEF-DB19-5558-4AA72E6DD899}"/>
               </a:ext>
             </a:extLst>
           </p:cNvPr>
@@ -6311,7 +6311,7 @@
           <p:cNvPr id="86" name="pattern">
             <a:extLst>
               <a:ext uri="{FF2B5EF4-FFF2-40B4-BE49-F238E27FC236}">
-                <a16:creationId xmlns:a16="http://schemas.microsoft.com/office/drawing/2014/main" id="{25AF4D14-EDBD-F881-63E2-55DE2A144A6E}"/>
+                <a16:creationId xmlns:a16="http://schemas.microsoft.com/office/drawing/2014/main" id="{4BF56A10-3928-3DBC-18FD-F30A37006E88}"/>
               </a:ext>
             </a:extLst>
           </p:cNvPr>
@@ -6379,7 +6379,7 @@
           <p:cNvPr id="87" name="pattern">
             <a:extLst>
               <a:ext uri="{FF2B5EF4-FFF2-40B4-BE49-F238E27FC236}">
-                <a16:creationId xmlns:a16="http://schemas.microsoft.com/office/drawing/2014/main" id="{5FEE6B29-EA12-2A99-07ED-0A1745E009BC}"/>
+                <a16:creationId xmlns:a16="http://schemas.microsoft.com/office/drawing/2014/main" id="{DD0F84AA-7DDA-7897-A715-0B1E8D06C48D}"/>
               </a:ext>
             </a:extLst>
           </p:cNvPr>
@@ -6447,7 +6447,7 @@
           <p:cNvPr id="88" name="pattern">
             <a:extLst>
               <a:ext uri="{FF2B5EF4-FFF2-40B4-BE49-F238E27FC236}">
-                <a16:creationId xmlns:a16="http://schemas.microsoft.com/office/drawing/2014/main" id="{B4502567-5250-B268-0AA8-E70246FAE68E}"/>
+                <a16:creationId xmlns:a16="http://schemas.microsoft.com/office/drawing/2014/main" id="{865CB1E6-2AFF-8071-55F3-3797C2447631}"/>
               </a:ext>
             </a:extLst>
           </p:cNvPr>
@@ -6515,7 +6515,7 @@
           <p:cNvPr id="89" name="pattern">
             <a:extLst>
               <a:ext uri="{FF2B5EF4-FFF2-40B4-BE49-F238E27FC236}">
-                <a16:creationId xmlns:a16="http://schemas.microsoft.com/office/drawing/2014/main" id="{A3D8F38D-674D-9D30-3771-9707C11D3FF2}"/>
+                <a16:creationId xmlns:a16="http://schemas.microsoft.com/office/drawing/2014/main" id="{4F9848AE-9474-5FB0-A3E7-C5A2298084B0}"/>
               </a:ext>
             </a:extLst>
           </p:cNvPr>
@@ -6583,7 +6583,7 @@
           <p:cNvPr id="90" name="pattern">
             <a:extLst>
               <a:ext uri="{FF2B5EF4-FFF2-40B4-BE49-F238E27FC236}">
-                <a16:creationId xmlns:a16="http://schemas.microsoft.com/office/drawing/2014/main" id="{22C07795-B424-500D-973F-99E20CDDEE4B}"/>
+                <a16:creationId xmlns:a16="http://schemas.microsoft.com/office/drawing/2014/main" id="{4AED3B0F-92B6-46E5-69CB-1CDFC606CB04}"/>
               </a:ext>
             </a:extLst>
           </p:cNvPr>
@@ -6651,7 +6651,7 @@
           <p:cNvPr id="91" name="pattern">
             <a:extLst>
               <a:ext uri="{FF2B5EF4-FFF2-40B4-BE49-F238E27FC236}">
-                <a16:creationId xmlns:a16="http://schemas.microsoft.com/office/drawing/2014/main" id="{D84817EF-00BB-DFF2-D48F-A54EF54A3AC1}"/>
+                <a16:creationId xmlns:a16="http://schemas.microsoft.com/office/drawing/2014/main" id="{2E188E8C-463F-420F-BCA2-66F26C53A1FD}"/>
               </a:ext>
             </a:extLst>
           </p:cNvPr>
@@ -6719,7 +6719,7 @@
           <p:cNvPr id="92" name="pattern">
             <a:extLst>
               <a:ext uri="{FF2B5EF4-FFF2-40B4-BE49-F238E27FC236}">
-                <a16:creationId xmlns:a16="http://schemas.microsoft.com/office/drawing/2014/main" id="{641E6690-BAF1-CCFB-2781-2309750F3916}"/>
+                <a16:creationId xmlns:a16="http://schemas.microsoft.com/office/drawing/2014/main" id="{0D821147-98A6-9F8E-44B0-C039112FFD17}"/>
               </a:ext>
             </a:extLst>
           </p:cNvPr>
@@ -6787,7 +6787,7 @@
           <p:cNvPr id="93" name="pattern">
             <a:extLst>
               <a:ext uri="{FF2B5EF4-FFF2-40B4-BE49-F238E27FC236}">
-                <a16:creationId xmlns:a16="http://schemas.microsoft.com/office/drawing/2014/main" id="{5F141AD4-3E20-6308-E282-CA79D0082832}"/>
+                <a16:creationId xmlns:a16="http://schemas.microsoft.com/office/drawing/2014/main" id="{BC9B61D2-1648-5307-A6E3-86451428C350}"/>
               </a:ext>
             </a:extLst>
           </p:cNvPr>
@@ -6855,7 +6855,7 @@
           <p:cNvPr id="94" name="pattern">
             <a:extLst>
               <a:ext uri="{FF2B5EF4-FFF2-40B4-BE49-F238E27FC236}">
-                <a16:creationId xmlns:a16="http://schemas.microsoft.com/office/drawing/2014/main" id="{E1F9EEE5-9E3A-CB4C-F75F-B097EA198B9C}"/>
+                <a16:creationId xmlns:a16="http://schemas.microsoft.com/office/drawing/2014/main" id="{0490E5E5-102A-CEF8-A9A2-42279B5E8E9D}"/>
               </a:ext>
             </a:extLst>
           </p:cNvPr>
@@ -6923,7 +6923,7 @@
           <p:cNvPr id="95" name="pattern">
             <a:extLst>
               <a:ext uri="{FF2B5EF4-FFF2-40B4-BE49-F238E27FC236}">
-                <a16:creationId xmlns:a16="http://schemas.microsoft.com/office/drawing/2014/main" id="{483B2394-69FA-01FF-B7DC-6BF56D60E4F2}"/>
+                <a16:creationId xmlns:a16="http://schemas.microsoft.com/office/drawing/2014/main" id="{57386D8C-6628-3194-6F14-4C03EC52533F}"/>
               </a:ext>
             </a:extLst>
           </p:cNvPr>
@@ -6991,7 +6991,7 @@
           <p:cNvPr id="96" name="pattern">
             <a:extLst>
               <a:ext uri="{FF2B5EF4-FFF2-40B4-BE49-F238E27FC236}">
-                <a16:creationId xmlns:a16="http://schemas.microsoft.com/office/drawing/2014/main" id="{317AA0DE-4D75-4D08-FA66-7CEE3EADFBB7}"/>
+                <a16:creationId xmlns:a16="http://schemas.microsoft.com/office/drawing/2014/main" id="{7FC8433A-4049-0B8F-92A8-970811D19A2A}"/>
               </a:ext>
             </a:extLst>
           </p:cNvPr>
@@ -7059,7 +7059,7 @@
           <p:cNvPr id="97" name="pattern">
             <a:extLst>
               <a:ext uri="{FF2B5EF4-FFF2-40B4-BE49-F238E27FC236}">
-                <a16:creationId xmlns:a16="http://schemas.microsoft.com/office/drawing/2014/main" id="{F771DB57-E146-687F-7AB2-245A136CB3A3}"/>
+                <a16:creationId xmlns:a16="http://schemas.microsoft.com/office/drawing/2014/main" id="{AB9B67E0-2EE2-BEB6-2AED-0BDE2B17DE60}"/>
               </a:ext>
             </a:extLst>
           </p:cNvPr>
@@ -7127,7 +7127,7 @@
           <p:cNvPr id="98" name="pattern">
             <a:extLst>
               <a:ext uri="{FF2B5EF4-FFF2-40B4-BE49-F238E27FC236}">
-                <a16:creationId xmlns:a16="http://schemas.microsoft.com/office/drawing/2014/main" id="{48E74BF9-E0FD-28AE-0EB2-EA45866AC0CB}"/>
+                <a16:creationId xmlns:a16="http://schemas.microsoft.com/office/drawing/2014/main" id="{6DBFA7BD-DBD1-BD06-A1A8-796D3BF3B9AE}"/>
               </a:ext>
             </a:extLst>
           </p:cNvPr>
@@ -7195,7 +7195,7 @@
           <p:cNvPr id="99" name="pattern">
             <a:extLst>
               <a:ext uri="{FF2B5EF4-FFF2-40B4-BE49-F238E27FC236}">
-                <a16:creationId xmlns:a16="http://schemas.microsoft.com/office/drawing/2014/main" id="{460E1E90-1990-808C-E2DD-A70F27603ED5}"/>
+                <a16:creationId xmlns:a16="http://schemas.microsoft.com/office/drawing/2014/main" id="{B8E935A5-4623-7134-0272-8C97C93C50FB}"/>
               </a:ext>
             </a:extLst>
           </p:cNvPr>
@@ -7263,7 +7263,7 @@
           <p:cNvPr id="100" name="pattern">
             <a:extLst>
               <a:ext uri="{FF2B5EF4-FFF2-40B4-BE49-F238E27FC236}">
-                <a16:creationId xmlns:a16="http://schemas.microsoft.com/office/drawing/2014/main" id="{2342C7DC-1FA7-4DCA-8C10-57D82ADDEC3C}"/>
+                <a16:creationId xmlns:a16="http://schemas.microsoft.com/office/drawing/2014/main" id="{646ABEAE-56C4-F829-39A7-5494578E8625}"/>
               </a:ext>
             </a:extLst>
           </p:cNvPr>
@@ -7331,7 +7331,7 @@
           <p:cNvPr id="101" name="pattern">
             <a:extLst>
               <a:ext uri="{FF2B5EF4-FFF2-40B4-BE49-F238E27FC236}">
-                <a16:creationId xmlns:a16="http://schemas.microsoft.com/office/drawing/2014/main" id="{E9BFEDEB-E46E-4854-5BB5-4058FA763B5D}"/>
+                <a16:creationId xmlns:a16="http://schemas.microsoft.com/office/drawing/2014/main" id="{5252CBD9-3168-A31F-2011-C97C7CB4A0CE}"/>
               </a:ext>
             </a:extLst>
           </p:cNvPr>
@@ -7399,7 +7399,7 @@
           <p:cNvPr id="102" name="pattern">
             <a:extLst>
               <a:ext uri="{FF2B5EF4-FFF2-40B4-BE49-F238E27FC236}">
-                <a16:creationId xmlns:a16="http://schemas.microsoft.com/office/drawing/2014/main" id="{88CFF212-281E-341C-E958-D8E6096AEDEC}"/>
+                <a16:creationId xmlns:a16="http://schemas.microsoft.com/office/drawing/2014/main" id="{F3FBF98F-A7D7-8515-7962-C5FDA69B2065}"/>
               </a:ext>
             </a:extLst>
           </p:cNvPr>
@@ -7467,7 +7467,7 @@
           <p:cNvPr id="103" name="pattern">
             <a:extLst>
               <a:ext uri="{FF2B5EF4-FFF2-40B4-BE49-F238E27FC236}">
-                <a16:creationId xmlns:a16="http://schemas.microsoft.com/office/drawing/2014/main" id="{57C31395-3B19-0BFD-2876-EFC431CC85AE}"/>
+                <a16:creationId xmlns:a16="http://schemas.microsoft.com/office/drawing/2014/main" id="{25397595-4BB8-0A65-763D-B2CFF05A8079}"/>
               </a:ext>
             </a:extLst>
           </p:cNvPr>
@@ -7535,7 +7535,7 @@
           <p:cNvPr id="104" name="pattern">
             <a:extLst>
               <a:ext uri="{FF2B5EF4-FFF2-40B4-BE49-F238E27FC236}">
-                <a16:creationId xmlns:a16="http://schemas.microsoft.com/office/drawing/2014/main" id="{C2BD5A16-61B5-038F-3322-82990DCE581D}"/>
+                <a16:creationId xmlns:a16="http://schemas.microsoft.com/office/drawing/2014/main" id="{1B50DF7F-C235-9A2C-04C1-EA9F91116AA3}"/>
               </a:ext>
             </a:extLst>
           </p:cNvPr>
@@ -7603,7 +7603,7 @@
           <p:cNvPr id="105" name="pattern">
             <a:extLst>
               <a:ext uri="{FF2B5EF4-FFF2-40B4-BE49-F238E27FC236}">
-                <a16:creationId xmlns:a16="http://schemas.microsoft.com/office/drawing/2014/main" id="{2A19B79D-658D-D5F3-EC38-DABEFB18641E}"/>
+                <a16:creationId xmlns:a16="http://schemas.microsoft.com/office/drawing/2014/main" id="{1AF6B10F-87C4-5EE2-6944-4583C55D4E15}"/>
               </a:ext>
             </a:extLst>
           </p:cNvPr>
@@ -7671,7 +7671,7 @@
           <p:cNvPr id="106" name="pattern">
             <a:extLst>
               <a:ext uri="{FF2B5EF4-FFF2-40B4-BE49-F238E27FC236}">
-                <a16:creationId xmlns:a16="http://schemas.microsoft.com/office/drawing/2014/main" id="{F0E27421-0827-9235-1FB3-6BA7D9229F21}"/>
+                <a16:creationId xmlns:a16="http://schemas.microsoft.com/office/drawing/2014/main" id="{96559556-5D5A-E310-6E86-D69C96C9B3F4}"/>
               </a:ext>
             </a:extLst>
           </p:cNvPr>
@@ -7739,7 +7739,7 @@
           <p:cNvPr id="107" name="pattern">
             <a:extLst>
               <a:ext uri="{FF2B5EF4-FFF2-40B4-BE49-F238E27FC236}">
-                <a16:creationId xmlns:a16="http://schemas.microsoft.com/office/drawing/2014/main" id="{9EFC09C2-4344-654F-D53C-8595483D7425}"/>
+                <a16:creationId xmlns:a16="http://schemas.microsoft.com/office/drawing/2014/main" id="{3D00D908-C37B-E8FC-516C-EC73811360E5}"/>
               </a:ext>
             </a:extLst>
           </p:cNvPr>
@@ -7807,7 +7807,7 @@
           <p:cNvPr id="108" name="pattern">
             <a:extLst>
               <a:ext uri="{FF2B5EF4-FFF2-40B4-BE49-F238E27FC236}">
-                <a16:creationId xmlns:a16="http://schemas.microsoft.com/office/drawing/2014/main" id="{96628B52-38B8-1CA2-4E20-E1EDCB93F34A}"/>
+                <a16:creationId xmlns:a16="http://schemas.microsoft.com/office/drawing/2014/main" id="{EBC992B7-90BB-9D17-063E-2FF338F07711}"/>
               </a:ext>
             </a:extLst>
           </p:cNvPr>
@@ -7875,7 +7875,7 @@
           <p:cNvPr id="109" name="pattern">
             <a:extLst>
               <a:ext uri="{FF2B5EF4-FFF2-40B4-BE49-F238E27FC236}">
-                <a16:creationId xmlns:a16="http://schemas.microsoft.com/office/drawing/2014/main" id="{A40AF7FC-027A-588B-CDD0-750E9B424416}"/>
+                <a16:creationId xmlns:a16="http://schemas.microsoft.com/office/drawing/2014/main" id="{C7224394-F773-549B-D0CE-E00D9EE1CDC8}"/>
               </a:ext>
             </a:extLst>
           </p:cNvPr>
@@ -7943,7 +7943,7 @@
           <p:cNvPr id="110" name="pattern">
             <a:extLst>
               <a:ext uri="{FF2B5EF4-FFF2-40B4-BE49-F238E27FC236}">
-                <a16:creationId xmlns:a16="http://schemas.microsoft.com/office/drawing/2014/main" id="{61E49708-B041-11BC-76E0-D179020D95C3}"/>
+                <a16:creationId xmlns:a16="http://schemas.microsoft.com/office/drawing/2014/main" id="{5339B7C3-DEE4-2D75-12C8-E088D0B59AE6}"/>
               </a:ext>
             </a:extLst>
           </p:cNvPr>
@@ -8011,7 +8011,7 @@
           <p:cNvPr id="111" name="pattern">
             <a:extLst>
               <a:ext uri="{FF2B5EF4-FFF2-40B4-BE49-F238E27FC236}">
-                <a16:creationId xmlns:a16="http://schemas.microsoft.com/office/drawing/2014/main" id="{FA3B249C-7C1B-D20A-263B-C3434B54D43F}"/>
+                <a16:creationId xmlns:a16="http://schemas.microsoft.com/office/drawing/2014/main" id="{0CADA204-F050-E85A-EE94-25EA56FC9727}"/>
               </a:ext>
             </a:extLst>
           </p:cNvPr>
@@ -8079,7 +8079,7 @@
           <p:cNvPr id="112" name="pattern">
             <a:extLst>
               <a:ext uri="{FF2B5EF4-FFF2-40B4-BE49-F238E27FC236}">
-                <a16:creationId xmlns:a16="http://schemas.microsoft.com/office/drawing/2014/main" id="{89E663FF-C67F-4997-98A4-A2A15FC17D44}"/>
+                <a16:creationId xmlns:a16="http://schemas.microsoft.com/office/drawing/2014/main" id="{F2FC513E-14F6-B9E1-3282-C6DBE323FCA9}"/>
               </a:ext>
             </a:extLst>
           </p:cNvPr>
@@ -8147,7 +8147,7 @@
           <p:cNvPr id="113" name="pattern">
             <a:extLst>
               <a:ext uri="{FF2B5EF4-FFF2-40B4-BE49-F238E27FC236}">
-                <a16:creationId xmlns:a16="http://schemas.microsoft.com/office/drawing/2014/main" id="{CDAABD6E-9D1C-ADF9-DDC6-2353AED68BDE}"/>
+                <a16:creationId xmlns:a16="http://schemas.microsoft.com/office/drawing/2014/main" id="{83EB8617-38F3-588D-2406-02F2609F5133}"/>
               </a:ext>
             </a:extLst>
           </p:cNvPr>
@@ -8215,7 +8215,7 @@
           <p:cNvPr id="114" name="pattern">
             <a:extLst>
               <a:ext uri="{FF2B5EF4-FFF2-40B4-BE49-F238E27FC236}">
-                <a16:creationId xmlns:a16="http://schemas.microsoft.com/office/drawing/2014/main" id="{2B94E060-DABD-F7C9-F530-737085807A0B}"/>
+                <a16:creationId xmlns:a16="http://schemas.microsoft.com/office/drawing/2014/main" id="{971A753E-C417-D183-64EB-3560FB1D98A8}"/>
               </a:ext>
             </a:extLst>
           </p:cNvPr>
@@ -8283,7 +8283,7 @@
           <p:cNvPr id="115" name="pattern">
             <a:extLst>
               <a:ext uri="{FF2B5EF4-FFF2-40B4-BE49-F238E27FC236}">
-                <a16:creationId xmlns:a16="http://schemas.microsoft.com/office/drawing/2014/main" id="{C33C49E1-FD44-786D-639A-44FE18D71B52}"/>
+                <a16:creationId xmlns:a16="http://schemas.microsoft.com/office/drawing/2014/main" id="{D2CF8AD0-E6C0-3E82-6CC8-EA3085A1C269}"/>
               </a:ext>
             </a:extLst>
           </p:cNvPr>
@@ -8351,7 +8351,7 @@
           <p:cNvPr id="116" name="pattern">
             <a:extLst>
               <a:ext uri="{FF2B5EF4-FFF2-40B4-BE49-F238E27FC236}">
-                <a16:creationId xmlns:a16="http://schemas.microsoft.com/office/drawing/2014/main" id="{35866A0E-351B-FD39-9656-84B6B7F67A9F}"/>
+                <a16:creationId xmlns:a16="http://schemas.microsoft.com/office/drawing/2014/main" id="{82D68FFF-6AA0-84CE-D6C0-E34F7F96DD65}"/>
               </a:ext>
             </a:extLst>
           </p:cNvPr>
@@ -8419,7 +8419,7 @@
           <p:cNvPr id="117" name="pattern">
             <a:extLst>
               <a:ext uri="{FF2B5EF4-FFF2-40B4-BE49-F238E27FC236}">
-                <a16:creationId xmlns:a16="http://schemas.microsoft.com/office/drawing/2014/main" id="{18426171-3D03-D53E-044F-BDF03230C2DC}"/>
+                <a16:creationId xmlns:a16="http://schemas.microsoft.com/office/drawing/2014/main" id="{4ADA4917-FA88-0843-2D60-DC81E50569C7}"/>
               </a:ext>
             </a:extLst>
           </p:cNvPr>
@@ -8487,7 +8487,7 @@
           <p:cNvPr id="118" name="pattern">
             <a:extLst>
               <a:ext uri="{FF2B5EF4-FFF2-40B4-BE49-F238E27FC236}">
-                <a16:creationId xmlns:a16="http://schemas.microsoft.com/office/drawing/2014/main" id="{7F1B28CF-220C-9F70-6D19-6210DE8B268E}"/>
+                <a16:creationId xmlns:a16="http://schemas.microsoft.com/office/drawing/2014/main" id="{F1DAB11F-C461-2A84-B4D9-C2CCE9764651}"/>
               </a:ext>
             </a:extLst>
           </p:cNvPr>
@@ -8555,7 +8555,7 @@
           <p:cNvPr id="119" name="pattern">
             <a:extLst>
               <a:ext uri="{FF2B5EF4-FFF2-40B4-BE49-F238E27FC236}">
-                <a16:creationId xmlns:a16="http://schemas.microsoft.com/office/drawing/2014/main" id="{8D910F49-F3AC-64B1-86D5-9AB02E000D97}"/>
+                <a16:creationId xmlns:a16="http://schemas.microsoft.com/office/drawing/2014/main" id="{43953E70-D1AA-B6F6-0EAD-DEEBC368D0A2}"/>
               </a:ext>
             </a:extLst>
           </p:cNvPr>
@@ -8623,7 +8623,7 @@
           <p:cNvPr id="120" name="pattern">
             <a:extLst>
               <a:ext uri="{FF2B5EF4-FFF2-40B4-BE49-F238E27FC236}">
-                <a16:creationId xmlns:a16="http://schemas.microsoft.com/office/drawing/2014/main" id="{BA1D3E1B-2AFF-91DC-D469-8419BDF7E5EE}"/>
+                <a16:creationId xmlns:a16="http://schemas.microsoft.com/office/drawing/2014/main" id="{32239E3B-8F7F-DC97-C94B-700C44790D0D}"/>
               </a:ext>
             </a:extLst>
           </p:cNvPr>
@@ -8691,7 +8691,7 @@
           <p:cNvPr id="121" name="pattern">
             <a:extLst>
               <a:ext uri="{FF2B5EF4-FFF2-40B4-BE49-F238E27FC236}">
-                <a16:creationId xmlns:a16="http://schemas.microsoft.com/office/drawing/2014/main" id="{526CAC01-A2AF-A868-E5ED-473E0C9AF6C4}"/>
+                <a16:creationId xmlns:a16="http://schemas.microsoft.com/office/drawing/2014/main" id="{B55A6B05-43AC-1029-75FA-F318235BB712}"/>
               </a:ext>
             </a:extLst>
           </p:cNvPr>
@@ -8759,7 +8759,7 @@
           <p:cNvPr id="122" name="pattern">
             <a:extLst>
               <a:ext uri="{FF2B5EF4-FFF2-40B4-BE49-F238E27FC236}">
-                <a16:creationId xmlns:a16="http://schemas.microsoft.com/office/drawing/2014/main" id="{F5366AEB-0F32-1E08-F5D3-338ACC980EEB}"/>
+                <a16:creationId xmlns:a16="http://schemas.microsoft.com/office/drawing/2014/main" id="{7B7500E2-9A60-CB28-E284-4F028FBFA65E}"/>
               </a:ext>
             </a:extLst>
           </p:cNvPr>
@@ -8827,7 +8827,7 @@
           <p:cNvPr id="123" name="pattern">
             <a:extLst>
               <a:ext uri="{FF2B5EF4-FFF2-40B4-BE49-F238E27FC236}">
-                <a16:creationId xmlns:a16="http://schemas.microsoft.com/office/drawing/2014/main" id="{6DAC31D0-7429-22F1-1F8B-4F5F2AE2D0D2}"/>
+                <a16:creationId xmlns:a16="http://schemas.microsoft.com/office/drawing/2014/main" id="{8058EBA4-5679-0B86-35E2-0BD542672E2D}"/>
               </a:ext>
             </a:extLst>
           </p:cNvPr>
@@ -8895,7 +8895,7 @@
           <p:cNvPr id="124" name="pattern">
             <a:extLst>
               <a:ext uri="{FF2B5EF4-FFF2-40B4-BE49-F238E27FC236}">
-                <a16:creationId xmlns:a16="http://schemas.microsoft.com/office/drawing/2014/main" id="{4EBDACCD-63EE-FA91-F42F-658E15262222}"/>
+                <a16:creationId xmlns:a16="http://schemas.microsoft.com/office/drawing/2014/main" id="{F76F6DB8-DB03-D5E6-8FFC-9A40B38C2A67}"/>
               </a:ext>
             </a:extLst>
           </p:cNvPr>
@@ -8963,7 +8963,7 @@
           <p:cNvPr id="125" name="pattern">
             <a:extLst>
               <a:ext uri="{FF2B5EF4-FFF2-40B4-BE49-F238E27FC236}">
-                <a16:creationId xmlns:a16="http://schemas.microsoft.com/office/drawing/2014/main" id="{A08874D6-0396-08D9-6D6F-B8E5841ADD66}"/>
+                <a16:creationId xmlns:a16="http://schemas.microsoft.com/office/drawing/2014/main" id="{5ECDF89E-D1F7-7FC5-EDD5-63732CC60239}"/>
               </a:ext>
             </a:extLst>
           </p:cNvPr>
@@ -9031,7 +9031,7 @@
           <p:cNvPr id="126" name="pattern">
             <a:extLst>
               <a:ext uri="{FF2B5EF4-FFF2-40B4-BE49-F238E27FC236}">
-                <a16:creationId xmlns:a16="http://schemas.microsoft.com/office/drawing/2014/main" id="{E342D059-3FC7-28E1-B320-65B04551042C}"/>
+                <a16:creationId xmlns:a16="http://schemas.microsoft.com/office/drawing/2014/main" id="{E212DB33-E029-AE8D-1EE3-1CEEA7A53969}"/>
               </a:ext>
             </a:extLst>
           </p:cNvPr>
@@ -9099,7 +9099,7 @@
           <p:cNvPr id="127" name="pattern">
             <a:extLst>
               <a:ext uri="{FF2B5EF4-FFF2-40B4-BE49-F238E27FC236}">
-                <a16:creationId xmlns:a16="http://schemas.microsoft.com/office/drawing/2014/main" id="{D8427A18-A92E-3539-CD63-1371303BF530}"/>
+                <a16:creationId xmlns:a16="http://schemas.microsoft.com/office/drawing/2014/main" id="{423A5F89-23D0-CB0A-507D-2B17018D6A31}"/>
               </a:ext>
             </a:extLst>
           </p:cNvPr>
@@ -9167,7 +9167,7 @@
           <p:cNvPr id="128" name="pattern">
             <a:extLst>
               <a:ext uri="{FF2B5EF4-FFF2-40B4-BE49-F238E27FC236}">
-                <a16:creationId xmlns:a16="http://schemas.microsoft.com/office/drawing/2014/main" id="{D06056EF-EE25-6F87-39B0-F73A16DCEC48}"/>
+                <a16:creationId xmlns:a16="http://schemas.microsoft.com/office/drawing/2014/main" id="{0951BF51-A3F8-513C-A3A6-E9EB35BB5B02}"/>
               </a:ext>
             </a:extLst>
           </p:cNvPr>
@@ -9235,7 +9235,7 @@
           <p:cNvPr id="129" name="pattern">
             <a:extLst>
               <a:ext uri="{FF2B5EF4-FFF2-40B4-BE49-F238E27FC236}">
-                <a16:creationId xmlns:a16="http://schemas.microsoft.com/office/drawing/2014/main" id="{963FFE80-5473-435A-0FC7-0B1FEFB74D00}"/>
+                <a16:creationId xmlns:a16="http://schemas.microsoft.com/office/drawing/2014/main" id="{025C6CCB-2270-7067-B52B-D604AAA34437}"/>
               </a:ext>
             </a:extLst>
           </p:cNvPr>
@@ -9303,7 +9303,7 @@
           <p:cNvPr id="130" name="pattern">
             <a:extLst>
               <a:ext uri="{FF2B5EF4-FFF2-40B4-BE49-F238E27FC236}">
-                <a16:creationId xmlns:a16="http://schemas.microsoft.com/office/drawing/2014/main" id="{A52421BA-F706-F338-5E18-901DE52C23C5}"/>
+                <a16:creationId xmlns:a16="http://schemas.microsoft.com/office/drawing/2014/main" id="{A572C860-E52A-5CA6-A5DA-31C1A442953A}"/>
               </a:ext>
             </a:extLst>
           </p:cNvPr>
@@ -9371,7 +9371,7 @@
           <p:cNvPr id="131" name="pattern">
             <a:extLst>
               <a:ext uri="{FF2B5EF4-FFF2-40B4-BE49-F238E27FC236}">
-                <a16:creationId xmlns:a16="http://schemas.microsoft.com/office/drawing/2014/main" id="{2B7F4C8F-DBAA-9BD2-2668-2A2EEF44F4E0}"/>
+                <a16:creationId xmlns:a16="http://schemas.microsoft.com/office/drawing/2014/main" id="{F1CB2BF7-00F4-4351-1E5B-7341FE402D0E}"/>
               </a:ext>
             </a:extLst>
           </p:cNvPr>
@@ -9439,7 +9439,7 @@
           <p:cNvPr id="132" name="pattern">
             <a:extLst>
               <a:ext uri="{FF2B5EF4-FFF2-40B4-BE49-F238E27FC236}">
-                <a16:creationId xmlns:a16="http://schemas.microsoft.com/office/drawing/2014/main" id="{8BBC7EF6-DF61-13D5-8C24-A2157F8458FE}"/>
+                <a16:creationId xmlns:a16="http://schemas.microsoft.com/office/drawing/2014/main" id="{5C24B4A4-4E29-2D1C-3ED5-067665F15925}"/>
               </a:ext>
             </a:extLst>
           </p:cNvPr>
@@ -9507,7 +9507,7 @@
           <p:cNvPr id="133" name="pattern">
             <a:extLst>
               <a:ext uri="{FF2B5EF4-FFF2-40B4-BE49-F238E27FC236}">
-                <a16:creationId xmlns:a16="http://schemas.microsoft.com/office/drawing/2014/main" id="{76A60B51-8190-D244-696A-1BFE690258A0}"/>
+                <a16:creationId xmlns:a16="http://schemas.microsoft.com/office/drawing/2014/main" id="{A715B63E-EE9F-721B-2527-8F2375F2A4A1}"/>
               </a:ext>
             </a:extLst>
           </p:cNvPr>
@@ -9575,7 +9575,7 @@
           <p:cNvPr id="134" name="pattern">
             <a:extLst>
               <a:ext uri="{FF2B5EF4-FFF2-40B4-BE49-F238E27FC236}">
-                <a16:creationId xmlns:a16="http://schemas.microsoft.com/office/drawing/2014/main" id="{61542D96-BF5F-C75C-A9AF-6CD68D7EEF47}"/>
+                <a16:creationId xmlns:a16="http://schemas.microsoft.com/office/drawing/2014/main" id="{1C313DC7-06A0-2E4C-73F7-343123655A29}"/>
               </a:ext>
             </a:extLst>
           </p:cNvPr>
@@ -9643,7 +9643,7 @@
           <p:cNvPr id="135" name="pattern">
             <a:extLst>
               <a:ext uri="{FF2B5EF4-FFF2-40B4-BE49-F238E27FC236}">
-                <a16:creationId xmlns:a16="http://schemas.microsoft.com/office/drawing/2014/main" id="{767AAB90-70E4-6DFE-D9DF-35198ECA29D9}"/>
+                <a16:creationId xmlns:a16="http://schemas.microsoft.com/office/drawing/2014/main" id="{ED28EB13-E271-DFA4-F38D-AE4E16DDE7AB}"/>
               </a:ext>
             </a:extLst>
           </p:cNvPr>
@@ -9709,7 +9709,7 @@
     </p:spTree>
     <p:extLst>
       <p:ext uri="{BB962C8B-B14F-4D97-AF65-F5344CB8AC3E}">
-        <p14:creationId xmlns:p14="http://schemas.microsoft.com/office/powerpoint/2010/main" val="3402085529"/>
+        <p14:creationId xmlns:p14="http://schemas.microsoft.com/office/powerpoint/2010/main" val="2028948933"/>
       </p:ext>
     </p:extLst>
   </p:cSld>
@@ -9741,7 +9741,7 @@
           <p:cNvPr id="7" name="creative_background">
             <a:extLst>
               <a:ext uri="{FF2B5EF4-FFF2-40B4-BE49-F238E27FC236}">
-                <a16:creationId xmlns:a16="http://schemas.microsoft.com/office/drawing/2014/main" id="{BA045D69-A5F0-F78A-D723-A638E6040722}"/>
+                <a16:creationId xmlns:a16="http://schemas.microsoft.com/office/drawing/2014/main" id="{747126EF-3DA7-7EC0-6FCA-C75A9509DA56}"/>
               </a:ext>
             </a:extLst>
           </p:cNvPr>
@@ -9824,9 +9824,9 @@
           <a:bodyPr/>
           <a:lstStyle/>
           <a:p>
-            <a:fld id="{F163761A-A4E5-4C7D-9728-6F0BC80FAE16}" type="datetimeFigureOut">
+            <a:fld id="{55B34ED4-2611-4754-BC8B-367044EB0C5C}" type="datetimeFigureOut">
               <a:rPr lang="en-US" smtClean="0"/>
-              <a:t>10/3/2026</a:t>
+              <a:t>10/4/2026</a:t>
             </a:fld>
             <a:endParaRPr lang="en-US"/>
           </a:p>
@@ -9866,7 +9866,7 @@
           <a:bodyPr/>
           <a:lstStyle/>
           <a:p>
-            <a:fld id="{4DDE2B9A-5AB6-497C-A8BC-8EC14D6B62BC}" type="slidenum">
+            <a:fld id="{1A1093C2-1C68-42EE-B693-25A933F6CF0F}" type="slidenum">
               <a:rPr lang="en-US" smtClean="0"/>
               <a:t>‹#›</a:t>
             </a:fld>
@@ -9879,7 +9879,7 @@
           <p:cNvPr id="8" name="item_1_title">
             <a:extLst>
               <a:ext uri="{FF2B5EF4-FFF2-40B4-BE49-F238E27FC236}">
-                <a16:creationId xmlns:a16="http://schemas.microsoft.com/office/drawing/2014/main" id="{5097435F-DE93-9FAA-CA4F-C92103AA9240}"/>
+                <a16:creationId xmlns:a16="http://schemas.microsoft.com/office/drawing/2014/main" id="{95E6CD4B-1837-7131-3174-CA37853EF447}"/>
               </a:ext>
             </a:extLst>
           </p:cNvPr>
@@ -9929,7 +9929,7 @@
           <p:cNvPr id="9" name="item_1">
             <a:extLst>
               <a:ext uri="{FF2B5EF4-FFF2-40B4-BE49-F238E27FC236}">
-                <a16:creationId xmlns:a16="http://schemas.microsoft.com/office/drawing/2014/main" id="{D63FB453-0376-86AE-C99F-7BBAB9827391}"/>
+                <a16:creationId xmlns:a16="http://schemas.microsoft.com/office/drawing/2014/main" id="{61D6F189-328D-7E92-A367-C4F36B55DD40}"/>
               </a:ext>
             </a:extLst>
           </p:cNvPr>
@@ -9977,7 +9977,7 @@
           <p:cNvPr id="10" name="item_2_title">
             <a:extLst>
               <a:ext uri="{FF2B5EF4-FFF2-40B4-BE49-F238E27FC236}">
-                <a16:creationId xmlns:a16="http://schemas.microsoft.com/office/drawing/2014/main" id="{BF7B1470-5E94-F31A-DAE3-E1B1D78BF402}"/>
+                <a16:creationId xmlns:a16="http://schemas.microsoft.com/office/drawing/2014/main" id="{369F6170-3147-412A-CC75-86D559F9E8A2}"/>
               </a:ext>
             </a:extLst>
           </p:cNvPr>
@@ -10030,7 +10030,7 @@
           <p:cNvPr id="11" name="item_2">
             <a:extLst>
               <a:ext uri="{FF2B5EF4-FFF2-40B4-BE49-F238E27FC236}">
-                <a16:creationId xmlns:a16="http://schemas.microsoft.com/office/drawing/2014/main" id="{8B3BFCD7-F178-B111-0E5E-657CF42B7E70}"/>
+                <a16:creationId xmlns:a16="http://schemas.microsoft.com/office/drawing/2014/main" id="{95EF0271-5B38-1468-61D8-A11935BEA6D6}"/>
               </a:ext>
             </a:extLst>
           </p:cNvPr>
@@ -10078,7 +10078,7 @@
           <p:cNvPr id="12" name="item_3_title">
             <a:extLst>
               <a:ext uri="{FF2B5EF4-FFF2-40B4-BE49-F238E27FC236}">
-                <a16:creationId xmlns:a16="http://schemas.microsoft.com/office/drawing/2014/main" id="{AE82B101-026C-6D0A-A5B6-1AECD8C8F69C}"/>
+                <a16:creationId xmlns:a16="http://schemas.microsoft.com/office/drawing/2014/main" id="{942972F9-0C5A-2619-8727-A437A552B656}"/>
               </a:ext>
             </a:extLst>
           </p:cNvPr>
@@ -10131,7 +10131,7 @@
           <p:cNvPr id="13" name="item_3">
             <a:extLst>
               <a:ext uri="{FF2B5EF4-FFF2-40B4-BE49-F238E27FC236}">
-                <a16:creationId xmlns:a16="http://schemas.microsoft.com/office/drawing/2014/main" id="{9E769FA0-DF3B-FB65-8AC7-DDE079157451}"/>
+                <a16:creationId xmlns:a16="http://schemas.microsoft.com/office/drawing/2014/main" id="{0819904B-AB33-FD27-CDA1-09CD3E75C72E}"/>
               </a:ext>
             </a:extLst>
           </p:cNvPr>
@@ -10179,7 +10179,7 @@
           <p:cNvPr id="14" name="item_4_title">
             <a:extLst>
               <a:ext uri="{FF2B5EF4-FFF2-40B4-BE49-F238E27FC236}">
-                <a16:creationId xmlns:a16="http://schemas.microsoft.com/office/drawing/2014/main" id="{771BF3B9-6994-3CBB-D65F-6AB475E8C546}"/>
+                <a16:creationId xmlns:a16="http://schemas.microsoft.com/office/drawing/2014/main" id="{2DDFC0D3-8C31-2B67-33B2-B68A0089BC60}"/>
               </a:ext>
             </a:extLst>
           </p:cNvPr>
@@ -10232,7 +10232,7 @@
           <p:cNvPr id="15" name="item_4">
             <a:extLst>
               <a:ext uri="{FF2B5EF4-FFF2-40B4-BE49-F238E27FC236}">
-                <a16:creationId xmlns:a16="http://schemas.microsoft.com/office/drawing/2014/main" id="{EA5BC195-16E9-E9F9-1079-A8C5374A934F}"/>
+                <a16:creationId xmlns:a16="http://schemas.microsoft.com/office/drawing/2014/main" id="{6A9FB38C-B2C1-2D11-E70D-55DEC5D9FBD1}"/>
               </a:ext>
             </a:extLst>
           </p:cNvPr>
@@ -10280,7 +10280,7 @@
           <p:cNvPr id="16" name="source">
             <a:extLst>
               <a:ext uri="{FF2B5EF4-FFF2-40B4-BE49-F238E27FC236}">
-                <a16:creationId xmlns:a16="http://schemas.microsoft.com/office/drawing/2014/main" id="{F261FC9B-27F4-2571-A372-6C59655A3AD6}"/>
+                <a16:creationId xmlns:a16="http://schemas.microsoft.com/office/drawing/2014/main" id="{18691EF8-9A6F-2011-B73D-E1400EB650DC}"/>
               </a:ext>
             </a:extLst>
           </p:cNvPr>
@@ -10335,7 +10335,7 @@
     </p:spTree>
     <p:extLst>
       <p:ext uri="{BB962C8B-B14F-4D97-AF65-F5344CB8AC3E}">
-        <p14:creationId xmlns:p14="http://schemas.microsoft.com/office/powerpoint/2010/main" val="536026905"/>
+        <p14:creationId xmlns:p14="http://schemas.microsoft.com/office/powerpoint/2010/main" val="2527808957"/>
       </p:ext>
     </p:extLst>
   </p:cSld>
@@ -10367,7 +10367,7 @@
           <p:cNvPr id="7" name="creative_background">
             <a:extLst>
               <a:ext uri="{FF2B5EF4-FFF2-40B4-BE49-F238E27FC236}">
-                <a16:creationId xmlns:a16="http://schemas.microsoft.com/office/drawing/2014/main" id="{3D7FCA7F-6CD6-71A8-1852-0B5934AA70FF}"/>
+                <a16:creationId xmlns:a16="http://schemas.microsoft.com/office/drawing/2014/main" id="{33521276-27D9-1782-893E-73B315A20250}"/>
               </a:ext>
             </a:extLst>
           </p:cNvPr>
@@ -10450,9 +10450,9 @@
           <a:bodyPr/>
           <a:lstStyle/>
           <a:p>
-            <a:fld id="{F163761A-A4E5-4C7D-9728-6F0BC80FAE16}" type="datetimeFigureOut">
+            <a:fld id="{55B34ED4-2611-4754-BC8B-367044EB0C5C}" type="datetimeFigureOut">
               <a:rPr lang="en-US" smtClean="0"/>
-              <a:t>10/3/2026</a:t>
+              <a:t>10/4/2026</a:t>
             </a:fld>
             <a:endParaRPr lang="en-US"/>
           </a:p>
@@ -10492,7 +10492,7 @@
           <a:bodyPr/>
           <a:lstStyle/>
           <a:p>
-            <a:fld id="{4DDE2B9A-5AB6-497C-A8BC-8EC14D6B62BC}" type="slidenum">
+            <a:fld id="{1A1093C2-1C68-42EE-B693-25A933F6CF0F}" type="slidenum">
               <a:rPr lang="en-US" smtClean="0"/>
               <a:t>‹#›</a:t>
             </a:fld>
@@ -10505,7 +10505,7 @@
           <p:cNvPr id="8" name="body">
             <a:extLst>
               <a:ext uri="{FF2B5EF4-FFF2-40B4-BE49-F238E27FC236}">
-                <a16:creationId xmlns:a16="http://schemas.microsoft.com/office/drawing/2014/main" id="{348066B7-FF4F-72AE-1D4A-914262B854E2}"/>
+                <a16:creationId xmlns:a16="http://schemas.microsoft.com/office/drawing/2014/main" id="{AFC1E066-D60B-6354-1BBB-0B234032ACA7}"/>
               </a:ext>
             </a:extLst>
           </p:cNvPr>
@@ -10550,7 +10550,7 @@
           <p:cNvPr id="9" name="source">
             <a:extLst>
               <a:ext uri="{FF2B5EF4-FFF2-40B4-BE49-F238E27FC236}">
-                <a16:creationId xmlns:a16="http://schemas.microsoft.com/office/drawing/2014/main" id="{4F342BE8-3B67-88BD-25BD-9ED0581F3293}"/>
+                <a16:creationId xmlns:a16="http://schemas.microsoft.com/office/drawing/2014/main" id="{327036B1-3F30-6E2B-736D-67E08CB930F7}"/>
               </a:ext>
             </a:extLst>
           </p:cNvPr>
@@ -10605,7 +10605,7 @@
     </p:spTree>
     <p:extLst>
       <p:ext uri="{BB962C8B-B14F-4D97-AF65-F5344CB8AC3E}">
-        <p14:creationId xmlns:p14="http://schemas.microsoft.com/office/powerpoint/2010/main" val="4071527109"/>
+        <p14:creationId xmlns:p14="http://schemas.microsoft.com/office/powerpoint/2010/main" val="4232474856"/>
       </p:ext>
     </p:extLst>
   </p:cSld>
@@ -10637,7 +10637,7 @@
           <p:cNvPr id="7" name="creative_background">
             <a:extLst>
               <a:ext uri="{FF2B5EF4-FFF2-40B4-BE49-F238E27FC236}">
-                <a16:creationId xmlns:a16="http://schemas.microsoft.com/office/drawing/2014/main" id="{793DD144-6FA3-E54D-610B-E57BAA5E8F94}"/>
+                <a16:creationId xmlns:a16="http://schemas.microsoft.com/office/drawing/2014/main" id="{D161DC10-C69D-0F41-3304-0C63E786F210}"/>
               </a:ext>
             </a:extLst>
           </p:cNvPr>
@@ -10720,9 +10720,9 @@
           <a:bodyPr/>
           <a:lstStyle/>
           <a:p>
-            <a:fld id="{F163761A-A4E5-4C7D-9728-6F0BC80FAE16}" type="datetimeFigureOut">
+            <a:fld id="{55B34ED4-2611-4754-BC8B-367044EB0C5C}" type="datetimeFigureOut">
               <a:rPr lang="en-US" smtClean="0"/>
-              <a:t>10/3/2026</a:t>
+              <a:t>10/4/2026</a:t>
             </a:fld>
             <a:endParaRPr lang="en-US"/>
           </a:p>
@@ -10762,7 +10762,7 @@
           <a:bodyPr/>
           <a:lstStyle/>
           <a:p>
-            <a:fld id="{4DDE2B9A-5AB6-497C-A8BC-8EC14D6B62BC}" type="slidenum">
+            <a:fld id="{1A1093C2-1C68-42EE-B693-25A933F6CF0F}" type="slidenum">
               <a:rPr lang="en-US" smtClean="0"/>
               <a:t>‹#›</a:t>
             </a:fld>
@@ -10775,7 +10775,7 @@
           <p:cNvPr id="8" name="item_1_title">
             <a:extLst>
               <a:ext uri="{FF2B5EF4-FFF2-40B4-BE49-F238E27FC236}">
-                <a16:creationId xmlns:a16="http://schemas.microsoft.com/office/drawing/2014/main" id="{2F1FDF57-0315-2F19-13D6-14773DDA8A5E}"/>
+                <a16:creationId xmlns:a16="http://schemas.microsoft.com/office/drawing/2014/main" id="{2B21A928-780B-B9AD-BC6D-5150E5FA237D}"/>
               </a:ext>
             </a:extLst>
           </p:cNvPr>
@@ -10825,7 +10825,7 @@
           <p:cNvPr id="9" name="item_1">
             <a:extLst>
               <a:ext uri="{FF2B5EF4-FFF2-40B4-BE49-F238E27FC236}">
-                <a16:creationId xmlns:a16="http://schemas.microsoft.com/office/drawing/2014/main" id="{403D740C-9DF0-62E2-70DF-0FF73D58F29A}"/>
+                <a16:creationId xmlns:a16="http://schemas.microsoft.com/office/drawing/2014/main" id="{68597350-7C1D-2944-3A1F-BE4DFCE8EEF9}"/>
               </a:ext>
             </a:extLst>
           </p:cNvPr>
@@ -10873,7 +10873,7 @@
           <p:cNvPr id="10" name="item_2_title">
             <a:extLst>
               <a:ext uri="{FF2B5EF4-FFF2-40B4-BE49-F238E27FC236}">
-                <a16:creationId xmlns:a16="http://schemas.microsoft.com/office/drawing/2014/main" id="{AF52D1F8-3DD0-8A4F-0413-B67E4B1EBFCB}"/>
+                <a16:creationId xmlns:a16="http://schemas.microsoft.com/office/drawing/2014/main" id="{0B78DD35-3257-CEBD-AAAB-479F3A984E33}"/>
               </a:ext>
             </a:extLst>
           </p:cNvPr>
@@ -10926,7 +10926,7 @@
           <p:cNvPr id="11" name="item_2">
             <a:extLst>
               <a:ext uri="{FF2B5EF4-FFF2-40B4-BE49-F238E27FC236}">
-                <a16:creationId xmlns:a16="http://schemas.microsoft.com/office/drawing/2014/main" id="{10C8924E-F266-95A8-2832-C841D1464E7C}"/>
+                <a16:creationId xmlns:a16="http://schemas.microsoft.com/office/drawing/2014/main" id="{F4A72022-AE92-83C9-1C88-06B75365FCB1}"/>
               </a:ext>
             </a:extLst>
           </p:cNvPr>
@@ -10974,7 +10974,7 @@
           <p:cNvPr id="12" name="item_3_title">
             <a:extLst>
               <a:ext uri="{FF2B5EF4-FFF2-40B4-BE49-F238E27FC236}">
-                <a16:creationId xmlns:a16="http://schemas.microsoft.com/office/drawing/2014/main" id="{3A880569-6BE8-1CE1-FAC5-6BD19FB1EC99}"/>
+                <a16:creationId xmlns:a16="http://schemas.microsoft.com/office/drawing/2014/main" id="{1E0AAD5C-20C7-9F1A-2114-2888E6E25BBD}"/>
               </a:ext>
             </a:extLst>
           </p:cNvPr>
@@ -11027,7 +11027,7 @@
           <p:cNvPr id="13" name="item_3">
             <a:extLst>
               <a:ext uri="{FF2B5EF4-FFF2-40B4-BE49-F238E27FC236}">
-                <a16:creationId xmlns:a16="http://schemas.microsoft.com/office/drawing/2014/main" id="{82A38B2A-D93E-8C4F-421A-2D866AAD91D5}"/>
+                <a16:creationId xmlns:a16="http://schemas.microsoft.com/office/drawing/2014/main" id="{998F913D-4073-D90D-C558-B88930852A71}"/>
               </a:ext>
             </a:extLst>
           </p:cNvPr>
@@ -11075,7 +11075,7 @@
           <p:cNvPr id="14" name="item_4_title">
             <a:extLst>
               <a:ext uri="{FF2B5EF4-FFF2-40B4-BE49-F238E27FC236}">
-                <a16:creationId xmlns:a16="http://schemas.microsoft.com/office/drawing/2014/main" id="{7533A330-293B-E769-CDDD-E515E782235B}"/>
+                <a16:creationId xmlns:a16="http://schemas.microsoft.com/office/drawing/2014/main" id="{A7834AA0-25F9-57F7-F56C-4293A2FB7A19}"/>
               </a:ext>
             </a:extLst>
           </p:cNvPr>
@@ -11128,7 +11128,7 @@
           <p:cNvPr id="15" name="item_4">
             <a:extLst>
               <a:ext uri="{FF2B5EF4-FFF2-40B4-BE49-F238E27FC236}">
-                <a16:creationId xmlns:a16="http://schemas.microsoft.com/office/drawing/2014/main" id="{6F150D3E-6037-5B2A-1DB6-2D241B5BBA2B}"/>
+                <a16:creationId xmlns:a16="http://schemas.microsoft.com/office/drawing/2014/main" id="{C013440E-5399-8F9E-6BEB-B298116CCEEE}"/>
               </a:ext>
             </a:extLst>
           </p:cNvPr>
@@ -11176,7 +11176,7 @@
           <p:cNvPr id="16" name="source">
             <a:extLst>
               <a:ext uri="{FF2B5EF4-FFF2-40B4-BE49-F238E27FC236}">
-                <a16:creationId xmlns:a16="http://schemas.microsoft.com/office/drawing/2014/main" id="{2720B9B8-6389-BF9B-BA42-60D926FA90BB}"/>
+                <a16:creationId xmlns:a16="http://schemas.microsoft.com/office/drawing/2014/main" id="{9B4AB375-73F0-246C-A6F7-EE7DCE9A0EA5}"/>
               </a:ext>
             </a:extLst>
           </p:cNvPr>
@@ -11231,7 +11231,7 @@
     </p:spTree>
     <p:extLst>
       <p:ext uri="{BB962C8B-B14F-4D97-AF65-F5344CB8AC3E}">
-        <p14:creationId xmlns:p14="http://schemas.microsoft.com/office/powerpoint/2010/main" val="1664290359"/>
+        <p14:creationId xmlns:p14="http://schemas.microsoft.com/office/powerpoint/2010/main" val="3286775532"/>
       </p:ext>
     </p:extLst>
   </p:cSld>
@@ -11263,7 +11263,7 @@
           <p:cNvPr id="7" name="creative_background">
             <a:extLst>
               <a:ext uri="{FF2B5EF4-FFF2-40B4-BE49-F238E27FC236}">
-                <a16:creationId xmlns:a16="http://schemas.microsoft.com/office/drawing/2014/main" id="{04AADC75-BF25-788D-2930-272B3E57C254}"/>
+                <a16:creationId xmlns:a16="http://schemas.microsoft.com/office/drawing/2014/main" id="{5D8592D8-7912-7D2F-88A8-9751A404B2C1}"/>
               </a:ext>
             </a:extLst>
           </p:cNvPr>
@@ -11346,9 +11346,9 @@
           <a:bodyPr/>
           <a:lstStyle/>
           <a:p>
-            <a:fld id="{F163761A-A4E5-4C7D-9728-6F0BC80FAE16}" type="datetimeFigureOut">
+            <a:fld id="{55B34ED4-2611-4754-BC8B-367044EB0C5C}" type="datetimeFigureOut">
               <a:rPr lang="en-US" smtClean="0"/>
-              <a:t>10/3/2026</a:t>
+              <a:t>10/4/2026</a:t>
             </a:fld>
             <a:endParaRPr lang="en-US"/>
           </a:p>
@@ -11388,7 +11388,7 @@
           <a:bodyPr/>
           <a:lstStyle/>
           <a:p>
-            <a:fld id="{4DDE2B9A-5AB6-497C-A8BC-8EC14D6B62BC}" type="slidenum">
+            <a:fld id="{1A1093C2-1C68-42EE-B693-25A933F6CF0F}" type="slidenum">
               <a:rPr lang="en-US" smtClean="0"/>
               <a:t>‹#›</a:t>
             </a:fld>
@@ -11401,7 +11401,7 @@
           <p:cNvPr id="8" name="body">
             <a:extLst>
               <a:ext uri="{FF2B5EF4-FFF2-40B4-BE49-F238E27FC236}">
-                <a16:creationId xmlns:a16="http://schemas.microsoft.com/office/drawing/2014/main" id="{8C5FC308-AFA0-E9F0-CE9B-CDB5BD60C403}"/>
+                <a16:creationId xmlns:a16="http://schemas.microsoft.com/office/drawing/2014/main" id="{1ECD3117-1517-AD36-4D9C-0C376A4B71D6}"/>
               </a:ext>
             </a:extLst>
           </p:cNvPr>
@@ -11441,7 +11441,7 @@
           <p:cNvPr id="9" name="kpi_value_1">
             <a:extLst>
               <a:ext uri="{FF2B5EF4-FFF2-40B4-BE49-F238E27FC236}">
-                <a16:creationId xmlns:a16="http://schemas.microsoft.com/office/drawing/2014/main" id="{5073FBC0-84FB-4862-6D2F-D12374573556}"/>
+                <a16:creationId xmlns:a16="http://schemas.microsoft.com/office/drawing/2014/main" id="{F83AB4B6-A23B-E9F7-81D0-0A4FB6A46800}"/>
               </a:ext>
             </a:extLst>
           </p:cNvPr>
@@ -11494,7 +11494,7 @@
           <p:cNvPr id="10" name="kpi_label_1">
             <a:extLst>
               <a:ext uri="{FF2B5EF4-FFF2-40B4-BE49-F238E27FC236}">
-                <a16:creationId xmlns:a16="http://schemas.microsoft.com/office/drawing/2014/main" id="{6565D6FA-2298-E264-90AF-325F267C768A}"/>
+                <a16:creationId xmlns:a16="http://schemas.microsoft.com/office/drawing/2014/main" id="{EE5BAE71-4E99-4A02-3304-345AF39DE1BC}"/>
               </a:ext>
             </a:extLst>
           </p:cNvPr>
@@ -11542,7 +11542,7 @@
           <p:cNvPr id="11" name="source">
             <a:extLst>
               <a:ext uri="{FF2B5EF4-FFF2-40B4-BE49-F238E27FC236}">
-                <a16:creationId xmlns:a16="http://schemas.microsoft.com/office/drawing/2014/main" id="{B3981F1B-6F15-F42E-0089-E8F7AD85917D}"/>
+                <a16:creationId xmlns:a16="http://schemas.microsoft.com/office/drawing/2014/main" id="{45ECCFEB-5545-F5C1-5DB4-63D64BB342D9}"/>
               </a:ext>
             </a:extLst>
           </p:cNvPr>
@@ -11597,7 +11597,7 @@
     </p:spTree>
     <p:extLst>
       <p:ext uri="{BB962C8B-B14F-4D97-AF65-F5344CB8AC3E}">
-        <p14:creationId xmlns:p14="http://schemas.microsoft.com/office/powerpoint/2010/main" val="2404914897"/>
+        <p14:creationId xmlns:p14="http://schemas.microsoft.com/office/powerpoint/2010/main" val="3627562947"/>
       </p:ext>
     </p:extLst>
   </p:cSld>
@@ -11629,7 +11629,7 @@
           <p:cNvPr id="7" name="creative_background">
             <a:extLst>
               <a:ext uri="{FF2B5EF4-FFF2-40B4-BE49-F238E27FC236}">
-                <a16:creationId xmlns:a16="http://schemas.microsoft.com/office/drawing/2014/main" id="{9C565C34-BEE4-3679-D41F-190455442485}"/>
+                <a16:creationId xmlns:a16="http://schemas.microsoft.com/office/drawing/2014/main" id="{1D261FDC-8678-BA66-1C1F-273EE5B78791}"/>
               </a:ext>
             </a:extLst>
           </p:cNvPr>
@@ -11712,9 +11712,9 @@
           <a:bodyPr/>
           <a:lstStyle/>
           <a:p>
-            <a:fld id="{F163761A-A4E5-4C7D-9728-6F0BC80FAE16}" type="datetimeFigureOut">
+            <a:fld id="{55B34ED4-2611-4754-BC8B-367044EB0C5C}" type="datetimeFigureOut">
               <a:rPr lang="en-US" smtClean="0"/>
-              <a:t>10/3/2026</a:t>
+              <a:t>10/4/2026</a:t>
             </a:fld>
             <a:endParaRPr lang="en-US"/>
           </a:p>
@@ -11754,7 +11754,7 @@
           <a:bodyPr/>
           <a:lstStyle/>
           <a:p>
-            <a:fld id="{4DDE2B9A-5AB6-497C-A8BC-8EC14D6B62BC}" type="slidenum">
+            <a:fld id="{1A1093C2-1C68-42EE-B693-25A933F6CF0F}" type="slidenum">
               <a:rPr lang="en-US" smtClean="0"/>
               <a:t>‹#›</a:t>
             </a:fld>
@@ -11767,7 +11767,7 @@
           <p:cNvPr id="8" name="body">
             <a:extLst>
               <a:ext uri="{FF2B5EF4-FFF2-40B4-BE49-F238E27FC236}">
-                <a16:creationId xmlns:a16="http://schemas.microsoft.com/office/drawing/2014/main" id="{83A40B39-D3EB-882F-C0F5-3B7F830F00C4}"/>
+                <a16:creationId xmlns:a16="http://schemas.microsoft.com/office/drawing/2014/main" id="{BE3B476D-0FBE-E1AE-B2A5-764ED7D195B6}"/>
               </a:ext>
             </a:extLst>
           </p:cNvPr>
@@ -11807,7 +11807,7 @@
           <p:cNvPr id="9" name="kpi_value_1">
             <a:extLst>
               <a:ext uri="{FF2B5EF4-FFF2-40B4-BE49-F238E27FC236}">
-                <a16:creationId xmlns:a16="http://schemas.microsoft.com/office/drawing/2014/main" id="{7C75A59E-D8BA-DDE2-0298-69419C7D7FBE}"/>
+                <a16:creationId xmlns:a16="http://schemas.microsoft.com/office/drawing/2014/main" id="{C116AD01-E6C5-EFEF-ED88-3D7B25D3BE05}"/>
               </a:ext>
             </a:extLst>
           </p:cNvPr>
@@ -11860,7 +11860,7 @@
           <p:cNvPr id="10" name="kpi_label_1">
             <a:extLst>
               <a:ext uri="{FF2B5EF4-FFF2-40B4-BE49-F238E27FC236}">
-                <a16:creationId xmlns:a16="http://schemas.microsoft.com/office/drawing/2014/main" id="{CB99CEE4-CC57-7F1B-7BC8-188B69EBF33E}"/>
+                <a16:creationId xmlns:a16="http://schemas.microsoft.com/office/drawing/2014/main" id="{BB2606A4-6687-7229-7A91-679D468BE947}"/>
               </a:ext>
             </a:extLst>
           </p:cNvPr>
@@ -11908,7 +11908,7 @@
           <p:cNvPr id="11" name="kpi_value_2">
             <a:extLst>
               <a:ext uri="{FF2B5EF4-FFF2-40B4-BE49-F238E27FC236}">
-                <a16:creationId xmlns:a16="http://schemas.microsoft.com/office/drawing/2014/main" id="{22A52CD9-7B87-9D54-A336-A1B4F33E2111}"/>
+                <a16:creationId xmlns:a16="http://schemas.microsoft.com/office/drawing/2014/main" id="{453DF984-49D9-1E0B-9090-6353487366FE}"/>
               </a:ext>
             </a:extLst>
           </p:cNvPr>
@@ -11961,7 +11961,7 @@
           <p:cNvPr id="12" name="kpi_label_2">
             <a:extLst>
               <a:ext uri="{FF2B5EF4-FFF2-40B4-BE49-F238E27FC236}">
-                <a16:creationId xmlns:a16="http://schemas.microsoft.com/office/drawing/2014/main" id="{5D9E8C56-906F-1E48-11CF-18B94A16769F}"/>
+                <a16:creationId xmlns:a16="http://schemas.microsoft.com/office/drawing/2014/main" id="{817BF4CA-C0A3-9F8F-CC9F-253D02994F18}"/>
               </a:ext>
             </a:extLst>
           </p:cNvPr>
@@ -12009,7 +12009,7 @@
           <p:cNvPr id="13" name="kpi_value_3">
             <a:extLst>
               <a:ext uri="{FF2B5EF4-FFF2-40B4-BE49-F238E27FC236}">
-                <a16:creationId xmlns:a16="http://schemas.microsoft.com/office/drawing/2014/main" id="{AE7CCA1F-823D-BFCD-FF0A-357F15437E79}"/>
+                <a16:creationId xmlns:a16="http://schemas.microsoft.com/office/drawing/2014/main" id="{6FD170BF-9502-EA6B-15EF-F87250DD2F99}"/>
               </a:ext>
             </a:extLst>
           </p:cNvPr>
@@ -12062,7 +12062,7 @@
           <p:cNvPr id="14" name="kpi_label_3">
             <a:extLst>
               <a:ext uri="{FF2B5EF4-FFF2-40B4-BE49-F238E27FC236}">
-                <a16:creationId xmlns:a16="http://schemas.microsoft.com/office/drawing/2014/main" id="{C9DFF84F-35EC-04B3-3C14-B08FE6B39C0D}"/>
+                <a16:creationId xmlns:a16="http://schemas.microsoft.com/office/drawing/2014/main" id="{09F73F1C-A890-BD7F-B547-54F10DDADE72}"/>
               </a:ext>
             </a:extLst>
           </p:cNvPr>
@@ -12110,7 +12110,7 @@
           <p:cNvPr id="15" name="kpi_value_4">
             <a:extLst>
               <a:ext uri="{FF2B5EF4-FFF2-40B4-BE49-F238E27FC236}">
-                <a16:creationId xmlns:a16="http://schemas.microsoft.com/office/drawing/2014/main" id="{F9EE4732-D3FE-58F1-2F14-307C4C30270C}"/>
+                <a16:creationId xmlns:a16="http://schemas.microsoft.com/office/drawing/2014/main" id="{B4AD3AE1-F91A-E14B-D606-6123665FE369}"/>
               </a:ext>
             </a:extLst>
           </p:cNvPr>
@@ -12163,7 +12163,7 @@
           <p:cNvPr id="16" name="kpi_label_4">
             <a:extLst>
               <a:ext uri="{FF2B5EF4-FFF2-40B4-BE49-F238E27FC236}">
-                <a16:creationId xmlns:a16="http://schemas.microsoft.com/office/drawing/2014/main" id="{9CAE4029-5504-7912-7CA6-F56D8DDB36AA}"/>
+                <a16:creationId xmlns:a16="http://schemas.microsoft.com/office/drawing/2014/main" id="{53F2D50E-EC79-0B0E-8667-6F43C62FCDF1}"/>
               </a:ext>
             </a:extLst>
           </p:cNvPr>
@@ -12211,7 +12211,7 @@
           <p:cNvPr id="17" name="source">
             <a:extLst>
               <a:ext uri="{FF2B5EF4-FFF2-40B4-BE49-F238E27FC236}">
-                <a16:creationId xmlns:a16="http://schemas.microsoft.com/office/drawing/2014/main" id="{D5729FF8-0613-BA25-C08F-CF90D37B9008}"/>
+                <a16:creationId xmlns:a16="http://schemas.microsoft.com/office/drawing/2014/main" id="{B53DC784-7E1A-CDAB-440C-D346BAC5B881}"/>
               </a:ext>
             </a:extLst>
           </p:cNvPr>
@@ -12266,7 +12266,7 @@
     </p:spTree>
     <p:extLst>
       <p:ext uri="{BB962C8B-B14F-4D97-AF65-F5344CB8AC3E}">
-        <p14:creationId xmlns:p14="http://schemas.microsoft.com/office/powerpoint/2010/main" val="3947974420"/>
+        <p14:creationId xmlns:p14="http://schemas.microsoft.com/office/powerpoint/2010/main" val="3990643413"/>
       </p:ext>
     </p:extLst>
   </p:cSld>
@@ -12298,7 +12298,7 @@
           <p:cNvPr id="7" name="creative_background">
             <a:extLst>
               <a:ext uri="{FF2B5EF4-FFF2-40B4-BE49-F238E27FC236}">
-                <a16:creationId xmlns:a16="http://schemas.microsoft.com/office/drawing/2014/main" id="{C7868D07-24DA-B7E6-FF01-7097D2FE2DD7}"/>
+                <a16:creationId xmlns:a16="http://schemas.microsoft.com/office/drawing/2014/main" id="{3ECCDEFC-A5B3-6642-D0C0-B4A81DBFBBF0}"/>
               </a:ext>
             </a:extLst>
           </p:cNvPr>
@@ -12381,9 +12381,9 @@
           <a:bodyPr/>
           <a:lstStyle/>
           <a:p>
-            <a:fld id="{F163761A-A4E5-4C7D-9728-6F0BC80FAE16}" type="datetimeFigureOut">
+            <a:fld id="{55B34ED4-2611-4754-BC8B-367044EB0C5C}" type="datetimeFigureOut">
               <a:rPr lang="en-US" smtClean="0"/>
-              <a:t>10/3/2026</a:t>
+              <a:t>10/4/2026</a:t>
             </a:fld>
             <a:endParaRPr lang="en-US"/>
           </a:p>
@@ -12423,7 +12423,7 @@
           <a:bodyPr/>
           <a:lstStyle/>
           <a:p>
-            <a:fld id="{4DDE2B9A-5AB6-497C-A8BC-8EC14D6B62BC}" type="slidenum">
+            <a:fld id="{1A1093C2-1C68-42EE-B693-25A933F6CF0F}" type="slidenum">
               <a:rPr lang="en-US" smtClean="0"/>
               <a:t>‹#›</a:t>
             </a:fld>
@@ -12436,7 +12436,7 @@
           <p:cNvPr id="8" name="body">
             <a:extLst>
               <a:ext uri="{FF2B5EF4-FFF2-40B4-BE49-F238E27FC236}">
-                <a16:creationId xmlns:a16="http://schemas.microsoft.com/office/drawing/2014/main" id="{37FF98F8-9979-1555-B72A-99EC15DEA2CD}"/>
+                <a16:creationId xmlns:a16="http://schemas.microsoft.com/office/drawing/2014/main" id="{D8B5B0F7-EBAE-2EE9-DC40-1AADDD1BDBCB}"/>
               </a:ext>
             </a:extLst>
           </p:cNvPr>
@@ -12476,7 +12476,7 @@
           <p:cNvPr id="9" name="kpi_value_1">
             <a:extLst>
               <a:ext uri="{FF2B5EF4-FFF2-40B4-BE49-F238E27FC236}">
-                <a16:creationId xmlns:a16="http://schemas.microsoft.com/office/drawing/2014/main" id="{3AE11725-CF94-531A-01C1-DAD14471D1E3}"/>
+                <a16:creationId xmlns:a16="http://schemas.microsoft.com/office/drawing/2014/main" id="{A9E92958-D50B-5106-EB3A-59008AB20FB2}"/>
               </a:ext>
             </a:extLst>
           </p:cNvPr>
@@ -12529,7 +12529,7 @@
           <p:cNvPr id="10" name="kpi_label_1">
             <a:extLst>
               <a:ext uri="{FF2B5EF4-FFF2-40B4-BE49-F238E27FC236}">
-                <a16:creationId xmlns:a16="http://schemas.microsoft.com/office/drawing/2014/main" id="{268C49D7-2A73-9CE5-A011-D3D83B036957}"/>
+                <a16:creationId xmlns:a16="http://schemas.microsoft.com/office/drawing/2014/main" id="{97502C12-9AFF-C0D6-00F9-CE24F92F1CEF}"/>
               </a:ext>
             </a:extLst>
           </p:cNvPr>
@@ -12577,7 +12577,7 @@
           <p:cNvPr id="11" name="kpi_value_2">
             <a:extLst>
               <a:ext uri="{FF2B5EF4-FFF2-40B4-BE49-F238E27FC236}">
-                <a16:creationId xmlns:a16="http://schemas.microsoft.com/office/drawing/2014/main" id="{DE90D001-312D-7F5A-A577-3DDBE73CD9A1}"/>
+                <a16:creationId xmlns:a16="http://schemas.microsoft.com/office/drawing/2014/main" id="{9BE7FB0A-EEA9-2D10-1ACD-3A9F7F084599}"/>
               </a:ext>
             </a:extLst>
           </p:cNvPr>
@@ -12630,7 +12630,7 @@
           <p:cNvPr id="12" name="kpi_label_2">
             <a:extLst>
               <a:ext uri="{FF2B5EF4-FFF2-40B4-BE49-F238E27FC236}">
-                <a16:creationId xmlns:a16="http://schemas.microsoft.com/office/drawing/2014/main" id="{BD12A555-CA78-E1E2-4696-5F9817B14C42}"/>
+                <a16:creationId xmlns:a16="http://schemas.microsoft.com/office/drawing/2014/main" id="{6F995F18-3632-9D71-2BE5-F64D14BFED93}"/>
               </a:ext>
             </a:extLst>
           </p:cNvPr>
@@ -12678,7 +12678,7 @@
           <p:cNvPr id="13" name="source">
             <a:extLst>
               <a:ext uri="{FF2B5EF4-FFF2-40B4-BE49-F238E27FC236}">
-                <a16:creationId xmlns:a16="http://schemas.microsoft.com/office/drawing/2014/main" id="{5D1C0880-6D44-0650-D496-17A87B0E3F81}"/>
+                <a16:creationId xmlns:a16="http://schemas.microsoft.com/office/drawing/2014/main" id="{85EBCA5B-59FA-6B94-0357-A01307F08B55}"/>
               </a:ext>
             </a:extLst>
           </p:cNvPr>
@@ -12733,7 +12733,7 @@
     </p:spTree>
     <p:extLst>
       <p:ext uri="{BB962C8B-B14F-4D97-AF65-F5344CB8AC3E}">
-        <p14:creationId xmlns:p14="http://schemas.microsoft.com/office/powerpoint/2010/main" val="744197559"/>
+        <p14:creationId xmlns:p14="http://schemas.microsoft.com/office/powerpoint/2010/main" val="168686500"/>
       </p:ext>
     </p:extLst>
   </p:cSld>
@@ -12765,7 +12765,7 @@
           <p:cNvPr id="7" name="creative_background">
             <a:extLst>
               <a:ext uri="{FF2B5EF4-FFF2-40B4-BE49-F238E27FC236}">
-                <a16:creationId xmlns:a16="http://schemas.microsoft.com/office/drawing/2014/main" id="{B84F5568-61CF-FCB0-5C8F-4433DD848777}"/>
+                <a16:creationId xmlns:a16="http://schemas.microsoft.com/office/drawing/2014/main" id="{088A5D5D-92AB-DB9C-32DA-D24897CA67CC}"/>
               </a:ext>
             </a:extLst>
           </p:cNvPr>
@@ -12848,9 +12848,9 @@
           <a:bodyPr/>
           <a:lstStyle/>
           <a:p>
-            <a:fld id="{F163761A-A4E5-4C7D-9728-6F0BC80FAE16}" type="datetimeFigureOut">
+            <a:fld id="{55B34ED4-2611-4754-BC8B-367044EB0C5C}" type="datetimeFigureOut">
               <a:rPr lang="en-US" smtClean="0"/>
-              <a:t>10/3/2026</a:t>
+              <a:t>10/4/2026</a:t>
             </a:fld>
             <a:endParaRPr lang="en-US"/>
           </a:p>
@@ -12890,7 +12890,7 @@
           <a:bodyPr/>
           <a:lstStyle/>
           <a:p>
-            <a:fld id="{4DDE2B9A-5AB6-497C-A8BC-8EC14D6B62BC}" type="slidenum">
+            <a:fld id="{1A1093C2-1C68-42EE-B693-25A933F6CF0F}" type="slidenum">
               <a:rPr lang="en-US" smtClean="0"/>
               <a:t>‹#›</a:t>
             </a:fld>
@@ -12903,7 +12903,7 @@
           <p:cNvPr id="8" name="body">
             <a:extLst>
               <a:ext uri="{FF2B5EF4-FFF2-40B4-BE49-F238E27FC236}">
-                <a16:creationId xmlns:a16="http://schemas.microsoft.com/office/drawing/2014/main" id="{69E95C15-7758-C296-30C8-22D18735092A}"/>
+                <a16:creationId xmlns:a16="http://schemas.microsoft.com/office/drawing/2014/main" id="{B3263986-CE6E-78A8-3574-CD00016C35E1}"/>
               </a:ext>
             </a:extLst>
           </p:cNvPr>
@@ -12943,7 +12943,7 @@
           <p:cNvPr id="9" name="kpi_value_1">
             <a:extLst>
               <a:ext uri="{FF2B5EF4-FFF2-40B4-BE49-F238E27FC236}">
-                <a16:creationId xmlns:a16="http://schemas.microsoft.com/office/drawing/2014/main" id="{AB597E66-65C8-407D-23DA-E358D5693980}"/>
+                <a16:creationId xmlns:a16="http://schemas.microsoft.com/office/drawing/2014/main" id="{1A928E20-45FC-80DF-CCDE-6CDE32A3A736}"/>
               </a:ext>
             </a:extLst>
           </p:cNvPr>
@@ -12996,7 +12996,7 @@
           <p:cNvPr id="10" name="kpi_label_1">
             <a:extLst>
               <a:ext uri="{FF2B5EF4-FFF2-40B4-BE49-F238E27FC236}">
-                <a16:creationId xmlns:a16="http://schemas.microsoft.com/office/drawing/2014/main" id="{AC074A08-0BDC-A021-4686-62B55A44A316}"/>
+                <a16:creationId xmlns:a16="http://schemas.microsoft.com/office/drawing/2014/main" id="{B71E6BA4-AD73-0A6E-A91B-B77BC2CD15B1}"/>
               </a:ext>
             </a:extLst>
           </p:cNvPr>
@@ -13044,7 +13044,7 @@
           <p:cNvPr id="11" name="kpi_value_2">
             <a:extLst>
               <a:ext uri="{FF2B5EF4-FFF2-40B4-BE49-F238E27FC236}">
-                <a16:creationId xmlns:a16="http://schemas.microsoft.com/office/drawing/2014/main" id="{38F416D8-EF85-5B71-797D-8D8715F69E98}"/>
+                <a16:creationId xmlns:a16="http://schemas.microsoft.com/office/drawing/2014/main" id="{D096E889-ED14-F913-C67E-34CF47D9CD33}"/>
               </a:ext>
             </a:extLst>
           </p:cNvPr>
@@ -13097,7 +13097,7 @@
           <p:cNvPr id="12" name="kpi_label_2">
             <a:extLst>
               <a:ext uri="{FF2B5EF4-FFF2-40B4-BE49-F238E27FC236}">
-                <a16:creationId xmlns:a16="http://schemas.microsoft.com/office/drawing/2014/main" id="{0379C4C8-1008-A52A-41A5-39B6C5677C3A}"/>
+                <a16:creationId xmlns:a16="http://schemas.microsoft.com/office/drawing/2014/main" id="{BD0D5973-286A-54BE-80A5-77C8B68C6DAF}"/>
               </a:ext>
             </a:extLst>
           </p:cNvPr>
@@ -13145,7 +13145,7 @@
           <p:cNvPr id="13" name="kpi_value_3">
             <a:extLst>
               <a:ext uri="{FF2B5EF4-FFF2-40B4-BE49-F238E27FC236}">
-                <a16:creationId xmlns:a16="http://schemas.microsoft.com/office/drawing/2014/main" id="{2BB823B4-C80A-188B-98C7-2654B5678E06}"/>
+                <a16:creationId xmlns:a16="http://schemas.microsoft.com/office/drawing/2014/main" id="{1CDA1EE8-D8ED-9D9F-A63E-3136A2A64664}"/>
               </a:ext>
             </a:extLst>
           </p:cNvPr>
@@ -13198,7 +13198,7 @@
           <p:cNvPr id="14" name="kpi_label_3">
             <a:extLst>
               <a:ext uri="{FF2B5EF4-FFF2-40B4-BE49-F238E27FC236}">
-                <a16:creationId xmlns:a16="http://schemas.microsoft.com/office/drawing/2014/main" id="{EBA893CE-F894-7AFF-AF8D-3C8BD60F8228}"/>
+                <a16:creationId xmlns:a16="http://schemas.microsoft.com/office/drawing/2014/main" id="{6F220111-9195-1EFA-3179-FDCC0EED2061}"/>
               </a:ext>
             </a:extLst>
           </p:cNvPr>
@@ -13246,7 +13246,7 @@
           <p:cNvPr id="15" name="kpi_value_4">
             <a:extLst>
               <a:ext uri="{FF2B5EF4-FFF2-40B4-BE49-F238E27FC236}">
-                <a16:creationId xmlns:a16="http://schemas.microsoft.com/office/drawing/2014/main" id="{1BC79AB4-7422-4BAB-6F6D-6AC60895A8B6}"/>
+                <a16:creationId xmlns:a16="http://schemas.microsoft.com/office/drawing/2014/main" id="{DADA2259-F770-BE87-1679-ECA73F99C0D7}"/>
               </a:ext>
             </a:extLst>
           </p:cNvPr>
@@ -13299,7 +13299,7 @@
           <p:cNvPr id="16" name="kpi_label_4">
             <a:extLst>
               <a:ext uri="{FF2B5EF4-FFF2-40B4-BE49-F238E27FC236}">
-                <a16:creationId xmlns:a16="http://schemas.microsoft.com/office/drawing/2014/main" id="{41FC9EE7-3AB1-6C9A-34A0-AF88B55D737B}"/>
+                <a16:creationId xmlns:a16="http://schemas.microsoft.com/office/drawing/2014/main" id="{B5A014FF-E9F7-942F-13E0-C45443F8B2C4}"/>
               </a:ext>
             </a:extLst>
           </p:cNvPr>
@@ -13347,7 +13347,7 @@
           <p:cNvPr id="17" name="source">
             <a:extLst>
               <a:ext uri="{FF2B5EF4-FFF2-40B4-BE49-F238E27FC236}">
-                <a16:creationId xmlns:a16="http://schemas.microsoft.com/office/drawing/2014/main" id="{21F28981-75F5-DC11-A016-015F240E0B79}"/>
+                <a16:creationId xmlns:a16="http://schemas.microsoft.com/office/drawing/2014/main" id="{33DCC033-A1E2-1BA3-DBC7-31427D8AFAF8}"/>
               </a:ext>
             </a:extLst>
           </p:cNvPr>
@@ -13402,7 +13402,7 @@
     </p:spTree>
     <p:extLst>
       <p:ext uri="{BB962C8B-B14F-4D97-AF65-F5344CB8AC3E}">
-        <p14:creationId xmlns:p14="http://schemas.microsoft.com/office/powerpoint/2010/main" val="1556618328"/>
+        <p14:creationId xmlns:p14="http://schemas.microsoft.com/office/powerpoint/2010/main" val="1831573734"/>
       </p:ext>
     </p:extLst>
   </p:cSld>
@@ -13434,7 +13434,7 @@
           <p:cNvPr id="7" name="creative_background">
             <a:extLst>
               <a:ext uri="{FF2B5EF4-FFF2-40B4-BE49-F238E27FC236}">
-                <a16:creationId xmlns:a16="http://schemas.microsoft.com/office/drawing/2014/main" id="{3BBCFA36-8889-16E5-4015-E27769E4843B}"/>
+                <a16:creationId xmlns:a16="http://schemas.microsoft.com/office/drawing/2014/main" id="{F8C521D4-F15C-147D-079B-150C6A0E918F}"/>
               </a:ext>
             </a:extLst>
           </p:cNvPr>
@@ -13517,9 +13517,9 @@
           <a:bodyPr/>
           <a:lstStyle/>
           <a:p>
-            <a:fld id="{F163761A-A4E5-4C7D-9728-6F0BC80FAE16}" type="datetimeFigureOut">
+            <a:fld id="{55B34ED4-2611-4754-BC8B-367044EB0C5C}" type="datetimeFigureOut">
               <a:rPr lang="en-US" smtClean="0"/>
-              <a:t>10/3/2026</a:t>
+              <a:t>10/4/2026</a:t>
             </a:fld>
             <a:endParaRPr lang="en-US"/>
           </a:p>
@@ -13559,7 +13559,7 @@
           <a:bodyPr/>
           <a:lstStyle/>
           <a:p>
-            <a:fld id="{4DDE2B9A-5AB6-497C-A8BC-8EC14D6B62BC}" type="slidenum">
+            <a:fld id="{1A1093C2-1C68-42EE-B693-25A933F6CF0F}" type="slidenum">
               <a:rPr lang="en-US" smtClean="0"/>
               <a:t>‹#›</a:t>
             </a:fld>
@@ -13572,7 +13572,7 @@
           <p:cNvPr id="8" name="item_1_title">
             <a:extLst>
               <a:ext uri="{FF2B5EF4-FFF2-40B4-BE49-F238E27FC236}">
-                <a16:creationId xmlns:a16="http://schemas.microsoft.com/office/drawing/2014/main" id="{6EE2BDDA-DA84-8A74-F335-E26E818582B3}"/>
+                <a16:creationId xmlns:a16="http://schemas.microsoft.com/office/drawing/2014/main" id="{BDADFD07-404C-603B-D663-1282E567DEC4}"/>
               </a:ext>
             </a:extLst>
           </p:cNvPr>
@@ -13622,7 +13622,7 @@
           <p:cNvPr id="9" name="item_1">
             <a:extLst>
               <a:ext uri="{FF2B5EF4-FFF2-40B4-BE49-F238E27FC236}">
-                <a16:creationId xmlns:a16="http://schemas.microsoft.com/office/drawing/2014/main" id="{840284E4-3C58-BDD5-F200-3AE75CF21FA0}"/>
+                <a16:creationId xmlns:a16="http://schemas.microsoft.com/office/drawing/2014/main" id="{76B0CC61-354F-5ECC-B7B2-5CC2914FADCC}"/>
               </a:ext>
             </a:extLst>
           </p:cNvPr>
@@ -13670,7 +13670,7 @@
           <p:cNvPr id="10" name="item_2_title">
             <a:extLst>
               <a:ext uri="{FF2B5EF4-FFF2-40B4-BE49-F238E27FC236}">
-                <a16:creationId xmlns:a16="http://schemas.microsoft.com/office/drawing/2014/main" id="{38EDA9DB-9555-D3B8-90C5-F7DB8E5632A1}"/>
+                <a16:creationId xmlns:a16="http://schemas.microsoft.com/office/drawing/2014/main" id="{6D41A795-73AC-B365-38DF-B897ADF895A4}"/>
               </a:ext>
             </a:extLst>
           </p:cNvPr>
@@ -13723,7 +13723,7 @@
           <p:cNvPr id="11" name="item_2">
             <a:extLst>
               <a:ext uri="{FF2B5EF4-FFF2-40B4-BE49-F238E27FC236}">
-                <a16:creationId xmlns:a16="http://schemas.microsoft.com/office/drawing/2014/main" id="{40677EC7-FC16-A4AE-A8F9-FDFE480D8CFD}"/>
+                <a16:creationId xmlns:a16="http://schemas.microsoft.com/office/drawing/2014/main" id="{E5001D8F-424D-BDD4-AB0A-187F8A062288}"/>
               </a:ext>
             </a:extLst>
           </p:cNvPr>
@@ -13771,7 +13771,7 @@
           <p:cNvPr id="12" name="item_3_title">
             <a:extLst>
               <a:ext uri="{FF2B5EF4-FFF2-40B4-BE49-F238E27FC236}">
-                <a16:creationId xmlns:a16="http://schemas.microsoft.com/office/drawing/2014/main" id="{FCD8BAD4-DD8E-36B7-C397-F5CBECB82450}"/>
+                <a16:creationId xmlns:a16="http://schemas.microsoft.com/office/drawing/2014/main" id="{98C2785E-D253-AB32-BE8F-739D9F666A58}"/>
               </a:ext>
             </a:extLst>
           </p:cNvPr>
@@ -13824,7 +13824,7 @@
           <p:cNvPr id="13" name="item_3">
             <a:extLst>
               <a:ext uri="{FF2B5EF4-FFF2-40B4-BE49-F238E27FC236}">
-                <a16:creationId xmlns:a16="http://schemas.microsoft.com/office/drawing/2014/main" id="{F17DE79A-BAA6-69AB-6D1E-D8E21CFCDCDC}"/>
+                <a16:creationId xmlns:a16="http://schemas.microsoft.com/office/drawing/2014/main" id="{E6F484D6-87F6-D453-C734-B3B5D4A4593D}"/>
               </a:ext>
             </a:extLst>
           </p:cNvPr>
@@ -13872,7 +13872,7 @@
           <p:cNvPr id="14" name="item_4_title">
             <a:extLst>
               <a:ext uri="{FF2B5EF4-FFF2-40B4-BE49-F238E27FC236}">
-                <a16:creationId xmlns:a16="http://schemas.microsoft.com/office/drawing/2014/main" id="{C4F9DBD1-74BA-CB2A-7425-3080E51031F2}"/>
+                <a16:creationId xmlns:a16="http://schemas.microsoft.com/office/drawing/2014/main" id="{B519889E-8EE9-4410-53E8-4B162193D5E4}"/>
               </a:ext>
             </a:extLst>
           </p:cNvPr>
@@ -13925,7 +13925,7 @@
           <p:cNvPr id="15" name="item_4">
             <a:extLst>
               <a:ext uri="{FF2B5EF4-FFF2-40B4-BE49-F238E27FC236}">
-                <a16:creationId xmlns:a16="http://schemas.microsoft.com/office/drawing/2014/main" id="{74169F3A-3FAC-A9CE-F5B8-2009A17E3AD0}"/>
+                <a16:creationId xmlns:a16="http://schemas.microsoft.com/office/drawing/2014/main" id="{CDC86B4E-8197-634A-321D-EEC48FD56C3B}"/>
               </a:ext>
             </a:extLst>
           </p:cNvPr>
@@ -13973,7 +13973,7 @@
           <p:cNvPr id="16" name="source">
             <a:extLst>
               <a:ext uri="{FF2B5EF4-FFF2-40B4-BE49-F238E27FC236}">
-                <a16:creationId xmlns:a16="http://schemas.microsoft.com/office/drawing/2014/main" id="{0FAD3CD6-0F44-A064-96D7-E69FF2C1D4A1}"/>
+                <a16:creationId xmlns:a16="http://schemas.microsoft.com/office/drawing/2014/main" id="{4CFA28FC-456D-9E31-4DB8-DD0A6F63DF96}"/>
               </a:ext>
             </a:extLst>
           </p:cNvPr>
@@ -14028,7 +14028,7 @@
     </p:spTree>
     <p:extLst>
       <p:ext uri="{BB962C8B-B14F-4D97-AF65-F5344CB8AC3E}">
-        <p14:creationId xmlns:p14="http://schemas.microsoft.com/office/powerpoint/2010/main" val="647143135"/>
+        <p14:creationId xmlns:p14="http://schemas.microsoft.com/office/powerpoint/2010/main" val="166168822"/>
       </p:ext>
     </p:extLst>
   </p:cSld>
@@ -14060,7 +14060,7 @@
           <p:cNvPr id="7" name="creative_background">
             <a:extLst>
               <a:ext uri="{FF2B5EF4-FFF2-40B4-BE49-F238E27FC236}">
-                <a16:creationId xmlns:a16="http://schemas.microsoft.com/office/drawing/2014/main" id="{EF0E0E5E-4B82-3105-FB91-7A29C8EB02BA}"/>
+                <a16:creationId xmlns:a16="http://schemas.microsoft.com/office/drawing/2014/main" id="{B270CBA9-874D-16FA-3A4C-83FB47FB12D6}"/>
               </a:ext>
             </a:extLst>
           </p:cNvPr>
@@ -14143,9 +14143,9 @@
           <a:bodyPr/>
           <a:lstStyle/>
           <a:p>
-            <a:fld id="{F163761A-A4E5-4C7D-9728-6F0BC80FAE16}" type="datetimeFigureOut">
+            <a:fld id="{55B34ED4-2611-4754-BC8B-367044EB0C5C}" type="datetimeFigureOut">
               <a:rPr lang="en-US" smtClean="0"/>
-              <a:t>10/3/2026</a:t>
+              <a:t>10/4/2026</a:t>
             </a:fld>
             <a:endParaRPr lang="en-US"/>
           </a:p>
@@ -14185,7 +14185,7 @@
           <a:bodyPr/>
           <a:lstStyle/>
           <a:p>
-            <a:fld id="{4DDE2B9A-5AB6-497C-A8BC-8EC14D6B62BC}" type="slidenum">
+            <a:fld id="{1A1093C2-1C68-42EE-B693-25A933F6CF0F}" type="slidenum">
               <a:rPr lang="en-US" smtClean="0"/>
               <a:t>‹#›</a:t>
             </a:fld>
@@ -14198,7 +14198,7 @@
           <p:cNvPr id="8" name="marker_1">
             <a:extLst>
               <a:ext uri="{FF2B5EF4-FFF2-40B4-BE49-F238E27FC236}">
-                <a16:creationId xmlns:a16="http://schemas.microsoft.com/office/drawing/2014/main" id="{B4B8F14D-CB08-98F0-ECE0-497BCA62C898}"/>
+                <a16:creationId xmlns:a16="http://schemas.microsoft.com/office/drawing/2014/main" id="{E2DE909E-1223-64A7-0FAA-39D0EE45AB1F}"/>
               </a:ext>
             </a:extLst>
           </p:cNvPr>
@@ -14254,7 +14254,7 @@
           <p:cNvPr id="9" name="item_1_title">
             <a:extLst>
               <a:ext uri="{FF2B5EF4-FFF2-40B4-BE49-F238E27FC236}">
-                <a16:creationId xmlns:a16="http://schemas.microsoft.com/office/drawing/2014/main" id="{75132FC2-3993-7A76-0A43-3518BF653D04}"/>
+                <a16:creationId xmlns:a16="http://schemas.microsoft.com/office/drawing/2014/main" id="{D8944413-9C64-6435-E050-987368FB68CF}"/>
               </a:ext>
             </a:extLst>
           </p:cNvPr>
@@ -14307,7 +14307,7 @@
           <p:cNvPr id="10" name="item_1">
             <a:extLst>
               <a:ext uri="{FF2B5EF4-FFF2-40B4-BE49-F238E27FC236}">
-                <a16:creationId xmlns:a16="http://schemas.microsoft.com/office/drawing/2014/main" id="{B7D6AC7E-BA7B-E746-5306-7FAAEE816DAC}"/>
+                <a16:creationId xmlns:a16="http://schemas.microsoft.com/office/drawing/2014/main" id="{F2835E8F-A7AF-C80F-7C76-193B80C5CD28}"/>
               </a:ext>
             </a:extLst>
           </p:cNvPr>
@@ -14355,7 +14355,7 @@
           <p:cNvPr id="11" name="marker_2">
             <a:extLst>
               <a:ext uri="{FF2B5EF4-FFF2-40B4-BE49-F238E27FC236}">
-                <a16:creationId xmlns:a16="http://schemas.microsoft.com/office/drawing/2014/main" id="{1FAD5476-575C-2FD5-6CB7-8A5DD6040BE0}"/>
+                <a16:creationId xmlns:a16="http://schemas.microsoft.com/office/drawing/2014/main" id="{836794F1-6D86-0AEB-F5C3-E6FDAE9C5218}"/>
               </a:ext>
             </a:extLst>
           </p:cNvPr>
@@ -14411,7 +14411,7 @@
           <p:cNvPr id="12" name="item_2_title">
             <a:extLst>
               <a:ext uri="{FF2B5EF4-FFF2-40B4-BE49-F238E27FC236}">
-                <a16:creationId xmlns:a16="http://schemas.microsoft.com/office/drawing/2014/main" id="{A70B9678-8D17-5DA4-43D0-2A214DADB40D}"/>
+                <a16:creationId xmlns:a16="http://schemas.microsoft.com/office/drawing/2014/main" id="{CAFD811F-E11F-7CBC-2217-2CDF97978F5E}"/>
               </a:ext>
             </a:extLst>
           </p:cNvPr>
@@ -14464,7 +14464,7 @@
           <p:cNvPr id="13" name="item_2">
             <a:extLst>
               <a:ext uri="{FF2B5EF4-FFF2-40B4-BE49-F238E27FC236}">
-                <a16:creationId xmlns:a16="http://schemas.microsoft.com/office/drawing/2014/main" id="{DB837B94-4D8A-6A6C-E726-4D898CA09104}"/>
+                <a16:creationId xmlns:a16="http://schemas.microsoft.com/office/drawing/2014/main" id="{386637BB-5477-8730-26BE-42E5FB7C7380}"/>
               </a:ext>
             </a:extLst>
           </p:cNvPr>
@@ -14512,7 +14512,7 @@
           <p:cNvPr id="14" name="source">
             <a:extLst>
               <a:ext uri="{FF2B5EF4-FFF2-40B4-BE49-F238E27FC236}">
-                <a16:creationId xmlns:a16="http://schemas.microsoft.com/office/drawing/2014/main" id="{6E634AE9-C255-BA7E-6067-7796C84D48E1}"/>
+                <a16:creationId xmlns:a16="http://schemas.microsoft.com/office/drawing/2014/main" id="{8D03EC15-7238-BF1B-596B-EF14E62F6367}"/>
               </a:ext>
             </a:extLst>
           </p:cNvPr>
@@ -14567,7 +14567,7 @@
     </p:spTree>
     <p:extLst>
       <p:ext uri="{BB962C8B-B14F-4D97-AF65-F5344CB8AC3E}">
-        <p14:creationId xmlns:p14="http://schemas.microsoft.com/office/powerpoint/2010/main" val="772472911"/>
+        <p14:creationId xmlns:p14="http://schemas.microsoft.com/office/powerpoint/2010/main" val="3716310494"/>
       </p:ext>
     </p:extLst>
   </p:cSld>
@@ -14599,7 +14599,7 @@
           <p:cNvPr id="7" name="creative_background">
             <a:extLst>
               <a:ext uri="{FF2B5EF4-FFF2-40B4-BE49-F238E27FC236}">
-                <a16:creationId xmlns:a16="http://schemas.microsoft.com/office/drawing/2014/main" id="{D65B60EB-D496-4100-1339-8B74D7B1ECC7}"/>
+                <a16:creationId xmlns:a16="http://schemas.microsoft.com/office/drawing/2014/main" id="{FAEDDC71-7796-954D-B2B6-C5A621C872DA}"/>
               </a:ext>
             </a:extLst>
           </p:cNvPr>
@@ -14682,9 +14682,9 @@
           <a:bodyPr/>
           <a:lstStyle/>
           <a:p>
-            <a:fld id="{F163761A-A4E5-4C7D-9728-6F0BC80FAE16}" type="datetimeFigureOut">
+            <a:fld id="{55B34ED4-2611-4754-BC8B-367044EB0C5C}" type="datetimeFigureOut">
               <a:rPr lang="en-US" smtClean="0"/>
-              <a:t>10/3/2026</a:t>
+              <a:t>10/4/2026</a:t>
             </a:fld>
             <a:endParaRPr lang="en-US"/>
           </a:p>
@@ -14724,7 +14724,7 @@
           <a:bodyPr/>
           <a:lstStyle/>
           <a:p>
-            <a:fld id="{4DDE2B9A-5AB6-497C-A8BC-8EC14D6B62BC}" type="slidenum">
+            <a:fld id="{1A1093C2-1C68-42EE-B693-25A933F6CF0F}" type="slidenum">
               <a:rPr lang="en-US" smtClean="0"/>
               <a:t>‹#›</a:t>
             </a:fld>
@@ -14737,7 +14737,7 @@
           <p:cNvPr id="8" name="item_1_title">
             <a:extLst>
               <a:ext uri="{FF2B5EF4-FFF2-40B4-BE49-F238E27FC236}">
-                <a16:creationId xmlns:a16="http://schemas.microsoft.com/office/drawing/2014/main" id="{4606890E-6F7E-7ADC-583F-F394711D75A4}"/>
+                <a16:creationId xmlns:a16="http://schemas.microsoft.com/office/drawing/2014/main" id="{486931D9-2D5B-5047-C2B1-320C57A14D0B}"/>
               </a:ext>
             </a:extLst>
           </p:cNvPr>
@@ -14787,7 +14787,7 @@
           <p:cNvPr id="9" name="item_1">
             <a:extLst>
               <a:ext uri="{FF2B5EF4-FFF2-40B4-BE49-F238E27FC236}">
-                <a16:creationId xmlns:a16="http://schemas.microsoft.com/office/drawing/2014/main" id="{6ABA1FFA-67C9-778A-9C25-F8F6D40C001F}"/>
+                <a16:creationId xmlns:a16="http://schemas.microsoft.com/office/drawing/2014/main" id="{E9CC20D5-D0BE-125D-0F7B-654267D1D71E}"/>
               </a:ext>
             </a:extLst>
           </p:cNvPr>
@@ -14835,7 +14835,7 @@
           <p:cNvPr id="10" name="item_2_title">
             <a:extLst>
               <a:ext uri="{FF2B5EF4-FFF2-40B4-BE49-F238E27FC236}">
-                <a16:creationId xmlns:a16="http://schemas.microsoft.com/office/drawing/2014/main" id="{99819B48-9E27-86BE-D1A3-6085C969B0AD}"/>
+                <a16:creationId xmlns:a16="http://schemas.microsoft.com/office/drawing/2014/main" id="{E31EAB4A-4D24-BA3D-39E5-5D305A43BDA9}"/>
               </a:ext>
             </a:extLst>
           </p:cNvPr>
@@ -14888,7 +14888,7 @@
           <p:cNvPr id="11" name="item_2">
             <a:extLst>
               <a:ext uri="{FF2B5EF4-FFF2-40B4-BE49-F238E27FC236}">
-                <a16:creationId xmlns:a16="http://schemas.microsoft.com/office/drawing/2014/main" id="{EC20DEE1-1CC4-9A6B-E740-3EE91EB4ED8F}"/>
+                <a16:creationId xmlns:a16="http://schemas.microsoft.com/office/drawing/2014/main" id="{FEB648DD-F443-8068-E89F-618353AB4ED1}"/>
               </a:ext>
             </a:extLst>
           </p:cNvPr>
@@ -14936,7 +14936,7 @@
           <p:cNvPr id="12" name="item_3_title">
             <a:extLst>
               <a:ext uri="{FF2B5EF4-FFF2-40B4-BE49-F238E27FC236}">
-                <a16:creationId xmlns:a16="http://schemas.microsoft.com/office/drawing/2014/main" id="{B7DB1A73-E145-D196-1465-039CF89CB8C5}"/>
+                <a16:creationId xmlns:a16="http://schemas.microsoft.com/office/drawing/2014/main" id="{78E16252-1464-6DE8-DB82-C5031BA95444}"/>
               </a:ext>
             </a:extLst>
           </p:cNvPr>
@@ -14989,7 +14989,7 @@
           <p:cNvPr id="13" name="item_3">
             <a:extLst>
               <a:ext uri="{FF2B5EF4-FFF2-40B4-BE49-F238E27FC236}">
-                <a16:creationId xmlns:a16="http://schemas.microsoft.com/office/drawing/2014/main" id="{EBBDBED0-03AF-3206-B85D-84839D18A7F7}"/>
+                <a16:creationId xmlns:a16="http://schemas.microsoft.com/office/drawing/2014/main" id="{572007A2-B531-506D-F278-E30B627C267C}"/>
               </a:ext>
             </a:extLst>
           </p:cNvPr>
@@ -15037,7 +15037,7 @@
           <p:cNvPr id="14" name="item_4_title">
             <a:extLst>
               <a:ext uri="{FF2B5EF4-FFF2-40B4-BE49-F238E27FC236}">
-                <a16:creationId xmlns:a16="http://schemas.microsoft.com/office/drawing/2014/main" id="{ADBDF868-8ECC-0692-29C6-E2375C24498C}"/>
+                <a16:creationId xmlns:a16="http://schemas.microsoft.com/office/drawing/2014/main" id="{B0EC0174-0CE8-8159-1C72-7F2F4EE1FA28}"/>
               </a:ext>
             </a:extLst>
           </p:cNvPr>
@@ -15090,7 +15090,7 @@
           <p:cNvPr id="15" name="item_4">
             <a:extLst>
               <a:ext uri="{FF2B5EF4-FFF2-40B4-BE49-F238E27FC236}">
-                <a16:creationId xmlns:a16="http://schemas.microsoft.com/office/drawing/2014/main" id="{AC5DF92F-F879-C937-7B01-06EE4255C593}"/>
+                <a16:creationId xmlns:a16="http://schemas.microsoft.com/office/drawing/2014/main" id="{8E843174-38E9-6AF1-F739-B3D09986C9B1}"/>
               </a:ext>
             </a:extLst>
           </p:cNvPr>
@@ -15138,7 +15138,7 @@
           <p:cNvPr id="16" name="source">
             <a:extLst>
               <a:ext uri="{FF2B5EF4-FFF2-40B4-BE49-F238E27FC236}">
-                <a16:creationId xmlns:a16="http://schemas.microsoft.com/office/drawing/2014/main" id="{4C4ECF43-9BCC-FE0C-E193-189A57A21ECA}"/>
+                <a16:creationId xmlns:a16="http://schemas.microsoft.com/office/drawing/2014/main" id="{7D5F7892-9093-CE38-31C7-BC147314DFBA}"/>
               </a:ext>
             </a:extLst>
           </p:cNvPr>
@@ -15193,7 +15193,7 @@
     </p:spTree>
     <p:extLst>
       <p:ext uri="{BB962C8B-B14F-4D97-AF65-F5344CB8AC3E}">
-        <p14:creationId xmlns:p14="http://schemas.microsoft.com/office/powerpoint/2010/main" val="839229831"/>
+        <p14:creationId xmlns:p14="http://schemas.microsoft.com/office/powerpoint/2010/main" val="115946669"/>
       </p:ext>
     </p:extLst>
   </p:cSld>
@@ -15225,7 +15225,7 @@
           <p:cNvPr id="7" name="creative_background">
             <a:extLst>
               <a:ext uri="{FF2B5EF4-FFF2-40B4-BE49-F238E27FC236}">
-                <a16:creationId xmlns:a16="http://schemas.microsoft.com/office/drawing/2014/main" id="{46D16182-1521-8DA4-2EF9-CC562C74E50D}"/>
+                <a16:creationId xmlns:a16="http://schemas.microsoft.com/office/drawing/2014/main" id="{966A4D6D-1A16-06D9-EF6B-F8497370B830}"/>
               </a:ext>
             </a:extLst>
           </p:cNvPr>
@@ -15308,9 +15308,9 @@
           <a:bodyPr/>
           <a:lstStyle/>
           <a:p>
-            <a:fld id="{F163761A-A4E5-4C7D-9728-6F0BC80FAE16}" type="datetimeFigureOut">
+            <a:fld id="{55B34ED4-2611-4754-BC8B-367044EB0C5C}" type="datetimeFigureOut">
               <a:rPr lang="en-US" smtClean="0"/>
-              <a:t>10/3/2026</a:t>
+              <a:t>10/4/2026</a:t>
             </a:fld>
             <a:endParaRPr lang="en-US"/>
           </a:p>
@@ -15350,7 +15350,7 @@
           <a:bodyPr/>
           <a:lstStyle/>
           <a:p>
-            <a:fld id="{4DDE2B9A-5AB6-497C-A8BC-8EC14D6B62BC}" type="slidenum">
+            <a:fld id="{1A1093C2-1C68-42EE-B693-25A933F6CF0F}" type="slidenum">
               <a:rPr lang="en-US" smtClean="0"/>
               <a:t>‹#›</a:t>
             </a:fld>
@@ -15363,7 +15363,7 @@
           <p:cNvPr id="8" name="item_1_title">
             <a:extLst>
               <a:ext uri="{FF2B5EF4-FFF2-40B4-BE49-F238E27FC236}">
-                <a16:creationId xmlns:a16="http://schemas.microsoft.com/office/drawing/2014/main" id="{2D304003-CBB2-EC5A-4486-FD3E255BEB66}"/>
+                <a16:creationId xmlns:a16="http://schemas.microsoft.com/office/drawing/2014/main" id="{017EA3A5-008E-44BC-2C5F-3C6154D38184}"/>
               </a:ext>
             </a:extLst>
           </p:cNvPr>
@@ -15413,7 +15413,7 @@
           <p:cNvPr id="9" name="item_1">
             <a:extLst>
               <a:ext uri="{FF2B5EF4-FFF2-40B4-BE49-F238E27FC236}">
-                <a16:creationId xmlns:a16="http://schemas.microsoft.com/office/drawing/2014/main" id="{1C6A2519-BA11-7A53-576B-E45386013451}"/>
+                <a16:creationId xmlns:a16="http://schemas.microsoft.com/office/drawing/2014/main" id="{8F4F6490-4D52-6AD2-FE69-62C8B665D6EE}"/>
               </a:ext>
             </a:extLst>
           </p:cNvPr>
@@ -15461,7 +15461,7 @@
           <p:cNvPr id="10" name="item_2_title">
             <a:extLst>
               <a:ext uri="{FF2B5EF4-FFF2-40B4-BE49-F238E27FC236}">
-                <a16:creationId xmlns:a16="http://schemas.microsoft.com/office/drawing/2014/main" id="{0BD45133-F63B-D306-69C1-26DDD5A7B827}"/>
+                <a16:creationId xmlns:a16="http://schemas.microsoft.com/office/drawing/2014/main" id="{9E99EBCC-AA24-7CFA-AEC0-3064211E8B15}"/>
               </a:ext>
             </a:extLst>
           </p:cNvPr>
@@ -15514,7 +15514,7 @@
           <p:cNvPr id="11" name="item_2">
             <a:extLst>
               <a:ext uri="{FF2B5EF4-FFF2-40B4-BE49-F238E27FC236}">
-                <a16:creationId xmlns:a16="http://schemas.microsoft.com/office/drawing/2014/main" id="{EDF5ECF5-EEAA-8584-A062-47DE1C233E0B}"/>
+                <a16:creationId xmlns:a16="http://schemas.microsoft.com/office/drawing/2014/main" id="{EEAAFD4D-72B2-2A52-5B56-36106642EAB5}"/>
               </a:ext>
             </a:extLst>
           </p:cNvPr>
@@ -15562,7 +15562,7 @@
           <p:cNvPr id="12" name="item_3_title">
             <a:extLst>
               <a:ext uri="{FF2B5EF4-FFF2-40B4-BE49-F238E27FC236}">
-                <a16:creationId xmlns:a16="http://schemas.microsoft.com/office/drawing/2014/main" id="{FD24CAD9-89D7-5E24-C764-02FDE37E9F5A}"/>
+                <a16:creationId xmlns:a16="http://schemas.microsoft.com/office/drawing/2014/main" id="{33E080FE-1CC3-83A6-E7D6-EE75D77A6EDD}"/>
               </a:ext>
             </a:extLst>
           </p:cNvPr>
@@ -15615,7 +15615,7 @@
           <p:cNvPr id="13" name="item_3">
             <a:extLst>
               <a:ext uri="{FF2B5EF4-FFF2-40B4-BE49-F238E27FC236}">
-                <a16:creationId xmlns:a16="http://schemas.microsoft.com/office/drawing/2014/main" id="{67208888-59E2-DD10-4F6A-91C6A798018F}"/>
+                <a16:creationId xmlns:a16="http://schemas.microsoft.com/office/drawing/2014/main" id="{FCE13595-5F86-52F4-F69C-A7ED8ABC13D2}"/>
               </a:ext>
             </a:extLst>
           </p:cNvPr>
@@ -15663,7 +15663,7 @@
           <p:cNvPr id="14" name="item_4_title">
             <a:extLst>
               <a:ext uri="{FF2B5EF4-FFF2-40B4-BE49-F238E27FC236}">
-                <a16:creationId xmlns:a16="http://schemas.microsoft.com/office/drawing/2014/main" id="{BEB1C6F7-8EA2-C830-F2D8-B82C8CF2025A}"/>
+                <a16:creationId xmlns:a16="http://schemas.microsoft.com/office/drawing/2014/main" id="{544B4849-FE02-1B2D-C21A-5673E60ED31A}"/>
               </a:ext>
             </a:extLst>
           </p:cNvPr>
@@ -15716,7 +15716,7 @@
           <p:cNvPr id="15" name="item_4">
             <a:extLst>
               <a:ext uri="{FF2B5EF4-FFF2-40B4-BE49-F238E27FC236}">
-                <a16:creationId xmlns:a16="http://schemas.microsoft.com/office/drawing/2014/main" id="{00DBEA05-2158-5783-9532-A7D944989A61}"/>
+                <a16:creationId xmlns:a16="http://schemas.microsoft.com/office/drawing/2014/main" id="{01A2A4D7-C694-B4FD-173E-184A102B6766}"/>
               </a:ext>
             </a:extLst>
           </p:cNvPr>
@@ -15764,7 +15764,7 @@
           <p:cNvPr id="16" name="source">
             <a:extLst>
               <a:ext uri="{FF2B5EF4-FFF2-40B4-BE49-F238E27FC236}">
-                <a16:creationId xmlns:a16="http://schemas.microsoft.com/office/drawing/2014/main" id="{9406C010-4F27-2F0E-5E25-1A553FE459B5}"/>
+                <a16:creationId xmlns:a16="http://schemas.microsoft.com/office/drawing/2014/main" id="{E082824B-2A22-958B-FFFA-F3C4A5179B78}"/>
               </a:ext>
             </a:extLst>
           </p:cNvPr>
@@ -15819,7 +15819,7 @@
     </p:spTree>
     <p:extLst>
       <p:ext uri="{BB962C8B-B14F-4D97-AF65-F5344CB8AC3E}">
-        <p14:creationId xmlns:p14="http://schemas.microsoft.com/office/powerpoint/2010/main" val="182715788"/>
+        <p14:creationId xmlns:p14="http://schemas.microsoft.com/office/powerpoint/2010/main" val="4079131636"/>
       </p:ext>
     </p:extLst>
   </p:cSld>
@@ -15851,7 +15851,7 @@
           <p:cNvPr id="7" name="creative_background">
             <a:extLst>
               <a:ext uri="{FF2B5EF4-FFF2-40B4-BE49-F238E27FC236}">
-                <a16:creationId xmlns:a16="http://schemas.microsoft.com/office/drawing/2014/main" id="{DE0C081B-A90A-C801-6C38-01DD739256B7}"/>
+                <a16:creationId xmlns:a16="http://schemas.microsoft.com/office/drawing/2014/main" id="{3568444D-E041-3D59-AF7B-3F45A4DB02A8}"/>
               </a:ext>
             </a:extLst>
           </p:cNvPr>
@@ -15934,9 +15934,9 @@
           <a:bodyPr/>
           <a:lstStyle/>
           <a:p>
-            <a:fld id="{F163761A-A4E5-4C7D-9728-6F0BC80FAE16}" type="datetimeFigureOut">
+            <a:fld id="{55B34ED4-2611-4754-BC8B-367044EB0C5C}" type="datetimeFigureOut">
               <a:rPr lang="en-US" smtClean="0"/>
-              <a:t>10/3/2026</a:t>
+              <a:t>10/4/2026</a:t>
             </a:fld>
             <a:endParaRPr lang="en-US"/>
           </a:p>
@@ -15976,7 +15976,7 @@
           <a:bodyPr/>
           <a:lstStyle/>
           <a:p>
-            <a:fld id="{4DDE2B9A-5AB6-497C-A8BC-8EC14D6B62BC}" type="slidenum">
+            <a:fld id="{1A1093C2-1C68-42EE-B693-25A933F6CF0F}" type="slidenum">
               <a:rPr lang="en-US" smtClean="0"/>
               <a:t>‹#›</a:t>
             </a:fld>
@@ -15989,7 +15989,7 @@
           <p:cNvPr id="8" name="kpi_value_1">
             <a:extLst>
               <a:ext uri="{FF2B5EF4-FFF2-40B4-BE49-F238E27FC236}">
-                <a16:creationId xmlns:a16="http://schemas.microsoft.com/office/drawing/2014/main" id="{CB77B2C9-9479-736D-149B-2CCA3C15C72E}"/>
+                <a16:creationId xmlns:a16="http://schemas.microsoft.com/office/drawing/2014/main" id="{5C6FE9DD-A5E7-31EB-3BF3-2CB46EA19D24}"/>
               </a:ext>
             </a:extLst>
           </p:cNvPr>
@@ -16039,7 +16039,7 @@
           <p:cNvPr id="9" name="kpi_label_1">
             <a:extLst>
               <a:ext uri="{FF2B5EF4-FFF2-40B4-BE49-F238E27FC236}">
-                <a16:creationId xmlns:a16="http://schemas.microsoft.com/office/drawing/2014/main" id="{05BE147D-4C8A-B0ED-51B1-411BA72336E2}"/>
+                <a16:creationId xmlns:a16="http://schemas.microsoft.com/office/drawing/2014/main" id="{12E6D4E8-01ED-B849-68F8-36D7C94CABAF}"/>
               </a:ext>
             </a:extLst>
           </p:cNvPr>
@@ -16087,7 +16087,7 @@
           <p:cNvPr id="10" name="quote">
             <a:extLst>
               <a:ext uri="{FF2B5EF4-FFF2-40B4-BE49-F238E27FC236}">
-                <a16:creationId xmlns:a16="http://schemas.microsoft.com/office/drawing/2014/main" id="{764EB69D-3915-72E7-3F2A-C619C985E40B}"/>
+                <a16:creationId xmlns:a16="http://schemas.microsoft.com/office/drawing/2014/main" id="{0C414006-11B7-20FD-1070-09B5F0C16639}"/>
               </a:ext>
             </a:extLst>
           </p:cNvPr>
@@ -16137,7 +16137,7 @@
           <p:cNvPr id="11" name="attribution">
             <a:extLst>
               <a:ext uri="{FF2B5EF4-FFF2-40B4-BE49-F238E27FC236}">
-                <a16:creationId xmlns:a16="http://schemas.microsoft.com/office/drawing/2014/main" id="{A1529C32-8357-9039-F017-06E621C93779}"/>
+                <a16:creationId xmlns:a16="http://schemas.microsoft.com/office/drawing/2014/main" id="{9BDE4159-3C58-993E-EFD5-C07765EB1F9D}"/>
               </a:ext>
             </a:extLst>
           </p:cNvPr>
@@ -16185,7 +16185,7 @@
           <p:cNvPr id="12" name="item_1_title">
             <a:extLst>
               <a:ext uri="{FF2B5EF4-FFF2-40B4-BE49-F238E27FC236}">
-                <a16:creationId xmlns:a16="http://schemas.microsoft.com/office/drawing/2014/main" id="{F90F637D-0684-1680-5A28-9FD5B8E5CA16}"/>
+                <a16:creationId xmlns:a16="http://schemas.microsoft.com/office/drawing/2014/main" id="{53D84DBB-E1EC-93DD-7541-A8EA8C8D0396}"/>
               </a:ext>
             </a:extLst>
           </p:cNvPr>
@@ -16238,7 +16238,7 @@
           <p:cNvPr id="13" name="item_1">
             <a:extLst>
               <a:ext uri="{FF2B5EF4-FFF2-40B4-BE49-F238E27FC236}">
-                <a16:creationId xmlns:a16="http://schemas.microsoft.com/office/drawing/2014/main" id="{136EDCB0-ACDC-A800-B034-CB89AD8E2138}"/>
+                <a16:creationId xmlns:a16="http://schemas.microsoft.com/office/drawing/2014/main" id="{AF183AAE-41F8-1EED-158A-0902062E1A03}"/>
               </a:ext>
             </a:extLst>
           </p:cNvPr>
@@ -16286,7 +16286,7 @@
           <p:cNvPr id="14" name="source">
             <a:extLst>
               <a:ext uri="{FF2B5EF4-FFF2-40B4-BE49-F238E27FC236}">
-                <a16:creationId xmlns:a16="http://schemas.microsoft.com/office/drawing/2014/main" id="{7182793D-03B0-808C-1355-7D13D3BE3260}"/>
+                <a16:creationId xmlns:a16="http://schemas.microsoft.com/office/drawing/2014/main" id="{2D8120FB-D5CA-8AD9-53B3-257251C461C5}"/>
               </a:ext>
             </a:extLst>
           </p:cNvPr>
@@ -16341,7 +16341,7 @@
     </p:spTree>
     <p:extLst>
       <p:ext uri="{BB962C8B-B14F-4D97-AF65-F5344CB8AC3E}">
-        <p14:creationId xmlns:p14="http://schemas.microsoft.com/office/powerpoint/2010/main" val="1227762322"/>
+        <p14:creationId xmlns:p14="http://schemas.microsoft.com/office/powerpoint/2010/main" val="4247097809"/>
       </p:ext>
     </p:extLst>
   </p:cSld>
@@ -16373,7 +16373,7 @@
           <p:cNvPr id="7" name="creative_background">
             <a:extLst>
               <a:ext uri="{FF2B5EF4-FFF2-40B4-BE49-F238E27FC236}">
-                <a16:creationId xmlns:a16="http://schemas.microsoft.com/office/drawing/2014/main" id="{7C1F8195-C4CE-0228-8BCC-A762F322469B}"/>
+                <a16:creationId xmlns:a16="http://schemas.microsoft.com/office/drawing/2014/main" id="{F8F3D9FB-43E4-AF35-BC65-2552FD929603}"/>
               </a:ext>
             </a:extLst>
           </p:cNvPr>
@@ -16456,9 +16456,9 @@
           <a:bodyPr/>
           <a:lstStyle/>
           <a:p>
-            <a:fld id="{F163761A-A4E5-4C7D-9728-6F0BC80FAE16}" type="datetimeFigureOut">
+            <a:fld id="{55B34ED4-2611-4754-BC8B-367044EB0C5C}" type="datetimeFigureOut">
               <a:rPr lang="en-US" smtClean="0"/>
-              <a:t>10/3/2026</a:t>
+              <a:t>10/4/2026</a:t>
             </a:fld>
             <a:endParaRPr lang="en-US"/>
           </a:p>
@@ -16498,7 +16498,7 @@
           <a:bodyPr/>
           <a:lstStyle/>
           <a:p>
-            <a:fld id="{4DDE2B9A-5AB6-497C-A8BC-8EC14D6B62BC}" type="slidenum">
+            <a:fld id="{1A1093C2-1C68-42EE-B693-25A933F6CF0F}" type="slidenum">
               <a:rPr lang="en-US" smtClean="0"/>
               <a:t>‹#›</a:t>
             </a:fld>
@@ -16511,7 +16511,7 @@
           <p:cNvPr id="8" name="item_1_title">
             <a:extLst>
               <a:ext uri="{FF2B5EF4-FFF2-40B4-BE49-F238E27FC236}">
-                <a16:creationId xmlns:a16="http://schemas.microsoft.com/office/drawing/2014/main" id="{E1986508-EE45-5155-DF78-3F1276AE7FE1}"/>
+                <a16:creationId xmlns:a16="http://schemas.microsoft.com/office/drawing/2014/main" id="{0617B98C-868E-1170-1D25-0733FA09579D}"/>
               </a:ext>
             </a:extLst>
           </p:cNvPr>
@@ -16561,7 +16561,7 @@
           <p:cNvPr id="9" name="item_1">
             <a:extLst>
               <a:ext uri="{FF2B5EF4-FFF2-40B4-BE49-F238E27FC236}">
-                <a16:creationId xmlns:a16="http://schemas.microsoft.com/office/drawing/2014/main" id="{295881D7-DAF9-39F4-FB0A-15D305F467C7}"/>
+                <a16:creationId xmlns:a16="http://schemas.microsoft.com/office/drawing/2014/main" id="{2BDEA730-61E8-09DC-D798-FD03B3BF692F}"/>
               </a:ext>
             </a:extLst>
           </p:cNvPr>
@@ -16609,7 +16609,7 @@
           <p:cNvPr id="10" name="item_2_title">
             <a:extLst>
               <a:ext uri="{FF2B5EF4-FFF2-40B4-BE49-F238E27FC236}">
-                <a16:creationId xmlns:a16="http://schemas.microsoft.com/office/drawing/2014/main" id="{0484604C-5B50-35E8-D5E5-8A0AAEF5EDF1}"/>
+                <a16:creationId xmlns:a16="http://schemas.microsoft.com/office/drawing/2014/main" id="{3C1E8A36-8776-D34A-A7B9-C5CCF9E6742D}"/>
               </a:ext>
             </a:extLst>
           </p:cNvPr>
@@ -16662,7 +16662,7 @@
           <p:cNvPr id="11" name="item_2">
             <a:extLst>
               <a:ext uri="{FF2B5EF4-FFF2-40B4-BE49-F238E27FC236}">
-                <a16:creationId xmlns:a16="http://schemas.microsoft.com/office/drawing/2014/main" id="{35DE6D12-7B02-8369-D379-3E4384D39D90}"/>
+                <a16:creationId xmlns:a16="http://schemas.microsoft.com/office/drawing/2014/main" id="{2A7C1E97-FE8A-A012-FBC9-7FF29C691EF2}"/>
               </a:ext>
             </a:extLst>
           </p:cNvPr>
@@ -16710,7 +16710,7 @@
           <p:cNvPr id="12" name="item_3_title">
             <a:extLst>
               <a:ext uri="{FF2B5EF4-FFF2-40B4-BE49-F238E27FC236}">
-                <a16:creationId xmlns:a16="http://schemas.microsoft.com/office/drawing/2014/main" id="{1747E4D6-7937-2CC2-275C-DEB6B8028288}"/>
+                <a16:creationId xmlns:a16="http://schemas.microsoft.com/office/drawing/2014/main" id="{579821B5-9B32-8AF8-74B1-A3ED96CC5913}"/>
               </a:ext>
             </a:extLst>
           </p:cNvPr>
@@ -16763,7 +16763,7 @@
           <p:cNvPr id="13" name="item_3">
             <a:extLst>
               <a:ext uri="{FF2B5EF4-FFF2-40B4-BE49-F238E27FC236}">
-                <a16:creationId xmlns:a16="http://schemas.microsoft.com/office/drawing/2014/main" id="{4E7F5031-F435-6123-5561-1BC882E1E971}"/>
+                <a16:creationId xmlns:a16="http://schemas.microsoft.com/office/drawing/2014/main" id="{60BF71CD-44BD-9730-8837-17CF256B594B}"/>
               </a:ext>
             </a:extLst>
           </p:cNvPr>
@@ -16811,7 +16811,7 @@
           <p:cNvPr id="14" name="source">
             <a:extLst>
               <a:ext uri="{FF2B5EF4-FFF2-40B4-BE49-F238E27FC236}">
-                <a16:creationId xmlns:a16="http://schemas.microsoft.com/office/drawing/2014/main" id="{11FF80C7-2947-C30E-0961-068D4009ED2C}"/>
+                <a16:creationId xmlns:a16="http://schemas.microsoft.com/office/drawing/2014/main" id="{CC0B8C22-C50C-00F2-A8B4-EEADA44B7C2F}"/>
               </a:ext>
             </a:extLst>
           </p:cNvPr>
@@ -16866,7 +16866,7 @@
     </p:spTree>
     <p:extLst>
       <p:ext uri="{BB962C8B-B14F-4D97-AF65-F5344CB8AC3E}">
-        <p14:creationId xmlns:p14="http://schemas.microsoft.com/office/powerpoint/2010/main" val="2698191588"/>
+        <p14:creationId xmlns:p14="http://schemas.microsoft.com/office/powerpoint/2010/main" val="1045349368"/>
       </p:ext>
     </p:extLst>
   </p:cSld>
@@ -16898,7 +16898,7 @@
           <p:cNvPr id="7" name="creative_background">
             <a:extLst>
               <a:ext uri="{FF2B5EF4-FFF2-40B4-BE49-F238E27FC236}">
-                <a16:creationId xmlns:a16="http://schemas.microsoft.com/office/drawing/2014/main" id="{B21ACCD4-770C-D3F3-0BF8-745BED38B691}"/>
+                <a16:creationId xmlns:a16="http://schemas.microsoft.com/office/drawing/2014/main" id="{1C01A485-9D4E-5F6A-813F-D9BD368D9811}"/>
               </a:ext>
             </a:extLst>
           </p:cNvPr>
@@ -16981,9 +16981,9 @@
           <a:bodyPr/>
           <a:lstStyle/>
           <a:p>
-            <a:fld id="{F163761A-A4E5-4C7D-9728-6F0BC80FAE16}" type="datetimeFigureOut">
+            <a:fld id="{55B34ED4-2611-4754-BC8B-367044EB0C5C}" type="datetimeFigureOut">
               <a:rPr lang="en-US" smtClean="0"/>
-              <a:t>10/3/2026</a:t>
+              <a:t>10/4/2026</a:t>
             </a:fld>
             <a:endParaRPr lang="en-US"/>
           </a:p>
@@ -17023,7 +17023,7 @@
           <a:bodyPr/>
           <a:lstStyle/>
           <a:p>
-            <a:fld id="{4DDE2B9A-5AB6-497C-A8BC-8EC14D6B62BC}" type="slidenum">
+            <a:fld id="{1A1093C2-1C68-42EE-B693-25A933F6CF0F}" type="slidenum">
               <a:rPr lang="en-US" smtClean="0"/>
               <a:t>‹#›</a:t>
             </a:fld>
@@ -17036,7 +17036,7 @@
           <p:cNvPr id="8" name="marker_1">
             <a:extLst>
               <a:ext uri="{FF2B5EF4-FFF2-40B4-BE49-F238E27FC236}">
-                <a16:creationId xmlns:a16="http://schemas.microsoft.com/office/drawing/2014/main" id="{49CBD5F4-3367-7D00-F50B-C62CED494984}"/>
+                <a16:creationId xmlns:a16="http://schemas.microsoft.com/office/drawing/2014/main" id="{EA026064-F670-A542-FA51-4E7A45ED8909}"/>
               </a:ext>
             </a:extLst>
           </p:cNvPr>
@@ -17092,7 +17092,7 @@
           <p:cNvPr id="9" name="item_1_title">
             <a:extLst>
               <a:ext uri="{FF2B5EF4-FFF2-40B4-BE49-F238E27FC236}">
-                <a16:creationId xmlns:a16="http://schemas.microsoft.com/office/drawing/2014/main" id="{44E11F1B-53FD-36AF-0D13-45BD09DFB2AB}"/>
+                <a16:creationId xmlns:a16="http://schemas.microsoft.com/office/drawing/2014/main" id="{7785A3C7-01DC-50FA-AACA-E25EDDFD0D06}"/>
               </a:ext>
             </a:extLst>
           </p:cNvPr>
@@ -17145,7 +17145,7 @@
           <p:cNvPr id="10" name="item_1">
             <a:extLst>
               <a:ext uri="{FF2B5EF4-FFF2-40B4-BE49-F238E27FC236}">
-                <a16:creationId xmlns:a16="http://schemas.microsoft.com/office/drawing/2014/main" id="{13049A69-FF66-B5D7-D3C4-0B7A87E05E4E}"/>
+                <a16:creationId xmlns:a16="http://schemas.microsoft.com/office/drawing/2014/main" id="{90AD3CF1-AD8C-591F-7197-11D01A43016B}"/>
               </a:ext>
             </a:extLst>
           </p:cNvPr>
@@ -17193,7 +17193,7 @@
           <p:cNvPr id="11" name="marker_2">
             <a:extLst>
               <a:ext uri="{FF2B5EF4-FFF2-40B4-BE49-F238E27FC236}">
-                <a16:creationId xmlns:a16="http://schemas.microsoft.com/office/drawing/2014/main" id="{B5920BA4-E76C-81C7-770E-D0924916C1CA}"/>
+                <a16:creationId xmlns:a16="http://schemas.microsoft.com/office/drawing/2014/main" id="{AC362AC8-CFA6-C1C8-239B-276666374E1D}"/>
               </a:ext>
             </a:extLst>
           </p:cNvPr>
@@ -17249,7 +17249,7 @@
           <p:cNvPr id="12" name="item_2_title">
             <a:extLst>
               <a:ext uri="{FF2B5EF4-FFF2-40B4-BE49-F238E27FC236}">
-                <a16:creationId xmlns:a16="http://schemas.microsoft.com/office/drawing/2014/main" id="{42AFA3A2-5281-6A4A-57DD-A76583DB732D}"/>
+                <a16:creationId xmlns:a16="http://schemas.microsoft.com/office/drawing/2014/main" id="{14409400-E9D9-BFF2-BE6E-3CB6D6F8801A}"/>
               </a:ext>
             </a:extLst>
           </p:cNvPr>
@@ -17302,7 +17302,7 @@
           <p:cNvPr id="13" name="item_2">
             <a:extLst>
               <a:ext uri="{FF2B5EF4-FFF2-40B4-BE49-F238E27FC236}">
-                <a16:creationId xmlns:a16="http://schemas.microsoft.com/office/drawing/2014/main" id="{B76DD944-525A-0E09-9F00-9E13E186F0EB}"/>
+                <a16:creationId xmlns:a16="http://schemas.microsoft.com/office/drawing/2014/main" id="{24C30CCA-7D2C-65EF-FD01-2BEC873C501B}"/>
               </a:ext>
             </a:extLst>
           </p:cNvPr>
@@ -17350,7 +17350,7 @@
           <p:cNvPr id="14" name="source">
             <a:extLst>
               <a:ext uri="{FF2B5EF4-FFF2-40B4-BE49-F238E27FC236}">
-                <a16:creationId xmlns:a16="http://schemas.microsoft.com/office/drawing/2014/main" id="{573D97CB-1502-1271-ACF7-4F3A9F46BFB8}"/>
+                <a16:creationId xmlns:a16="http://schemas.microsoft.com/office/drawing/2014/main" id="{59D0EC0F-EC99-93A5-A329-EA4D52BCD6F7}"/>
               </a:ext>
             </a:extLst>
           </p:cNvPr>
@@ -17405,7 +17405,7 @@
     </p:spTree>
     <p:extLst>
       <p:ext uri="{BB962C8B-B14F-4D97-AF65-F5344CB8AC3E}">
-        <p14:creationId xmlns:p14="http://schemas.microsoft.com/office/powerpoint/2010/main" val="1863644360"/>
+        <p14:creationId xmlns:p14="http://schemas.microsoft.com/office/powerpoint/2010/main" val="2632452819"/>
       </p:ext>
     </p:extLst>
   </p:cSld>
@@ -17437,7 +17437,7 @@
           <p:cNvPr id="7" name="creative_background">
             <a:extLst>
               <a:ext uri="{FF2B5EF4-FFF2-40B4-BE49-F238E27FC236}">
-                <a16:creationId xmlns:a16="http://schemas.microsoft.com/office/drawing/2014/main" id="{48E39F7C-E6BF-3486-2377-D327E901A598}"/>
+                <a16:creationId xmlns:a16="http://schemas.microsoft.com/office/drawing/2014/main" id="{E5E397C6-0E42-870F-C650-80D659BAB0F6}"/>
               </a:ext>
             </a:extLst>
           </p:cNvPr>
@@ -17520,9 +17520,9 @@
           <a:bodyPr/>
           <a:lstStyle/>
           <a:p>
-            <a:fld id="{F163761A-A4E5-4C7D-9728-6F0BC80FAE16}" type="datetimeFigureOut">
+            <a:fld id="{55B34ED4-2611-4754-BC8B-367044EB0C5C}" type="datetimeFigureOut">
               <a:rPr lang="en-US" smtClean="0"/>
-              <a:t>10/3/2026</a:t>
+              <a:t>10/4/2026</a:t>
             </a:fld>
             <a:endParaRPr lang="en-US"/>
           </a:p>
@@ -17562,7 +17562,7 @@
           <a:bodyPr/>
           <a:lstStyle/>
           <a:p>
-            <a:fld id="{4DDE2B9A-5AB6-497C-A8BC-8EC14D6B62BC}" type="slidenum">
+            <a:fld id="{1A1093C2-1C68-42EE-B693-25A933F6CF0F}" type="slidenum">
               <a:rPr lang="en-US" smtClean="0"/>
               <a:t>‹#›</a:t>
             </a:fld>
@@ -17575,7 +17575,7 @@
           <p:cNvPr id="8" name="kpi_value_1">
             <a:extLst>
               <a:ext uri="{FF2B5EF4-FFF2-40B4-BE49-F238E27FC236}">
-                <a16:creationId xmlns:a16="http://schemas.microsoft.com/office/drawing/2014/main" id="{82BF1548-EA41-421E-F391-8900626AF235}"/>
+                <a16:creationId xmlns:a16="http://schemas.microsoft.com/office/drawing/2014/main" id="{10607720-8972-8D9E-9032-055229443E5B}"/>
               </a:ext>
             </a:extLst>
           </p:cNvPr>
@@ -17625,7 +17625,7 @@
           <p:cNvPr id="9" name="kpi_label_1">
             <a:extLst>
               <a:ext uri="{FF2B5EF4-FFF2-40B4-BE49-F238E27FC236}">
-                <a16:creationId xmlns:a16="http://schemas.microsoft.com/office/drawing/2014/main" id="{1D47BCD6-1193-3E7C-E187-2F6B3B61D199}"/>
+                <a16:creationId xmlns:a16="http://schemas.microsoft.com/office/drawing/2014/main" id="{E1F5ECE1-609D-E2C3-0C4A-320CA944D93A}"/>
               </a:ext>
             </a:extLst>
           </p:cNvPr>
@@ -17673,7 +17673,7 @@
           <p:cNvPr id="10" name="quote">
             <a:extLst>
               <a:ext uri="{FF2B5EF4-FFF2-40B4-BE49-F238E27FC236}">
-                <a16:creationId xmlns:a16="http://schemas.microsoft.com/office/drawing/2014/main" id="{DE06D7DB-03C4-99A2-3E68-3BB8ACA5B50B}"/>
+                <a16:creationId xmlns:a16="http://schemas.microsoft.com/office/drawing/2014/main" id="{4B6A8EFB-F3D7-E90C-E318-CC0686DA5D57}"/>
               </a:ext>
             </a:extLst>
           </p:cNvPr>
@@ -17723,7 +17723,7 @@
           <p:cNvPr id="11" name="attribution">
             <a:extLst>
               <a:ext uri="{FF2B5EF4-FFF2-40B4-BE49-F238E27FC236}">
-                <a16:creationId xmlns:a16="http://schemas.microsoft.com/office/drawing/2014/main" id="{594AB0EC-8340-31E9-593F-320A6AECB043}"/>
+                <a16:creationId xmlns:a16="http://schemas.microsoft.com/office/drawing/2014/main" id="{94D01C82-3363-2643-01E0-341CF36E4D38}"/>
               </a:ext>
             </a:extLst>
           </p:cNvPr>
@@ -17771,7 +17771,7 @@
           <p:cNvPr id="12" name="item_1_title">
             <a:extLst>
               <a:ext uri="{FF2B5EF4-FFF2-40B4-BE49-F238E27FC236}">
-                <a16:creationId xmlns:a16="http://schemas.microsoft.com/office/drawing/2014/main" id="{64DC1073-E343-32B1-503C-E181DD48D958}"/>
+                <a16:creationId xmlns:a16="http://schemas.microsoft.com/office/drawing/2014/main" id="{056753AD-769A-BBC5-A4E1-5F6D4932C16B}"/>
               </a:ext>
             </a:extLst>
           </p:cNvPr>
@@ -17824,7 +17824,7 @@
           <p:cNvPr id="13" name="item_1">
             <a:extLst>
               <a:ext uri="{FF2B5EF4-FFF2-40B4-BE49-F238E27FC236}">
-                <a16:creationId xmlns:a16="http://schemas.microsoft.com/office/drawing/2014/main" id="{2EF5B381-5B3A-2632-A364-06FBCFC7337E}"/>
+                <a16:creationId xmlns:a16="http://schemas.microsoft.com/office/drawing/2014/main" id="{5E022459-8DF2-AA57-E878-9A864E9A646B}"/>
               </a:ext>
             </a:extLst>
           </p:cNvPr>
@@ -17872,7 +17872,7 @@
           <p:cNvPr id="14" name="source">
             <a:extLst>
               <a:ext uri="{FF2B5EF4-FFF2-40B4-BE49-F238E27FC236}">
-                <a16:creationId xmlns:a16="http://schemas.microsoft.com/office/drawing/2014/main" id="{DB26FF15-44C2-FA64-35F2-AA6382AA3593}"/>
+                <a16:creationId xmlns:a16="http://schemas.microsoft.com/office/drawing/2014/main" id="{52F8DB1A-33A4-34D0-65F1-DA4B58E3A3D2}"/>
               </a:ext>
             </a:extLst>
           </p:cNvPr>
@@ -17927,7 +17927,7 @@
     </p:spTree>
     <p:extLst>
       <p:ext uri="{BB962C8B-B14F-4D97-AF65-F5344CB8AC3E}">
-        <p14:creationId xmlns:p14="http://schemas.microsoft.com/office/powerpoint/2010/main" val="313349238"/>
+        <p14:creationId xmlns:p14="http://schemas.microsoft.com/office/powerpoint/2010/main" val="3501513139"/>
       </p:ext>
     </p:extLst>
   </p:cSld>
@@ -17959,7 +17959,7 @@
           <p:cNvPr id="7" name="creative_background">
             <a:extLst>
               <a:ext uri="{FF2B5EF4-FFF2-40B4-BE49-F238E27FC236}">
-                <a16:creationId xmlns:a16="http://schemas.microsoft.com/office/drawing/2014/main" id="{6D69E0AA-5832-DCB0-6926-B3DEF1C20B8F}"/>
+                <a16:creationId xmlns:a16="http://schemas.microsoft.com/office/drawing/2014/main" id="{39999713-8BB1-237D-E99D-76013A3E9E2C}"/>
               </a:ext>
             </a:extLst>
           </p:cNvPr>
@@ -18042,9 +18042,9 @@
           <a:bodyPr/>
           <a:lstStyle/>
           <a:p>
-            <a:fld id="{F163761A-A4E5-4C7D-9728-6F0BC80FAE16}" type="datetimeFigureOut">
+            <a:fld id="{55B34ED4-2611-4754-BC8B-367044EB0C5C}" type="datetimeFigureOut">
               <a:rPr lang="en-US" smtClean="0"/>
-              <a:t>10/3/2026</a:t>
+              <a:t>10/4/2026</a:t>
             </a:fld>
             <a:endParaRPr lang="en-US"/>
           </a:p>
@@ -18084,7 +18084,7 @@
           <a:bodyPr/>
           <a:lstStyle/>
           <a:p>
-            <a:fld id="{4DDE2B9A-5AB6-497C-A8BC-8EC14D6B62BC}" type="slidenum">
+            <a:fld id="{1A1093C2-1C68-42EE-B693-25A933F6CF0F}" type="slidenum">
               <a:rPr lang="en-US" smtClean="0"/>
               <a:t>‹#›</a:t>
             </a:fld>
@@ -18097,7 +18097,7 @@
           <p:cNvPr id="8" name="marker_1">
             <a:extLst>
               <a:ext uri="{FF2B5EF4-FFF2-40B4-BE49-F238E27FC236}">
-                <a16:creationId xmlns:a16="http://schemas.microsoft.com/office/drawing/2014/main" id="{2DBF9584-EA1F-5A0C-2226-991AFFB3EAC6}"/>
+                <a16:creationId xmlns:a16="http://schemas.microsoft.com/office/drawing/2014/main" id="{E7233ECF-510A-EE66-DDDF-C2F775D7C14C}"/>
               </a:ext>
             </a:extLst>
           </p:cNvPr>
@@ -18153,7 +18153,7 @@
           <p:cNvPr id="9" name="item_1">
             <a:extLst>
               <a:ext uri="{FF2B5EF4-FFF2-40B4-BE49-F238E27FC236}">
-                <a16:creationId xmlns:a16="http://schemas.microsoft.com/office/drawing/2014/main" id="{BDD53CFF-78EB-CB11-CE6A-FB923B926F69}"/>
+                <a16:creationId xmlns:a16="http://schemas.microsoft.com/office/drawing/2014/main" id="{4A053442-9FA1-32CD-4F81-3A0CA785CB66}"/>
               </a:ext>
             </a:extLst>
           </p:cNvPr>
@@ -18201,7 +18201,7 @@
           <p:cNvPr id="10" name="marker_2">
             <a:extLst>
               <a:ext uri="{FF2B5EF4-FFF2-40B4-BE49-F238E27FC236}">
-                <a16:creationId xmlns:a16="http://schemas.microsoft.com/office/drawing/2014/main" id="{157F3447-16CE-D7FE-61BB-5F09A3651A92}"/>
+                <a16:creationId xmlns:a16="http://schemas.microsoft.com/office/drawing/2014/main" id="{23E10511-6F74-434B-8F60-0646A2A16F56}"/>
               </a:ext>
             </a:extLst>
           </p:cNvPr>
@@ -18257,7 +18257,7 @@
           <p:cNvPr id="11" name="item_2">
             <a:extLst>
               <a:ext uri="{FF2B5EF4-FFF2-40B4-BE49-F238E27FC236}">
-                <a16:creationId xmlns:a16="http://schemas.microsoft.com/office/drawing/2014/main" id="{EF955441-B60F-DCAA-31EE-F12716ED086D}"/>
+                <a16:creationId xmlns:a16="http://schemas.microsoft.com/office/drawing/2014/main" id="{15A1D420-4555-883A-A883-555F3E90F8F0}"/>
               </a:ext>
             </a:extLst>
           </p:cNvPr>
@@ -18305,7 +18305,7 @@
           <p:cNvPr id="12" name="marker_3">
             <a:extLst>
               <a:ext uri="{FF2B5EF4-FFF2-40B4-BE49-F238E27FC236}">
-                <a16:creationId xmlns:a16="http://schemas.microsoft.com/office/drawing/2014/main" id="{96C37D8E-ED01-2A08-469F-38C88A3524B1}"/>
+                <a16:creationId xmlns:a16="http://schemas.microsoft.com/office/drawing/2014/main" id="{9372501B-9256-204F-DA5A-F77CFF7D32FF}"/>
               </a:ext>
             </a:extLst>
           </p:cNvPr>
@@ -18361,7 +18361,7 @@
           <p:cNvPr id="13" name="item_3">
             <a:extLst>
               <a:ext uri="{FF2B5EF4-FFF2-40B4-BE49-F238E27FC236}">
-                <a16:creationId xmlns:a16="http://schemas.microsoft.com/office/drawing/2014/main" id="{1E99FB25-E282-A733-3D32-A66AEE80D520}"/>
+                <a16:creationId xmlns:a16="http://schemas.microsoft.com/office/drawing/2014/main" id="{AB8B2E4A-F13E-99ED-FD1D-E81FCC4A01B1}"/>
               </a:ext>
             </a:extLst>
           </p:cNvPr>
@@ -18409,7 +18409,7 @@
           <p:cNvPr id="14" name="marker_4">
             <a:extLst>
               <a:ext uri="{FF2B5EF4-FFF2-40B4-BE49-F238E27FC236}">
-                <a16:creationId xmlns:a16="http://schemas.microsoft.com/office/drawing/2014/main" id="{27BDB3AC-D21E-AFAF-3C95-9AC7145144B8}"/>
+                <a16:creationId xmlns:a16="http://schemas.microsoft.com/office/drawing/2014/main" id="{B94F7E77-B61A-7375-2401-0AFD30EBB58E}"/>
               </a:ext>
             </a:extLst>
           </p:cNvPr>
@@ -18465,7 +18465,7 @@
           <p:cNvPr id="15" name="item_4">
             <a:extLst>
               <a:ext uri="{FF2B5EF4-FFF2-40B4-BE49-F238E27FC236}">
-                <a16:creationId xmlns:a16="http://schemas.microsoft.com/office/drawing/2014/main" id="{A4ACD789-E400-8375-583D-FEF4E44FAF39}"/>
+                <a16:creationId xmlns:a16="http://schemas.microsoft.com/office/drawing/2014/main" id="{B3986B57-A7DF-3013-AEB7-B07CAF670BF8}"/>
               </a:ext>
             </a:extLst>
           </p:cNvPr>
@@ -18513,7 +18513,7 @@
           <p:cNvPr id="16" name="source">
             <a:extLst>
               <a:ext uri="{FF2B5EF4-FFF2-40B4-BE49-F238E27FC236}">
-                <a16:creationId xmlns:a16="http://schemas.microsoft.com/office/drawing/2014/main" id="{BA1564C5-A0CD-79B0-4A32-D6EE4B794151}"/>
+                <a16:creationId xmlns:a16="http://schemas.microsoft.com/office/drawing/2014/main" id="{A6157132-19B5-5153-3AF5-B4605933B547}"/>
               </a:ext>
             </a:extLst>
           </p:cNvPr>
@@ -18568,7 +18568,7 @@
     </p:spTree>
     <p:extLst>
       <p:ext uri="{BB962C8B-B14F-4D97-AF65-F5344CB8AC3E}">
-        <p14:creationId xmlns:p14="http://schemas.microsoft.com/office/powerpoint/2010/main" val="930317771"/>
+        <p14:creationId xmlns:p14="http://schemas.microsoft.com/office/powerpoint/2010/main" val="3582221748"/>
       </p:ext>
     </p:extLst>
   </p:cSld>
@@ -18600,7 +18600,7 @@
           <p:cNvPr id="7" name="creative_background">
             <a:extLst>
               <a:ext uri="{FF2B5EF4-FFF2-40B4-BE49-F238E27FC236}">
-                <a16:creationId xmlns:a16="http://schemas.microsoft.com/office/drawing/2014/main" id="{2FEED973-27C1-BF89-D314-46CF5866EE3D}"/>
+                <a16:creationId xmlns:a16="http://schemas.microsoft.com/office/drawing/2014/main" id="{A4EA9461-98D2-27CD-ED70-33EEC6DDFCE3}"/>
               </a:ext>
             </a:extLst>
           </p:cNvPr>
@@ -18683,9 +18683,9 @@
           <a:bodyPr/>
           <a:lstStyle/>
           <a:p>
-            <a:fld id="{F163761A-A4E5-4C7D-9728-6F0BC80FAE16}" type="datetimeFigureOut">
+            <a:fld id="{55B34ED4-2611-4754-BC8B-367044EB0C5C}" type="datetimeFigureOut">
               <a:rPr lang="en-US" smtClean="0"/>
-              <a:t>10/3/2026</a:t>
+              <a:t>10/4/2026</a:t>
             </a:fld>
             <a:endParaRPr lang="en-US"/>
           </a:p>
@@ -18725,7 +18725,7 @@
           <a:bodyPr/>
           <a:lstStyle/>
           <a:p>
-            <a:fld id="{4DDE2B9A-5AB6-497C-A8BC-8EC14D6B62BC}" type="slidenum">
+            <a:fld id="{1A1093C2-1C68-42EE-B693-25A933F6CF0F}" type="slidenum">
               <a:rPr lang="en-US" smtClean="0"/>
               <a:t>‹#›</a:t>
             </a:fld>
@@ -18738,7 +18738,7 @@
           <p:cNvPr id="8" name="decisions_title">
             <a:extLst>
               <a:ext uri="{FF2B5EF4-FFF2-40B4-BE49-F238E27FC236}">
-                <a16:creationId xmlns:a16="http://schemas.microsoft.com/office/drawing/2014/main" id="{705A56D4-2D7C-9BD6-591C-AC13C9F0DC4D}"/>
+                <a16:creationId xmlns:a16="http://schemas.microsoft.com/office/drawing/2014/main" id="{C88394F5-E99A-17A9-8F6F-957429ED561B}"/>
               </a:ext>
             </a:extLst>
           </p:cNvPr>
@@ -18788,7 +18788,7 @@
           <p:cNvPr id="9" name="decisions">
             <a:extLst>
               <a:ext uri="{FF2B5EF4-FFF2-40B4-BE49-F238E27FC236}">
-                <a16:creationId xmlns:a16="http://schemas.microsoft.com/office/drawing/2014/main" id="{8E87C3C9-5AC4-B189-3290-5C57ADB2DEB8}"/>
+                <a16:creationId xmlns:a16="http://schemas.microsoft.com/office/drawing/2014/main" id="{9E1A50C8-05FD-B834-EA84-CDAF2F26C9BD}"/>
               </a:ext>
             </a:extLst>
           </p:cNvPr>
@@ -18831,7 +18831,7 @@
           <p:cNvPr id="10" name="item_1_title">
             <a:extLst>
               <a:ext uri="{FF2B5EF4-FFF2-40B4-BE49-F238E27FC236}">
-                <a16:creationId xmlns:a16="http://schemas.microsoft.com/office/drawing/2014/main" id="{D90E2903-290A-0A0F-EDED-C3592E74C799}"/>
+                <a16:creationId xmlns:a16="http://schemas.microsoft.com/office/drawing/2014/main" id="{7CD9A69E-8876-D51D-5370-2AA7B8A50789}"/>
               </a:ext>
             </a:extLst>
           </p:cNvPr>
@@ -18884,7 +18884,7 @@
           <p:cNvPr id="11" name="item_1">
             <a:extLst>
               <a:ext uri="{FF2B5EF4-FFF2-40B4-BE49-F238E27FC236}">
-                <a16:creationId xmlns:a16="http://schemas.microsoft.com/office/drawing/2014/main" id="{1FF83F5E-D3C6-69B1-7AFC-C02372592522}"/>
+                <a16:creationId xmlns:a16="http://schemas.microsoft.com/office/drawing/2014/main" id="{CA1FA897-B23A-899F-03E7-3DBA04903F90}"/>
               </a:ext>
             </a:extLst>
           </p:cNvPr>
@@ -18932,7 +18932,7 @@
           <p:cNvPr id="12" name="item_2_title">
             <a:extLst>
               <a:ext uri="{FF2B5EF4-FFF2-40B4-BE49-F238E27FC236}">
-                <a16:creationId xmlns:a16="http://schemas.microsoft.com/office/drawing/2014/main" id="{60153090-1F99-6BBB-DFCE-5BDF4D3066E2}"/>
+                <a16:creationId xmlns:a16="http://schemas.microsoft.com/office/drawing/2014/main" id="{36F597B3-FBCD-DCA2-846B-DC39E07ACDD2}"/>
               </a:ext>
             </a:extLst>
           </p:cNvPr>
@@ -18985,7 +18985,7 @@
           <p:cNvPr id="13" name="item_2">
             <a:extLst>
               <a:ext uri="{FF2B5EF4-FFF2-40B4-BE49-F238E27FC236}">
-                <a16:creationId xmlns:a16="http://schemas.microsoft.com/office/drawing/2014/main" id="{104C98C7-FA31-AECE-EF3E-1BA35BEA0C6F}"/>
+                <a16:creationId xmlns:a16="http://schemas.microsoft.com/office/drawing/2014/main" id="{7347CFBF-5304-EECA-D663-85893C405E66}"/>
               </a:ext>
             </a:extLst>
           </p:cNvPr>
@@ -19033,7 +19033,7 @@
           <p:cNvPr id="14" name="item_3_title">
             <a:extLst>
               <a:ext uri="{FF2B5EF4-FFF2-40B4-BE49-F238E27FC236}">
-                <a16:creationId xmlns:a16="http://schemas.microsoft.com/office/drawing/2014/main" id="{A571F9E3-E461-C6D0-65DF-6A01F4D89B52}"/>
+                <a16:creationId xmlns:a16="http://schemas.microsoft.com/office/drawing/2014/main" id="{AA482410-AC72-6E8E-AF0E-69EBDB768B4E}"/>
               </a:ext>
             </a:extLst>
           </p:cNvPr>
@@ -19086,7 +19086,7 @@
           <p:cNvPr id="15" name="item_3">
             <a:extLst>
               <a:ext uri="{FF2B5EF4-FFF2-40B4-BE49-F238E27FC236}">
-                <a16:creationId xmlns:a16="http://schemas.microsoft.com/office/drawing/2014/main" id="{98979F55-CED5-6D2E-51A3-423F56E7A603}"/>
+                <a16:creationId xmlns:a16="http://schemas.microsoft.com/office/drawing/2014/main" id="{59BDC99A-9581-4D36-1BF2-0AB6D4ED5AC5}"/>
               </a:ext>
             </a:extLst>
           </p:cNvPr>
@@ -19134,7 +19134,7 @@
           <p:cNvPr id="16" name="source">
             <a:extLst>
               <a:ext uri="{FF2B5EF4-FFF2-40B4-BE49-F238E27FC236}">
-                <a16:creationId xmlns:a16="http://schemas.microsoft.com/office/drawing/2014/main" id="{42B257A8-50D5-ACAA-92A5-83C5B2A6557D}"/>
+                <a16:creationId xmlns:a16="http://schemas.microsoft.com/office/drawing/2014/main" id="{087C2F28-80DA-1FBE-2B1D-D8662DD00A68}"/>
               </a:ext>
             </a:extLst>
           </p:cNvPr>
@@ -19189,7 +19189,7 @@
     </p:spTree>
     <p:extLst>
       <p:ext uri="{BB962C8B-B14F-4D97-AF65-F5344CB8AC3E}">
-        <p14:creationId xmlns:p14="http://schemas.microsoft.com/office/powerpoint/2010/main" val="3268174642"/>
+        <p14:creationId xmlns:p14="http://schemas.microsoft.com/office/powerpoint/2010/main" val="438968344"/>
       </p:ext>
     </p:extLst>
   </p:cSld>
@@ -19221,7 +19221,7 @@
           <p:cNvPr id="7" name="creative_background">
             <a:extLst>
               <a:ext uri="{FF2B5EF4-FFF2-40B4-BE49-F238E27FC236}">
-                <a16:creationId xmlns:a16="http://schemas.microsoft.com/office/drawing/2014/main" id="{8636F3BB-AA7C-8055-C364-E72A5FD03E0E}"/>
+                <a16:creationId xmlns:a16="http://schemas.microsoft.com/office/drawing/2014/main" id="{16FA2EB7-C6D7-777C-E7BE-9C222D5F7979}"/>
               </a:ext>
             </a:extLst>
           </p:cNvPr>
@@ -19304,9 +19304,9 @@
           <a:bodyPr/>
           <a:lstStyle/>
           <a:p>
-            <a:fld id="{F163761A-A4E5-4C7D-9728-6F0BC80FAE16}" type="datetimeFigureOut">
+            <a:fld id="{55B34ED4-2611-4754-BC8B-367044EB0C5C}" type="datetimeFigureOut">
               <a:rPr lang="en-US" smtClean="0"/>
-              <a:t>10/3/2026</a:t>
+              <a:t>10/4/2026</a:t>
             </a:fld>
             <a:endParaRPr lang="en-US"/>
           </a:p>
@@ -19346,7 +19346,7 @@
           <a:bodyPr/>
           <a:lstStyle/>
           <a:p>
-            <a:fld id="{4DDE2B9A-5AB6-497C-A8BC-8EC14D6B62BC}" type="slidenum">
+            <a:fld id="{1A1093C2-1C68-42EE-B693-25A933F6CF0F}" type="slidenum">
               <a:rPr lang="en-US" smtClean="0"/>
               <a:t>‹#›</a:t>
             </a:fld>
@@ -19359,7 +19359,7 @@
           <p:cNvPr id="8" name="body">
             <a:extLst>
               <a:ext uri="{FF2B5EF4-FFF2-40B4-BE49-F238E27FC236}">
-                <a16:creationId xmlns:a16="http://schemas.microsoft.com/office/drawing/2014/main" id="{3FA41B47-4C18-E0D8-89A0-8AC75CF75BB3}"/>
+                <a16:creationId xmlns:a16="http://schemas.microsoft.com/office/drawing/2014/main" id="{DFA2B534-7AF8-8669-5109-123C13147ABB}"/>
               </a:ext>
             </a:extLst>
           </p:cNvPr>
@@ -19399,7 +19399,7 @@
           <p:cNvPr id="9" name="kpi_value_1">
             <a:extLst>
               <a:ext uri="{FF2B5EF4-FFF2-40B4-BE49-F238E27FC236}">
-                <a16:creationId xmlns:a16="http://schemas.microsoft.com/office/drawing/2014/main" id="{4A67A50A-7503-C6D5-BC92-3E3F6FD54F8F}"/>
+                <a16:creationId xmlns:a16="http://schemas.microsoft.com/office/drawing/2014/main" id="{099080B9-6E16-021E-27DE-A7860ABE5C8B}"/>
               </a:ext>
             </a:extLst>
           </p:cNvPr>
@@ -19452,7 +19452,7 @@
           <p:cNvPr id="10" name="kpi_label_1">
             <a:extLst>
               <a:ext uri="{FF2B5EF4-FFF2-40B4-BE49-F238E27FC236}">
-                <a16:creationId xmlns:a16="http://schemas.microsoft.com/office/drawing/2014/main" id="{981E5D64-1A01-64B4-141D-F177A632D47C}"/>
+                <a16:creationId xmlns:a16="http://schemas.microsoft.com/office/drawing/2014/main" id="{3691D475-F87C-70A4-B944-CCFB4DFE4B40}"/>
               </a:ext>
             </a:extLst>
           </p:cNvPr>
@@ -19500,7 +19500,7 @@
           <p:cNvPr id="11" name="kpi_value_2">
             <a:extLst>
               <a:ext uri="{FF2B5EF4-FFF2-40B4-BE49-F238E27FC236}">
-                <a16:creationId xmlns:a16="http://schemas.microsoft.com/office/drawing/2014/main" id="{FB3C01B1-4C4C-F022-9266-5AE6E151D341}"/>
+                <a16:creationId xmlns:a16="http://schemas.microsoft.com/office/drawing/2014/main" id="{31F0CAFE-4AA4-E13C-68F8-F2FFCFDBDAEF}"/>
               </a:ext>
             </a:extLst>
           </p:cNvPr>
@@ -19553,7 +19553,7 @@
           <p:cNvPr id="12" name="kpi_label_2">
             <a:extLst>
               <a:ext uri="{FF2B5EF4-FFF2-40B4-BE49-F238E27FC236}">
-                <a16:creationId xmlns:a16="http://schemas.microsoft.com/office/drawing/2014/main" id="{BE221761-09FB-A570-9CF5-92BF7B87E93D}"/>
+                <a16:creationId xmlns:a16="http://schemas.microsoft.com/office/drawing/2014/main" id="{EE63DB8F-66B3-F561-45C4-3466F1675B72}"/>
               </a:ext>
             </a:extLst>
           </p:cNvPr>
@@ -19601,7 +19601,7 @@
           <p:cNvPr id="13" name="source">
             <a:extLst>
               <a:ext uri="{FF2B5EF4-FFF2-40B4-BE49-F238E27FC236}">
-                <a16:creationId xmlns:a16="http://schemas.microsoft.com/office/drawing/2014/main" id="{C1A13625-C1F1-D58E-0CF2-1FC041DA0C88}"/>
+                <a16:creationId xmlns:a16="http://schemas.microsoft.com/office/drawing/2014/main" id="{7772DFFD-B28E-5490-B185-A2C7136D5096}"/>
               </a:ext>
             </a:extLst>
           </p:cNvPr>
@@ -19656,7 +19656,7 @@
     </p:spTree>
     <p:extLst>
       <p:ext uri="{BB962C8B-B14F-4D97-AF65-F5344CB8AC3E}">
-        <p14:creationId xmlns:p14="http://schemas.microsoft.com/office/powerpoint/2010/main" val="3257611957"/>
+        <p14:creationId xmlns:p14="http://schemas.microsoft.com/office/powerpoint/2010/main" val="3152902083"/>
       </p:ext>
     </p:extLst>
   </p:cSld>
@@ -19688,7 +19688,7 @@
           <p:cNvPr id="7" name="creative_background">
             <a:extLst>
               <a:ext uri="{FF2B5EF4-FFF2-40B4-BE49-F238E27FC236}">
-                <a16:creationId xmlns:a16="http://schemas.microsoft.com/office/drawing/2014/main" id="{C42471B2-0007-C813-497D-5FE4EAC0408D}"/>
+                <a16:creationId xmlns:a16="http://schemas.microsoft.com/office/drawing/2014/main" id="{6DBCB1F3-E4DE-4BEE-8430-D89B0DD09DCA}"/>
               </a:ext>
             </a:extLst>
           </p:cNvPr>
@@ -19771,9 +19771,9 @@
           <a:bodyPr/>
           <a:lstStyle/>
           <a:p>
-            <a:fld id="{F163761A-A4E5-4C7D-9728-6F0BC80FAE16}" type="datetimeFigureOut">
+            <a:fld id="{55B34ED4-2611-4754-BC8B-367044EB0C5C}" type="datetimeFigureOut">
               <a:rPr lang="en-US" smtClean="0"/>
-              <a:t>10/3/2026</a:t>
+              <a:t>10/4/2026</a:t>
             </a:fld>
             <a:endParaRPr lang="en-US"/>
           </a:p>
@@ -19813,7 +19813,7 @@
           <a:bodyPr/>
           <a:lstStyle/>
           <a:p>
-            <a:fld id="{4DDE2B9A-5AB6-497C-A8BC-8EC14D6B62BC}" type="slidenum">
+            <a:fld id="{1A1093C2-1C68-42EE-B693-25A933F6CF0F}" type="slidenum">
               <a:rPr lang="en-US" smtClean="0"/>
               <a:t>‹#›</a:t>
             </a:fld>
@@ -19826,7 +19826,7 @@
           <p:cNvPr id="8" name="body">
             <a:extLst>
               <a:ext uri="{FF2B5EF4-FFF2-40B4-BE49-F238E27FC236}">
-                <a16:creationId xmlns:a16="http://schemas.microsoft.com/office/drawing/2014/main" id="{5C184E23-5CB0-4D3F-8109-5048430CE21F}"/>
+                <a16:creationId xmlns:a16="http://schemas.microsoft.com/office/drawing/2014/main" id="{4FE180E2-FF5D-CED9-E549-DF20F0057814}"/>
               </a:ext>
             </a:extLst>
           </p:cNvPr>
@@ -19866,7 +19866,7 @@
           <p:cNvPr id="9" name="kpi_value_1">
             <a:extLst>
               <a:ext uri="{FF2B5EF4-FFF2-40B4-BE49-F238E27FC236}">
-                <a16:creationId xmlns:a16="http://schemas.microsoft.com/office/drawing/2014/main" id="{5C2EBE93-EBAE-94CA-9B9F-A4C70D57B2FA}"/>
+                <a16:creationId xmlns:a16="http://schemas.microsoft.com/office/drawing/2014/main" id="{BF4BE9A7-30E4-E63E-D66A-515E615CA15C}"/>
               </a:ext>
             </a:extLst>
           </p:cNvPr>
@@ -19919,7 +19919,7 @@
           <p:cNvPr id="10" name="kpi_label_1">
             <a:extLst>
               <a:ext uri="{FF2B5EF4-FFF2-40B4-BE49-F238E27FC236}">
-                <a16:creationId xmlns:a16="http://schemas.microsoft.com/office/drawing/2014/main" id="{04D12FD6-E104-AAC7-A48B-82426E4CF948}"/>
+                <a16:creationId xmlns:a16="http://schemas.microsoft.com/office/drawing/2014/main" id="{C0BFE33C-4F5E-9554-EAB5-9C1A6C5F5EE7}"/>
               </a:ext>
             </a:extLst>
           </p:cNvPr>
@@ -19967,7 +19967,7 @@
           <p:cNvPr id="11" name="kpi_value_2">
             <a:extLst>
               <a:ext uri="{FF2B5EF4-FFF2-40B4-BE49-F238E27FC236}">
-                <a16:creationId xmlns:a16="http://schemas.microsoft.com/office/drawing/2014/main" id="{D42EED2A-45A9-83E1-459C-8B23002E94CC}"/>
+                <a16:creationId xmlns:a16="http://schemas.microsoft.com/office/drawing/2014/main" id="{0DA9803F-1BE7-887C-845E-44CB645410DB}"/>
               </a:ext>
             </a:extLst>
           </p:cNvPr>
@@ -20020,7 +20020,7 @@
           <p:cNvPr id="12" name="kpi_label_2">
             <a:extLst>
               <a:ext uri="{FF2B5EF4-FFF2-40B4-BE49-F238E27FC236}">
-                <a16:creationId xmlns:a16="http://schemas.microsoft.com/office/drawing/2014/main" id="{1A7C8ACC-2509-F6B9-C20A-3A8322EF4126}"/>
+                <a16:creationId xmlns:a16="http://schemas.microsoft.com/office/drawing/2014/main" id="{D5B9D354-85F1-2BAA-09C1-2A1634517B19}"/>
               </a:ext>
             </a:extLst>
           </p:cNvPr>
@@ -20068,7 +20068,7 @@
           <p:cNvPr id="13" name="kpi_value_3">
             <a:extLst>
               <a:ext uri="{FF2B5EF4-FFF2-40B4-BE49-F238E27FC236}">
-                <a16:creationId xmlns:a16="http://schemas.microsoft.com/office/drawing/2014/main" id="{A4DCED98-07E4-810D-C964-29EA965406DC}"/>
+                <a16:creationId xmlns:a16="http://schemas.microsoft.com/office/drawing/2014/main" id="{60D14075-2E71-FFD8-F972-759C667D61DE}"/>
               </a:ext>
             </a:extLst>
           </p:cNvPr>
@@ -20121,7 +20121,7 @@
           <p:cNvPr id="14" name="kpi_label_3">
             <a:extLst>
               <a:ext uri="{FF2B5EF4-FFF2-40B4-BE49-F238E27FC236}">
-                <a16:creationId xmlns:a16="http://schemas.microsoft.com/office/drawing/2014/main" id="{0F2AD1EA-F4FC-A05C-E113-8E5E5C15FBCA}"/>
+                <a16:creationId xmlns:a16="http://schemas.microsoft.com/office/drawing/2014/main" id="{BBC11B70-C1DF-5FF6-6350-ED31B0712562}"/>
               </a:ext>
             </a:extLst>
           </p:cNvPr>
@@ -20169,7 +20169,7 @@
           <p:cNvPr id="15" name="kpi_value_4">
             <a:extLst>
               <a:ext uri="{FF2B5EF4-FFF2-40B4-BE49-F238E27FC236}">
-                <a16:creationId xmlns:a16="http://schemas.microsoft.com/office/drawing/2014/main" id="{26F629EC-F727-3BF0-52E8-47A45415AA60}"/>
+                <a16:creationId xmlns:a16="http://schemas.microsoft.com/office/drawing/2014/main" id="{CD790D8A-D341-DDED-A82B-3C3BC467B2B4}"/>
               </a:ext>
             </a:extLst>
           </p:cNvPr>
@@ -20222,7 +20222,7 @@
           <p:cNvPr id="16" name="kpi_label_4">
             <a:extLst>
               <a:ext uri="{FF2B5EF4-FFF2-40B4-BE49-F238E27FC236}">
-                <a16:creationId xmlns:a16="http://schemas.microsoft.com/office/drawing/2014/main" id="{F2B2E005-7A10-AE5D-BE4C-6F19A082FD9F}"/>
+                <a16:creationId xmlns:a16="http://schemas.microsoft.com/office/drawing/2014/main" id="{4CA4EEF5-F2EF-4070-3966-66F39F84113A}"/>
               </a:ext>
             </a:extLst>
           </p:cNvPr>
@@ -20270,7 +20270,7 @@
           <p:cNvPr id="17" name="source">
             <a:extLst>
               <a:ext uri="{FF2B5EF4-FFF2-40B4-BE49-F238E27FC236}">
-                <a16:creationId xmlns:a16="http://schemas.microsoft.com/office/drawing/2014/main" id="{F87E2500-9052-EA11-4E0C-9812079057B9}"/>
+                <a16:creationId xmlns:a16="http://schemas.microsoft.com/office/drawing/2014/main" id="{D7C039F1-7015-4AD4-AF3C-20F6C2C6781C}"/>
               </a:ext>
             </a:extLst>
           </p:cNvPr>
@@ -20325,7 +20325,7 @@
     </p:spTree>
     <p:extLst>
       <p:ext uri="{BB962C8B-B14F-4D97-AF65-F5344CB8AC3E}">
-        <p14:creationId xmlns:p14="http://schemas.microsoft.com/office/powerpoint/2010/main" val="540523838"/>
+        <p14:creationId xmlns:p14="http://schemas.microsoft.com/office/powerpoint/2010/main" val="1108355710"/>
       </p:ext>
     </p:extLst>
   </p:cSld>
@@ -20357,7 +20357,7 @@
           <p:cNvPr id="7" name="creative_background">
             <a:extLst>
               <a:ext uri="{FF2B5EF4-FFF2-40B4-BE49-F238E27FC236}">
-                <a16:creationId xmlns:a16="http://schemas.microsoft.com/office/drawing/2014/main" id="{DA71E52D-DF90-AC7E-2CE0-09D672855E29}"/>
+                <a16:creationId xmlns:a16="http://schemas.microsoft.com/office/drawing/2014/main" id="{EEA18F5A-0392-A668-3413-E7CC53A83419}"/>
               </a:ext>
             </a:extLst>
           </p:cNvPr>
@@ -20440,9 +20440,9 @@
           <a:bodyPr/>
           <a:lstStyle/>
           <a:p>
-            <a:fld id="{F163761A-A4E5-4C7D-9728-6F0BC80FAE16}" type="datetimeFigureOut">
+            <a:fld id="{55B34ED4-2611-4754-BC8B-367044EB0C5C}" type="datetimeFigureOut">
               <a:rPr lang="en-US" smtClean="0"/>
-              <a:t>10/3/2026</a:t>
+              <a:t>10/4/2026</a:t>
             </a:fld>
             <a:endParaRPr lang="en-US"/>
           </a:p>
@@ -20482,7 +20482,7 @@
           <a:bodyPr/>
           <a:lstStyle/>
           <a:p>
-            <a:fld id="{4DDE2B9A-5AB6-497C-A8BC-8EC14D6B62BC}" type="slidenum">
+            <a:fld id="{1A1093C2-1C68-42EE-B693-25A933F6CF0F}" type="slidenum">
               <a:rPr lang="en-US" smtClean="0"/>
               <a:t>‹#›</a:t>
             </a:fld>
@@ -20495,7 +20495,7 @@
           <p:cNvPr id="8" name="body">
             <a:extLst>
               <a:ext uri="{FF2B5EF4-FFF2-40B4-BE49-F238E27FC236}">
-                <a16:creationId xmlns:a16="http://schemas.microsoft.com/office/drawing/2014/main" id="{392C7140-3AB5-E11B-A6E5-1E317849554E}"/>
+                <a16:creationId xmlns:a16="http://schemas.microsoft.com/office/drawing/2014/main" id="{12D01E9B-AC7A-173A-D151-B558A8496643}"/>
               </a:ext>
             </a:extLst>
           </p:cNvPr>
@@ -20535,7 +20535,7 @@
           <p:cNvPr id="9" name="quote">
             <a:extLst>
               <a:ext uri="{FF2B5EF4-FFF2-40B4-BE49-F238E27FC236}">
-                <a16:creationId xmlns:a16="http://schemas.microsoft.com/office/drawing/2014/main" id="{1CD968FD-C2F4-FDE1-7AFC-5BF6B3693820}"/>
+                <a16:creationId xmlns:a16="http://schemas.microsoft.com/office/drawing/2014/main" id="{6C880B9F-0AF6-B084-30A2-EEED0CF50B60}"/>
               </a:ext>
             </a:extLst>
           </p:cNvPr>
@@ -20585,7 +20585,7 @@
           <p:cNvPr id="10" name="attribution">
             <a:extLst>
               <a:ext uri="{FF2B5EF4-FFF2-40B4-BE49-F238E27FC236}">
-                <a16:creationId xmlns:a16="http://schemas.microsoft.com/office/drawing/2014/main" id="{5C1C3785-AD89-009B-AF42-8EB12CE3C87F}"/>
+                <a16:creationId xmlns:a16="http://schemas.microsoft.com/office/drawing/2014/main" id="{5FBB0269-0E0C-F4E6-29C6-BA364F0DFA22}"/>
               </a:ext>
             </a:extLst>
           </p:cNvPr>
@@ -20633,7 +20633,7 @@
           <p:cNvPr id="11" name="source">
             <a:extLst>
               <a:ext uri="{FF2B5EF4-FFF2-40B4-BE49-F238E27FC236}">
-                <a16:creationId xmlns:a16="http://schemas.microsoft.com/office/drawing/2014/main" id="{360B57FA-9BBC-C054-3042-6FFFEFE4C6EA}"/>
+                <a16:creationId xmlns:a16="http://schemas.microsoft.com/office/drawing/2014/main" id="{A7FB5A14-C0DE-D984-4E54-05962CC8A46C}"/>
               </a:ext>
             </a:extLst>
           </p:cNvPr>
@@ -20688,7 +20688,7 @@
     </p:spTree>
     <p:extLst>
       <p:ext uri="{BB962C8B-B14F-4D97-AF65-F5344CB8AC3E}">
-        <p14:creationId xmlns:p14="http://schemas.microsoft.com/office/powerpoint/2010/main" val="4033362876"/>
+        <p14:creationId xmlns:p14="http://schemas.microsoft.com/office/powerpoint/2010/main" val="3487466169"/>
       </p:ext>
     </p:extLst>
   </p:cSld>
@@ -20720,7 +20720,7 @@
           <p:cNvPr id="7" name="creative_background">
             <a:extLst>
               <a:ext uri="{FF2B5EF4-FFF2-40B4-BE49-F238E27FC236}">
-                <a16:creationId xmlns:a16="http://schemas.microsoft.com/office/drawing/2014/main" id="{2F8D4E17-8899-DF64-BD32-8D454486FB6C}"/>
+                <a16:creationId xmlns:a16="http://schemas.microsoft.com/office/drawing/2014/main" id="{F09A29CF-AA74-4C85-5E3B-484E4BAD9CF8}"/>
               </a:ext>
             </a:extLst>
           </p:cNvPr>
@@ -20803,9 +20803,9 @@
           <a:bodyPr/>
           <a:lstStyle/>
           <a:p>
-            <a:fld id="{F163761A-A4E5-4C7D-9728-6F0BC80FAE16}" type="datetimeFigureOut">
+            <a:fld id="{55B34ED4-2611-4754-BC8B-367044EB0C5C}" type="datetimeFigureOut">
               <a:rPr lang="en-US" smtClean="0"/>
-              <a:t>10/3/2026</a:t>
+              <a:t>10/4/2026</a:t>
             </a:fld>
             <a:endParaRPr lang="en-US"/>
           </a:p>
@@ -20845,7 +20845,7 @@
           <a:bodyPr/>
           <a:lstStyle/>
           <a:p>
-            <a:fld id="{4DDE2B9A-5AB6-497C-A8BC-8EC14D6B62BC}" type="slidenum">
+            <a:fld id="{1A1093C2-1C68-42EE-B693-25A933F6CF0F}" type="slidenum">
               <a:rPr lang="en-US" smtClean="0"/>
               <a:t>‹#›</a:t>
             </a:fld>
@@ -20858,7 +20858,7 @@
           <p:cNvPr id="8" name="item_1_title">
             <a:extLst>
               <a:ext uri="{FF2B5EF4-FFF2-40B4-BE49-F238E27FC236}">
-                <a16:creationId xmlns:a16="http://schemas.microsoft.com/office/drawing/2014/main" id="{D7488309-59B7-D021-89C2-5564247E2183}"/>
+                <a16:creationId xmlns:a16="http://schemas.microsoft.com/office/drawing/2014/main" id="{BC66ECD7-0F52-9F8B-7102-D887B4CFAFF0}"/>
               </a:ext>
             </a:extLst>
           </p:cNvPr>
@@ -20908,7 +20908,7 @@
           <p:cNvPr id="9" name="item_1">
             <a:extLst>
               <a:ext uri="{FF2B5EF4-FFF2-40B4-BE49-F238E27FC236}">
-                <a16:creationId xmlns:a16="http://schemas.microsoft.com/office/drawing/2014/main" id="{90E611E1-9222-0AF3-C791-9781B486988B}"/>
+                <a16:creationId xmlns:a16="http://schemas.microsoft.com/office/drawing/2014/main" id="{8B4D7D59-948A-6C97-FA23-B63E1380F6C9}"/>
               </a:ext>
             </a:extLst>
           </p:cNvPr>
@@ -20956,7 +20956,7 @@
           <p:cNvPr id="10" name="item_2_title">
             <a:extLst>
               <a:ext uri="{FF2B5EF4-FFF2-40B4-BE49-F238E27FC236}">
-                <a16:creationId xmlns:a16="http://schemas.microsoft.com/office/drawing/2014/main" id="{8E97C252-9629-24C4-4F7A-4EA4C0C1CA23}"/>
+                <a16:creationId xmlns:a16="http://schemas.microsoft.com/office/drawing/2014/main" id="{E53E9D07-089A-3624-26A2-7D4A8F09B8EF}"/>
               </a:ext>
             </a:extLst>
           </p:cNvPr>
@@ -21009,7 +21009,7 @@
           <p:cNvPr id="11" name="item_2">
             <a:extLst>
               <a:ext uri="{FF2B5EF4-FFF2-40B4-BE49-F238E27FC236}">
-                <a16:creationId xmlns:a16="http://schemas.microsoft.com/office/drawing/2014/main" id="{482A09AA-AC6A-1008-0A8D-4037ACC6D7BC}"/>
+                <a16:creationId xmlns:a16="http://schemas.microsoft.com/office/drawing/2014/main" id="{74AD1406-7475-FC80-81BB-2B3518F6281B}"/>
               </a:ext>
             </a:extLst>
           </p:cNvPr>
@@ -21057,7 +21057,7 @@
           <p:cNvPr id="12" name="item_3_title">
             <a:extLst>
               <a:ext uri="{FF2B5EF4-FFF2-40B4-BE49-F238E27FC236}">
-                <a16:creationId xmlns:a16="http://schemas.microsoft.com/office/drawing/2014/main" id="{DB78206E-C70E-D7BC-EAA4-79DB89529F83}"/>
+                <a16:creationId xmlns:a16="http://schemas.microsoft.com/office/drawing/2014/main" id="{5F663267-2D6F-EE85-2EEE-750DE8EBA641}"/>
               </a:ext>
             </a:extLst>
           </p:cNvPr>
@@ -21110,7 +21110,7 @@
           <p:cNvPr id="13" name="item_3">
             <a:extLst>
               <a:ext uri="{FF2B5EF4-FFF2-40B4-BE49-F238E27FC236}">
-                <a16:creationId xmlns:a16="http://schemas.microsoft.com/office/drawing/2014/main" id="{8335229B-EAA8-F05F-C93F-C4DA8E917EAB}"/>
+                <a16:creationId xmlns:a16="http://schemas.microsoft.com/office/drawing/2014/main" id="{33B70971-FED0-8E74-F2B8-701838CE997E}"/>
               </a:ext>
             </a:extLst>
           </p:cNvPr>
@@ -21158,7 +21158,7 @@
           <p:cNvPr id="14" name="source">
             <a:extLst>
               <a:ext uri="{FF2B5EF4-FFF2-40B4-BE49-F238E27FC236}">
-                <a16:creationId xmlns:a16="http://schemas.microsoft.com/office/drawing/2014/main" id="{4AE8B255-B91F-5285-550E-635812041233}"/>
+                <a16:creationId xmlns:a16="http://schemas.microsoft.com/office/drawing/2014/main" id="{36303CBF-F558-2B2D-D0AC-348D4C448D53}"/>
               </a:ext>
             </a:extLst>
           </p:cNvPr>
@@ -21213,7 +21213,7 @@
     </p:spTree>
     <p:extLst>
       <p:ext uri="{BB962C8B-B14F-4D97-AF65-F5344CB8AC3E}">
-        <p14:creationId xmlns:p14="http://schemas.microsoft.com/office/powerpoint/2010/main" val="1656077667"/>
+        <p14:creationId xmlns:p14="http://schemas.microsoft.com/office/powerpoint/2010/main" val="3408260150"/>
       </p:ext>
     </p:extLst>
   </p:cSld>
@@ -21245,7 +21245,7 @@
           <p:cNvPr id="7" name="creative_background">
             <a:extLst>
               <a:ext uri="{FF2B5EF4-FFF2-40B4-BE49-F238E27FC236}">
-                <a16:creationId xmlns:a16="http://schemas.microsoft.com/office/drawing/2014/main" id="{1CBBD67B-BEE4-754D-374A-7E326B081E72}"/>
+                <a16:creationId xmlns:a16="http://schemas.microsoft.com/office/drawing/2014/main" id="{13ACA330-7CF0-59B1-1742-985D4B2C9B7F}"/>
               </a:ext>
             </a:extLst>
           </p:cNvPr>
@@ -21328,9 +21328,9 @@
           <a:bodyPr/>
           <a:lstStyle/>
           <a:p>
-            <a:fld id="{F163761A-A4E5-4C7D-9728-6F0BC80FAE16}" type="datetimeFigureOut">
+            <a:fld id="{55B34ED4-2611-4754-BC8B-367044EB0C5C}" type="datetimeFigureOut">
               <a:rPr lang="en-US" smtClean="0"/>
-              <a:t>10/3/2026</a:t>
+              <a:t>10/4/2026</a:t>
             </a:fld>
             <a:endParaRPr lang="en-US"/>
           </a:p>
@@ -21370,7 +21370,7 @@
           <a:bodyPr/>
           <a:lstStyle/>
           <a:p>
-            <a:fld id="{4DDE2B9A-5AB6-497C-A8BC-8EC14D6B62BC}" type="slidenum">
+            <a:fld id="{1A1093C2-1C68-42EE-B693-25A933F6CF0F}" type="slidenum">
               <a:rPr lang="en-US" smtClean="0"/>
               <a:t>‹#›</a:t>
             </a:fld>
@@ -21383,7 +21383,7 @@
           <p:cNvPr id="8" name="item_1_title">
             <a:extLst>
               <a:ext uri="{FF2B5EF4-FFF2-40B4-BE49-F238E27FC236}">
-                <a16:creationId xmlns:a16="http://schemas.microsoft.com/office/drawing/2014/main" id="{319E46EB-3C3E-F98E-8EB6-0691F2696901}"/>
+                <a16:creationId xmlns:a16="http://schemas.microsoft.com/office/drawing/2014/main" id="{02151AD7-B049-27B7-8FA8-6FD66301150A}"/>
               </a:ext>
             </a:extLst>
           </p:cNvPr>
@@ -21433,7 +21433,7 @@
           <p:cNvPr id="9" name="item_1">
             <a:extLst>
               <a:ext uri="{FF2B5EF4-FFF2-40B4-BE49-F238E27FC236}">
-                <a16:creationId xmlns:a16="http://schemas.microsoft.com/office/drawing/2014/main" id="{AD156196-275E-D7FD-DF08-EFB066528F1E}"/>
+                <a16:creationId xmlns:a16="http://schemas.microsoft.com/office/drawing/2014/main" id="{2ABBC9A8-AD07-F772-CDF2-72DDDE6D71ED}"/>
               </a:ext>
             </a:extLst>
           </p:cNvPr>
@@ -21481,7 +21481,7 @@
           <p:cNvPr id="10" name="item_2_title">
             <a:extLst>
               <a:ext uri="{FF2B5EF4-FFF2-40B4-BE49-F238E27FC236}">
-                <a16:creationId xmlns:a16="http://schemas.microsoft.com/office/drawing/2014/main" id="{C25271B0-147C-2459-243F-76131A21077D}"/>
+                <a16:creationId xmlns:a16="http://schemas.microsoft.com/office/drawing/2014/main" id="{DF7C53B5-AB33-014C-92C1-55B3E100D6DE}"/>
               </a:ext>
             </a:extLst>
           </p:cNvPr>
@@ -21534,7 +21534,7 @@
           <p:cNvPr id="11" name="item_2">
             <a:extLst>
               <a:ext uri="{FF2B5EF4-FFF2-40B4-BE49-F238E27FC236}">
-                <a16:creationId xmlns:a16="http://schemas.microsoft.com/office/drawing/2014/main" id="{635B17F0-7810-FAF6-0DC7-9459BF342CED}"/>
+                <a16:creationId xmlns:a16="http://schemas.microsoft.com/office/drawing/2014/main" id="{B89D90FE-49DD-B7B4-1E3B-1FC7F4C35629}"/>
               </a:ext>
             </a:extLst>
           </p:cNvPr>
@@ -21582,7 +21582,7 @@
           <p:cNvPr id="12" name="source">
             <a:extLst>
               <a:ext uri="{FF2B5EF4-FFF2-40B4-BE49-F238E27FC236}">
-                <a16:creationId xmlns:a16="http://schemas.microsoft.com/office/drawing/2014/main" id="{62C55CF7-B6BD-2C9D-F2D8-0CFBD67889B2}"/>
+                <a16:creationId xmlns:a16="http://schemas.microsoft.com/office/drawing/2014/main" id="{9EA7B12C-A959-15ED-62D2-B64DD85BEBCE}"/>
               </a:ext>
             </a:extLst>
           </p:cNvPr>
@@ -21637,7 +21637,7 @@
     </p:spTree>
     <p:extLst>
       <p:ext uri="{BB962C8B-B14F-4D97-AF65-F5344CB8AC3E}">
-        <p14:creationId xmlns:p14="http://schemas.microsoft.com/office/powerpoint/2010/main" val="3958423878"/>
+        <p14:creationId xmlns:p14="http://schemas.microsoft.com/office/powerpoint/2010/main" val="2349404163"/>
       </p:ext>
     </p:extLst>
   </p:cSld>
@@ -21669,7 +21669,7 @@
           <p:cNvPr id="7" name="creative_background">
             <a:extLst>
               <a:ext uri="{FF2B5EF4-FFF2-40B4-BE49-F238E27FC236}">
-                <a16:creationId xmlns:a16="http://schemas.microsoft.com/office/drawing/2014/main" id="{CD437CF3-4F1C-0EA2-5959-664429EE9B29}"/>
+                <a16:creationId xmlns:a16="http://schemas.microsoft.com/office/drawing/2014/main" id="{73827D2D-408A-E521-6E32-CD56423CAC2E}"/>
               </a:ext>
             </a:extLst>
           </p:cNvPr>
@@ -21752,9 +21752,9 @@
           <a:bodyPr/>
           <a:lstStyle/>
           <a:p>
-            <a:fld id="{F163761A-A4E5-4C7D-9728-6F0BC80FAE16}" type="datetimeFigureOut">
+            <a:fld id="{55B34ED4-2611-4754-BC8B-367044EB0C5C}" type="datetimeFigureOut">
               <a:rPr lang="en-US" smtClean="0"/>
-              <a:t>10/3/2026</a:t>
+              <a:t>10/4/2026</a:t>
             </a:fld>
             <a:endParaRPr lang="en-US"/>
           </a:p>
@@ -21794,7 +21794,7 @@
           <a:bodyPr/>
           <a:lstStyle/>
           <a:p>
-            <a:fld id="{4DDE2B9A-5AB6-497C-A8BC-8EC14D6B62BC}" type="slidenum">
+            <a:fld id="{1A1093C2-1C68-42EE-B693-25A933F6CF0F}" type="slidenum">
               <a:rPr lang="en-US" smtClean="0"/>
               <a:t>‹#›</a:t>
             </a:fld>
@@ -21807,7 +21807,7 @@
           <p:cNvPr id="8" name="chart">
             <a:extLst>
               <a:ext uri="{FF2B5EF4-FFF2-40B4-BE49-F238E27FC236}">
-                <a16:creationId xmlns:a16="http://schemas.microsoft.com/office/drawing/2014/main" id="{A4DF8017-C91C-4994-9A98-EBA67E59F468}"/>
+                <a16:creationId xmlns:a16="http://schemas.microsoft.com/office/drawing/2014/main" id="{84A0DADF-F6C0-CDA9-370D-BD9FC0BD99AF}"/>
               </a:ext>
             </a:extLst>
           </p:cNvPr>
@@ -21837,7 +21837,7 @@
           <p:cNvPr id="9" name="body">
             <a:extLst>
               <a:ext uri="{FF2B5EF4-FFF2-40B4-BE49-F238E27FC236}">
-                <a16:creationId xmlns:a16="http://schemas.microsoft.com/office/drawing/2014/main" id="{C4881A79-2F5D-3AC5-327A-DE20AF03DD83}"/>
+                <a16:creationId xmlns:a16="http://schemas.microsoft.com/office/drawing/2014/main" id="{DC6FC344-CA10-998A-2FA8-5A1C71C95F3C}"/>
               </a:ext>
             </a:extLst>
           </p:cNvPr>
@@ -21880,7 +21880,7 @@
           <p:cNvPr id="10" name="source">
             <a:extLst>
               <a:ext uri="{FF2B5EF4-FFF2-40B4-BE49-F238E27FC236}">
-                <a16:creationId xmlns:a16="http://schemas.microsoft.com/office/drawing/2014/main" id="{55D094B2-DEA6-7FD9-8318-0B51C17E2449}"/>
+                <a16:creationId xmlns:a16="http://schemas.microsoft.com/office/drawing/2014/main" id="{72D2060F-5F7B-0699-54BA-1FE55E25959F}"/>
               </a:ext>
             </a:extLst>
           </p:cNvPr>
@@ -21935,7 +21935,7 @@
     </p:spTree>
     <p:extLst>
       <p:ext uri="{BB962C8B-B14F-4D97-AF65-F5344CB8AC3E}">
-        <p14:creationId xmlns:p14="http://schemas.microsoft.com/office/powerpoint/2010/main" val="1524612216"/>
+        <p14:creationId xmlns:p14="http://schemas.microsoft.com/office/powerpoint/2010/main" val="2751545674"/>
       </p:ext>
     </p:extLst>
   </p:cSld>
@@ -21967,7 +21967,7 @@
           <p:cNvPr id="7" name="creative_background">
             <a:extLst>
               <a:ext uri="{FF2B5EF4-FFF2-40B4-BE49-F238E27FC236}">
-                <a16:creationId xmlns:a16="http://schemas.microsoft.com/office/drawing/2014/main" id="{7FBA10CB-4BC4-E876-1DD1-E68F32E8C37E}"/>
+                <a16:creationId xmlns:a16="http://schemas.microsoft.com/office/drawing/2014/main" id="{107DDE7C-0BB8-E6E5-4DDE-0D374FE91398}"/>
               </a:ext>
             </a:extLst>
           </p:cNvPr>
@@ -22050,9 +22050,9 @@
           <a:bodyPr/>
           <a:lstStyle/>
           <a:p>
-            <a:fld id="{F163761A-A4E5-4C7D-9728-6F0BC80FAE16}" type="datetimeFigureOut">
+            <a:fld id="{55B34ED4-2611-4754-BC8B-367044EB0C5C}" type="datetimeFigureOut">
               <a:rPr lang="en-US" smtClean="0"/>
-              <a:t>10/3/2026</a:t>
+              <a:t>10/4/2026</a:t>
             </a:fld>
             <a:endParaRPr lang="en-US"/>
           </a:p>
@@ -22092,7 +22092,7 @@
           <a:bodyPr/>
           <a:lstStyle/>
           <a:p>
-            <a:fld id="{4DDE2B9A-5AB6-497C-A8BC-8EC14D6B62BC}" type="slidenum">
+            <a:fld id="{1A1093C2-1C68-42EE-B693-25A933F6CF0F}" type="slidenum">
               <a:rPr lang="en-US" smtClean="0"/>
               <a:t>‹#›</a:t>
             </a:fld>
@@ -22105,7 +22105,7 @@
           <p:cNvPr id="8" name="item_1_title">
             <a:extLst>
               <a:ext uri="{FF2B5EF4-FFF2-40B4-BE49-F238E27FC236}">
-                <a16:creationId xmlns:a16="http://schemas.microsoft.com/office/drawing/2014/main" id="{08EAB2A4-DC12-9288-FDDA-BFF84D6C752C}"/>
+                <a16:creationId xmlns:a16="http://schemas.microsoft.com/office/drawing/2014/main" id="{113EF2D8-B4B4-7DB7-0FB3-DADA76FD4108}"/>
               </a:ext>
             </a:extLst>
           </p:cNvPr>
@@ -22155,7 +22155,7 @@
           <p:cNvPr id="9" name="item_1">
             <a:extLst>
               <a:ext uri="{FF2B5EF4-FFF2-40B4-BE49-F238E27FC236}">
-                <a16:creationId xmlns:a16="http://schemas.microsoft.com/office/drawing/2014/main" id="{73ADCE74-FC68-5A45-9904-9D8C949A025D}"/>
+                <a16:creationId xmlns:a16="http://schemas.microsoft.com/office/drawing/2014/main" id="{8AB76ACE-EABC-C722-3911-691419532F11}"/>
               </a:ext>
             </a:extLst>
           </p:cNvPr>
@@ -22203,7 +22203,7 @@
           <p:cNvPr id="10" name="item_2_title">
             <a:extLst>
               <a:ext uri="{FF2B5EF4-FFF2-40B4-BE49-F238E27FC236}">
-                <a16:creationId xmlns:a16="http://schemas.microsoft.com/office/drawing/2014/main" id="{745E0F4E-3C62-E499-4E6A-A87938AB363C}"/>
+                <a16:creationId xmlns:a16="http://schemas.microsoft.com/office/drawing/2014/main" id="{05125609-39B8-7631-68B8-AD91164DB502}"/>
               </a:ext>
             </a:extLst>
           </p:cNvPr>
@@ -22256,7 +22256,7 @@
           <p:cNvPr id="11" name="item_2">
             <a:extLst>
               <a:ext uri="{FF2B5EF4-FFF2-40B4-BE49-F238E27FC236}">
-                <a16:creationId xmlns:a16="http://schemas.microsoft.com/office/drawing/2014/main" id="{38949DDE-46FD-60B4-3BA9-EE1832F29FF3}"/>
+                <a16:creationId xmlns:a16="http://schemas.microsoft.com/office/drawing/2014/main" id="{082DAB8F-4BBC-0098-44CB-6E652F11F6C0}"/>
               </a:ext>
             </a:extLst>
           </p:cNvPr>
@@ -22304,7 +22304,7 @@
           <p:cNvPr id="12" name="item_3_title">
             <a:extLst>
               <a:ext uri="{FF2B5EF4-FFF2-40B4-BE49-F238E27FC236}">
-                <a16:creationId xmlns:a16="http://schemas.microsoft.com/office/drawing/2014/main" id="{D93D3F94-0493-7176-CFDE-4C82CDEB8367}"/>
+                <a16:creationId xmlns:a16="http://schemas.microsoft.com/office/drawing/2014/main" id="{70240F67-FCAD-0F74-ED83-5F8643751E1E}"/>
               </a:ext>
             </a:extLst>
           </p:cNvPr>
@@ -22357,7 +22357,7 @@
           <p:cNvPr id="13" name="item_3">
             <a:extLst>
               <a:ext uri="{FF2B5EF4-FFF2-40B4-BE49-F238E27FC236}">
-                <a16:creationId xmlns:a16="http://schemas.microsoft.com/office/drawing/2014/main" id="{5F0DAEED-F038-B4AB-6F2B-77E739682F91}"/>
+                <a16:creationId xmlns:a16="http://schemas.microsoft.com/office/drawing/2014/main" id="{97934ED9-6E6B-1272-FDDA-28D02E53FA05}"/>
               </a:ext>
             </a:extLst>
           </p:cNvPr>
@@ -22405,7 +22405,7 @@
           <p:cNvPr id="14" name="item_4_title">
             <a:extLst>
               <a:ext uri="{FF2B5EF4-FFF2-40B4-BE49-F238E27FC236}">
-                <a16:creationId xmlns:a16="http://schemas.microsoft.com/office/drawing/2014/main" id="{95A4398F-2C19-DF78-6C57-E3E7E3A020E6}"/>
+                <a16:creationId xmlns:a16="http://schemas.microsoft.com/office/drawing/2014/main" id="{DCDA70AD-E375-3D55-15D2-F52F08546FB9}"/>
               </a:ext>
             </a:extLst>
           </p:cNvPr>
@@ -22458,7 +22458,7 @@
           <p:cNvPr id="15" name="item_4">
             <a:extLst>
               <a:ext uri="{FF2B5EF4-FFF2-40B4-BE49-F238E27FC236}">
-                <a16:creationId xmlns:a16="http://schemas.microsoft.com/office/drawing/2014/main" id="{7FE0791C-4C84-6770-EA06-BD42F0DF958A}"/>
+                <a16:creationId xmlns:a16="http://schemas.microsoft.com/office/drawing/2014/main" id="{0E7FF0C9-1B62-1BF5-4AB7-181AFD702DD3}"/>
               </a:ext>
             </a:extLst>
           </p:cNvPr>
@@ -22506,7 +22506,7 @@
           <p:cNvPr id="16" name="source">
             <a:extLst>
               <a:ext uri="{FF2B5EF4-FFF2-40B4-BE49-F238E27FC236}">
-                <a16:creationId xmlns:a16="http://schemas.microsoft.com/office/drawing/2014/main" id="{9ECD8AC1-4F2A-C06F-F9A6-790DA3A876EF}"/>
+                <a16:creationId xmlns:a16="http://schemas.microsoft.com/office/drawing/2014/main" id="{91AD8845-329E-B07D-4776-AB0B521A0218}"/>
               </a:ext>
             </a:extLst>
           </p:cNvPr>
@@ -22561,7 +22561,7 @@
     </p:spTree>
     <p:extLst>
       <p:ext uri="{BB962C8B-B14F-4D97-AF65-F5344CB8AC3E}">
-        <p14:creationId xmlns:p14="http://schemas.microsoft.com/office/powerpoint/2010/main" val="2213147108"/>
+        <p14:creationId xmlns:p14="http://schemas.microsoft.com/office/powerpoint/2010/main" val="2316398435"/>
       </p:ext>
     </p:extLst>
   </p:cSld>
@@ -22598,7 +22598,7 @@
           <p:cNvPr id="9" name="creative_background_master">
             <a:extLst>
               <a:ext uri="{FF2B5EF4-FFF2-40B4-BE49-F238E27FC236}">
-                <a16:creationId xmlns:a16="http://schemas.microsoft.com/office/drawing/2014/main" id="{EA396213-0D21-E7D4-CD66-4C3C312CE030}"/>
+                <a16:creationId xmlns:a16="http://schemas.microsoft.com/office/drawing/2014/main" id="{993EA523-DD14-9367-4B81-21C8C4206016}"/>
               </a:ext>
             </a:extLst>
           </p:cNvPr>
@@ -22759,9 +22759,9 @@
             </a:lvl1pPr>
           </a:lstStyle>
           <a:p>
-            <a:fld id="{F163761A-A4E5-4C7D-9728-6F0BC80FAE16}" type="datetimeFigureOut">
+            <a:fld id="{55B34ED4-2611-4754-BC8B-367044EB0C5C}" type="datetimeFigureOut">
               <a:rPr lang="en-US" smtClean="0"/>
-              <a:t>10/3/2026</a:t>
+              <a:t>10/4/2026</a:t>
             </a:fld>
             <a:endParaRPr lang="en-US"/>
           </a:p>
@@ -22841,7 +22841,7 @@
             </a:lvl1pPr>
           </a:lstStyle>
           <a:p>
-            <a:fld id="{4DDE2B9A-5AB6-497C-A8BC-8EC14D6B62BC}" type="slidenum">
+            <a:fld id="{1A1093C2-1C68-42EE-B693-25A933F6CF0F}" type="slidenum">
               <a:rPr lang="en-US" smtClean="0"/>
               <a:t>‹#›</a:t>
             </a:fld>
@@ -22852,7 +22852,7 @@
     </p:spTree>
     <p:extLst>
       <p:ext uri="{BB962C8B-B14F-4D97-AF65-F5344CB8AC3E}">
-        <p14:creationId xmlns:p14="http://schemas.microsoft.com/office/powerpoint/2010/main" val="182671467"/>
+        <p14:creationId xmlns:p14="http://schemas.microsoft.com/office/powerpoint/2010/main" val="1103835590"/>
       </p:ext>
     </p:extLst>
   </p:cSld>
